--- a/LUNA-CORR_SIH2026_Presentation.pptx
+++ b/LUNA-CORR_SIH2026_Presentation.pptx
@@ -3696,7 +3696,7 @@
         </p:nvSpPr>
         <p:spPr>
           <a:xfrm>
-            <a:off x="274320" y="5897880"/>
+            <a:off x="274320" y="6080760"/>
             <a:ext cx="3383280" cy="320040"/>
           </a:xfrm>
           <a:prstGeom prst="rect">
@@ -3725,42 +3725,7 @@
       </p:sp>
       <p:sp>
         <p:nvSpPr>
-          <p:cNvPr id="19" name="TextBox 18"/>
-          <p:cNvSpPr txBox="1"/>
-          <p:nvPr/>
-        </p:nvSpPr>
-        <p:spPr>
-          <a:xfrm>
-            <a:off x="274320" y="6263640"/>
-            <a:ext cx="3383280" cy="182880"/>
-          </a:xfrm>
-          <a:prstGeom prst="rect">
-            <a:avLst/>
-          </a:prstGeom>
-          <a:noFill/>
-        </p:spPr>
-        <p:txBody>
-          <a:bodyPr wrap="square">
-            <a:spAutoFit/>
-          </a:bodyPr>
-          <a:lstStyle/>
-          <a:p>
-            <a:pPr algn="l"/>
-            <a:r>
-              <a:rPr sz="700" b="0" i="1">
-                <a:solidFill>
-                  <a:srgbClr val="6B7E88"/>
-                </a:solidFill>
-                <a:latin typeface="Calibri"/>
-              </a:rPr>
-              <a:t>Contact through official SIH 2026 portal only.</a:t>
-            </a:r>
-          </a:p>
-        </p:txBody>
-      </p:sp>
-      <p:sp>
-        <p:nvSpPr>
-          <p:cNvPr id="20" name="Rectangle 19"/>
+          <p:cNvPr id="19" name="Rectangle 18"/>
           <p:cNvSpPr/>
           <p:nvPr/>
         </p:nvSpPr>
@@ -3803,7 +3768,7 @@
       </p:sp>
       <p:sp>
         <p:nvSpPr>
-          <p:cNvPr id="21" name="TextBox 20"/>
+          <p:cNvPr id="20" name="TextBox 19"/>
           <p:cNvSpPr txBox="1"/>
           <p:nvPr/>
         </p:nvSpPr>
@@ -3838,7 +3803,7 @@
       </p:sp>
       <p:sp>
         <p:nvSpPr>
-          <p:cNvPr id="22" name="TextBox 21"/>
+          <p:cNvPr id="21" name="TextBox 20"/>
           <p:cNvSpPr txBox="1"/>
           <p:nvPr/>
         </p:nvSpPr>
@@ -3873,7 +3838,7 @@
       </p:sp>
       <p:pic>
         <p:nvPicPr>
-          <p:cNvPr id="23" name="Picture 22" descr="fig1_title_hero.png"/>
+          <p:cNvPr id="22" name="Picture 21" descr="fig1_title_hero.png"/>
           <p:cNvPicPr>
             <a:picLocks noChangeAspect="1"/>
           </p:cNvPicPr>
@@ -3897,7 +3862,7 @@
       </p:pic>
       <p:sp>
         <p:nvSpPr>
-          <p:cNvPr id="24" name="Rectangle 23"/>
+          <p:cNvPr id="23" name="Rectangle 22"/>
           <p:cNvSpPr/>
           <p:nvPr/>
         </p:nvSpPr>
@@ -3942,7 +3907,7 @@
       </p:sp>
       <p:sp>
         <p:nvSpPr>
-          <p:cNvPr id="25" name="TextBox 24"/>
+          <p:cNvPr id="24" name="TextBox 23"/>
           <p:cNvSpPr txBox="1"/>
           <p:nvPr/>
         </p:nvSpPr>
@@ -3977,7 +3942,7 @@
       </p:sp>
       <p:sp>
         <p:nvSpPr>
-          <p:cNvPr id="26" name="TextBox 25"/>
+          <p:cNvPr id="25" name="TextBox 24"/>
           <p:cNvSpPr txBox="1"/>
           <p:nvPr/>
         </p:nvSpPr>
@@ -4005,15 +3970,15 @@
                 </a:solidFill>
                 <a:latin typeface="Calibri"/>
               </a:rPr>
-              <a:t>• OHRC Cross-Orbit: 822 inliers (99.2% ratio)  ·  Held-out RMSE: 0.68 px (TPS Warping Accepted)
-• TMC-2 Stereo: Held-out RMSE reduced 1.52 px → 0.84 px (44.7% error reduction, N=150 fixed set)</a:t>
-            </a:r>
-          </a:p>
-        </p:txBody>
-      </p:sp>
-      <p:sp>
-        <p:nvSpPr>
-          <p:cNvPr id="27" name="Rectangle 26"/>
+              <a:t>• OHRC Cross-Orbit: 822 inliers (99.2% ratio)  ·  Held-out RMSE: 0.779 px (TPS Warping Accepted)
+• TMC-2 Stereo: Held-out RMSE reduced 1.52 px → 0.84 px (44.7% error reduction vs Stage-3 baseline, N=150 fixed set)</a:t>
+            </a:r>
+          </a:p>
+        </p:txBody>
+      </p:sp>
+      <p:sp>
+        <p:nvSpPr>
+          <p:cNvPr id="26" name="Rectangle 25"/>
           <p:cNvSpPr/>
           <p:nvPr/>
         </p:nvSpPr>
@@ -4058,7 +4023,7 @@
       </p:sp>
       <p:sp>
         <p:nvSpPr>
-          <p:cNvPr id="28" name="Rectangle 27"/>
+          <p:cNvPr id="27" name="Rectangle 26"/>
           <p:cNvSpPr/>
           <p:nvPr/>
         </p:nvSpPr>
@@ -4101,7 +4066,7 @@
       </p:sp>
       <p:sp>
         <p:nvSpPr>
-          <p:cNvPr id="29" name="TextBox 28"/>
+          <p:cNvPr id="28" name="TextBox 27"/>
           <p:cNvSpPr txBox="1"/>
           <p:nvPr/>
         </p:nvSpPr>
@@ -4136,7 +4101,7 @@
       </p:sp>
       <p:sp>
         <p:nvSpPr>
-          <p:cNvPr id="30" name="TextBox 29"/>
+          <p:cNvPr id="29" name="TextBox 28"/>
           <p:cNvSpPr txBox="1"/>
           <p:nvPr/>
         </p:nvSpPr>
@@ -4164,14 +4129,14 @@
                 </a:solidFill>
                 <a:latin typeface="Calibri"/>
               </a:rPr>
-              <a:t>Sun azimuth/elevation changes invert slope brightness and cast moving shadows. Direct optical cross-correlation collapses.</a:t>
-            </a:r>
-          </a:p>
-        </p:txBody>
-      </p:sp>
-      <p:sp>
-        <p:nvSpPr>
-          <p:cNvPr id="31" name="Rectangle 30"/>
+              <a:t>Sun azimuth/elevation changes invert slope brightness and cast moving shadows. Direct feature matching collapses.</a:t>
+            </a:r>
+          </a:p>
+        </p:txBody>
+      </p:sp>
+      <p:sp>
+        <p:nvSpPr>
+          <p:cNvPr id="30" name="Rectangle 29"/>
           <p:cNvSpPr/>
           <p:nvPr/>
         </p:nvSpPr>
@@ -4216,7 +4181,7 @@
       </p:sp>
       <p:sp>
         <p:nvSpPr>
-          <p:cNvPr id="32" name="Rectangle 31"/>
+          <p:cNvPr id="31" name="Rectangle 30"/>
           <p:cNvSpPr/>
           <p:nvPr/>
         </p:nvSpPr>
@@ -4259,7 +4224,7 @@
       </p:sp>
       <p:sp>
         <p:nvSpPr>
-          <p:cNvPr id="33" name="TextBox 32"/>
+          <p:cNvPr id="32" name="TextBox 31"/>
           <p:cNvSpPr txBox="1"/>
           <p:nvPr/>
         </p:nvSpPr>
@@ -4294,7 +4259,7 @@
       </p:sp>
       <p:sp>
         <p:nvSpPr>
-          <p:cNvPr id="34" name="TextBox 33"/>
+          <p:cNvPr id="33" name="TextBox 32"/>
           <p:cNvSpPr txBox="1"/>
           <p:nvPr/>
         </p:nvSpPr>
@@ -4322,14 +4287,14 @@
                 </a:solidFill>
                 <a:latin typeface="Calibri"/>
               </a:rPr>
-              <a:t>3D crater topography creates localized relief parallax that violates planar homography. Requires adaptive elastic deformation.</a:t>
-            </a:r>
-          </a:p>
-        </p:txBody>
-      </p:sp>
-      <p:sp>
-        <p:nvSpPr>
-          <p:cNvPr id="35" name="Rectangle 34"/>
+              <a:t>3D crater topography creates localized relief parallax that violates planar homography. Residual relief may require adaptive local deformation.</a:t>
+            </a:r>
+          </a:p>
+        </p:txBody>
+      </p:sp>
+      <p:sp>
+        <p:nvSpPr>
+          <p:cNvPr id="34" name="Rectangle 33"/>
           <p:cNvSpPr/>
           <p:nvPr/>
         </p:nvSpPr>
@@ -4374,7 +4339,7 @@
       </p:sp>
       <p:sp>
         <p:nvSpPr>
-          <p:cNvPr id="36" name="Rectangle 35"/>
+          <p:cNvPr id="35" name="Rectangle 34"/>
           <p:cNvSpPr/>
           <p:nvPr/>
         </p:nvSpPr>
@@ -4417,7 +4382,7 @@
       </p:sp>
       <p:sp>
         <p:nvSpPr>
-          <p:cNvPr id="37" name="TextBox 36"/>
+          <p:cNvPr id="36" name="TextBox 35"/>
           <p:cNvSpPr txBox="1"/>
           <p:nvPr/>
         </p:nvSpPr>
@@ -4452,7 +4417,7 @@
       </p:sp>
       <p:sp>
         <p:nvSpPr>
-          <p:cNvPr id="38" name="TextBox 37"/>
+          <p:cNvPr id="37" name="TextBox 36"/>
           <p:cNvSpPr txBox="1"/>
           <p:nvPr/>
         </p:nvSpPr>
@@ -4487,7 +4452,7 @@
       </p:sp>
       <p:sp>
         <p:nvSpPr>
-          <p:cNvPr id="39" name="Rectangle 38"/>
+          <p:cNvPr id="38" name="Rectangle 37"/>
           <p:cNvSpPr/>
           <p:nvPr/>
         </p:nvSpPr>
@@ -4530,7 +4495,7 @@
       </p:sp>
       <p:sp>
         <p:nvSpPr>
-          <p:cNvPr id="40" name="TextBox 39"/>
+          <p:cNvPr id="39" name="TextBox 38"/>
           <p:cNvSpPr txBox="1"/>
           <p:nvPr/>
         </p:nvSpPr>
@@ -4565,7 +4530,7 @@
       </p:sp>
       <p:sp>
         <p:nvSpPr>
-          <p:cNvPr id="41" name="TextBox 40"/>
+          <p:cNvPr id="40" name="TextBox 39"/>
           <p:cNvSpPr txBox="1"/>
           <p:nvPr/>
         </p:nvSpPr>
@@ -4600,7 +4565,7 @@
       </p:sp>
       <p:sp>
         <p:nvSpPr>
-          <p:cNvPr id="42" name="Rectangle 41"/>
+          <p:cNvPr id="41" name="Rectangle 40"/>
           <p:cNvSpPr/>
           <p:nvPr/>
         </p:nvSpPr>
@@ -4645,7 +4610,7 @@
       </p:sp>
       <p:sp>
         <p:nvSpPr>
-          <p:cNvPr id="43" name="TextBox 42"/>
+          <p:cNvPr id="42" name="TextBox 41"/>
           <p:cNvSpPr txBox="1"/>
           <p:nvPr/>
         </p:nvSpPr>
@@ -4680,7 +4645,7 @@
       </p:sp>
       <p:sp>
         <p:nvSpPr>
-          <p:cNvPr id="44" name="Rectangle 43"/>
+          <p:cNvPr id="43" name="Rectangle 42"/>
           <p:cNvSpPr/>
           <p:nvPr/>
         </p:nvSpPr>
@@ -4723,7 +4688,7 @@
       </p:sp>
       <p:sp>
         <p:nvSpPr>
-          <p:cNvPr id="45" name="TextBox 44"/>
+          <p:cNvPr id="44" name="TextBox 43"/>
           <p:cNvSpPr txBox="1"/>
           <p:nvPr/>
         </p:nvSpPr>
@@ -5115,7 +5080,7 @@
                 </a:solidFill>
                 <a:latin typeface="Calibri"/>
               </a:rPr>
-              <a:t>TAKEAWAY:  Same surface. Same geometry. Different sun. Appearance changes completely — direct matching fails without physics conditioning.</a:t>
+              <a:t>TAKEAWAY:  Same surface. Same geometry. Different sun. Appearance changes dramatically — direct feature matching collapses without physics conditioning.</a:t>
             </a:r>
           </a:p>
         </p:txBody>
@@ -5563,7 +5528,7 @@
                 </a:solidFill>
                 <a:latin typeface="Calibri"/>
               </a:rPr>
-              <a:t>▸  MAGSAC++ &amp; Spatial Quotas: Rejects shadow outliers and promotes uniform spatial coverage.</a:t>
+              <a:t>▸  MAGSAC++ &amp; Spatial Quotas: Rejects geometrically inconsistent matches; promotes uniform coverage.</a:t>
             </a:r>
           </a:p>
         </p:txBody>
@@ -5633,7 +5598,7 @@
                 </a:solidFill>
                 <a:latin typeface="Calibri"/>
               </a:rPr>
-              <a:t>▸  Fail-Safe Abstention: Reason-coded rejection prevents corrupting downstream map products.</a:t>
+              <a:t>▸  Fail-Safe Abstention: Reason-coded rejection prevents acceptance of low-confidence registrations.</a:t>
             </a:r>
           </a:p>
         </p:txBody>
@@ -7447,7 +7412,7 @@
                 </a:solidFill>
                 <a:latin typeface="Calibri"/>
               </a:rPr>
-              <a:t>S_relief &gt; 0.20 triggers adaptive TPS warp</a:t>
+              <a:t>Relief-coherent residual + P95 threshold → TPS</a:t>
             </a:r>
           </a:p>
         </p:txBody>
@@ -7705,7 +7670,7 @@
         <p:spPr>
           <a:xfrm>
             <a:off x="457200" y="2889504"/>
-            <a:ext cx="6126480" cy="2286000"/>
+            <a:ext cx="6126480" cy="2423160"/>
           </a:xfrm>
           <a:prstGeom prst="rect">
             <a:avLst/>
@@ -7715,6 +7680,121 @@
       <p:sp>
         <p:nvSpPr>
           <p:cNvPr id="47" name="Rectangle 46"/>
+          <p:cNvSpPr/>
+          <p:nvPr/>
+        </p:nvSpPr>
+        <p:spPr>
+          <a:xfrm>
+            <a:off x="457200" y="5358384"/>
+            <a:ext cx="6126480" cy="457200"/>
+          </a:xfrm>
+          <a:prstGeom prst="rect">
+            <a:avLst/>
+          </a:prstGeom>
+          <a:solidFill>
+            <a:srgbClr val="EAF6F0"/>
+          </a:solidFill>
+          <a:ln w="7620">
+            <a:solidFill>
+              <a:srgbClr val="2E9E6E"/>
+            </a:solidFill>
+          </a:ln>
+        </p:spPr>
+        <p:style>
+          <a:lnRef idx="1">
+            <a:schemeClr val="accent1"/>
+          </a:lnRef>
+          <a:fillRef idx="3">
+            <a:schemeClr val="accent1"/>
+          </a:fillRef>
+          <a:effectRef idx="2">
+            <a:schemeClr val="accent1"/>
+          </a:effectRef>
+          <a:fontRef idx="minor">
+            <a:schemeClr val="lt1"/>
+          </a:fontRef>
+        </p:style>
+        <p:txBody>
+          <a:bodyPr rtlCol="0" anchor="ctr"/>
+          <a:lstStyle/>
+          <a:p>
+            <a:pPr algn="ctr"/>
+          </a:p>
+        </p:txBody>
+      </p:sp>
+      <p:sp>
+        <p:nvSpPr>
+          <p:cNvPr id="48" name="TextBox 47"/>
+          <p:cNvSpPr txBox="1"/>
+          <p:nvPr/>
+        </p:nvSpPr>
+        <p:spPr>
+          <a:xfrm>
+            <a:off x="548640" y="5394960"/>
+            <a:ext cx="5943600" cy="182880"/>
+          </a:xfrm>
+          <a:prstGeom prst="rect">
+            <a:avLst/>
+          </a:prstGeom>
+          <a:noFill/>
+        </p:spPr>
+        <p:txBody>
+          <a:bodyPr wrap="square">
+            <a:spAutoFit/>
+          </a:bodyPr>
+          <a:lstStyle/>
+          <a:p>
+            <a:pPr algn="l"/>
+            <a:r>
+              <a:rPr sz="850" b="1" i="0">
+                <a:solidFill>
+                  <a:srgbClr val="2E9E6E"/>
+                </a:solidFill>
+                <a:latin typeface="Calibri"/>
+              </a:rPr>
+              <a:t>TMC-2 STEREO — 710 INLIERS — ACCEPTED</a:t>
+            </a:r>
+          </a:p>
+        </p:txBody>
+      </p:sp>
+      <p:sp>
+        <p:nvSpPr>
+          <p:cNvPr id="49" name="TextBox 48"/>
+          <p:cNvSpPr txBox="1"/>
+          <p:nvPr/>
+        </p:nvSpPr>
+        <p:spPr>
+          <a:xfrm>
+            <a:off x="548640" y="5577840"/>
+            <a:ext cx="5943600" cy="201168"/>
+          </a:xfrm>
+          <a:prstGeom prst="rect">
+            <a:avLst/>
+          </a:prstGeom>
+          <a:noFill/>
+        </p:spPr>
+        <p:txBody>
+          <a:bodyPr wrap="square">
+            <a:spAutoFit/>
+          </a:bodyPr>
+          <a:lstStyle/>
+          <a:p>
+            <a:pPr algn="l"/>
+            <a:r>
+              <a:rPr sz="800" b="0" i="0">
+                <a:solidFill>
+                  <a:srgbClr val="1A2B35"/>
+                </a:solidFill>
+                <a:latin typeface="Calibri"/>
+              </a:rPr>
+              <a:t>Held-out RMSE: 1.52 → 0.84 px (44.7% error reduction vs Stage-3 baseline) · Continuous crater rims across seams</a:t>
+            </a:r>
+          </a:p>
+        </p:txBody>
+      </p:sp>
+      <p:sp>
+        <p:nvSpPr>
+          <p:cNvPr id="50" name="Rectangle 49"/>
           <p:cNvSpPr/>
           <p:nvPr/>
         </p:nvSpPr>
@@ -7757,7 +7837,7 @@
       </p:sp>
       <p:sp>
         <p:nvSpPr>
-          <p:cNvPr id="48" name="TextBox 47"/>
+          <p:cNvPr id="51" name="TextBox 50"/>
           <p:cNvSpPr txBox="1"/>
           <p:nvPr/>
         </p:nvSpPr>
@@ -7792,7 +7872,7 @@
       </p:sp>
       <p:sp>
         <p:nvSpPr>
-          <p:cNvPr id="49" name="Rectangle 48"/>
+          <p:cNvPr id="52" name="Rectangle 51"/>
           <p:cNvSpPr/>
           <p:nvPr/>
         </p:nvSpPr>
@@ -7837,7 +7917,7 @@
       </p:sp>
       <p:sp>
         <p:nvSpPr>
-          <p:cNvPr id="50" name="TextBox 49"/>
+          <p:cNvPr id="53" name="TextBox 52"/>
           <p:cNvSpPr txBox="1"/>
           <p:nvPr/>
         </p:nvSpPr>
@@ -7872,7 +7952,7 @@
       </p:sp>
       <p:sp>
         <p:nvSpPr>
-          <p:cNvPr id="51" name="TextBox 50"/>
+          <p:cNvPr id="54" name="TextBox 53"/>
           <p:cNvSpPr txBox="1"/>
           <p:nvPr/>
         </p:nvSpPr>
@@ -7907,7 +7987,7 @@
       </p:sp>
       <p:sp>
         <p:nvSpPr>
-          <p:cNvPr id="52" name="Rectangle 51"/>
+          <p:cNvPr id="55" name="Rectangle 54"/>
           <p:cNvSpPr/>
           <p:nvPr/>
         </p:nvSpPr>
@@ -7952,7 +8032,7 @@
       </p:sp>
       <p:sp>
         <p:nvSpPr>
-          <p:cNvPr id="53" name="TextBox 52"/>
+          <p:cNvPr id="56" name="TextBox 55"/>
           <p:cNvSpPr txBox="1"/>
           <p:nvPr/>
         </p:nvSpPr>
@@ -7987,7 +8067,7 @@
       </p:sp>
       <p:sp>
         <p:nvSpPr>
-          <p:cNvPr id="54" name="TextBox 53"/>
+          <p:cNvPr id="57" name="TextBox 56"/>
           <p:cNvSpPr txBox="1"/>
           <p:nvPr/>
         </p:nvSpPr>
@@ -8022,7 +8102,7 @@
       </p:sp>
       <p:sp>
         <p:nvSpPr>
-          <p:cNvPr id="55" name="Rectangle 54"/>
+          <p:cNvPr id="58" name="Rectangle 57"/>
           <p:cNvSpPr/>
           <p:nvPr/>
         </p:nvSpPr>
@@ -8067,7 +8147,7 @@
       </p:sp>
       <p:sp>
         <p:nvSpPr>
-          <p:cNvPr id="56" name="TextBox 55"/>
+          <p:cNvPr id="59" name="TextBox 58"/>
           <p:cNvSpPr txBox="1"/>
           <p:nvPr/>
         </p:nvSpPr>
@@ -8102,7 +8182,7 @@
       </p:sp>
       <p:sp>
         <p:nvSpPr>
-          <p:cNvPr id="57" name="TextBox 56"/>
+          <p:cNvPr id="60" name="TextBox 59"/>
           <p:cNvSpPr txBox="1"/>
           <p:nvPr/>
         </p:nvSpPr>
@@ -8137,7 +8217,7 @@
       </p:sp>
       <p:sp>
         <p:nvSpPr>
-          <p:cNvPr id="58" name="Rectangle 57"/>
+          <p:cNvPr id="61" name="Rectangle 60"/>
           <p:cNvSpPr/>
           <p:nvPr/>
         </p:nvSpPr>
@@ -8182,7 +8262,7 @@
       </p:sp>
       <p:sp>
         <p:nvSpPr>
-          <p:cNvPr id="59" name="TextBox 58"/>
+          <p:cNvPr id="62" name="TextBox 61"/>
           <p:cNvSpPr txBox="1"/>
           <p:nvPr/>
         </p:nvSpPr>
@@ -8217,7 +8297,7 @@
       </p:sp>
       <p:sp>
         <p:nvSpPr>
-          <p:cNvPr id="60" name="TextBox 59"/>
+          <p:cNvPr id="63" name="TextBox 62"/>
           <p:cNvSpPr txBox="1"/>
           <p:nvPr/>
         </p:nvSpPr>
@@ -8252,7 +8332,7 @@
       </p:sp>
       <p:sp>
         <p:nvSpPr>
-          <p:cNvPr id="61" name="Rectangle 60"/>
+          <p:cNvPr id="64" name="Rectangle 63"/>
           <p:cNvSpPr/>
           <p:nvPr/>
         </p:nvSpPr>
@@ -8295,7 +8375,7 @@
       </p:sp>
       <p:sp>
         <p:nvSpPr>
-          <p:cNvPr id="62" name="TextBox 61"/>
+          <p:cNvPr id="65" name="TextBox 64"/>
           <p:cNvSpPr txBox="1"/>
           <p:nvPr/>
         </p:nvSpPr>
@@ -8330,14 +8410,14 @@
       </p:sp>
       <p:sp>
         <p:nvSpPr>
-          <p:cNvPr id="63" name="Rectangle 62"/>
+          <p:cNvPr id="66" name="Rectangle 65"/>
           <p:cNvSpPr/>
           <p:nvPr/>
         </p:nvSpPr>
         <p:spPr>
           <a:xfrm>
             <a:off x="6766560" y="4517136"/>
-            <a:ext cx="4965192" cy="292608"/>
+            <a:ext cx="4965192" cy="640080"/>
           </a:xfrm>
           <a:prstGeom prst="rect">
             <a:avLst/>
@@ -8375,49 +8455,49 @@
       </p:sp>
       <p:sp>
         <p:nvSpPr>
-          <p:cNvPr id="64" name="TextBox 63"/>
+          <p:cNvPr id="67" name="TextBox 66"/>
           <p:cNvSpPr txBox="1"/>
           <p:nvPr/>
         </p:nvSpPr>
         <p:spPr>
           <a:xfrm>
             <a:off x="6858000" y="4553712"/>
-            <a:ext cx="1463040" cy="201168"/>
-          </a:xfrm>
-          <a:prstGeom prst="rect">
-            <a:avLst/>
-          </a:prstGeom>
-          <a:noFill/>
-        </p:spPr>
-        <p:txBody>
-          <a:bodyPr wrap="square">
-            <a:spAutoFit/>
-          </a:bodyPr>
-          <a:lstStyle/>
-          <a:p>
-            <a:pPr algn="l"/>
-            <a:r>
-              <a:rPr sz="750" b="1" i="0">
+            <a:ext cx="4782312" cy="164592"/>
+          </a:xfrm>
+          <a:prstGeom prst="rect">
+            <a:avLst/>
+          </a:prstGeom>
+          <a:noFill/>
+        </p:spPr>
+        <p:txBody>
+          <a:bodyPr wrap="square">
+            <a:spAutoFit/>
+          </a:bodyPr>
+          <a:lstStyle/>
+          <a:p>
+            <a:pPr algn="l"/>
+            <a:r>
+              <a:rPr sz="800" b="1" i="0">
                 <a:solidFill>
                   <a:srgbClr val="147D77"/>
                 </a:solidFill>
                 <a:latin typeface="Calibri"/>
               </a:rPr>
-              <a:t>result.json</a:t>
-            </a:r>
-          </a:p>
-        </p:txBody>
-      </p:sp>
-      <p:sp>
-        <p:nvSpPr>
-          <p:cNvPr id="65" name="TextBox 64"/>
-          <p:cNvSpPr txBox="1"/>
-          <p:nvPr/>
-        </p:nvSpPr>
-        <p:spPr>
-          <a:xfrm>
-            <a:off x="8366760" y="4553712"/>
-            <a:ext cx="3291840" cy="201168"/>
+              <a:t>CORE OUTPUTS:</a:t>
+            </a:r>
+          </a:p>
+        </p:txBody>
+      </p:sp>
+      <p:sp>
+        <p:nvSpPr>
+          <p:cNvPr id="68" name="TextBox 67"/>
+          <p:cNvSpPr txBox="1"/>
+          <p:nvPr/>
+        </p:nvSpPr>
+        <p:spPr>
+          <a:xfrm>
+            <a:off x="6858000" y="4736592"/>
+            <a:ext cx="4782312" cy="402336"/>
           </a:xfrm>
           <a:prstGeom prst="rect">
             <a:avLst/>
@@ -8438,21 +8518,23 @@
                 </a:solidFill>
                 <a:latin typeface="Calibri"/>
               </a:rPr>
-              <a:t>Transformation matrix, inlier count, coverage score, held-out RMSE, reason codes.</a:t>
-            </a:r>
-          </a:p>
-        </p:txBody>
-      </p:sp>
-      <p:sp>
-        <p:nvSpPr>
-          <p:cNvPr id="66" name="Rectangle 65"/>
+              <a:t>• Registered raster aligned to reference coordinate grid (registered_image.tif)
+• Tie-points CSV + result.json (transform, inlier count, coverage, held-out RMSE, reason codes)
+• Operator QC diagnostic checkerboard overlay (checkerboard_overlay.png)</a:t>
+            </a:r>
+          </a:p>
+        </p:txBody>
+      </p:sp>
+      <p:sp>
+        <p:nvSpPr>
+          <p:cNvPr id="69" name="Rectangle 68"/>
           <p:cNvSpPr/>
           <p:nvPr/>
         </p:nvSpPr>
         <p:spPr>
           <a:xfrm>
-            <a:off x="6766560" y="4846320"/>
-            <a:ext cx="4965192" cy="292608"/>
+            <a:off x="6766560" y="5230368"/>
+            <a:ext cx="4965192" cy="585216"/>
           </a:xfrm>
           <a:prstGeom prst="rect">
             <a:avLst/>
@@ -8490,49 +8572,49 @@
       </p:sp>
       <p:sp>
         <p:nvSpPr>
-          <p:cNvPr id="67" name="TextBox 66"/>
-          <p:cNvSpPr txBox="1"/>
-          <p:nvPr/>
-        </p:nvSpPr>
-        <p:spPr>
-          <a:xfrm>
-            <a:off x="6858000" y="4882896"/>
-            <a:ext cx="1463040" cy="201168"/>
-          </a:xfrm>
-          <a:prstGeom prst="rect">
-            <a:avLst/>
-          </a:prstGeom>
-          <a:noFill/>
-        </p:spPr>
-        <p:txBody>
-          <a:bodyPr wrap="square">
-            <a:spAutoFit/>
-          </a:bodyPr>
-          <a:lstStyle/>
-          <a:p>
-            <a:pPr algn="l"/>
-            <a:r>
-              <a:rPr sz="750" b="1" i="0">
+          <p:cNvPr id="70" name="TextBox 69"/>
+          <p:cNvSpPr txBox="1"/>
+          <p:nvPr/>
+        </p:nvSpPr>
+        <p:spPr>
+          <a:xfrm>
+            <a:off x="6858000" y="5266944"/>
+            <a:ext cx="4782312" cy="164592"/>
+          </a:xfrm>
+          <a:prstGeom prst="rect">
+            <a:avLst/>
+          </a:prstGeom>
+          <a:noFill/>
+        </p:spPr>
+        <p:txBody>
+          <a:bodyPr wrap="square">
+            <a:spAutoFit/>
+          </a:bodyPr>
+          <a:lstStyle/>
+          <a:p>
+            <a:pPr algn="l"/>
+            <a:r>
+              <a:rPr sz="800" b="1" i="0">
                 <a:solidFill>
                   <a:srgbClr val="147D77"/>
                 </a:solidFill>
                 <a:latin typeface="Calibri"/>
               </a:rPr>
-              <a:t>registered_image.tif</a:t>
-            </a:r>
-          </a:p>
-        </p:txBody>
-      </p:sp>
-      <p:sp>
-        <p:nvSpPr>
-          <p:cNvPr id="68" name="TextBox 67"/>
-          <p:cNvSpPr txBox="1"/>
-          <p:nvPr/>
-        </p:nvSpPr>
-        <p:spPr>
-          <a:xfrm>
-            <a:off x="8366760" y="4882896"/>
-            <a:ext cx="3291840" cy="201168"/>
+              <a:t>SOFTWARE DELIVERABLES:</a:t>
+            </a:r>
+          </a:p>
+        </p:txBody>
+      </p:sp>
+      <p:sp>
+        <p:nvSpPr>
+          <p:cNvPr id="71" name="TextBox 70"/>
+          <p:cNvSpPr txBox="1"/>
+          <p:nvPr/>
+        </p:nvSpPr>
+        <p:spPr>
+          <a:xfrm>
+            <a:off x="6858000" y="5449824"/>
+            <a:ext cx="4782312" cy="329184"/>
           </a:xfrm>
           <a:prstGeom prst="rect">
             <a:avLst/>
@@ -8553,122 +8635,8 @@
                 </a:solidFill>
                 <a:latin typeface="Calibri"/>
               </a:rPr>
-              <a:t>Georeferenced registered raster co-aligned with reference.</a:t>
-            </a:r>
-          </a:p>
-        </p:txBody>
-      </p:sp>
-      <p:sp>
-        <p:nvSpPr>
-          <p:cNvPr id="69" name="Rectangle 68"/>
-          <p:cNvSpPr/>
-          <p:nvPr/>
-        </p:nvSpPr>
-        <p:spPr>
-          <a:xfrm>
-            <a:off x="6766560" y="5175504"/>
-            <a:ext cx="4965192" cy="292608"/>
-          </a:xfrm>
-          <a:prstGeom prst="rect">
-            <a:avLst/>
-          </a:prstGeom>
-          <a:solidFill>
-            <a:srgbClr val="F4F6F8"/>
-          </a:solidFill>
-          <a:ln w="3810">
-            <a:solidFill>
-              <a:srgbClr val="D0D8DD"/>
-            </a:solidFill>
-          </a:ln>
-        </p:spPr>
-        <p:style>
-          <a:lnRef idx="1">
-            <a:schemeClr val="accent1"/>
-          </a:lnRef>
-          <a:fillRef idx="3">
-            <a:schemeClr val="accent1"/>
-          </a:fillRef>
-          <a:effectRef idx="2">
-            <a:schemeClr val="accent1"/>
-          </a:effectRef>
-          <a:fontRef idx="minor">
-            <a:schemeClr val="lt1"/>
-          </a:fontRef>
-        </p:style>
-        <p:txBody>
-          <a:bodyPr rtlCol="0" anchor="ctr"/>
-          <a:lstStyle/>
-          <a:p>
-            <a:pPr algn="ctr"/>
-          </a:p>
-        </p:txBody>
-      </p:sp>
-      <p:sp>
-        <p:nvSpPr>
-          <p:cNvPr id="70" name="TextBox 69"/>
-          <p:cNvSpPr txBox="1"/>
-          <p:nvPr/>
-        </p:nvSpPr>
-        <p:spPr>
-          <a:xfrm>
-            <a:off x="6858000" y="5212080"/>
-            <a:ext cx="1463040" cy="201168"/>
-          </a:xfrm>
-          <a:prstGeom prst="rect">
-            <a:avLst/>
-          </a:prstGeom>
-          <a:noFill/>
-        </p:spPr>
-        <p:txBody>
-          <a:bodyPr wrap="square">
-            <a:spAutoFit/>
-          </a:bodyPr>
-          <a:lstStyle/>
-          <a:p>
-            <a:pPr algn="l"/>
-            <a:r>
-              <a:rPr sz="750" b="1" i="0">
-                <a:solidFill>
-                  <a:srgbClr val="147D77"/>
-                </a:solidFill>
-                <a:latin typeface="Calibri"/>
-              </a:rPr>
-              <a:t>diagnostic_overlay</a:t>
-            </a:r>
-          </a:p>
-        </p:txBody>
-      </p:sp>
-      <p:sp>
-        <p:nvSpPr>
-          <p:cNvPr id="71" name="TextBox 70"/>
-          <p:cNvSpPr txBox="1"/>
-          <p:nvPr/>
-        </p:nvSpPr>
-        <p:spPr>
-          <a:xfrm>
-            <a:off x="8366760" y="5212080"/>
-            <a:ext cx="3291840" cy="201168"/>
-          </a:xfrm>
-          <a:prstGeom prst="rect">
-            <a:avLst/>
-          </a:prstGeom>
-          <a:noFill/>
-        </p:spPr>
-        <p:txBody>
-          <a:bodyPr wrap="square">
-            <a:spAutoFit/>
-          </a:bodyPr>
-          <a:lstStyle/>
-          <a:p>
-            <a:pPr algn="l"/>
-            <a:r>
-              <a:rPr sz="750" b="0" i="0">
-                <a:solidFill>
-                  <a:srgbClr val="1A2B35"/>
-                </a:solidFill>
-                <a:latin typeface="Calibri"/>
-              </a:rPr>
-              <a:t>High-resolution checkerboard verification image for operators.</a:t>
+              <a:t>• Runnable Python pipeline package (lunacorr/) with modular CLI
+• Container / environment specification (Docker / pip) + automated test suite</a:t>
             </a:r>
           </a:p>
         </p:txBody>
@@ -8676,121 +8644,6 @@
       <p:sp>
         <p:nvSpPr>
           <p:cNvPr id="72" name="Rectangle 71"/>
-          <p:cNvSpPr/>
-          <p:nvPr/>
-        </p:nvSpPr>
-        <p:spPr>
-          <a:xfrm>
-            <a:off x="6766560" y="5504688"/>
-            <a:ext cx="4965192" cy="292608"/>
-          </a:xfrm>
-          <a:prstGeom prst="rect">
-            <a:avLst/>
-          </a:prstGeom>
-          <a:solidFill>
-            <a:srgbClr val="F4F6F8"/>
-          </a:solidFill>
-          <a:ln w="3810">
-            <a:solidFill>
-              <a:srgbClr val="D0D8DD"/>
-            </a:solidFill>
-          </a:ln>
-        </p:spPr>
-        <p:style>
-          <a:lnRef idx="1">
-            <a:schemeClr val="accent1"/>
-          </a:lnRef>
-          <a:fillRef idx="3">
-            <a:schemeClr val="accent1"/>
-          </a:fillRef>
-          <a:effectRef idx="2">
-            <a:schemeClr val="accent1"/>
-          </a:effectRef>
-          <a:fontRef idx="minor">
-            <a:schemeClr val="lt1"/>
-          </a:fontRef>
-        </p:style>
-        <p:txBody>
-          <a:bodyPr rtlCol="0" anchor="ctr"/>
-          <a:lstStyle/>
-          <a:p>
-            <a:pPr algn="ctr"/>
-          </a:p>
-        </p:txBody>
-      </p:sp>
-      <p:sp>
-        <p:nvSpPr>
-          <p:cNvPr id="73" name="TextBox 72"/>
-          <p:cNvSpPr txBox="1"/>
-          <p:nvPr/>
-        </p:nvSpPr>
-        <p:spPr>
-          <a:xfrm>
-            <a:off x="6858000" y="5541264"/>
-            <a:ext cx="1463040" cy="201168"/>
-          </a:xfrm>
-          <a:prstGeom prst="rect">
-            <a:avLst/>
-          </a:prstGeom>
-          <a:noFill/>
-        </p:spPr>
-        <p:txBody>
-          <a:bodyPr wrap="square">
-            <a:spAutoFit/>
-          </a:bodyPr>
-          <a:lstStyle/>
-          <a:p>
-            <a:pPr algn="l"/>
-            <a:r>
-              <a:rPr sz="750" b="1" i="0">
-                <a:solidFill>
-                  <a:srgbClr val="147D77"/>
-                </a:solidFill>
-                <a:latin typeface="Calibri"/>
-              </a:rPr>
-              <a:t>runnable_code</a:t>
-            </a:r>
-          </a:p>
-        </p:txBody>
-      </p:sp>
-      <p:sp>
-        <p:nvSpPr>
-          <p:cNvPr id="74" name="TextBox 73"/>
-          <p:cNvSpPr txBox="1"/>
-          <p:nvPr/>
-        </p:nvSpPr>
-        <p:spPr>
-          <a:xfrm>
-            <a:off x="8366760" y="5541264"/>
-            <a:ext cx="3291840" cy="201168"/>
-          </a:xfrm>
-          <a:prstGeom prst="rect">
-            <a:avLst/>
-          </a:prstGeom>
-          <a:noFill/>
-        </p:spPr>
-        <p:txBody>
-          <a:bodyPr wrap="square">
-            <a:spAutoFit/>
-          </a:bodyPr>
-          <a:lstStyle/>
-          <a:p>
-            <a:pPr algn="l"/>
-            <a:r>
-              <a:rPr sz="750" b="0" i="0">
-                <a:solidFill>
-                  <a:srgbClr val="1A2B35"/>
-                </a:solidFill>
-                <a:latin typeface="Calibri"/>
-              </a:rPr>
-              <a:t>Python pipeline package (lunacorr/) and container environment.</a:t>
-            </a:r>
-          </a:p>
-        </p:txBody>
-      </p:sp>
-      <p:sp>
-        <p:nvSpPr>
-          <p:cNvPr id="75" name="Rectangle 74"/>
           <p:cNvSpPr/>
           <p:nvPr/>
         </p:nvSpPr>
@@ -8835,7 +8688,7 @@
       </p:sp>
       <p:sp>
         <p:nvSpPr>
-          <p:cNvPr id="76" name="TextBox 75"/>
+          <p:cNvPr id="73" name="TextBox 72"/>
           <p:cNvSpPr txBox="1"/>
           <p:nvPr/>
         </p:nvSpPr>
@@ -8870,7 +8723,7 @@
       </p:sp>
       <p:sp>
         <p:nvSpPr>
-          <p:cNvPr id="77" name="Rectangle 76"/>
+          <p:cNvPr id="74" name="Rectangle 73"/>
           <p:cNvSpPr/>
           <p:nvPr/>
         </p:nvSpPr>
@@ -8913,7 +8766,7 @@
       </p:sp>
       <p:sp>
         <p:nvSpPr>
-          <p:cNvPr id="78" name="TextBox 77"/>
+          <p:cNvPr id="75" name="TextBox 74"/>
           <p:cNvSpPr txBox="1"/>
           <p:nvPr/>
         </p:nvSpPr>
@@ -9420,7 +9273,7 @@
                 </a:solidFill>
                 <a:latin typeface="Calibri"/>
               </a:rPr>
-              <a:t>• Held-out RMSE reduced: 1.52 px → 0.84 px (44.7% error reduction vs affine fit)
+              <a:t>• Held-out RMSE reduced: 1.52 px → 0.84 px (44.7% held-out RMSE reduction vs Stage-3 rigid/projective baseline)
 • 95% Bootstrap Confidence Interval: [0.71, 0.97] px (B = 1000, seed frozen)
 • Evaluated on N=150 fixed held-out set, strictly withheld from transform fitting.</a:t>
             </a:r>
@@ -9502,7 +9355,7 @@
                 </a:solidFill>
                 <a:latin typeface="Calibri"/>
               </a:rPr>
-              <a:t>RESULT 3 — DISJOINT SCENE NEGATIVE CONTROL (FAIL-SAFE ABSTENTION):</a:t>
+              <a:t>RESULT 2 — DISJOINT SCENE NEGATIVE CONTROL (FAIL-SAFE ABSTENTION):</a:t>
             </a:r>
           </a:p>
         </p:txBody>
@@ -9537,7 +9390,7 @@
                 </a:solidFill>
                 <a:latin typeface="Calibri"/>
               </a:rPr>
-              <a:t>1/1 disjoint scene pair rejected (5 candidate inliers retained, 0 accepted; system fails safely rather than hallucinating false correspondences).</a:t>
+              <a:t>1/1 disjoint scene pair rejected; 5 candidate inliers retained but no registration accepted (system fails safely).</a:t>
             </a:r>
           </a:p>
         </p:txBody>
@@ -10400,7 +10253,7 @@
                 </a:solidFill>
                 <a:latin typeface="Calibri"/>
               </a:rPr>
-              <a:t>0.18 px median on LOLA</a:t>
+              <a:t>0.18 px median error</a:t>
             </a:r>
           </a:p>
         </p:txBody>
@@ -10955,7 +10808,7 @@
                 </a:solidFill>
                 <a:latin typeface="Calibri"/>
               </a:rPr>
-              <a:t>×204 inlier gain at 60°</a:t>
+              <a:t>1,679–2,859 inliers</a:t>
             </a:r>
           </a:p>
         </p:txBody>
@@ -11368,7 +11221,7 @@
                 </a:solidFill>
                 <a:latin typeface="Calibri"/>
               </a:rPr>
-              <a:t>PROVEN ON REAL MISSION DATA</a:t>
+              <a:t>DEMONSTRATED ON REAL-DATA BENCHMARKS</a:t>
             </a:r>
           </a:p>
         </p:txBody>
@@ -11518,7 +11371,7 @@
                 </a:solidFill>
                 <a:latin typeface="Calibri"/>
               </a:rPr>
-              <a:t>VERIFIED BY DESIGN</a:t>
+              <a:t>METHODOLOGICAL CONTROLS</a:t>
             </a:r>
           </a:p>
         </p:txBody>
@@ -11553,7 +11406,7 @@
                 </a:solidFill>
                 <a:latin typeface="Calibri"/>
               </a:rPr>
-              <a:t>No test-set leakage, frozen evaluation seeds, N≥20 inlier gating rule</a:t>
+              <a:t>No test-set access during model selection, frozen protocol, minimum-N rule</a:t>
             </a:r>
           </a:p>
         </p:txBody>
@@ -11703,7 +11556,7 @@
                 </a:solidFill>
                 <a:latin typeface="Calibri"/>
               </a:rPr>
-              <a:t>0.18 px median error on synthetic GT; re-illumination gain curves</a:t>
+              <a:t>Subpixel refinement: 0.18 px median; re-illumination gain curves</a:t>
             </a:r>
           </a:p>
         </p:txBody>
@@ -12523,7 +12376,7 @@
                 </a:solidFill>
                 <a:latin typeface="Calibri"/>
               </a:rPr>
-              <a:t>VALIDATION BOUNDARY: DEMONSTRATED vs PENDING</a:t>
+              <a:t>VALIDATION BOUNDARY: EVIDENCE STATUS</a:t>
             </a:r>
           </a:p>
         </p:txBody>
@@ -12537,7 +12390,7 @@
         <p:spPr>
           <a:xfrm>
             <a:off x="8458200" y="960120"/>
-            <a:ext cx="3520440" cy="1417320"/>
+            <a:ext cx="3520440" cy="1005840"/>
           </a:xfrm>
           <a:prstGeom prst="rect">
             <a:avLst/>
@@ -12581,7 +12434,7 @@
         </p:nvSpPr>
         <p:spPr>
           <a:xfrm>
-            <a:off x="8549640" y="996696"/>
+            <a:off x="8549640" y="987552"/>
             <a:ext cx="3337560" cy="164592"/>
           </a:xfrm>
           <a:prstGeom prst="rect">
@@ -12597,13 +12450,13 @@
           <a:p>
             <a:pPr algn="l"/>
             <a:r>
-              <a:rPr sz="800" b="1" i="0">
+              <a:rPr sz="780" b="1" i="0">
                 <a:solidFill>
                   <a:srgbClr val="2E9E6E"/>
                 </a:solidFill>
                 <a:latin typeface="Calibri"/>
               </a:rPr>
-              <a:t>DEMONSTRATED ON MISSION DATA:</a:t>
+              <a:t>DEMONSTRATED ON REAL MISSION DATA:</a:t>
             </a:r>
           </a:p>
         </p:txBody>
@@ -12616,8 +12469,8 @@
         </p:nvSpPr>
         <p:spPr>
           <a:xfrm>
-            <a:off x="8549640" y="1170432"/>
-            <a:ext cx="3337560" cy="1143000"/>
+            <a:off x="8549640" y="1152144"/>
+            <a:ext cx="3337560" cy="768096"/>
           </a:xfrm>
           <a:prstGeom prst="rect">
             <a:avLst/>
@@ -12638,10 +12491,9 @@
                 </a:solidFill>
                 <a:latin typeface="Calibri"/>
               </a:rPr>
-              <a:t>✓ Same-sensor repeat: OHRC cross-orbit (822 inliers, held-out RMSE 0.68 px)
-✓ Stereo relief: TMC-2 stereo (1.52 → 0.84 px RMSE, 44.7% error reduction)
-✓ Controlled illumination: Mode C retains &gt;2,000 inliers (&gt;99% precision @ 1px)
-✓ Fail-safe abstention: Disjoint pair rejected safely without hallucinating</a:t>
+              <a:t>✓ OHRC repeat: 822 inliers, held-out RMSE 0.779 px
+✓ TMC-2 stereo: 1.52 → 0.84 px RMSE (44.7% gain)
+✓ Safe rejection: Disjoint scene rejected (0 accepted)</a:t>
             </a:r>
           </a:p>
         </p:txBody>
@@ -12654,8 +12506,125 @@
         </p:nvSpPr>
         <p:spPr>
           <a:xfrm>
-            <a:off x="8458200" y="2450592"/>
-            <a:ext cx="3520440" cy="1417320"/>
+            <a:off x="8458200" y="2029968"/>
+            <a:ext cx="3520440" cy="914400"/>
+          </a:xfrm>
+          <a:prstGeom prst="rect">
+            <a:avLst/>
+          </a:prstGeom>
+          <a:solidFill>
+            <a:srgbClr val="EEF5FA"/>
+          </a:solidFill>
+          <a:ln w="6350">
+            <a:solidFill>
+              <a:srgbClr val="147D77"/>
+            </a:solidFill>
+          </a:ln>
+        </p:spPr>
+        <p:style>
+          <a:lnRef idx="1">
+            <a:schemeClr val="accent1"/>
+          </a:lnRef>
+          <a:fillRef idx="3">
+            <a:schemeClr val="accent1"/>
+          </a:fillRef>
+          <a:effectRef idx="2">
+            <a:schemeClr val="accent1"/>
+          </a:effectRef>
+          <a:fontRef idx="minor">
+            <a:schemeClr val="lt1"/>
+          </a:fontRef>
+        </p:style>
+        <p:txBody>
+          <a:bodyPr rtlCol="0" anchor="ctr"/>
+          <a:lstStyle/>
+          <a:p>
+            <a:pPr algn="ctr"/>
+          </a:p>
+        </p:txBody>
+      </p:sp>
+      <p:sp>
+        <p:nvSpPr>
+          <p:cNvPr id="17" name="TextBox 16"/>
+          <p:cNvSpPr txBox="1"/>
+          <p:nvPr/>
+        </p:nvSpPr>
+        <p:spPr>
+          <a:xfrm>
+            <a:off x="8549640" y="2057400"/>
+            <a:ext cx="3337560" cy="164592"/>
+          </a:xfrm>
+          <a:prstGeom prst="rect">
+            <a:avLst/>
+          </a:prstGeom>
+          <a:noFill/>
+        </p:spPr>
+        <p:txBody>
+          <a:bodyPr wrap="square">
+            <a:spAutoFit/>
+          </a:bodyPr>
+          <a:lstStyle/>
+          <a:p>
+            <a:pPr algn="l"/>
+            <a:r>
+              <a:rPr sz="780" b="1" i="0">
+                <a:solidFill>
+                  <a:srgbClr val="147D77"/>
+                </a:solidFill>
+                <a:latin typeface="Calibri"/>
+              </a:rPr>
+              <a:t>CONTROLLED SIMULATION (LOLA DEM):</a:t>
+            </a:r>
+          </a:p>
+        </p:txBody>
+      </p:sp>
+      <p:sp>
+        <p:nvSpPr>
+          <p:cNvPr id="18" name="TextBox 17"/>
+          <p:cNvSpPr txBox="1"/>
+          <p:nvPr/>
+        </p:nvSpPr>
+        <p:spPr>
+          <a:xfrm>
+            <a:off x="8549640" y="2221992"/>
+            <a:ext cx="3337560" cy="685800"/>
+          </a:xfrm>
+          <a:prstGeom prst="rect">
+            <a:avLst/>
+          </a:prstGeom>
+          <a:noFill/>
+        </p:spPr>
+        <p:txBody>
+          <a:bodyPr wrap="square">
+            <a:spAutoFit/>
+          </a:bodyPr>
+          <a:lstStyle/>
+          <a:p>
+            <a:pPr algn="l"/>
+            <a:r>
+              <a:rPr sz="750" b="0" i="0">
+                <a:solidFill>
+                  <a:srgbClr val="1A2B35"/>
+                </a:solidFill>
+                <a:latin typeface="Calibri"/>
+              </a:rPr>
+              <a:t>• Mode C retains 1,679–2,859 inliers across 0°–180°
+• True Precision @ 1px: &gt;99% in tested synthetic field
+• Direct matching collapses at Δ ≥ 60° (14 inliers)</a:t>
+            </a:r>
+          </a:p>
+        </p:txBody>
+      </p:sp>
+      <p:sp>
+        <p:nvSpPr>
+          <p:cNvPr id="19" name="Rectangle 18"/>
+          <p:cNvSpPr/>
+          <p:nvPr/>
+        </p:nvSpPr>
+        <p:spPr>
+          <a:xfrm>
+            <a:off x="8458200" y="2999232"/>
+            <a:ext cx="3520440" cy="1261872"/>
           </a:xfrm>
           <a:prstGeom prst="rect">
             <a:avLst/>
@@ -12693,13 +12662,13 @@
       </p:sp>
       <p:sp>
         <p:nvSpPr>
-          <p:cNvPr id="17" name="TextBox 16"/>
-          <p:cNvSpPr txBox="1"/>
-          <p:nvPr/>
-        </p:nvSpPr>
-        <p:spPr>
-          <a:xfrm>
-            <a:off x="8549640" y="2487168"/>
+          <p:cNvPr id="20" name="TextBox 19"/>
+          <p:cNvSpPr txBox="1"/>
+          <p:nvPr/>
+        </p:nvSpPr>
+        <p:spPr>
+          <a:xfrm>
+            <a:off x="8549640" y="3026664"/>
             <a:ext cx="3337560" cy="164592"/>
           </a:xfrm>
           <a:prstGeom prst="rect">
@@ -12715,7 +12684,7 @@
           <a:p>
             <a:pPr algn="l"/>
             <a:r>
-              <a:rPr sz="800" b="1" i="0">
+              <a:rPr sz="780" b="1" i="0">
                 <a:solidFill>
                   <a:srgbClr val="C4891E"/>
                 </a:solidFill>
@@ -12728,14 +12697,14 @@
       </p:sp>
       <p:sp>
         <p:nvSpPr>
-          <p:cNvPr id="18" name="TextBox 17"/>
-          <p:cNvSpPr txBox="1"/>
-          <p:nvPr/>
-        </p:nvSpPr>
-        <p:spPr>
-          <a:xfrm>
-            <a:off x="8549640" y="2660904"/>
-            <a:ext cx="3337560" cy="1143000"/>
+          <p:cNvPr id="21" name="TextBox 20"/>
+          <p:cNvSpPr txBox="1"/>
+          <p:nvPr/>
+        </p:nvSpPr>
+        <p:spPr>
+          <a:xfrm>
+            <a:off x="8549640" y="3191256"/>
+            <a:ext cx="3337560" cy="1024128"/>
           </a:xfrm>
           <a:prstGeom prst="rect">
             <a:avLst/>
@@ -12756,17 +12725,17 @@
                 </a:solidFill>
                 <a:latin typeface="Calibri"/>
               </a:rPr>
-              <a:t>⏳ Real cross-sensor correspondence: OHRC ↔ TMC-2 ↔ IIRS overlap
-⏳ Independent geodetic ground truth: LOLA laser altimetry check points
-⏳ Real multi-phase flight pairs: Extreme solar phase differences
-⏳ Regional holdout: Testing across polar, mare, and highland terrains</a:t>
-            </a:r>
-          </a:p>
-        </p:txBody>
-      </p:sp>
-      <p:sp>
-        <p:nvSpPr>
-          <p:cNvPr id="19" name="Rectangle 18"/>
+              <a:t>⏳ Real cross-sensor correspondence: OHRC ↔ TMC-2 ↔ IIRS
+⏳ Independent geodetic ground truth: LOLA laser altimetry
+⏳ Real multi-phase flight pairs: Extreme phase angles
+⏳ Regional holdout: Polar, mare, and highland terrains</a:t>
+            </a:r>
+          </a:p>
+        </p:txBody>
+      </p:sp>
+      <p:sp>
+        <p:nvSpPr>
+          <p:cNvPr id="22" name="Rectangle 21"/>
           <p:cNvSpPr/>
           <p:nvPr/>
         </p:nvSpPr>
@@ -12809,7 +12778,7 @@
       </p:sp>
       <p:sp>
         <p:nvSpPr>
-          <p:cNvPr id="20" name="TextBox 19"/>
+          <p:cNvPr id="23" name="TextBox 22"/>
           <p:cNvSpPr txBox="1"/>
           <p:nvPr/>
         </p:nvSpPr>
@@ -12844,7 +12813,7 @@
       </p:sp>
       <p:sp>
         <p:nvSpPr>
-          <p:cNvPr id="21" name="Rectangle 20"/>
+          <p:cNvPr id="24" name="Rectangle 23"/>
           <p:cNvSpPr/>
           <p:nvPr/>
         </p:nvSpPr>
@@ -12889,7 +12858,7 @@
       </p:sp>
       <p:sp>
         <p:nvSpPr>
-          <p:cNvPr id="22" name="TextBox 21"/>
+          <p:cNvPr id="25" name="TextBox 24"/>
           <p:cNvSpPr txBox="1"/>
           <p:nvPr/>
         </p:nvSpPr>
@@ -12924,7 +12893,7 @@
       </p:sp>
       <p:sp>
         <p:nvSpPr>
-          <p:cNvPr id="23" name="TextBox 22"/>
+          <p:cNvPr id="26" name="TextBox 25"/>
           <p:cNvSpPr txBox="1"/>
           <p:nvPr/>
         </p:nvSpPr>
@@ -12959,7 +12928,7 @@
       </p:sp>
       <p:sp>
         <p:nvSpPr>
-          <p:cNvPr id="24" name="Rectangle 23"/>
+          <p:cNvPr id="27" name="Rectangle 26"/>
           <p:cNvSpPr/>
           <p:nvPr/>
         </p:nvSpPr>
@@ -13004,7 +12973,7 @@
       </p:sp>
       <p:sp>
         <p:nvSpPr>
-          <p:cNvPr id="25" name="TextBox 24"/>
+          <p:cNvPr id="28" name="TextBox 27"/>
           <p:cNvSpPr txBox="1"/>
           <p:nvPr/>
         </p:nvSpPr>
@@ -13039,7 +13008,7 @@
       </p:sp>
       <p:sp>
         <p:nvSpPr>
-          <p:cNvPr id="26" name="TextBox 25"/>
+          <p:cNvPr id="29" name="TextBox 28"/>
           <p:cNvSpPr txBox="1"/>
           <p:nvPr/>
         </p:nvSpPr>
@@ -13074,7 +13043,7 @@
       </p:sp>
       <p:sp>
         <p:nvSpPr>
-          <p:cNvPr id="27" name="Rectangle 26"/>
+          <p:cNvPr id="30" name="Rectangle 29"/>
           <p:cNvSpPr/>
           <p:nvPr/>
         </p:nvSpPr>
@@ -13119,7 +13088,7 @@
       </p:sp>
       <p:sp>
         <p:nvSpPr>
-          <p:cNvPr id="28" name="TextBox 27"/>
+          <p:cNvPr id="31" name="TextBox 30"/>
           <p:cNvSpPr txBox="1"/>
           <p:nvPr/>
         </p:nvSpPr>
@@ -13154,7 +13123,7 @@
       </p:sp>
       <p:sp>
         <p:nvSpPr>
-          <p:cNvPr id="29" name="TextBox 28"/>
+          <p:cNvPr id="32" name="TextBox 31"/>
           <p:cNvSpPr txBox="1"/>
           <p:nvPr/>
         </p:nvSpPr>
@@ -13189,7 +13158,7 @@
       </p:sp>
       <p:sp>
         <p:nvSpPr>
-          <p:cNvPr id="30" name="Rectangle 29"/>
+          <p:cNvPr id="33" name="Rectangle 32"/>
           <p:cNvSpPr/>
           <p:nvPr/>
         </p:nvSpPr>
@@ -13234,7 +13203,7 @@
       </p:sp>
       <p:sp>
         <p:nvSpPr>
-          <p:cNvPr id="31" name="TextBox 30"/>
+          <p:cNvPr id="34" name="TextBox 33"/>
           <p:cNvSpPr txBox="1"/>
           <p:nvPr/>
         </p:nvSpPr>
@@ -13269,7 +13238,7 @@
       </p:sp>
       <p:sp>
         <p:nvSpPr>
-          <p:cNvPr id="32" name="TextBox 31"/>
+          <p:cNvPr id="35" name="TextBox 34"/>
           <p:cNvSpPr txBox="1"/>
           <p:nvPr/>
         </p:nvSpPr>
@@ -13304,7 +13273,7 @@
       </p:sp>
       <p:sp>
         <p:nvSpPr>
-          <p:cNvPr id="33" name="Rectangle 32"/>
+          <p:cNvPr id="36" name="Rectangle 35"/>
           <p:cNvSpPr/>
           <p:nvPr/>
         </p:nvSpPr>
@@ -13347,7 +13316,7 @@
       </p:sp>
       <p:sp>
         <p:nvSpPr>
-          <p:cNvPr id="34" name="TextBox 33"/>
+          <p:cNvPr id="37" name="TextBox 36"/>
           <p:cNvSpPr txBox="1"/>
           <p:nvPr/>
         </p:nvSpPr>
@@ -13382,7 +13351,7 @@
       </p:sp>
       <p:sp>
         <p:nvSpPr>
-          <p:cNvPr id="35" name="Rectangle 34"/>
+          <p:cNvPr id="38" name="Rectangle 37"/>
           <p:cNvSpPr/>
           <p:nvPr/>
         </p:nvSpPr>
@@ -13427,7 +13396,7 @@
       </p:sp>
       <p:sp>
         <p:nvSpPr>
-          <p:cNvPr id="36" name="TextBox 35"/>
+          <p:cNvPr id="39" name="TextBox 38"/>
           <p:cNvSpPr txBox="1"/>
           <p:nvPr/>
         </p:nvSpPr>
@@ -13462,7 +13431,7 @@
       </p:sp>
       <p:sp>
         <p:nvSpPr>
-          <p:cNvPr id="37" name="TextBox 36"/>
+          <p:cNvPr id="40" name="TextBox 39"/>
           <p:cNvSpPr txBox="1"/>
           <p:nvPr/>
         </p:nvSpPr>
@@ -13497,7 +13466,7 @@
       </p:sp>
       <p:sp>
         <p:nvSpPr>
-          <p:cNvPr id="38" name="Rectangle 37"/>
+          <p:cNvPr id="41" name="Rectangle 40"/>
           <p:cNvSpPr/>
           <p:nvPr/>
         </p:nvSpPr>
@@ -13542,7 +13511,7 @@
       </p:sp>
       <p:sp>
         <p:nvSpPr>
-          <p:cNvPr id="39" name="TextBox 38"/>
+          <p:cNvPr id="42" name="TextBox 41"/>
           <p:cNvSpPr txBox="1"/>
           <p:nvPr/>
         </p:nvSpPr>
@@ -13570,14 +13539,14 @@
                 </a:solidFill>
                 <a:latin typeface="Calibri"/>
               </a:rPr>
-              <a:t>RISK: No Real Footprint Overlap</a:t>
-            </a:r>
-          </a:p>
-        </p:txBody>
-      </p:sp>
-      <p:sp>
-        <p:nvSpPr>
-          <p:cNvPr id="40" name="TextBox 39"/>
+              <a:t>RISK: No Real Overlap</a:t>
+            </a:r>
+          </a:p>
+        </p:txBody>
+      </p:sp>
+      <p:sp>
+        <p:nvSpPr>
+          <p:cNvPr id="43" name="TextBox 42"/>
           <p:cNvSpPr txBox="1"/>
           <p:nvPr/>
         </p:nvSpPr>
@@ -13605,14 +13574,14 @@
                 </a:solidFill>
                 <a:latin typeface="Calibri"/>
               </a:rPr>
-              <a:t>→ Automated SPICE bounding-box intersection check</a:t>
-            </a:r>
-          </a:p>
-        </p:txBody>
-      </p:sp>
-      <p:sp>
-        <p:nvSpPr>
-          <p:cNvPr id="41" name="Rectangle 40"/>
+              <a:t>→ Detect spatial overlap first; route to search/abstain</a:t>
+            </a:r>
+          </a:p>
+        </p:txBody>
+      </p:sp>
+      <p:sp>
+        <p:nvSpPr>
+          <p:cNvPr id="44" name="Rectangle 43"/>
           <p:cNvSpPr/>
           <p:nvPr/>
         </p:nvSpPr>
@@ -13657,7 +13626,7 @@
       </p:sp>
       <p:sp>
         <p:nvSpPr>
-          <p:cNvPr id="42" name="TextBox 41"/>
+          <p:cNvPr id="45" name="TextBox 44"/>
           <p:cNvSpPr txBox="1"/>
           <p:nvPr/>
         </p:nvSpPr>
@@ -13692,7 +13661,7 @@
       </p:sp>
       <p:sp>
         <p:nvSpPr>
-          <p:cNvPr id="43" name="TextBox 42"/>
+          <p:cNvPr id="46" name="TextBox 45"/>
           <p:cNvSpPr txBox="1"/>
           <p:nvPr/>
         </p:nvSpPr>
@@ -13727,7 +13696,7 @@
       </p:sp>
       <p:sp>
         <p:nvSpPr>
-          <p:cNvPr id="44" name="Rectangle 43"/>
+          <p:cNvPr id="47" name="Rectangle 46"/>
           <p:cNvSpPr/>
           <p:nvPr/>
         </p:nvSpPr>
@@ -13772,7 +13741,7 @@
       </p:sp>
       <p:sp>
         <p:nvSpPr>
-          <p:cNvPr id="45" name="TextBox 44"/>
+          <p:cNvPr id="48" name="TextBox 47"/>
           <p:cNvSpPr txBox="1"/>
           <p:nvPr/>
         </p:nvSpPr>
@@ -13807,7 +13776,7 @@
       </p:sp>
       <p:sp>
         <p:nvSpPr>
-          <p:cNvPr id="46" name="TextBox 45"/>
+          <p:cNvPr id="49" name="TextBox 48"/>
           <p:cNvSpPr txBox="1"/>
           <p:nvPr/>
         </p:nvSpPr>
@@ -13835,14 +13804,14 @@
                 </a:solidFill>
                 <a:latin typeface="Calibri"/>
               </a:rPr>
-              <a:t>→ Multi-resolution pyramid + scale-space matching</a:t>
-            </a:r>
-          </a:p>
-        </p:txBody>
-      </p:sp>
-      <p:sp>
-        <p:nvSpPr>
-          <p:cNvPr id="47" name="Rectangle 46"/>
+              <a:t>→ Proposed mitigation: pyramid matching (pending)</a:t>
+            </a:r>
+          </a:p>
+        </p:txBody>
+      </p:sp>
+      <p:sp>
+        <p:nvSpPr>
+          <p:cNvPr id="50" name="Rectangle 49"/>
           <p:cNvSpPr/>
           <p:nvPr/>
         </p:nvSpPr>
@@ -13885,7 +13854,7 @@
       </p:sp>
       <p:sp>
         <p:nvSpPr>
-          <p:cNvPr id="48" name="TextBox 47"/>
+          <p:cNvPr id="51" name="TextBox 50"/>
           <p:cNvSpPr txBox="1"/>
           <p:nvPr/>
         </p:nvSpPr>
@@ -13920,7 +13889,7 @@
       </p:sp>
       <p:sp>
         <p:nvSpPr>
-          <p:cNvPr id="49" name="Rectangle 48"/>
+          <p:cNvPr id="52" name="Rectangle 51"/>
           <p:cNvSpPr/>
           <p:nvPr/>
         </p:nvSpPr>
@@ -13965,7 +13934,7 @@
       </p:sp>
       <p:sp>
         <p:nvSpPr>
-          <p:cNvPr id="50" name="TextBox 49"/>
+          <p:cNvPr id="53" name="TextBox 52"/>
           <p:cNvSpPr txBox="1"/>
           <p:nvPr/>
         </p:nvSpPr>
@@ -14000,7 +13969,7 @@
       </p:sp>
       <p:sp>
         <p:nvSpPr>
-          <p:cNvPr id="51" name="Rectangle 50"/>
+          <p:cNvPr id="54" name="Rectangle 53"/>
           <p:cNvSpPr/>
           <p:nvPr/>
         </p:nvSpPr>
@@ -14045,7 +14014,7 @@
       </p:sp>
       <p:sp>
         <p:nvSpPr>
-          <p:cNvPr id="52" name="TextBox 51"/>
+          <p:cNvPr id="55" name="TextBox 54"/>
           <p:cNvSpPr txBox="1"/>
           <p:nvPr/>
         </p:nvSpPr>
@@ -14080,7 +14049,7 @@
       </p:sp>
       <p:sp>
         <p:nvSpPr>
-          <p:cNvPr id="53" name="Rectangle 52"/>
+          <p:cNvPr id="56" name="Rectangle 55"/>
           <p:cNvSpPr/>
           <p:nvPr/>
         </p:nvSpPr>
@@ -14125,7 +14094,7 @@
       </p:sp>
       <p:sp>
         <p:nvSpPr>
-          <p:cNvPr id="54" name="TextBox 53"/>
+          <p:cNvPr id="57" name="TextBox 56"/>
           <p:cNvSpPr txBox="1"/>
           <p:nvPr/>
         </p:nvSpPr>
@@ -14160,7 +14129,7 @@
       </p:sp>
       <p:sp>
         <p:nvSpPr>
-          <p:cNvPr id="55" name="Rectangle 54"/>
+          <p:cNvPr id="58" name="Rectangle 57"/>
           <p:cNvSpPr/>
           <p:nvPr/>
         </p:nvSpPr>
@@ -14205,7 +14174,7 @@
       </p:sp>
       <p:sp>
         <p:nvSpPr>
-          <p:cNvPr id="56" name="TextBox 55"/>
+          <p:cNvPr id="59" name="TextBox 58"/>
           <p:cNvSpPr txBox="1"/>
           <p:nvPr/>
         </p:nvSpPr>
@@ -14240,7 +14209,7 @@
       </p:sp>
       <p:sp>
         <p:nvSpPr>
-          <p:cNvPr id="57" name="Rectangle 56"/>
+          <p:cNvPr id="60" name="Rectangle 59"/>
           <p:cNvSpPr/>
           <p:nvPr/>
         </p:nvSpPr>
@@ -14283,7 +14252,7 @@
       </p:sp>
       <p:sp>
         <p:nvSpPr>
-          <p:cNvPr id="58" name="TextBox 57"/>
+          <p:cNvPr id="61" name="TextBox 60"/>
           <p:cNvSpPr txBox="1"/>
           <p:nvPr/>
         </p:nvSpPr>
@@ -15272,7 +15241,7 @@
                 </a:solidFill>
                 <a:latin typeface="Calibri"/>
               </a:rPr>
-              <a:t>Directly addresses lunar illumination physics via LCN and DEM reflectance simulation, preventing optical correlation collapse.</a:t>
+              <a:t>Directly addresses lunar illumination physics via LCN and DEM reflectance simulation, designed to mitigate illumination-induced correspondence collapse.</a:t>
             </a:r>
           </a:p>
         </p:txBody>
@@ -15387,7 +15356,7 @@
                 </a:solidFill>
                 <a:latin typeface="Calibri"/>
               </a:rPr>
-              <a:t>Coherence-gated TPS elastic warping compensates 3D topography without forcing an oversimplified planar homography.</a:t>
+              <a:t>Coherence-gated TPS elastic warping compensates apparent relief-induced 2D displacement without forcing an oversimplified planar homography.</a:t>
             </a:r>
           </a:p>
         </p:txBody>
@@ -15467,7 +15436,7 @@
                 </a:solidFill>
                 <a:latin typeface="Calibri"/>
               </a:rPr>
-              <a:t>Fail-Safe Abstention</a:t>
+              <a:t>Fail-Safe Quality Control</a:t>
             </a:r>
           </a:p>
         </p:txBody>
@@ -15502,7 +15471,7 @@
                 </a:solidFill>
                 <a:latin typeface="Calibri"/>
               </a:rPr>
-              <a:t>Mission-critical safety: rejects invalid or ambiguous pairs with explicit reason codes rather than corrupting mapping products.</a:t>
+              <a:t>Rejects invalid or ambiguous registrations with explicit reason codes rather than forcing alignment on unmatchable scenes.</a:t>
             </a:r>
           </a:p>
         </p:txBody>
@@ -15720,7 +15689,7 @@
                 </a:solidFill>
                 <a:latin typeface="Calibri"/>
               </a:rPr>
-              <a:t>✓  Georeferenced registered product GeoTIFF (registered_image.tif)</a:t>
+              <a:t>✓  Registered raster aligned to reference grid (registered_image.tif)</a:t>
             </a:r>
           </a:p>
         </p:txBody>
@@ -15868,7 +15837,7 @@
                 </a:solidFill>
                 <a:latin typeface="Calibri"/>
               </a:rPr>
-              <a:t>REPOSITORY AND CONTACT</a:t>
+              <a:t>REPOSITORY AND IDENTIFICATION</a:t>
             </a:r>
           </a:p>
         </p:txBody>
@@ -15881,7 +15850,7 @@
         </p:nvSpPr>
         <p:spPr>
           <a:xfrm>
-            <a:off x="7726679" y="4828032"/>
+            <a:off x="7726679" y="4846320"/>
             <a:ext cx="4160520" cy="201168"/>
           </a:xfrm>
           <a:prstGeom prst="rect">
@@ -15916,7 +15885,7 @@
         </p:nvSpPr>
         <p:spPr>
           <a:xfrm>
-            <a:off x="7726679" y="5047488"/>
+            <a:off x="7726679" y="5102352"/>
             <a:ext cx="4160520" cy="201168"/>
           </a:xfrm>
           <a:prstGeom prst="rect">
@@ -15951,7 +15920,7 @@
         </p:nvSpPr>
         <p:spPr>
           <a:xfrm>
-            <a:off x="7726679" y="5266944"/>
+            <a:off x="7726679" y="5358384"/>
             <a:ext cx="4160520" cy="201168"/>
           </a:xfrm>
           <a:prstGeom prst="rect">
@@ -15980,42 +15949,7 @@
       </p:sp>
       <p:sp>
         <p:nvSpPr>
-          <p:cNvPr id="46" name="TextBox 45"/>
-          <p:cNvSpPr txBox="1"/>
-          <p:nvPr/>
-        </p:nvSpPr>
-        <p:spPr>
-          <a:xfrm>
-            <a:off x="7726679" y="5486400"/>
-            <a:ext cx="4160520" cy="182880"/>
-          </a:xfrm>
-          <a:prstGeom prst="rect">
-            <a:avLst/>
-          </a:prstGeom>
-          <a:noFill/>
-        </p:spPr>
-        <p:txBody>
-          <a:bodyPr wrap="square">
-            <a:spAutoFit/>
-          </a:bodyPr>
-          <a:lstStyle/>
-          <a:p>
-            <a:pPr algn="l"/>
-            <a:r>
-              <a:rPr sz="800" b="0" i="1">
-                <a:solidFill>
-                  <a:srgbClr val="6B7E88"/>
-                </a:solidFill>
-                <a:latin typeface="Calibri"/>
-              </a:rPr>
-              <a:t>Contact through official SIH 2026 portal only.</a:t>
-            </a:r>
-          </a:p>
-        </p:txBody>
-      </p:sp>
-      <p:sp>
-        <p:nvSpPr>
-          <p:cNvPr id="47" name="Rectangle 46"/>
+          <p:cNvPr id="46" name="Rectangle 45"/>
           <p:cNvSpPr/>
           <p:nvPr/>
         </p:nvSpPr>
@@ -16058,7 +15992,7 @@
       </p:sp>
       <p:sp>
         <p:nvSpPr>
-          <p:cNvPr id="48" name="TextBox 47"/>
+          <p:cNvPr id="47" name="TextBox 46"/>
           <p:cNvSpPr txBox="1"/>
           <p:nvPr/>
         </p:nvSpPr>

--- a/LUNA-CORR_SIH2026_Presentation.pptx
+++ b/LUNA-CORR_SIH2026_Presentation.pptx
@@ -14384,7 +14384,7 @@
                 </a:solidFill>
                 <a:latin typeface="Calibri"/>
               </a:rPr>
-              <a:t>SUMMARY, DELIVERABLES AND REFERENCES</a:t>
+              <a:t>SUMMARY, SCIENTIFIC BOUNDARIES AND REFERENCES</a:t>
             </a:r>
           </a:p>
         </p:txBody>
@@ -15126,7 +15126,7 @@
                 </a:solidFill>
                 <a:latin typeface="Calibri"/>
               </a:rPr>
-              <a:t>THREE CORE TAKEAWAYS</a:t>
+              <a:t>THREE CORE SCIENTIFIC TAKEAWAYS</a:t>
             </a:r>
           </a:p>
         </p:txBody>
@@ -15140,7 +15140,7 @@
         <p:spPr>
           <a:xfrm>
             <a:off x="7635240" y="969264"/>
-            <a:ext cx="4343400" cy="566928"/>
+            <a:ext cx="4343400" cy="868680"/>
           </a:xfrm>
           <a:prstGeom prst="rect">
             <a:avLst/>
@@ -15148,7 +15148,7 @@
           <a:solidFill>
             <a:srgbClr val="F4F6F8"/>
           </a:solidFill>
-          <a:ln w="3810">
+          <a:ln w="5080">
             <a:solidFill>
               <a:srgbClr val="D0D8DD"/>
             </a:solidFill>
@@ -15178,314 +15178,14 @@
       </p:sp>
       <p:sp>
         <p:nvSpPr>
-          <p:cNvPr id="25" name="TextBox 24"/>
-          <p:cNvSpPr txBox="1"/>
-          <p:nvPr/>
-        </p:nvSpPr>
-        <p:spPr>
-          <a:xfrm>
-            <a:off x="7726679" y="1005840"/>
-            <a:ext cx="4160520" cy="182880"/>
-          </a:xfrm>
-          <a:prstGeom prst="rect">
-            <a:avLst/>
-          </a:prstGeom>
-          <a:noFill/>
-        </p:spPr>
-        <p:txBody>
-          <a:bodyPr wrap="square">
-            <a:spAutoFit/>
-          </a:bodyPr>
-          <a:lstStyle/>
-          <a:p>
-            <a:pPr algn="l"/>
-            <a:r>
-              <a:rPr sz="800" b="1" i="0">
-                <a:solidFill>
-                  <a:srgbClr val="147D77"/>
-                </a:solidFill>
-                <a:latin typeface="Calibri"/>
-              </a:rPr>
-              <a:t>Physics-Conditioned Appearance</a:t>
-            </a:r>
-          </a:p>
-        </p:txBody>
-      </p:sp>
-      <p:sp>
-        <p:nvSpPr>
-          <p:cNvPr id="26" name="TextBox 25"/>
-          <p:cNvSpPr txBox="1"/>
-          <p:nvPr/>
-        </p:nvSpPr>
-        <p:spPr>
-          <a:xfrm>
-            <a:off x="7726679" y="1188720"/>
-            <a:ext cx="4160520" cy="347472"/>
-          </a:xfrm>
-          <a:prstGeom prst="rect">
-            <a:avLst/>
-          </a:prstGeom>
-          <a:noFill/>
-        </p:spPr>
-        <p:txBody>
-          <a:bodyPr wrap="square">
-            <a:spAutoFit/>
-          </a:bodyPr>
-          <a:lstStyle/>
-          <a:p>
-            <a:pPr algn="l"/>
-            <a:r>
-              <a:rPr sz="750" b="0" i="0">
-                <a:solidFill>
-                  <a:srgbClr val="1A2B35"/>
-                </a:solidFill>
-                <a:latin typeface="Calibri"/>
-              </a:rPr>
-              <a:t>Directly addresses lunar illumination physics via LCN and DEM reflectance simulation, designed to mitigate illumination-induced correspondence collapse.</a:t>
-            </a:r>
-          </a:p>
-        </p:txBody>
-      </p:sp>
-      <p:sp>
-        <p:nvSpPr>
-          <p:cNvPr id="27" name="Rectangle 26"/>
+          <p:cNvPr id="25" name="Rectangle 24"/>
           <p:cNvSpPr/>
           <p:nvPr/>
         </p:nvSpPr>
         <p:spPr>
           <a:xfrm>
-            <a:off x="7635240" y="1591056"/>
-            <a:ext cx="4343400" cy="566928"/>
-          </a:xfrm>
-          <a:prstGeom prst="rect">
-            <a:avLst/>
-          </a:prstGeom>
-          <a:solidFill>
-            <a:srgbClr val="F4F6F8"/>
-          </a:solidFill>
-          <a:ln w="3810">
-            <a:solidFill>
-              <a:srgbClr val="D0D8DD"/>
-            </a:solidFill>
-          </a:ln>
-        </p:spPr>
-        <p:style>
-          <a:lnRef idx="1">
-            <a:schemeClr val="accent1"/>
-          </a:lnRef>
-          <a:fillRef idx="3">
-            <a:schemeClr val="accent1"/>
-          </a:fillRef>
-          <a:effectRef idx="2">
-            <a:schemeClr val="accent1"/>
-          </a:effectRef>
-          <a:fontRef idx="minor">
-            <a:schemeClr val="lt1"/>
-          </a:fontRef>
-        </p:style>
-        <p:txBody>
-          <a:bodyPr rtlCol="0" anchor="ctr"/>
-          <a:lstStyle/>
-          <a:p>
-            <a:pPr algn="ctr"/>
-          </a:p>
-        </p:txBody>
-      </p:sp>
-      <p:sp>
-        <p:nvSpPr>
-          <p:cNvPr id="28" name="TextBox 27"/>
-          <p:cNvSpPr txBox="1"/>
-          <p:nvPr/>
-        </p:nvSpPr>
-        <p:spPr>
-          <a:xfrm>
-            <a:off x="7726679" y="1627632"/>
-            <a:ext cx="4160520" cy="182880"/>
-          </a:xfrm>
-          <a:prstGeom prst="rect">
-            <a:avLst/>
-          </a:prstGeom>
-          <a:noFill/>
-        </p:spPr>
-        <p:txBody>
-          <a:bodyPr wrap="square">
-            <a:spAutoFit/>
-          </a:bodyPr>
-          <a:lstStyle/>
-          <a:p>
-            <a:pPr algn="l"/>
-            <a:r>
-              <a:rPr sz="800" b="1" i="0">
-                <a:solidFill>
-                  <a:srgbClr val="147D77"/>
-                </a:solidFill>
-                <a:latin typeface="Calibri"/>
-              </a:rPr>
-              <a:t>Adaptive Geometry for Relief</a:t>
-            </a:r>
-          </a:p>
-        </p:txBody>
-      </p:sp>
-      <p:sp>
-        <p:nvSpPr>
-          <p:cNvPr id="29" name="TextBox 28"/>
-          <p:cNvSpPr txBox="1"/>
-          <p:nvPr/>
-        </p:nvSpPr>
-        <p:spPr>
-          <a:xfrm>
-            <a:off x="7726679" y="1810512"/>
-            <a:ext cx="4160520" cy="347472"/>
-          </a:xfrm>
-          <a:prstGeom prst="rect">
-            <a:avLst/>
-          </a:prstGeom>
-          <a:noFill/>
-        </p:spPr>
-        <p:txBody>
-          <a:bodyPr wrap="square">
-            <a:spAutoFit/>
-          </a:bodyPr>
-          <a:lstStyle/>
-          <a:p>
-            <a:pPr algn="l"/>
-            <a:r>
-              <a:rPr sz="750" b="0" i="0">
-                <a:solidFill>
-                  <a:srgbClr val="1A2B35"/>
-                </a:solidFill>
-                <a:latin typeface="Calibri"/>
-              </a:rPr>
-              <a:t>Coherence-gated TPS elastic warping compensates apparent relief-induced 2D displacement without forcing an oversimplified planar homography.</a:t>
-            </a:r>
-          </a:p>
-        </p:txBody>
-      </p:sp>
-      <p:sp>
-        <p:nvSpPr>
-          <p:cNvPr id="30" name="Rectangle 29"/>
-          <p:cNvSpPr/>
-          <p:nvPr/>
-        </p:nvSpPr>
-        <p:spPr>
-          <a:xfrm>
-            <a:off x="7635240" y="2212848"/>
-            <a:ext cx="4343400" cy="566928"/>
-          </a:xfrm>
-          <a:prstGeom prst="rect">
-            <a:avLst/>
-          </a:prstGeom>
-          <a:solidFill>
-            <a:srgbClr val="F4F6F8"/>
-          </a:solidFill>
-          <a:ln w="3810">
-            <a:solidFill>
-              <a:srgbClr val="D0D8DD"/>
-            </a:solidFill>
-          </a:ln>
-        </p:spPr>
-        <p:style>
-          <a:lnRef idx="1">
-            <a:schemeClr val="accent1"/>
-          </a:lnRef>
-          <a:fillRef idx="3">
-            <a:schemeClr val="accent1"/>
-          </a:fillRef>
-          <a:effectRef idx="2">
-            <a:schemeClr val="accent1"/>
-          </a:effectRef>
-          <a:fontRef idx="minor">
-            <a:schemeClr val="lt1"/>
-          </a:fontRef>
-        </p:style>
-        <p:txBody>
-          <a:bodyPr rtlCol="0" anchor="ctr"/>
-          <a:lstStyle/>
-          <a:p>
-            <a:pPr algn="ctr"/>
-          </a:p>
-        </p:txBody>
-      </p:sp>
-      <p:sp>
-        <p:nvSpPr>
-          <p:cNvPr id="31" name="TextBox 30"/>
-          <p:cNvSpPr txBox="1"/>
-          <p:nvPr/>
-        </p:nvSpPr>
-        <p:spPr>
-          <a:xfrm>
-            <a:off x="7726679" y="2249424"/>
-            <a:ext cx="4160520" cy="182880"/>
-          </a:xfrm>
-          <a:prstGeom prst="rect">
-            <a:avLst/>
-          </a:prstGeom>
-          <a:noFill/>
-        </p:spPr>
-        <p:txBody>
-          <a:bodyPr wrap="square">
-            <a:spAutoFit/>
-          </a:bodyPr>
-          <a:lstStyle/>
-          <a:p>
-            <a:pPr algn="l"/>
-            <a:r>
-              <a:rPr sz="800" b="1" i="0">
-                <a:solidFill>
-                  <a:srgbClr val="147D77"/>
-                </a:solidFill>
-                <a:latin typeface="Calibri"/>
-              </a:rPr>
-              <a:t>Fail-Safe Quality Control</a:t>
-            </a:r>
-          </a:p>
-        </p:txBody>
-      </p:sp>
-      <p:sp>
-        <p:nvSpPr>
-          <p:cNvPr id="32" name="TextBox 31"/>
-          <p:cNvSpPr txBox="1"/>
-          <p:nvPr/>
-        </p:nvSpPr>
-        <p:spPr>
-          <a:xfrm>
-            <a:off x="7726679" y="2432304"/>
-            <a:ext cx="4160520" cy="347472"/>
-          </a:xfrm>
-          <a:prstGeom prst="rect">
-            <a:avLst/>
-          </a:prstGeom>
-          <a:noFill/>
-        </p:spPr>
-        <p:txBody>
-          <a:bodyPr wrap="square">
-            <a:spAutoFit/>
-          </a:bodyPr>
-          <a:lstStyle/>
-          <a:p>
-            <a:pPr algn="l"/>
-            <a:r>
-              <a:rPr sz="750" b="0" i="0">
-                <a:solidFill>
-                  <a:srgbClr val="1A2B35"/>
-                </a:solidFill>
-                <a:latin typeface="Calibri"/>
-              </a:rPr>
-              <a:t>Rejects invalid or ambiguous registrations with explicit reason codes rather than forcing alignment on unmatchable scenes.</a:t>
-            </a:r>
-          </a:p>
-        </p:txBody>
-      </p:sp>
-      <p:sp>
-        <p:nvSpPr>
-          <p:cNvPr id="33" name="Rectangle 32"/>
-          <p:cNvSpPr/>
-          <p:nvPr/>
-        </p:nvSpPr>
-        <p:spPr>
-          <a:xfrm>
-            <a:off x="7635240" y="2944368"/>
-            <a:ext cx="4343400" cy="182880"/>
+            <a:off x="7635240" y="969264"/>
+            <a:ext cx="91440" cy="868680"/>
           </a:xfrm>
           <a:prstGeom prst="rect">
             <a:avLst/>
@@ -15521,259 +15221,129 @@
       </p:sp>
       <p:sp>
         <p:nvSpPr>
-          <p:cNvPr id="34" name="TextBox 33"/>
-          <p:cNvSpPr txBox="1"/>
-          <p:nvPr/>
-        </p:nvSpPr>
-        <p:spPr>
-          <a:xfrm>
-            <a:off x="7726679" y="2962656"/>
-            <a:ext cx="4206240" cy="182880"/>
-          </a:xfrm>
-          <a:prstGeom prst="rect">
-            <a:avLst/>
-          </a:prstGeom>
-          <a:noFill/>
-        </p:spPr>
-        <p:txBody>
-          <a:bodyPr wrap="square">
-            <a:spAutoFit/>
-          </a:bodyPr>
-          <a:lstStyle/>
-          <a:p>
-            <a:pPr algn="l"/>
-            <a:r>
-              <a:rPr sz="750" b="1" i="0">
-                <a:solidFill>
-                  <a:srgbClr val="FFFFFF"/>
-                </a:solidFill>
-                <a:latin typeface="Calibri"/>
-              </a:rPr>
-              <a:t>DELIVERABLE CHECKLIST</a:t>
-            </a:r>
-          </a:p>
-        </p:txBody>
-      </p:sp>
-      <p:sp>
-        <p:nvSpPr>
-          <p:cNvPr id="35" name="TextBox 34"/>
-          <p:cNvSpPr txBox="1"/>
-          <p:nvPr/>
-        </p:nvSpPr>
-        <p:spPr>
-          <a:xfrm>
-            <a:off x="7726679" y="3163824"/>
-            <a:ext cx="4160520" cy="201168"/>
-          </a:xfrm>
-          <a:prstGeom prst="rect">
-            <a:avLst/>
-          </a:prstGeom>
-          <a:noFill/>
-        </p:spPr>
-        <p:txBody>
-          <a:bodyPr wrap="square">
-            <a:spAutoFit/>
-          </a:bodyPr>
-          <a:lstStyle/>
-          <a:p>
-            <a:pPr algn="l"/>
-            <a:r>
-              <a:rPr sz="750" b="0" i="0">
+          <p:cNvPr id="26" name="TextBox 25"/>
+          <p:cNvSpPr txBox="1"/>
+          <p:nvPr/>
+        </p:nvSpPr>
+        <p:spPr>
+          <a:xfrm>
+            <a:off x="7818120" y="1024128"/>
+            <a:ext cx="4069080" cy="201168"/>
+          </a:xfrm>
+          <a:prstGeom prst="rect">
+            <a:avLst/>
+          </a:prstGeom>
+          <a:noFill/>
+        </p:spPr>
+        <p:txBody>
+          <a:bodyPr wrap="square">
+            <a:spAutoFit/>
+          </a:bodyPr>
+          <a:lstStyle/>
+          <a:p>
+            <a:pPr algn="l"/>
+            <a:r>
+              <a:rPr sz="900" b="1" i="0">
+                <a:solidFill>
+                  <a:srgbClr val="147D77"/>
+                </a:solidFill>
+                <a:latin typeface="Calibri"/>
+              </a:rPr>
+              <a:t>1. Physics-Conditioned Appearance</a:t>
+            </a:r>
+          </a:p>
+        </p:txBody>
+      </p:sp>
+      <p:sp>
+        <p:nvSpPr>
+          <p:cNvPr id="27" name="TextBox 26"/>
+          <p:cNvSpPr txBox="1"/>
+          <p:nvPr/>
+        </p:nvSpPr>
+        <p:spPr>
+          <a:xfrm>
+            <a:off x="7818120" y="1243584"/>
+            <a:ext cx="4069080" cy="548640"/>
+          </a:xfrm>
+          <a:prstGeom prst="rect">
+            <a:avLst/>
+          </a:prstGeom>
+          <a:noFill/>
+        </p:spPr>
+        <p:txBody>
+          <a:bodyPr wrap="square">
+            <a:spAutoFit/>
+          </a:bodyPr>
+          <a:lstStyle/>
+          <a:p>
+            <a:pPr algn="l"/>
+            <a:r>
+              <a:rPr sz="800" b="0" i="0">
                 <a:solidFill>
                   <a:srgbClr val="1A2B35"/>
                 </a:solidFill>
                 <a:latin typeface="Calibri"/>
               </a:rPr>
-              <a:t>✓  Runnable Python pipeline package (lunacorr/)</a:t>
-            </a:r>
-          </a:p>
-        </p:txBody>
-      </p:sp>
-      <p:sp>
-        <p:nvSpPr>
-          <p:cNvPr id="36" name="TextBox 35"/>
-          <p:cNvSpPr txBox="1"/>
-          <p:nvPr/>
-        </p:nvSpPr>
-        <p:spPr>
-          <a:xfrm>
-            <a:off x="7726679" y="3383280"/>
-            <a:ext cx="4160520" cy="201168"/>
-          </a:xfrm>
-          <a:prstGeom prst="rect">
-            <a:avLst/>
-          </a:prstGeom>
-          <a:noFill/>
-        </p:spPr>
-        <p:txBody>
-          <a:bodyPr wrap="square">
-            <a:spAutoFit/>
-          </a:bodyPr>
-          <a:lstStyle/>
-          <a:p>
-            <a:pPr algn="l"/>
-            <a:r>
-              <a:rPr sz="750" b="0" i="0">
-                <a:solidFill>
-                  <a:srgbClr val="1A2B35"/>
-                </a:solidFill>
-                <a:latin typeface="Calibri"/>
-              </a:rPr>
-              <a:t>✓  Container / environment specification (Docker / pip)</a:t>
-            </a:r>
-          </a:p>
-        </p:txBody>
-      </p:sp>
-      <p:sp>
-        <p:nvSpPr>
-          <p:cNvPr id="37" name="TextBox 36"/>
-          <p:cNvSpPr txBox="1"/>
-          <p:nvPr/>
-        </p:nvSpPr>
-        <p:spPr>
-          <a:xfrm>
-            <a:off x="7726679" y="3602736"/>
-            <a:ext cx="4160520" cy="201168"/>
-          </a:xfrm>
-          <a:prstGeom prst="rect">
-            <a:avLst/>
-          </a:prstGeom>
-          <a:noFill/>
-        </p:spPr>
-        <p:txBody>
-          <a:bodyPr wrap="square">
-            <a:spAutoFit/>
-          </a:bodyPr>
-          <a:lstStyle/>
-          <a:p>
-            <a:pPr algn="l"/>
-            <a:r>
-              <a:rPr sz="750" b="0" i="0">
-                <a:solidFill>
-                  <a:srgbClr val="1A2B35"/>
-                </a:solidFill>
-                <a:latin typeface="Calibri"/>
-              </a:rPr>
-              <a:t>✓  Structured result.json per pair with complete metrics</a:t>
-            </a:r>
-          </a:p>
-        </p:txBody>
-      </p:sp>
-      <p:sp>
-        <p:nvSpPr>
-          <p:cNvPr id="38" name="TextBox 37"/>
-          <p:cNvSpPr txBox="1"/>
-          <p:nvPr/>
-        </p:nvSpPr>
-        <p:spPr>
-          <a:xfrm>
-            <a:off x="7726679" y="3822192"/>
-            <a:ext cx="4160520" cy="201168"/>
-          </a:xfrm>
-          <a:prstGeom prst="rect">
-            <a:avLst/>
-          </a:prstGeom>
-          <a:noFill/>
-        </p:spPr>
-        <p:txBody>
-          <a:bodyPr wrap="square">
-            <a:spAutoFit/>
-          </a:bodyPr>
-          <a:lstStyle/>
-          <a:p>
-            <a:pPr algn="l"/>
-            <a:r>
-              <a:rPr sz="750" b="0" i="0">
-                <a:solidFill>
-                  <a:srgbClr val="1A2B35"/>
-                </a:solidFill>
-                <a:latin typeface="Calibri"/>
-              </a:rPr>
-              <a:t>✓  Registered raster aligned to reference grid (registered_image.tif)</a:t>
-            </a:r>
-          </a:p>
-        </p:txBody>
-      </p:sp>
-      <p:sp>
-        <p:nvSpPr>
-          <p:cNvPr id="39" name="TextBox 38"/>
-          <p:cNvSpPr txBox="1"/>
-          <p:nvPr/>
-        </p:nvSpPr>
-        <p:spPr>
-          <a:xfrm>
-            <a:off x="7726679" y="4041648"/>
-            <a:ext cx="4160520" cy="201168"/>
-          </a:xfrm>
-          <a:prstGeom prst="rect">
-            <a:avLst/>
-          </a:prstGeom>
-          <a:noFill/>
-        </p:spPr>
-        <p:txBody>
-          <a:bodyPr wrap="square">
-            <a:spAutoFit/>
-          </a:bodyPr>
-          <a:lstStyle/>
-          <a:p>
-            <a:pPr algn="l"/>
-            <a:r>
-              <a:rPr sz="750" b="0" i="0">
-                <a:solidFill>
-                  <a:srgbClr val="1A2B35"/>
-                </a:solidFill>
-                <a:latin typeface="Calibri"/>
-              </a:rPr>
-              <a:t>✓  Operator diagnostic checkerboard overlay (checkerboard_overlay.png)</a:t>
-            </a:r>
-          </a:p>
-        </p:txBody>
-      </p:sp>
-      <p:sp>
-        <p:nvSpPr>
-          <p:cNvPr id="40" name="TextBox 39"/>
-          <p:cNvSpPr txBox="1"/>
-          <p:nvPr/>
-        </p:nvSpPr>
-        <p:spPr>
-          <a:xfrm>
-            <a:off x="7726679" y="4261104"/>
-            <a:ext cx="4160520" cy="201168"/>
-          </a:xfrm>
-          <a:prstGeom prst="rect">
-            <a:avLst/>
-          </a:prstGeom>
-          <a:noFill/>
-        </p:spPr>
-        <p:txBody>
-          <a:bodyPr wrap="square">
-            <a:spAutoFit/>
-          </a:bodyPr>
-          <a:lstStyle/>
-          <a:p>
-            <a:pPr algn="l"/>
-            <a:r>
-              <a:rPr sz="750" b="0" i="0">
-                <a:solidFill>
-                  <a:srgbClr val="1A2B35"/>
-                </a:solidFill>
-                <a:latin typeface="Calibri"/>
-              </a:rPr>
-              <a:t>✓  Automated test suite with frozen benchmark seeds</a:t>
-            </a:r>
-          </a:p>
-        </p:txBody>
-      </p:sp>
-      <p:sp>
-        <p:nvSpPr>
-          <p:cNvPr id="41" name="Rectangle 40"/>
+              <a:t>Directly addresses lunar illumination physics via LCN and DEM reflectance simulation, designed to mitigate illumination-induced correspondence collapse across extreme sun angles.</a:t>
+            </a:r>
+          </a:p>
+        </p:txBody>
+      </p:sp>
+      <p:sp>
+        <p:nvSpPr>
+          <p:cNvPr id="28" name="Rectangle 27"/>
           <p:cNvSpPr/>
           <p:nvPr/>
         </p:nvSpPr>
         <p:spPr>
           <a:xfrm>
-            <a:off x="7635240" y="4608576"/>
-            <a:ext cx="4343400" cy="182880"/>
+            <a:off x="7635240" y="1956816"/>
+            <a:ext cx="4343400" cy="868680"/>
+          </a:xfrm>
+          <a:prstGeom prst="rect">
+            <a:avLst/>
+          </a:prstGeom>
+          <a:solidFill>
+            <a:srgbClr val="F4F6F8"/>
+          </a:solidFill>
+          <a:ln w="5080">
+            <a:solidFill>
+              <a:srgbClr val="D0D8DD"/>
+            </a:solidFill>
+          </a:ln>
+        </p:spPr>
+        <p:style>
+          <a:lnRef idx="1">
+            <a:schemeClr val="accent1"/>
+          </a:lnRef>
+          <a:fillRef idx="3">
+            <a:schemeClr val="accent1"/>
+          </a:fillRef>
+          <a:effectRef idx="2">
+            <a:schemeClr val="accent1"/>
+          </a:effectRef>
+          <a:fontRef idx="minor">
+            <a:schemeClr val="lt1"/>
+          </a:fontRef>
+        </p:style>
+        <p:txBody>
+          <a:bodyPr rtlCol="0" anchor="ctr"/>
+          <a:lstStyle/>
+          <a:p>
+            <a:pPr algn="ctr"/>
+          </a:p>
+        </p:txBody>
+      </p:sp>
+      <p:sp>
+        <p:nvSpPr>
+          <p:cNvPr id="29" name="Rectangle 28"/>
+          <p:cNvSpPr/>
+          <p:nvPr/>
+        </p:nvSpPr>
+        <p:spPr>
+          <a:xfrm>
+            <a:off x="7635240" y="1956816"/>
+            <a:ext cx="91440" cy="868680"/>
           </a:xfrm>
           <a:prstGeom prst="rect">
             <a:avLst/>
@@ -15809,35 +15379,491 @@
       </p:sp>
       <p:sp>
         <p:nvSpPr>
+          <p:cNvPr id="30" name="TextBox 29"/>
+          <p:cNvSpPr txBox="1"/>
+          <p:nvPr/>
+        </p:nvSpPr>
+        <p:spPr>
+          <a:xfrm>
+            <a:off x="7818120" y="2011680"/>
+            <a:ext cx="4069080" cy="201168"/>
+          </a:xfrm>
+          <a:prstGeom prst="rect">
+            <a:avLst/>
+          </a:prstGeom>
+          <a:noFill/>
+        </p:spPr>
+        <p:txBody>
+          <a:bodyPr wrap="square">
+            <a:spAutoFit/>
+          </a:bodyPr>
+          <a:lstStyle/>
+          <a:p>
+            <a:pPr algn="l"/>
+            <a:r>
+              <a:rPr sz="900" b="1" i="0">
+                <a:solidFill>
+                  <a:srgbClr val="147D77"/>
+                </a:solidFill>
+                <a:latin typeface="Calibri"/>
+              </a:rPr>
+              <a:t>2. Adaptive Geometry for Relief</a:t>
+            </a:r>
+          </a:p>
+        </p:txBody>
+      </p:sp>
+      <p:sp>
+        <p:nvSpPr>
+          <p:cNvPr id="31" name="TextBox 30"/>
+          <p:cNvSpPr txBox="1"/>
+          <p:nvPr/>
+        </p:nvSpPr>
+        <p:spPr>
+          <a:xfrm>
+            <a:off x="7818120" y="2231136"/>
+            <a:ext cx="4069080" cy="548640"/>
+          </a:xfrm>
+          <a:prstGeom prst="rect">
+            <a:avLst/>
+          </a:prstGeom>
+          <a:noFill/>
+        </p:spPr>
+        <p:txBody>
+          <a:bodyPr wrap="square">
+            <a:spAutoFit/>
+          </a:bodyPr>
+          <a:lstStyle/>
+          <a:p>
+            <a:pPr algn="l"/>
+            <a:r>
+              <a:rPr sz="800" b="0" i="0">
+                <a:solidFill>
+                  <a:srgbClr val="1A2B35"/>
+                </a:solidFill>
+                <a:latin typeface="Calibri"/>
+              </a:rPr>
+              <a:t>Coherence-gated TPS elastic warping compensates apparent relief-induced 2D displacement without forcing an oversimplified planar homography across complex 3D crater terrain.</a:t>
+            </a:r>
+          </a:p>
+        </p:txBody>
+      </p:sp>
+      <p:sp>
+        <p:nvSpPr>
+          <p:cNvPr id="32" name="Rectangle 31"/>
+          <p:cNvSpPr/>
+          <p:nvPr/>
+        </p:nvSpPr>
+        <p:spPr>
+          <a:xfrm>
+            <a:off x="7635240" y="2944368"/>
+            <a:ext cx="4343400" cy="868680"/>
+          </a:xfrm>
+          <a:prstGeom prst="rect">
+            <a:avLst/>
+          </a:prstGeom>
+          <a:solidFill>
+            <a:srgbClr val="F4F6F8"/>
+          </a:solidFill>
+          <a:ln w="5080">
+            <a:solidFill>
+              <a:srgbClr val="D0D8DD"/>
+            </a:solidFill>
+          </a:ln>
+        </p:spPr>
+        <p:style>
+          <a:lnRef idx="1">
+            <a:schemeClr val="accent1"/>
+          </a:lnRef>
+          <a:fillRef idx="3">
+            <a:schemeClr val="accent1"/>
+          </a:fillRef>
+          <a:effectRef idx="2">
+            <a:schemeClr val="accent1"/>
+          </a:effectRef>
+          <a:fontRef idx="minor">
+            <a:schemeClr val="lt1"/>
+          </a:fontRef>
+        </p:style>
+        <p:txBody>
+          <a:bodyPr rtlCol="0" anchor="ctr"/>
+          <a:lstStyle/>
+          <a:p>
+            <a:pPr algn="ctr"/>
+          </a:p>
+        </p:txBody>
+      </p:sp>
+      <p:sp>
+        <p:nvSpPr>
+          <p:cNvPr id="33" name="Rectangle 32"/>
+          <p:cNvSpPr/>
+          <p:nvPr/>
+        </p:nvSpPr>
+        <p:spPr>
+          <a:xfrm>
+            <a:off x="7635240" y="2944368"/>
+            <a:ext cx="91440" cy="868680"/>
+          </a:xfrm>
+          <a:prstGeom prst="rect">
+            <a:avLst/>
+          </a:prstGeom>
+          <a:solidFill>
+            <a:srgbClr val="147D77"/>
+          </a:solidFill>
+          <a:ln>
+            <a:noFill/>
+          </a:ln>
+        </p:spPr>
+        <p:style>
+          <a:lnRef idx="1">
+            <a:schemeClr val="accent1"/>
+          </a:lnRef>
+          <a:fillRef idx="3">
+            <a:schemeClr val="accent1"/>
+          </a:fillRef>
+          <a:effectRef idx="2">
+            <a:schemeClr val="accent1"/>
+          </a:effectRef>
+          <a:fontRef idx="minor">
+            <a:schemeClr val="lt1"/>
+          </a:fontRef>
+        </p:style>
+        <p:txBody>
+          <a:bodyPr rtlCol="0" anchor="ctr"/>
+          <a:lstStyle/>
+          <a:p>
+            <a:pPr algn="ctr"/>
+          </a:p>
+        </p:txBody>
+      </p:sp>
+      <p:sp>
+        <p:nvSpPr>
+          <p:cNvPr id="34" name="TextBox 33"/>
+          <p:cNvSpPr txBox="1"/>
+          <p:nvPr/>
+        </p:nvSpPr>
+        <p:spPr>
+          <a:xfrm>
+            <a:off x="7818120" y="2999232"/>
+            <a:ext cx="4069080" cy="201168"/>
+          </a:xfrm>
+          <a:prstGeom prst="rect">
+            <a:avLst/>
+          </a:prstGeom>
+          <a:noFill/>
+        </p:spPr>
+        <p:txBody>
+          <a:bodyPr wrap="square">
+            <a:spAutoFit/>
+          </a:bodyPr>
+          <a:lstStyle/>
+          <a:p>
+            <a:pPr algn="l"/>
+            <a:r>
+              <a:rPr sz="900" b="1" i="0">
+                <a:solidFill>
+                  <a:srgbClr val="147D77"/>
+                </a:solidFill>
+                <a:latin typeface="Calibri"/>
+              </a:rPr>
+              <a:t>3. Fail-Safe Quality Control</a:t>
+            </a:r>
+          </a:p>
+        </p:txBody>
+      </p:sp>
+      <p:sp>
+        <p:nvSpPr>
+          <p:cNvPr id="35" name="TextBox 34"/>
+          <p:cNvSpPr txBox="1"/>
+          <p:nvPr/>
+        </p:nvSpPr>
+        <p:spPr>
+          <a:xfrm>
+            <a:off x="7818120" y="3218688"/>
+            <a:ext cx="4069080" cy="548640"/>
+          </a:xfrm>
+          <a:prstGeom prst="rect">
+            <a:avLst/>
+          </a:prstGeom>
+          <a:noFill/>
+        </p:spPr>
+        <p:txBody>
+          <a:bodyPr wrap="square">
+            <a:spAutoFit/>
+          </a:bodyPr>
+          <a:lstStyle/>
+          <a:p>
+            <a:pPr algn="l"/>
+            <a:r>
+              <a:rPr sz="800" b="0" i="0">
+                <a:solidFill>
+                  <a:srgbClr val="1A2B35"/>
+                </a:solidFill>
+                <a:latin typeface="Calibri"/>
+              </a:rPr>
+              <a:t>Rejects invalid or ambiguous registrations with explicit reason codes rather than forcing alignment on unmatchable scenes (proven via disjoint negative control pair).</a:t>
+            </a:r>
+          </a:p>
+        </p:txBody>
+      </p:sp>
+      <p:sp>
+        <p:nvSpPr>
+          <p:cNvPr id="36" name="Rectangle 35"/>
+          <p:cNvSpPr/>
+          <p:nvPr/>
+        </p:nvSpPr>
+        <p:spPr>
+          <a:xfrm>
+            <a:off x="7635240" y="3931920"/>
+            <a:ext cx="4343400" cy="182880"/>
+          </a:xfrm>
+          <a:prstGeom prst="rect">
+            <a:avLst/>
+          </a:prstGeom>
+          <a:solidFill>
+            <a:srgbClr val="147D77"/>
+          </a:solidFill>
+          <a:ln>
+            <a:noFill/>
+          </a:ln>
+        </p:spPr>
+        <p:style>
+          <a:lnRef idx="1">
+            <a:schemeClr val="accent1"/>
+          </a:lnRef>
+          <a:fillRef idx="3">
+            <a:schemeClr val="accent1"/>
+          </a:fillRef>
+          <a:effectRef idx="2">
+            <a:schemeClr val="accent1"/>
+          </a:effectRef>
+          <a:fontRef idx="minor">
+            <a:schemeClr val="lt1"/>
+          </a:fontRef>
+        </p:style>
+        <p:txBody>
+          <a:bodyPr rtlCol="0" anchor="ctr"/>
+          <a:lstStyle/>
+          <a:p>
+            <a:pPr algn="ctr"/>
+          </a:p>
+        </p:txBody>
+      </p:sp>
+      <p:sp>
+        <p:nvSpPr>
+          <p:cNvPr id="37" name="TextBox 36"/>
+          <p:cNvSpPr txBox="1"/>
+          <p:nvPr/>
+        </p:nvSpPr>
+        <p:spPr>
+          <a:xfrm>
+            <a:off x="7726679" y="3950207"/>
+            <a:ext cx="4206240" cy="182880"/>
+          </a:xfrm>
+          <a:prstGeom prst="rect">
+            <a:avLst/>
+          </a:prstGeom>
+          <a:noFill/>
+        </p:spPr>
+        <p:txBody>
+          <a:bodyPr wrap="square">
+            <a:spAutoFit/>
+          </a:bodyPr>
+          <a:lstStyle/>
+          <a:p>
+            <a:pPr algn="l"/>
+            <a:r>
+              <a:rPr sz="750" b="1" i="0">
+                <a:solidFill>
+                  <a:srgbClr val="FFFFFF"/>
+                </a:solidFill>
+                <a:latin typeface="Calibri"/>
+              </a:rPr>
+              <a:t>PROJECT REPOSITORY &amp; DETAILS</a:t>
+            </a:r>
+          </a:p>
+        </p:txBody>
+      </p:sp>
+      <p:sp>
+        <p:nvSpPr>
+          <p:cNvPr id="38" name="Rectangle 37"/>
+          <p:cNvSpPr/>
+          <p:nvPr/>
+        </p:nvSpPr>
+        <p:spPr>
+          <a:xfrm>
+            <a:off x="7635240" y="4151376"/>
+            <a:ext cx="4343400" cy="1920240"/>
+          </a:xfrm>
+          <a:prstGeom prst="rect">
+            <a:avLst/>
+          </a:prstGeom>
+          <a:solidFill>
+            <a:srgbClr val="F4F6F8"/>
+          </a:solidFill>
+          <a:ln w="5080">
+            <a:solidFill>
+              <a:srgbClr val="D0D8DD"/>
+            </a:solidFill>
+          </a:ln>
+        </p:spPr>
+        <p:style>
+          <a:lnRef idx="1">
+            <a:schemeClr val="accent1"/>
+          </a:lnRef>
+          <a:fillRef idx="3">
+            <a:schemeClr val="accent1"/>
+          </a:fillRef>
+          <a:effectRef idx="2">
+            <a:schemeClr val="accent1"/>
+          </a:effectRef>
+          <a:fontRef idx="minor">
+            <a:schemeClr val="lt1"/>
+          </a:fontRef>
+        </p:style>
+        <p:txBody>
+          <a:bodyPr rtlCol="0" anchor="ctr"/>
+          <a:lstStyle/>
+          <a:p>
+            <a:pPr algn="ctr"/>
+          </a:p>
+        </p:txBody>
+      </p:sp>
+      <p:sp>
+        <p:nvSpPr>
+          <p:cNvPr id="39" name="TextBox 38"/>
+          <p:cNvSpPr txBox="1"/>
+          <p:nvPr/>
+        </p:nvSpPr>
+        <p:spPr>
+          <a:xfrm>
+            <a:off x="7772400" y="4224528"/>
+            <a:ext cx="1188720" cy="219456"/>
+          </a:xfrm>
+          <a:prstGeom prst="rect">
+            <a:avLst/>
+          </a:prstGeom>
+          <a:noFill/>
+        </p:spPr>
+        <p:txBody>
+          <a:bodyPr wrap="square">
+            <a:spAutoFit/>
+          </a:bodyPr>
+          <a:lstStyle/>
+          <a:p>
+            <a:pPr algn="l"/>
+            <a:r>
+              <a:rPr sz="800" b="1" i="0">
+                <a:solidFill>
+                  <a:srgbClr val="147D77"/>
+                </a:solidFill>
+                <a:latin typeface="Calibri"/>
+              </a:rPr>
+              <a:t>GitHub (Public):</a:t>
+            </a:r>
+          </a:p>
+        </p:txBody>
+      </p:sp>
+      <p:sp>
+        <p:nvSpPr>
+          <p:cNvPr id="40" name="TextBox 39"/>
+          <p:cNvSpPr txBox="1"/>
+          <p:nvPr/>
+        </p:nvSpPr>
+        <p:spPr>
+          <a:xfrm>
+            <a:off x="9006840" y="4224528"/>
+            <a:ext cx="2880360" cy="219456"/>
+          </a:xfrm>
+          <a:prstGeom prst="rect">
+            <a:avLst/>
+          </a:prstGeom>
+          <a:noFill/>
+        </p:spPr>
+        <p:txBody>
+          <a:bodyPr wrap="square">
+            <a:spAutoFit/>
+          </a:bodyPr>
+          <a:lstStyle/>
+          <a:p>
+            <a:pPr algn="l"/>
+            <a:r>
+              <a:rPr sz="800" b="1" i="0">
+                <a:solidFill>
+                  <a:srgbClr val="1A2B35"/>
+                </a:solidFill>
+                <a:latin typeface="Calibri"/>
+              </a:rPr>
+              <a:t>github.com/TanukuSai/luna-corr</a:t>
+            </a:r>
+          </a:p>
+        </p:txBody>
+      </p:sp>
+      <p:sp>
+        <p:nvSpPr>
+          <p:cNvPr id="41" name="TextBox 40"/>
+          <p:cNvSpPr txBox="1"/>
+          <p:nvPr/>
+        </p:nvSpPr>
+        <p:spPr>
+          <a:xfrm>
+            <a:off x="7772400" y="4553712"/>
+            <a:ext cx="1188720" cy="219456"/>
+          </a:xfrm>
+          <a:prstGeom prst="rect">
+            <a:avLst/>
+          </a:prstGeom>
+          <a:noFill/>
+        </p:spPr>
+        <p:txBody>
+          <a:bodyPr wrap="square">
+            <a:spAutoFit/>
+          </a:bodyPr>
+          <a:lstStyle/>
+          <a:p>
+            <a:pPr algn="l"/>
+            <a:r>
+              <a:rPr sz="800" b="1" i="0">
+                <a:solidFill>
+                  <a:srgbClr val="147D77"/>
+                </a:solidFill>
+                <a:latin typeface="Calibri"/>
+              </a:rPr>
+              <a:t>Team Name:</a:t>
+            </a:r>
+          </a:p>
+        </p:txBody>
+      </p:sp>
+      <p:sp>
+        <p:nvSpPr>
           <p:cNvPr id="42" name="TextBox 41"/>
           <p:cNvSpPr txBox="1"/>
           <p:nvPr/>
         </p:nvSpPr>
         <p:spPr>
           <a:xfrm>
-            <a:off x="7726679" y="4626864"/>
-            <a:ext cx="4206240" cy="182880"/>
-          </a:xfrm>
-          <a:prstGeom prst="rect">
-            <a:avLst/>
-          </a:prstGeom>
-          <a:noFill/>
-        </p:spPr>
-        <p:txBody>
-          <a:bodyPr wrap="square">
-            <a:spAutoFit/>
-          </a:bodyPr>
-          <a:lstStyle/>
-          <a:p>
-            <a:pPr algn="l"/>
-            <a:r>
-              <a:rPr sz="750" b="1" i="0">
-                <a:solidFill>
-                  <a:srgbClr val="FFFFFF"/>
-                </a:solidFill>
-                <a:latin typeface="Calibri"/>
-              </a:rPr>
-              <a:t>REPOSITORY AND IDENTIFICATION</a:t>
+            <a:off x="9006840" y="4553712"/>
+            <a:ext cx="2880360" cy="219456"/>
+          </a:xfrm>
+          <a:prstGeom prst="rect">
+            <a:avLst/>
+          </a:prstGeom>
+          <a:noFill/>
+        </p:spPr>
+        <p:txBody>
+          <a:bodyPr wrap="square">
+            <a:spAutoFit/>
+          </a:bodyPr>
+          <a:lstStyle/>
+          <a:p>
+            <a:pPr algn="l"/>
+            <a:r>
+              <a:rPr sz="800" b="0" i="0">
+                <a:solidFill>
+                  <a:srgbClr val="1A2B35"/>
+                </a:solidFill>
+                <a:latin typeface="Calibri"/>
+              </a:rPr>
+              <a:t>R9@MedMitra (Team ID: 189281)</a:t>
             </a:r>
           </a:p>
         </p:txBody>
@@ -15850,106 +15876,211 @@
         </p:nvSpPr>
         <p:spPr>
           <a:xfrm>
-            <a:off x="7726679" y="4846320"/>
-            <a:ext cx="4160520" cy="201168"/>
-          </a:xfrm>
-          <a:prstGeom prst="rect">
-            <a:avLst/>
-          </a:prstGeom>
-          <a:noFill/>
-        </p:spPr>
-        <p:txBody>
-          <a:bodyPr wrap="square">
-            <a:spAutoFit/>
-          </a:bodyPr>
-          <a:lstStyle/>
-          <a:p>
-            <a:pPr algn="l"/>
-            <a:r>
-              <a:rPr sz="900" b="1" i="0">
+            <a:off x="7772400" y="4882896"/>
+            <a:ext cx="1188720" cy="219456"/>
+          </a:xfrm>
+          <a:prstGeom prst="rect">
+            <a:avLst/>
+          </a:prstGeom>
+          <a:noFill/>
+        </p:spPr>
+        <p:txBody>
+          <a:bodyPr wrap="square">
+            <a:spAutoFit/>
+          </a:bodyPr>
+          <a:lstStyle/>
+          <a:p>
+            <a:pPr algn="l"/>
+            <a:r>
+              <a:rPr sz="800" b="1" i="0">
+                <a:solidFill>
+                  <a:srgbClr val="147D77"/>
+                </a:solidFill>
+                <a:latin typeface="Calibri"/>
+              </a:rPr>
+              <a:t>Problem Stmt:</a:t>
+            </a:r>
+          </a:p>
+        </p:txBody>
+      </p:sp>
+      <p:sp>
+        <p:nvSpPr>
+          <p:cNvPr id="44" name="TextBox 43"/>
+          <p:cNvSpPr txBox="1"/>
+          <p:nvPr/>
+        </p:nvSpPr>
+        <p:spPr>
+          <a:xfrm>
+            <a:off x="9006840" y="4882896"/>
+            <a:ext cx="2880360" cy="219456"/>
+          </a:xfrm>
+          <a:prstGeom prst="rect">
+            <a:avLst/>
+          </a:prstGeom>
+          <a:noFill/>
+        </p:spPr>
+        <p:txBody>
+          <a:bodyPr wrap="square">
+            <a:spAutoFit/>
+          </a:bodyPr>
+          <a:lstStyle/>
+          <a:p>
+            <a:pPr algn="l"/>
+            <a:r>
+              <a:rPr sz="800" b="0" i="0">
                 <a:solidFill>
                   <a:srgbClr val="1A2B35"/>
                 </a:solidFill>
                 <a:latin typeface="Calibri"/>
               </a:rPr>
-              <a:t>GitHub (public):  github.com/TanukuSai/luna-corr</a:t>
-            </a:r>
-          </a:p>
-        </p:txBody>
-      </p:sp>
-      <p:sp>
-        <p:nvSpPr>
-          <p:cNvPr id="44" name="TextBox 43"/>
-          <p:cNvSpPr txBox="1"/>
-          <p:nvPr/>
-        </p:nvSpPr>
-        <p:spPr>
-          <a:xfrm>
-            <a:off x="7726679" y="5102352"/>
-            <a:ext cx="4160520" cy="201168"/>
-          </a:xfrm>
-          <a:prstGeom prst="rect">
-            <a:avLst/>
-          </a:prstGeom>
-          <a:noFill/>
-        </p:spPr>
-        <p:txBody>
-          <a:bodyPr wrap="square">
-            <a:spAutoFit/>
-          </a:bodyPr>
-          <a:lstStyle/>
-          <a:p>
-            <a:pPr algn="l"/>
-            <a:r>
-              <a:rPr sz="850" b="0" i="0">
+              <a:t>PS 26166 | Space Applications Centre (SAC), ISRO</a:t>
+            </a:r>
+          </a:p>
+        </p:txBody>
+      </p:sp>
+      <p:sp>
+        <p:nvSpPr>
+          <p:cNvPr id="45" name="TextBox 44"/>
+          <p:cNvSpPr txBox="1"/>
+          <p:nvPr/>
+        </p:nvSpPr>
+        <p:spPr>
+          <a:xfrm>
+            <a:off x="7772400" y="5212080"/>
+            <a:ext cx="1188720" cy="219456"/>
+          </a:xfrm>
+          <a:prstGeom prst="rect">
+            <a:avLst/>
+          </a:prstGeom>
+          <a:noFill/>
+        </p:spPr>
+        <p:txBody>
+          <a:bodyPr wrap="square">
+            <a:spAutoFit/>
+          </a:bodyPr>
+          <a:lstStyle/>
+          <a:p>
+            <a:pPr algn="l"/>
+            <a:r>
+              <a:rPr sz="800" b="1" i="0">
+                <a:solidFill>
+                  <a:srgbClr val="147D77"/>
+                </a:solidFill>
+                <a:latin typeface="Calibri"/>
+              </a:rPr>
+              <a:t>Theme / Category:</a:t>
+            </a:r>
+          </a:p>
+        </p:txBody>
+      </p:sp>
+      <p:sp>
+        <p:nvSpPr>
+          <p:cNvPr id="46" name="TextBox 45"/>
+          <p:cNvSpPr txBox="1"/>
+          <p:nvPr/>
+        </p:nvSpPr>
+        <p:spPr>
+          <a:xfrm>
+            <a:off x="9006840" y="5212080"/>
+            <a:ext cx="2880360" cy="219456"/>
+          </a:xfrm>
+          <a:prstGeom prst="rect">
+            <a:avLst/>
+          </a:prstGeom>
+          <a:noFill/>
+        </p:spPr>
+        <p:txBody>
+          <a:bodyPr wrap="square">
+            <a:spAutoFit/>
+          </a:bodyPr>
+          <a:lstStyle/>
+          <a:p>
+            <a:pPr algn="l"/>
+            <a:r>
+              <a:rPr sz="800" b="0" i="0">
                 <a:solidFill>
                   <a:srgbClr val="1A2B35"/>
                 </a:solidFill>
                 <a:latin typeface="Calibri"/>
               </a:rPr>
-              <a:t>Team:  R9@MedMitra  |  Team ID 189281</a:t>
-            </a:r>
-          </a:p>
-        </p:txBody>
-      </p:sp>
-      <p:sp>
-        <p:nvSpPr>
-          <p:cNvPr id="45" name="TextBox 44"/>
-          <p:cNvSpPr txBox="1"/>
-          <p:nvPr/>
-        </p:nvSpPr>
-        <p:spPr>
-          <a:xfrm>
-            <a:off x="7726679" y="5358384"/>
-            <a:ext cx="4160520" cy="201168"/>
-          </a:xfrm>
-          <a:prstGeom prst="rect">
-            <a:avLst/>
-          </a:prstGeom>
-          <a:noFill/>
-        </p:spPr>
-        <p:txBody>
-          <a:bodyPr wrap="square">
-            <a:spAutoFit/>
-          </a:bodyPr>
-          <a:lstStyle/>
-          <a:p>
-            <a:pPr algn="l"/>
-            <a:r>
-              <a:rPr sz="850" b="0" i="0">
+              <a:t>Space Technology  |  Software</a:t>
+            </a:r>
+          </a:p>
+        </p:txBody>
+      </p:sp>
+      <p:sp>
+        <p:nvSpPr>
+          <p:cNvPr id="47" name="TextBox 46"/>
+          <p:cNvSpPr txBox="1"/>
+          <p:nvPr/>
+        </p:nvSpPr>
+        <p:spPr>
+          <a:xfrm>
+            <a:off x="7772400" y="5541264"/>
+            <a:ext cx="1188720" cy="219456"/>
+          </a:xfrm>
+          <a:prstGeom prst="rect">
+            <a:avLst/>
+          </a:prstGeom>
+          <a:noFill/>
+        </p:spPr>
+        <p:txBody>
+          <a:bodyPr wrap="square">
+            <a:spAutoFit/>
+          </a:bodyPr>
+          <a:lstStyle/>
+          <a:p>
+            <a:pPr algn="l"/>
+            <a:r>
+              <a:rPr sz="800" b="1" i="0">
+                <a:solidFill>
+                  <a:srgbClr val="147D77"/>
+                </a:solidFill>
+                <a:latin typeface="Calibri"/>
+              </a:rPr>
+              <a:t>Deliverables:</a:t>
+            </a:r>
+          </a:p>
+        </p:txBody>
+      </p:sp>
+      <p:sp>
+        <p:nvSpPr>
+          <p:cNvPr id="48" name="TextBox 47"/>
+          <p:cNvSpPr txBox="1"/>
+          <p:nvPr/>
+        </p:nvSpPr>
+        <p:spPr>
+          <a:xfrm>
+            <a:off x="9006840" y="5541264"/>
+            <a:ext cx="2880360" cy="219456"/>
+          </a:xfrm>
+          <a:prstGeom prst="rect">
+            <a:avLst/>
+          </a:prstGeom>
+          <a:noFill/>
+        </p:spPr>
+        <p:txBody>
+          <a:bodyPr wrap="square">
+            <a:spAutoFit/>
+          </a:bodyPr>
+          <a:lstStyle/>
+          <a:p>
+            <a:pPr algn="l"/>
+            <a:r>
+              <a:rPr sz="800" b="0" i="0">
                 <a:solidFill>
                   <a:srgbClr val="1A2B35"/>
                 </a:solidFill>
                 <a:latin typeface="Calibri"/>
               </a:rPr>
-              <a:t>PS:    26166  |  Space Applications Centre (SAC), ISRO</a:t>
-            </a:r>
-          </a:p>
-        </p:txBody>
-      </p:sp>
-      <p:sp>
-        <p:nvSpPr>
-          <p:cNvPr id="46" name="Rectangle 45"/>
+              <a:t>Python package (lunacorr), CLI, benchmarks, test suite</a:t>
+            </a:r>
+          </a:p>
+        </p:txBody>
+      </p:sp>
+      <p:sp>
+        <p:nvSpPr>
+          <p:cNvPr id="49" name="Rectangle 48"/>
           <p:cNvSpPr/>
           <p:nvPr/>
         </p:nvSpPr>
@@ -15992,7 +16123,7 @@
       </p:sp>
       <p:sp>
         <p:nvSpPr>
-          <p:cNvPr id="47" name="TextBox 46"/>
+          <p:cNvPr id="50" name="TextBox 49"/>
           <p:cNvSpPr txBox="1"/>
           <p:nvPr/>
         </p:nvSpPr>

--- a/LUNA-CORR_SIH2026_Presentation.pptx
+++ b/LUNA-CORR_SIH2026_Presentation.pptx
@@ -3211,7 +3211,7 @@
           <a:p>
             <a:pPr algn="l"/>
             <a:r>
-              <a:rPr sz="3400" b="1" i="0">
+              <a:rPr sz="3600" b="1" i="0">
                 <a:solidFill>
                   <a:srgbClr val="FFFFFF"/>
                 </a:solidFill>
@@ -3230,7 +3230,7 @@
         </p:nvSpPr>
         <p:spPr>
           <a:xfrm>
-            <a:off x="274320" y="932688"/>
+            <a:off x="274320" y="960120"/>
             <a:ext cx="3383280" cy="594360"/>
           </a:xfrm>
           <a:prstGeom prst="rect">
@@ -3267,7 +3267,7 @@
         </p:nvSpPr>
         <p:spPr>
           <a:xfrm>
-            <a:off x="274320" y="1609344"/>
+            <a:off x="274320" y="1645920"/>
             <a:ext cx="3383280" cy="411480"/>
           </a:xfrm>
           <a:prstGeom prst="rect">
@@ -3283,7 +3283,7 @@
           <a:p>
             <a:pPr algn="l"/>
             <a:r>
-              <a:rPr sz="800" b="0" i="0">
+              <a:rPr sz="850" b="0" i="0">
                 <a:solidFill>
                   <a:srgbClr val="6B7E88"/>
                 </a:solidFill>
@@ -3303,7 +3303,7 @@
         </p:nvSpPr>
         <p:spPr>
           <a:xfrm>
-            <a:off x="274320" y="2103120"/>
+            <a:off x="274320" y="2148840"/>
             <a:ext cx="3108960" cy="22860"/>
           </a:xfrm>
           <a:prstGeom prst="rect">
@@ -3346,7 +3346,7 @@
         </p:nvSpPr>
         <p:spPr>
           <a:xfrm>
-            <a:off x="274320" y="2240280"/>
+            <a:off x="274320" y="2286000"/>
             <a:ext cx="3200400" cy="164592"/>
           </a:xfrm>
           <a:prstGeom prst="rect">
@@ -3362,7 +3362,7 @@
           <a:p>
             <a:pPr algn="l"/>
             <a:r>
-              <a:rPr sz="750" b="1" i="0">
+              <a:rPr sz="800" b="1" i="0">
                 <a:solidFill>
                   <a:srgbClr val="147D77"/>
                 </a:solidFill>
@@ -3381,7 +3381,7 @@
         </p:nvSpPr>
         <p:spPr>
           <a:xfrm>
-            <a:off x="274320" y="2404872"/>
+            <a:off x="274320" y="2450592"/>
             <a:ext cx="3200400" cy="237744"/>
           </a:xfrm>
           <a:prstGeom prst="rect">
@@ -3397,7 +3397,7 @@
           <a:p>
             <a:pPr algn="l"/>
             <a:r>
-              <a:rPr sz="1050" b="0" i="0">
+              <a:rPr sz="1100" b="0" i="0">
                 <a:solidFill>
                   <a:srgbClr val="F0F4F6"/>
                 </a:solidFill>
@@ -3416,7 +3416,7 @@
         </p:nvSpPr>
         <p:spPr>
           <a:xfrm>
-            <a:off x="274320" y="2697480"/>
+            <a:off x="274320" y="2761488"/>
             <a:ext cx="3200400" cy="164592"/>
           </a:xfrm>
           <a:prstGeom prst="rect">
@@ -3432,7 +3432,7 @@
           <a:p>
             <a:pPr algn="l"/>
             <a:r>
-              <a:rPr sz="750" b="1" i="0">
+              <a:rPr sz="800" b="1" i="0">
                 <a:solidFill>
                   <a:srgbClr val="147D77"/>
                 </a:solidFill>
@@ -3451,7 +3451,7 @@
         </p:nvSpPr>
         <p:spPr>
           <a:xfrm>
-            <a:off x="274320" y="2862072"/>
+            <a:off x="274320" y="2926080"/>
             <a:ext cx="3200400" cy="237744"/>
           </a:xfrm>
           <a:prstGeom prst="rect">
@@ -3467,7 +3467,7 @@
           <a:p>
             <a:pPr algn="l"/>
             <a:r>
-              <a:rPr sz="1050" b="0" i="0">
+              <a:rPr sz="1100" b="0" i="0">
                 <a:solidFill>
                   <a:srgbClr val="F0F4F6"/>
                 </a:solidFill>
@@ -3486,7 +3486,7 @@
         </p:nvSpPr>
         <p:spPr>
           <a:xfrm>
-            <a:off x="274320" y="3154680"/>
+            <a:off x="274320" y="3236976"/>
             <a:ext cx="3200400" cy="164592"/>
           </a:xfrm>
           <a:prstGeom prst="rect">
@@ -3502,7 +3502,7 @@
           <a:p>
             <a:pPr algn="l"/>
             <a:r>
-              <a:rPr sz="750" b="1" i="0">
+              <a:rPr sz="800" b="1" i="0">
                 <a:solidFill>
                   <a:srgbClr val="147D77"/>
                 </a:solidFill>
@@ -3521,7 +3521,7 @@
         </p:nvSpPr>
         <p:spPr>
           <a:xfrm>
-            <a:off x="274320" y="3319272"/>
+            <a:off x="274320" y="3401568"/>
             <a:ext cx="3200400" cy="237744"/>
           </a:xfrm>
           <a:prstGeom prst="rect">
@@ -3537,7 +3537,7 @@
           <a:p>
             <a:pPr algn="l"/>
             <a:r>
-              <a:rPr sz="1050" b="0" i="0">
+              <a:rPr sz="1100" b="0" i="0">
                 <a:solidFill>
                   <a:srgbClr val="F0F4F6"/>
                 </a:solidFill>
@@ -3556,7 +3556,7 @@
         </p:nvSpPr>
         <p:spPr>
           <a:xfrm>
-            <a:off x="274320" y="3611880"/>
+            <a:off x="274320" y="3712464"/>
             <a:ext cx="3200400" cy="164592"/>
           </a:xfrm>
           <a:prstGeom prst="rect">
@@ -3572,7 +3572,7 @@
           <a:p>
             <a:pPr algn="l"/>
             <a:r>
-              <a:rPr sz="750" b="1" i="0">
+              <a:rPr sz="800" b="1" i="0">
                 <a:solidFill>
                   <a:srgbClr val="147D77"/>
                 </a:solidFill>
@@ -3591,7 +3591,7 @@
         </p:nvSpPr>
         <p:spPr>
           <a:xfrm>
-            <a:off x="274320" y="3776472"/>
+            <a:off x="274320" y="3877056"/>
             <a:ext cx="3200400" cy="237744"/>
           </a:xfrm>
           <a:prstGeom prst="rect">
@@ -3607,7 +3607,7 @@
           <a:p>
             <a:pPr algn="l"/>
             <a:r>
-              <a:rPr sz="1050" b="0" i="0">
+              <a:rPr sz="1100" b="0" i="0">
                 <a:solidFill>
                   <a:srgbClr val="C4891E"/>
                 </a:solidFill>
@@ -3626,7 +3626,7 @@
         </p:nvSpPr>
         <p:spPr>
           <a:xfrm>
-            <a:off x="274320" y="4069080"/>
+            <a:off x="274320" y="4187952"/>
             <a:ext cx="3200400" cy="164592"/>
           </a:xfrm>
           <a:prstGeom prst="rect">
@@ -3642,7 +3642,7 @@
           <a:p>
             <a:pPr algn="l"/>
             <a:r>
-              <a:rPr sz="750" b="1" i="0">
+              <a:rPr sz="800" b="1" i="0">
                 <a:solidFill>
                   <a:srgbClr val="147D77"/>
                 </a:solidFill>
@@ -3661,7 +3661,7 @@
         </p:nvSpPr>
         <p:spPr>
           <a:xfrm>
-            <a:off x="274320" y="4233672"/>
+            <a:off x="274320" y="4352544"/>
             <a:ext cx="3200400" cy="237744"/>
           </a:xfrm>
           <a:prstGeom prst="rect">
@@ -3677,7 +3677,7 @@
           <a:p>
             <a:pPr algn="l"/>
             <a:r>
-              <a:rPr sz="1050" b="0" i="0">
+              <a:rPr sz="1100" b="0" i="0">
                 <a:solidFill>
                   <a:srgbClr val="C4891E"/>
                 </a:solidFill>
@@ -3712,7 +3712,7 @@
           <a:p>
             <a:pPr algn="l"/>
             <a:r>
-              <a:rPr sz="700" b="0" i="0">
+              <a:rPr sz="750" b="0" i="0">
                 <a:solidFill>
                   <a:srgbClr val="6B7E88"/>
                 </a:solidFill>
@@ -3790,7 +3790,7 @@
           <a:p>
             <a:pPr algn="l"/>
             <a:r>
-              <a:rPr sz="850" b="1" i="0">
+              <a:rPr sz="900" b="1" i="0">
                 <a:solidFill>
                   <a:srgbClr val="147D77"/>
                 </a:solidFill>
@@ -3825,7 +3825,7 @@
           <a:p>
             <a:pPr algn="l"/>
             <a:r>
-              <a:rPr sz="900" b="0" i="0">
+              <a:rPr sz="950" b="0" i="0">
                 <a:solidFill>
                   <a:srgbClr val="6B7E88"/>
                 </a:solidFill>
@@ -3869,7 +3869,7 @@
         <p:spPr>
           <a:xfrm>
             <a:off x="4023360" y="3236976"/>
-            <a:ext cx="8092440" cy="493776"/>
+            <a:ext cx="8092440" cy="512064"/>
           </a:xfrm>
           <a:prstGeom prst="rect">
             <a:avLst/>
@@ -3929,13 +3929,13 @@
           <a:p>
             <a:pPr algn="l"/>
             <a:r>
-              <a:rPr sz="800" b="1" i="0">
+              <a:rPr sz="850" b="1" i="0">
                 <a:solidFill>
                   <a:srgbClr val="2E9E6E"/>
                 </a:solidFill>
                 <a:latin typeface="Calibri"/>
               </a:rPr>
-              <a:t>DEMONSTRATED ON REAL CHANDRAYAAN-2 DATA:</a:t>
+              <a:t>DEMONSTRATED ON REAL CHANDRAYAAN-2 DATA (BENCHMARK MANIFEST VERIFIED):</a:t>
             </a:r>
           </a:p>
         </p:txBody>
@@ -3948,30 +3948,30 @@
         </p:nvSpPr>
         <p:spPr>
           <a:xfrm>
-            <a:off x="4114800" y="3429000"/>
-            <a:ext cx="7909560" cy="274320"/>
-          </a:xfrm>
-          <a:prstGeom prst="rect">
-            <a:avLst/>
-          </a:prstGeom>
-          <a:noFill/>
-        </p:spPr>
-        <p:txBody>
-          <a:bodyPr wrap="square">
-            <a:spAutoFit/>
-          </a:bodyPr>
-          <a:lstStyle/>
-          <a:p>
-            <a:pPr algn="l"/>
-            <a:r>
-              <a:rPr sz="780" b="0" i="0">
+            <a:off x="4114800" y="3438144"/>
+            <a:ext cx="7909560" cy="292608"/>
+          </a:xfrm>
+          <a:prstGeom prst="rect">
+            <a:avLst/>
+          </a:prstGeom>
+          <a:noFill/>
+        </p:spPr>
+        <p:txBody>
+          <a:bodyPr wrap="square">
+            <a:spAutoFit/>
+          </a:bodyPr>
+          <a:lstStyle/>
+          <a:p>
+            <a:pPr algn="l"/>
+            <a:r>
+              <a:rPr sz="819" b="0" i="0">
                 <a:solidFill>
                   <a:srgbClr val="1A2B35"/>
                 </a:solidFill>
                 <a:latin typeface="Calibri"/>
               </a:rPr>
-              <a:t>• OHRC Cross-Orbit: 822 inliers (99.2% ratio)  ·  Held-out RMSE: 0.779 px (TPS Warping Accepted)
-• TMC-2 Stereo: Held-out RMSE reduced 1.52 px → 0.84 px (44.7% error reduction vs Stage-3 baseline, N=150 fixed set)</a:t>
+              <a:t>• EXP-OHRC-E2E: 822 inliers (99.2% ratio)  ·  Held-out RMSE: 0.679 px (N=165 withheld, TPS Warping Accepted)
+• EXP-TMC-FIXED: 1.52 px → 0.84 px RMSE (44.7% gain vs Stage 3, N=150)  |  EXP-TMC-E2E: 686 inliers, 1.110 px RMSE</a:t>
             </a:r>
           </a:p>
         </p:txBody>
@@ -3984,7 +3984,7 @@
         </p:nvSpPr>
         <p:spPr>
           <a:xfrm>
-            <a:off x="4023360" y="3803904"/>
+            <a:off x="4023360" y="3822191"/>
             <a:ext cx="2633472" cy="1143000"/>
           </a:xfrm>
           <a:prstGeom prst="rect">
@@ -4029,7 +4029,7 @@
         </p:nvSpPr>
         <p:spPr>
           <a:xfrm>
-            <a:off x="4023360" y="3803904"/>
+            <a:off x="4023360" y="3822191"/>
             <a:ext cx="2633472" cy="201168"/>
           </a:xfrm>
           <a:prstGeom prst="rect">
@@ -4072,7 +4072,7 @@
         </p:nvSpPr>
         <p:spPr>
           <a:xfrm>
-            <a:off x="4114800" y="3822191"/>
+            <a:off x="4114800" y="3840480"/>
             <a:ext cx="2468880" cy="164592"/>
           </a:xfrm>
           <a:prstGeom prst="rect">
@@ -4088,7 +4088,7 @@
           <a:p>
             <a:pPr algn="l"/>
             <a:r>
-              <a:rPr sz="800" b="1" i="0">
+              <a:rPr sz="850" b="1" i="0">
                 <a:solidFill>
                   <a:srgbClr val="FFFFFF"/>
                 </a:solidFill>
@@ -4107,7 +4107,7 @@
         </p:nvSpPr>
         <p:spPr>
           <a:xfrm>
-            <a:off x="4114800" y="4041648"/>
+            <a:off x="4114800" y="4059936"/>
             <a:ext cx="2450592" cy="868680"/>
           </a:xfrm>
           <a:prstGeom prst="rect">
@@ -4123,7 +4123,7 @@
           <a:p>
             <a:pPr algn="l"/>
             <a:r>
-              <a:rPr sz="800" b="0" i="0">
+              <a:rPr sz="819" b="0" i="0">
                 <a:solidFill>
                   <a:srgbClr val="1A2B35"/>
                 </a:solidFill>
@@ -4142,7 +4142,7 @@
         </p:nvSpPr>
         <p:spPr>
           <a:xfrm>
-            <a:off x="6748272" y="3803904"/>
+            <a:off x="6748272" y="3822191"/>
             <a:ext cx="2633472" cy="1143000"/>
           </a:xfrm>
           <a:prstGeom prst="rect">
@@ -4187,7 +4187,7 @@
         </p:nvSpPr>
         <p:spPr>
           <a:xfrm>
-            <a:off x="6748272" y="3803904"/>
+            <a:off x="6748272" y="3822191"/>
             <a:ext cx="2633472" cy="201168"/>
           </a:xfrm>
           <a:prstGeom prst="rect">
@@ -4230,7 +4230,7 @@
         </p:nvSpPr>
         <p:spPr>
           <a:xfrm>
-            <a:off x="6839712" y="3822191"/>
+            <a:off x="6839712" y="3840480"/>
             <a:ext cx="2468880" cy="164592"/>
           </a:xfrm>
           <a:prstGeom prst="rect">
@@ -4246,7 +4246,7 @@
           <a:p>
             <a:pPr algn="l"/>
             <a:r>
-              <a:rPr sz="800" b="1" i="0">
+              <a:rPr sz="850" b="1" i="0">
                 <a:solidFill>
                   <a:srgbClr val="FFFFFF"/>
                 </a:solidFill>
@@ -4265,7 +4265,7 @@
         </p:nvSpPr>
         <p:spPr>
           <a:xfrm>
-            <a:off x="6839712" y="4041648"/>
+            <a:off x="6839712" y="4059936"/>
             <a:ext cx="2450592" cy="868680"/>
           </a:xfrm>
           <a:prstGeom prst="rect">
@@ -4281,7 +4281,7 @@
           <a:p>
             <a:pPr algn="l"/>
             <a:r>
-              <a:rPr sz="800" b="0" i="0">
+              <a:rPr sz="819" b="0" i="0">
                 <a:solidFill>
                   <a:srgbClr val="1A2B35"/>
                 </a:solidFill>
@@ -4300,7 +4300,7 @@
         </p:nvSpPr>
         <p:spPr>
           <a:xfrm>
-            <a:off x="9473184" y="3803904"/>
+            <a:off x="9473184" y="3822191"/>
             <a:ext cx="2633472" cy="1143000"/>
           </a:xfrm>
           <a:prstGeom prst="rect">
@@ -4345,7 +4345,7 @@
         </p:nvSpPr>
         <p:spPr>
           <a:xfrm>
-            <a:off x="9473184" y="3803904"/>
+            <a:off x="9473184" y="3822191"/>
             <a:ext cx="2633472" cy="201168"/>
           </a:xfrm>
           <a:prstGeom prst="rect">
@@ -4388,7 +4388,7 @@
         </p:nvSpPr>
         <p:spPr>
           <a:xfrm>
-            <a:off x="9564624" y="3822191"/>
+            <a:off x="9564624" y="3840480"/>
             <a:ext cx="2468880" cy="164592"/>
           </a:xfrm>
           <a:prstGeom prst="rect">
@@ -4404,7 +4404,7 @@
           <a:p>
             <a:pPr algn="l"/>
             <a:r>
-              <a:rPr sz="800" b="1" i="0">
+              <a:rPr sz="850" b="1" i="0">
                 <a:solidFill>
                   <a:srgbClr val="FFFFFF"/>
                 </a:solidFill>
@@ -4423,7 +4423,7 @@
         </p:nvSpPr>
         <p:spPr>
           <a:xfrm>
-            <a:off x="9564624" y="4041648"/>
+            <a:off x="9564624" y="4059936"/>
             <a:ext cx="2450592" cy="868680"/>
           </a:xfrm>
           <a:prstGeom prst="rect">
@@ -4439,7 +4439,7 @@
           <a:p>
             <a:pPr algn="l"/>
             <a:r>
-              <a:rPr sz="800" b="0" i="0">
+              <a:rPr sz="819" b="0" i="0">
                 <a:solidFill>
                   <a:srgbClr val="1A2B35"/>
                 </a:solidFill>
@@ -4458,7 +4458,7 @@
         </p:nvSpPr>
         <p:spPr>
           <a:xfrm>
-            <a:off x="4023360" y="5047488"/>
+            <a:off x="4023360" y="5065776"/>
             <a:ext cx="8092440" cy="201168"/>
           </a:xfrm>
           <a:prstGeom prst="rect">
@@ -4501,7 +4501,7 @@
         </p:nvSpPr>
         <p:spPr>
           <a:xfrm>
-            <a:off x="4114800" y="5056632"/>
+            <a:off x="4114800" y="5074920"/>
             <a:ext cx="7955279" cy="182880"/>
           </a:xfrm>
           <a:prstGeom prst="rect">
@@ -4517,7 +4517,7 @@
           <a:p>
             <a:pPr algn="l"/>
             <a:r>
-              <a:rPr sz="800" b="1" i="0">
+              <a:rPr sz="850" b="1" i="0">
                 <a:solidFill>
                   <a:srgbClr val="FFFFFF"/>
                 </a:solidFill>
@@ -4536,7 +4536,7 @@
         </p:nvSpPr>
         <p:spPr>
           <a:xfrm>
-            <a:off x="4114800" y="5266944"/>
+            <a:off x="4114800" y="5285232"/>
             <a:ext cx="7955279" cy="438912"/>
           </a:xfrm>
           <a:prstGeom prst="rect">
@@ -4552,7 +4552,7 @@
           <a:p>
             <a:pPr algn="l"/>
             <a:r>
-              <a:rPr sz="800" b="0" i="0">
+              <a:rPr sz="819" b="0" i="0">
                 <a:solidFill>
                   <a:srgbClr val="1A2B35"/>
                 </a:solidFill>
@@ -4571,7 +4571,7 @@
         </p:nvSpPr>
         <p:spPr>
           <a:xfrm>
-            <a:off x="4023360" y="5797296"/>
+            <a:off x="4023360" y="5815584"/>
             <a:ext cx="8092440" cy="219456"/>
           </a:xfrm>
           <a:prstGeom prst="rect">
@@ -4616,7 +4616,7 @@
         </p:nvSpPr>
         <p:spPr>
           <a:xfrm>
-            <a:off x="4114800" y="5833872"/>
+            <a:off x="4114800" y="5843016"/>
             <a:ext cx="7955279" cy="182880"/>
           </a:xfrm>
           <a:prstGeom prst="rect">
@@ -4632,7 +4632,7 @@
           <a:p>
             <a:pPr algn="l"/>
             <a:r>
-              <a:rPr sz="750" b="1" i="0">
+              <a:rPr sz="780" b="1" i="0">
                 <a:solidFill>
                   <a:srgbClr val="147D77"/>
                 </a:solidFill>
@@ -4710,13 +4710,13 @@
           <a:p>
             <a:pPr algn="l"/>
             <a:r>
-              <a:rPr sz="700" b="0" i="0">
+              <a:rPr sz="750" b="0" i="0">
                 <a:solidFill>
                   <a:srgbClr val="6B7E88"/>
                 </a:solidFill>
                 <a:latin typeface="Calibri"/>
               </a:rPr>
-              <a:t>LUNA-CORR     •     SIH 2026     •     01 / 06</a:t>
+              <a:t>LUNA-CORR     •     SIH 2026 PS 26166     •     01 / 06</a:t>
             </a:r>
           </a:p>
         </p:txBody>
@@ -4912,7 +4912,7 @@
         <p:spPr>
           <a:xfrm>
             <a:off x="457200" y="749808"/>
-            <a:ext cx="11274552" cy="182880"/>
+            <a:ext cx="11274552" cy="201168"/>
           </a:xfrm>
           <a:prstGeom prst="rect">
             <a:avLst/>
@@ -4955,22 +4955,22 @@
         <p:spPr>
           <a:xfrm>
             <a:off x="548640" y="768096"/>
-            <a:ext cx="11137392" cy="182880"/>
-          </a:xfrm>
-          <a:prstGeom prst="rect">
-            <a:avLst/>
-          </a:prstGeom>
-          <a:noFill/>
-        </p:spPr>
-        <p:txBody>
-          <a:bodyPr wrap="square">
-            <a:spAutoFit/>
-          </a:bodyPr>
-          <a:lstStyle/>
-          <a:p>
-            <a:pPr algn="l"/>
-            <a:r>
-              <a:rPr sz="750" b="1" i="0">
+            <a:ext cx="11137392" cy="201168"/>
+          </a:xfrm>
+          <a:prstGeom prst="rect">
+            <a:avLst/>
+          </a:prstGeom>
+          <a:noFill/>
+        </p:spPr>
+        <p:txBody>
+          <a:bodyPr wrap="square">
+            <a:spAutoFit/>
+          </a:bodyPr>
+          <a:lstStyle/>
+          <a:p>
+            <a:pPr algn="l"/>
+            <a:r>
+              <a:rPr sz="800" b="1" i="0">
                 <a:solidFill>
                   <a:srgbClr val="FFFFFF"/>
                 </a:solidFill>
@@ -5094,7 +5094,7 @@
         <p:spPr>
           <a:xfrm>
             <a:off x="457200" y="4443984"/>
-            <a:ext cx="11274552" cy="182880"/>
+            <a:ext cx="11274552" cy="201168"/>
           </a:xfrm>
           <a:prstGeom prst="rect">
             <a:avLst/>
@@ -5137,22 +5137,22 @@
         <p:spPr>
           <a:xfrm>
             <a:off x="548640" y="4462272"/>
-            <a:ext cx="11137392" cy="182880"/>
-          </a:xfrm>
-          <a:prstGeom prst="rect">
-            <a:avLst/>
-          </a:prstGeom>
-          <a:noFill/>
-        </p:spPr>
-        <p:txBody>
-          <a:bodyPr wrap="square">
-            <a:spAutoFit/>
-          </a:bodyPr>
-          <a:lstStyle/>
-          <a:p>
-            <a:pPr algn="l"/>
-            <a:r>
-              <a:rPr sz="750" b="1" i="0">
+            <a:ext cx="11137392" cy="201168"/>
+          </a:xfrm>
+          <a:prstGeom prst="rect">
+            <a:avLst/>
+          </a:prstGeom>
+          <a:noFill/>
+        </p:spPr>
+        <p:txBody>
+          <a:bodyPr wrap="square">
+            <a:spAutoFit/>
+          </a:bodyPr>
+          <a:lstStyle/>
+          <a:p>
+            <a:pPr algn="l"/>
+            <a:r>
+              <a:rPr sz="800" b="1" i="0">
                 <a:solidFill>
                   <a:srgbClr val="FFFFFF"/>
                 </a:solidFill>
@@ -5232,13 +5232,13 @@
           <a:p>
             <a:pPr algn="l"/>
             <a:r>
-              <a:rPr sz="800" b="1" i="0">
+              <a:rPr sz="850" b="1" i="0">
                 <a:solidFill>
                   <a:srgbClr val="147D77"/>
                 </a:solidFill>
                 <a:latin typeface="Calibri"/>
               </a:rPr>
-              <a:t>THREE PHYSICAL CAUSES</a:t>
+              <a:t>FOUR PHYSICAL CAUSES</a:t>
             </a:r>
           </a:p>
         </p:txBody>
@@ -5267,7 +5267,7 @@
           <a:p>
             <a:pPr algn="l"/>
             <a:r>
-              <a:rPr sz="800" b="0" i="0">
+              <a:rPr sz="819" b="0" i="0">
                 <a:solidFill>
                   <a:srgbClr val="1A2B35"/>
                 </a:solidFill>
@@ -5302,7 +5302,7 @@
           <a:p>
             <a:pPr algn="l"/>
             <a:r>
-              <a:rPr sz="800" b="0" i="0">
+              <a:rPr sz="819" b="0" i="0">
                 <a:solidFill>
                   <a:srgbClr val="1A2B35"/>
                 </a:solidFill>
@@ -5337,7 +5337,7 @@
           <a:p>
             <a:pPr algn="l"/>
             <a:r>
-              <a:rPr sz="800" b="0" i="0">
+              <a:rPr sz="819" b="0" i="0">
                 <a:solidFill>
                   <a:srgbClr val="1A2B35"/>
                 </a:solidFill>
@@ -5372,7 +5372,7 @@
           <a:p>
             <a:pPr algn="l"/>
             <a:r>
-              <a:rPr sz="800" b="0" i="0">
+              <a:rPr sz="819" b="0" i="0">
                 <a:solidFill>
                   <a:srgbClr val="1A2B35"/>
                 </a:solidFill>
@@ -5452,13 +5452,13 @@
           <a:p>
             <a:pPr algn="l"/>
             <a:r>
-              <a:rPr sz="800" b="1" i="0">
+              <a:rPr sz="850" b="1" i="0">
                 <a:solidFill>
                   <a:srgbClr val="147D77"/>
                 </a:solidFill>
                 <a:latin typeface="Calibri"/>
               </a:rPr>
-              <a:t>THREE LUNA-CORR RESPONSES</a:t>
+              <a:t>FOUR LUNA-CORR RESPONSES</a:t>
             </a:r>
           </a:p>
         </p:txBody>
@@ -5487,7 +5487,7 @@
           <a:p>
             <a:pPr algn="l"/>
             <a:r>
-              <a:rPr sz="800" b="0" i="0">
+              <a:rPr sz="819" b="0" i="0">
                 <a:solidFill>
                   <a:srgbClr val="1A2B35"/>
                 </a:solidFill>
@@ -5522,7 +5522,7 @@
           <a:p>
             <a:pPr algn="l"/>
             <a:r>
-              <a:rPr sz="800" b="0" i="0">
+              <a:rPr sz="819" b="0" i="0">
                 <a:solidFill>
                   <a:srgbClr val="1A2B35"/>
                 </a:solidFill>
@@ -5557,7 +5557,7 @@
           <a:p>
             <a:pPr algn="l"/>
             <a:r>
-              <a:rPr sz="800" b="0" i="0">
+              <a:rPr sz="819" b="0" i="0">
                 <a:solidFill>
                   <a:srgbClr val="1A2B35"/>
                 </a:solidFill>
@@ -5592,7 +5592,7 @@
           <a:p>
             <a:pPr algn="l"/>
             <a:r>
-              <a:rPr sz="800" b="0" i="0">
+              <a:rPr sz="819" b="0" i="0">
                 <a:solidFill>
                   <a:srgbClr val="1A2B35"/>
                 </a:solidFill>
@@ -5672,7 +5672,7 @@
           <a:p>
             <a:pPr algn="l"/>
             <a:r>
-              <a:rPr sz="800" b="1" i="0">
+              <a:rPr sz="850" b="1" i="0">
                 <a:solidFill>
                   <a:srgbClr val="147D77"/>
                 </a:solidFill>
@@ -5707,7 +5707,7 @@
           <a:p>
             <a:pPr algn="l"/>
             <a:r>
-              <a:rPr sz="800" b="0" i="0">
+              <a:rPr sz="819" b="0" i="0">
                 <a:solidFill>
                   <a:srgbClr val="1A2B35"/>
                 </a:solidFill>
@@ -5742,13 +5742,13 @@
           <a:p>
             <a:pPr algn="l"/>
             <a:r>
-              <a:rPr sz="800" b="0" i="0">
+              <a:rPr sz="819" b="0" i="0">
                 <a:solidFill>
                   <a:srgbClr val="1A2B35"/>
                 </a:solidFill>
                 <a:latin typeface="Calibri"/>
               </a:rPr>
-              <a:t>▸  True Precision @ 1px: Measured against known synthetic ground truth fields.</a:t>
+              <a:t>▸  Controlled Photometric Consistency: Measured under matched synthetic re-illumination.</a:t>
             </a:r>
           </a:p>
         </p:txBody>
@@ -5777,7 +5777,7 @@
           <a:p>
             <a:pPr algn="l"/>
             <a:r>
-              <a:rPr sz="800" b="0" i="0">
+              <a:rPr sz="819" b="0" i="0">
                 <a:solidFill>
                   <a:srgbClr val="1A2B35"/>
                 </a:solidFill>
@@ -5812,7 +5812,7 @@
           <a:p>
             <a:pPr algn="l"/>
             <a:r>
-              <a:rPr sz="800" b="0" i="0">
+              <a:rPr sz="819" b="0" i="0">
                 <a:solidFill>
                   <a:srgbClr val="1A2B35"/>
                 </a:solidFill>
@@ -5890,13 +5890,13 @@
           <a:p>
             <a:pPr algn="l"/>
             <a:r>
-              <a:rPr sz="700" b="0" i="0">
+              <a:rPr sz="750" b="0" i="0">
                 <a:solidFill>
                   <a:srgbClr val="6B7E88"/>
                 </a:solidFill>
                 <a:latin typeface="Calibri"/>
               </a:rPr>
-              <a:t>LUNA-CORR     •     SIH 2026     •     02 / 06</a:t>
+              <a:t>LUNA-CORR     •     SIH 2026 PS 26166     •     02 / 06</a:t>
             </a:r>
           </a:p>
         </p:txBody>
@@ -6152,7 +6152,7 @@
           <a:p>
             <a:pPr algn="l"/>
             <a:r>
-              <a:rPr sz="800" b="1" i="0">
+              <a:rPr sz="850" b="1" i="0">
                 <a:solidFill>
                   <a:srgbClr val="147D77"/>
                 </a:solidFill>
@@ -6222,7 +6222,7 @@
           <a:p>
             <a:pPr algn="l"/>
             <a:r>
-              <a:rPr sz="800" b="0" i="1">
+              <a:rPr sz="819" b="0" i="1">
                 <a:solidFill>
                   <a:srgbClr val="6B7E88"/>
                 </a:solidFill>
@@ -6241,8 +6241,8 @@
         </p:nvSpPr>
         <p:spPr>
           <a:xfrm>
-            <a:off x="457200" y="1444752"/>
-            <a:ext cx="11274552" cy="182880"/>
+            <a:off x="457200" y="1408176"/>
+            <a:ext cx="11274552" cy="201168"/>
           </a:xfrm>
           <a:prstGeom prst="rect">
             <a:avLst/>
@@ -6284,23 +6284,23 @@
         </p:nvSpPr>
         <p:spPr>
           <a:xfrm>
-            <a:off x="548640" y="1463040"/>
-            <a:ext cx="11137392" cy="182880"/>
-          </a:xfrm>
-          <a:prstGeom prst="rect">
-            <a:avLst/>
-          </a:prstGeom>
-          <a:noFill/>
-        </p:spPr>
-        <p:txBody>
-          <a:bodyPr wrap="square">
-            <a:spAutoFit/>
-          </a:bodyPr>
-          <a:lstStyle/>
-          <a:p>
-            <a:pPr algn="l"/>
-            <a:r>
-              <a:rPr sz="750" b="1" i="0">
+            <a:off x="548640" y="1426464"/>
+            <a:ext cx="11137392" cy="201168"/>
+          </a:xfrm>
+          <a:prstGeom prst="rect">
+            <a:avLst/>
+          </a:prstGeom>
+          <a:noFill/>
+        </p:spPr>
+        <p:txBody>
+          <a:bodyPr wrap="square">
+            <a:spAutoFit/>
+          </a:bodyPr>
+          <a:lstStyle/>
+          <a:p>
+            <a:pPr algn="l"/>
+            <a:r>
+              <a:rPr sz="800" b="1" i="0">
                 <a:solidFill>
                   <a:srgbClr val="FFFFFF"/>
                 </a:solidFill>
@@ -6319,8 +6319,8 @@
         </p:nvSpPr>
         <p:spPr>
           <a:xfrm>
-            <a:off x="457200" y="1664208"/>
-            <a:ext cx="1353312" cy="868680"/>
+            <a:off x="457200" y="1627632"/>
+            <a:ext cx="1353312" cy="777240"/>
           </a:xfrm>
           <a:prstGeom prst="rect">
             <a:avLst/>
@@ -6328,7 +6328,7 @@
           <a:solidFill>
             <a:srgbClr val="F4F6F8"/>
           </a:solidFill>
-          <a:ln w="5080">
+          <a:ln w="6350">
             <a:solidFill>
               <a:srgbClr val="D0D8DD"/>
             </a:solidFill>
@@ -6364,7 +6364,7 @@
         </p:nvSpPr>
         <p:spPr>
           <a:xfrm>
-            <a:off x="457200" y="1664208"/>
+            <a:off x="457200" y="1627632"/>
             <a:ext cx="1353312" cy="201168"/>
           </a:xfrm>
           <a:prstGeom prst="rect">
@@ -6407,8 +6407,8 @@
         </p:nvSpPr>
         <p:spPr>
           <a:xfrm>
-            <a:off x="502920" y="1682496"/>
-            <a:ext cx="1261872" cy="164592"/>
+            <a:off x="493776" y="1645920"/>
+            <a:ext cx="1280160" cy="164592"/>
           </a:xfrm>
           <a:prstGeom prst="rect">
             <a:avLst/>
@@ -6442,8 +6442,8 @@
         </p:nvSpPr>
         <p:spPr>
           <a:xfrm>
-            <a:off x="512064" y="1901952"/>
-            <a:ext cx="1243584" cy="594360"/>
+            <a:off x="502920" y="1865376"/>
+            <a:ext cx="1261872" cy="502920"/>
           </a:xfrm>
           <a:prstGeom prst="rect">
             <a:avLst/>
@@ -6458,7 +6458,7 @@
           <a:p>
             <a:pPr algn="ctr"/>
             <a:r>
-              <a:rPr sz="750" b="0" i="0">
+              <a:rPr sz="780" b="0" i="0">
                 <a:solidFill>
                   <a:srgbClr val="1A2B35"/>
                 </a:solidFill>
@@ -6477,8 +6477,8 @@
         </p:nvSpPr>
         <p:spPr>
           <a:xfrm>
-            <a:off x="1874519" y="1664208"/>
-            <a:ext cx="1353312" cy="868680"/>
+            <a:off x="1874519" y="1627632"/>
+            <a:ext cx="1353312" cy="777240"/>
           </a:xfrm>
           <a:prstGeom prst="rect">
             <a:avLst/>
@@ -6486,7 +6486,7 @@
           <a:solidFill>
             <a:srgbClr val="F4F6F8"/>
           </a:solidFill>
-          <a:ln w="5080">
+          <a:ln w="6350">
             <a:solidFill>
               <a:srgbClr val="D0D8DD"/>
             </a:solidFill>
@@ -6522,7 +6522,7 @@
         </p:nvSpPr>
         <p:spPr>
           <a:xfrm>
-            <a:off x="1874519" y="1664208"/>
+            <a:off x="1874519" y="1627632"/>
             <a:ext cx="1353312" cy="201168"/>
           </a:xfrm>
           <a:prstGeom prst="rect">
@@ -6565,8 +6565,8 @@
         </p:nvSpPr>
         <p:spPr>
           <a:xfrm>
-            <a:off x="1920239" y="1682496"/>
-            <a:ext cx="1261872" cy="164592"/>
+            <a:off x="1911095" y="1645920"/>
+            <a:ext cx="1280160" cy="164592"/>
           </a:xfrm>
           <a:prstGeom prst="rect">
             <a:avLst/>
@@ -6600,8 +6600,8 @@
         </p:nvSpPr>
         <p:spPr>
           <a:xfrm>
-            <a:off x="1929384" y="1901952"/>
-            <a:ext cx="1243584" cy="594360"/>
+            <a:off x="1920239" y="1865376"/>
+            <a:ext cx="1261872" cy="502920"/>
           </a:xfrm>
           <a:prstGeom prst="rect">
             <a:avLst/>
@@ -6616,7 +6616,7 @@
           <a:p>
             <a:pPr algn="ctr"/>
             <a:r>
-              <a:rPr sz="750" b="0" i="0">
+              <a:rPr sz="780" b="0" i="0">
                 <a:solidFill>
                   <a:srgbClr val="1A2B35"/>
                 </a:solidFill>
@@ -6635,8 +6635,8 @@
         </p:nvSpPr>
         <p:spPr>
           <a:xfrm>
-            <a:off x="3291839" y="1664208"/>
-            <a:ext cx="1353312" cy="868680"/>
+            <a:off x="3291839" y="1627632"/>
+            <a:ext cx="1353312" cy="777240"/>
           </a:xfrm>
           <a:prstGeom prst="rect">
             <a:avLst/>
@@ -6644,7 +6644,7 @@
           <a:solidFill>
             <a:srgbClr val="F4F6F8"/>
           </a:solidFill>
-          <a:ln w="5080">
+          <a:ln w="6350">
             <a:solidFill>
               <a:srgbClr val="D0D8DD"/>
             </a:solidFill>
@@ -6680,7 +6680,7 @@
         </p:nvSpPr>
         <p:spPr>
           <a:xfrm>
-            <a:off x="3291839" y="1664208"/>
+            <a:off x="3291839" y="1627632"/>
             <a:ext cx="1353312" cy="201168"/>
           </a:xfrm>
           <a:prstGeom prst="rect">
@@ -6723,8 +6723,8 @@
         </p:nvSpPr>
         <p:spPr>
           <a:xfrm>
-            <a:off x="3337559" y="1682496"/>
-            <a:ext cx="1261872" cy="164592"/>
+            <a:off x="3328415" y="1645920"/>
+            <a:ext cx="1280160" cy="164592"/>
           </a:xfrm>
           <a:prstGeom prst="rect">
             <a:avLst/>
@@ -6758,8 +6758,8 @@
         </p:nvSpPr>
         <p:spPr>
           <a:xfrm>
-            <a:off x="3346703" y="1901952"/>
-            <a:ext cx="1243584" cy="594360"/>
+            <a:off x="3337559" y="1865376"/>
+            <a:ext cx="1261872" cy="502920"/>
           </a:xfrm>
           <a:prstGeom prst="rect">
             <a:avLst/>
@@ -6774,7 +6774,7 @@
           <a:p>
             <a:pPr algn="ctr"/>
             <a:r>
-              <a:rPr sz="750" b="0" i="0">
+              <a:rPr sz="780" b="0" i="0">
                 <a:solidFill>
                   <a:srgbClr val="1A2B35"/>
                 </a:solidFill>
@@ -6793,8 +6793,8 @@
         </p:nvSpPr>
         <p:spPr>
           <a:xfrm>
-            <a:off x="4709159" y="1664208"/>
-            <a:ext cx="1353312" cy="868680"/>
+            <a:off x="4709159" y="1627632"/>
+            <a:ext cx="1353312" cy="777240"/>
           </a:xfrm>
           <a:prstGeom prst="rect">
             <a:avLst/>
@@ -6802,7 +6802,7 @@
           <a:solidFill>
             <a:srgbClr val="F4F6F8"/>
           </a:solidFill>
-          <a:ln w="5080">
+          <a:ln w="6350">
             <a:solidFill>
               <a:srgbClr val="D0D8DD"/>
             </a:solidFill>
@@ -6838,7 +6838,7 @@
         </p:nvSpPr>
         <p:spPr>
           <a:xfrm>
-            <a:off x="4709159" y="1664208"/>
+            <a:off x="4709159" y="1627632"/>
             <a:ext cx="1353312" cy="201168"/>
           </a:xfrm>
           <a:prstGeom prst="rect">
@@ -6881,8 +6881,8 @@
         </p:nvSpPr>
         <p:spPr>
           <a:xfrm>
-            <a:off x="4754879" y="1682496"/>
-            <a:ext cx="1261872" cy="164592"/>
+            <a:off x="4745736" y="1645920"/>
+            <a:ext cx="1280160" cy="164592"/>
           </a:xfrm>
           <a:prstGeom prst="rect">
             <a:avLst/>
@@ -6916,8 +6916,8 @@
         </p:nvSpPr>
         <p:spPr>
           <a:xfrm>
-            <a:off x="4764023" y="1901952"/>
-            <a:ext cx="1243584" cy="594360"/>
+            <a:off x="4754879" y="1865376"/>
+            <a:ext cx="1261872" cy="502920"/>
           </a:xfrm>
           <a:prstGeom prst="rect">
             <a:avLst/>
@@ -6932,7 +6932,7 @@
           <a:p>
             <a:pPr algn="ctr"/>
             <a:r>
-              <a:rPr sz="750" b="0" i="0">
+              <a:rPr sz="780" b="0" i="0">
                 <a:solidFill>
                   <a:srgbClr val="1A2B35"/>
                 </a:solidFill>
@@ -6951,8 +6951,8 @@
         </p:nvSpPr>
         <p:spPr>
           <a:xfrm>
-            <a:off x="6126479" y="1664208"/>
-            <a:ext cx="1353312" cy="868680"/>
+            <a:off x="6126479" y="1627632"/>
+            <a:ext cx="1353312" cy="777240"/>
           </a:xfrm>
           <a:prstGeom prst="rect">
             <a:avLst/>
@@ -6960,7 +6960,7 @@
           <a:solidFill>
             <a:srgbClr val="F4F6F8"/>
           </a:solidFill>
-          <a:ln w="5080">
+          <a:ln w="6350">
             <a:solidFill>
               <a:srgbClr val="D0D8DD"/>
             </a:solidFill>
@@ -6996,7 +6996,7 @@
         </p:nvSpPr>
         <p:spPr>
           <a:xfrm>
-            <a:off x="6126479" y="1664208"/>
+            <a:off x="6126479" y="1627632"/>
             <a:ext cx="1353312" cy="201168"/>
           </a:xfrm>
           <a:prstGeom prst="rect">
@@ -7039,8 +7039,8 @@
         </p:nvSpPr>
         <p:spPr>
           <a:xfrm>
-            <a:off x="6172199" y="1682496"/>
-            <a:ext cx="1261872" cy="164592"/>
+            <a:off x="6163055" y="1645920"/>
+            <a:ext cx="1280160" cy="164592"/>
           </a:xfrm>
           <a:prstGeom prst="rect">
             <a:avLst/>
@@ -7074,8 +7074,8 @@
         </p:nvSpPr>
         <p:spPr>
           <a:xfrm>
-            <a:off x="6181343" y="1901952"/>
-            <a:ext cx="1243584" cy="594360"/>
+            <a:off x="6172199" y="1865376"/>
+            <a:ext cx="1261872" cy="502920"/>
           </a:xfrm>
           <a:prstGeom prst="rect">
             <a:avLst/>
@@ -7090,7 +7090,7 @@
           <a:p>
             <a:pPr algn="ctr"/>
             <a:r>
-              <a:rPr sz="750" b="0" i="0">
+              <a:rPr sz="780" b="0" i="0">
                 <a:solidFill>
                   <a:srgbClr val="1A2B35"/>
                 </a:solidFill>
@@ -7109,8 +7109,8 @@
         </p:nvSpPr>
         <p:spPr>
           <a:xfrm>
-            <a:off x="7543800" y="1664208"/>
-            <a:ext cx="1353312" cy="868680"/>
+            <a:off x="7543800" y="1627632"/>
+            <a:ext cx="1353312" cy="777240"/>
           </a:xfrm>
           <a:prstGeom prst="rect">
             <a:avLst/>
@@ -7118,7 +7118,7 @@
           <a:solidFill>
             <a:srgbClr val="F4F6F8"/>
           </a:solidFill>
-          <a:ln w="5080">
+          <a:ln w="6350">
             <a:solidFill>
               <a:srgbClr val="D0D8DD"/>
             </a:solidFill>
@@ -7154,7 +7154,7 @@
         </p:nvSpPr>
         <p:spPr>
           <a:xfrm>
-            <a:off x="7543800" y="1664208"/>
+            <a:off x="7543800" y="1627632"/>
             <a:ext cx="1353312" cy="201168"/>
           </a:xfrm>
           <a:prstGeom prst="rect">
@@ -7197,8 +7197,8 @@
         </p:nvSpPr>
         <p:spPr>
           <a:xfrm>
-            <a:off x="7589520" y="1682496"/>
-            <a:ext cx="1261872" cy="164592"/>
+            <a:off x="7580375" y="1645920"/>
+            <a:ext cx="1280160" cy="164592"/>
           </a:xfrm>
           <a:prstGeom prst="rect">
             <a:avLst/>
@@ -7232,8 +7232,8 @@
         </p:nvSpPr>
         <p:spPr>
           <a:xfrm>
-            <a:off x="7598664" y="1901952"/>
-            <a:ext cx="1243584" cy="594360"/>
+            <a:off x="7589520" y="1865376"/>
+            <a:ext cx="1261872" cy="502920"/>
           </a:xfrm>
           <a:prstGeom prst="rect">
             <a:avLst/>
@@ -7248,7 +7248,7 @@
           <a:p>
             <a:pPr algn="ctr"/>
             <a:r>
-              <a:rPr sz="750" b="0" i="0">
+              <a:rPr sz="780" b="0" i="0">
                 <a:solidFill>
                   <a:srgbClr val="1A2B35"/>
                 </a:solidFill>
@@ -7267,8 +7267,8 @@
         </p:nvSpPr>
         <p:spPr>
           <a:xfrm>
-            <a:off x="8961120" y="1664208"/>
-            <a:ext cx="1353312" cy="868680"/>
+            <a:off x="8961120" y="1627632"/>
+            <a:ext cx="1353312" cy="777240"/>
           </a:xfrm>
           <a:prstGeom prst="rect">
             <a:avLst/>
@@ -7276,7 +7276,7 @@
           <a:solidFill>
             <a:srgbClr val="F4F6F8"/>
           </a:solidFill>
-          <a:ln w="5080">
+          <a:ln w="6350">
             <a:solidFill>
               <a:srgbClr val="D0D8DD"/>
             </a:solidFill>
@@ -7312,7 +7312,7 @@
         </p:nvSpPr>
         <p:spPr>
           <a:xfrm>
-            <a:off x="8961120" y="1664208"/>
+            <a:off x="8961120" y="1627632"/>
             <a:ext cx="1353312" cy="201168"/>
           </a:xfrm>
           <a:prstGeom prst="rect">
@@ -7355,8 +7355,8 @@
         </p:nvSpPr>
         <p:spPr>
           <a:xfrm>
-            <a:off x="9006840" y="1682496"/>
-            <a:ext cx="1261872" cy="164592"/>
+            <a:off x="8997696" y="1645920"/>
+            <a:ext cx="1280160" cy="164592"/>
           </a:xfrm>
           <a:prstGeom prst="rect">
             <a:avLst/>
@@ -7390,8 +7390,8 @@
         </p:nvSpPr>
         <p:spPr>
           <a:xfrm>
-            <a:off x="9015984" y="1901952"/>
-            <a:ext cx="1243584" cy="594360"/>
+            <a:off x="9006840" y="1865376"/>
+            <a:ext cx="1261872" cy="502920"/>
           </a:xfrm>
           <a:prstGeom prst="rect">
             <a:avLst/>
@@ -7406,7 +7406,7 @@
           <a:p>
             <a:pPr algn="ctr"/>
             <a:r>
-              <a:rPr sz="750" b="0" i="0">
+              <a:rPr sz="780" b="0" i="0">
                 <a:solidFill>
                   <a:srgbClr val="1A2B35"/>
                 </a:solidFill>
@@ -7425,8 +7425,8 @@
         </p:nvSpPr>
         <p:spPr>
           <a:xfrm>
-            <a:off x="10378440" y="1664208"/>
-            <a:ext cx="1353312" cy="868680"/>
+            <a:off x="10378440" y="1627632"/>
+            <a:ext cx="1353312" cy="777240"/>
           </a:xfrm>
           <a:prstGeom prst="rect">
             <a:avLst/>
@@ -7434,7 +7434,7 @@
           <a:solidFill>
             <a:srgbClr val="F4F6F8"/>
           </a:solidFill>
-          <a:ln w="5080">
+          <a:ln w="6350">
             <a:solidFill>
               <a:srgbClr val="D0D8DD"/>
             </a:solidFill>
@@ -7470,7 +7470,7 @@
         </p:nvSpPr>
         <p:spPr>
           <a:xfrm>
-            <a:off x="10378440" y="1664208"/>
+            <a:off x="10378440" y="1627632"/>
             <a:ext cx="1353312" cy="201168"/>
           </a:xfrm>
           <a:prstGeom prst="rect">
@@ -7513,8 +7513,8 @@
         </p:nvSpPr>
         <p:spPr>
           <a:xfrm>
-            <a:off x="10424160" y="1682496"/>
-            <a:ext cx="1261872" cy="164592"/>
+            <a:off x="10415016" y="1645920"/>
+            <a:ext cx="1280160" cy="164592"/>
           </a:xfrm>
           <a:prstGeom prst="rect">
             <a:avLst/>
@@ -7548,8 +7548,8 @@
         </p:nvSpPr>
         <p:spPr>
           <a:xfrm>
-            <a:off x="10433304" y="1901952"/>
-            <a:ext cx="1243584" cy="594360"/>
+            <a:off x="10424160" y="1865376"/>
+            <a:ext cx="1261872" cy="502920"/>
           </a:xfrm>
           <a:prstGeom prst="rect">
             <a:avLst/>
@@ -7564,7 +7564,7 @@
           <a:p>
             <a:pPr algn="ctr"/>
             <a:r>
-              <a:rPr sz="750" b="0" i="0">
+              <a:rPr sz="780" b="0" i="0">
                 <a:solidFill>
                   <a:srgbClr val="1A2B35"/>
                 </a:solidFill>
@@ -7583,8 +7583,8 @@
         </p:nvSpPr>
         <p:spPr>
           <a:xfrm>
-            <a:off x="457200" y="2670048"/>
-            <a:ext cx="6126480" cy="182880"/>
+            <a:off x="457200" y="2468880"/>
+            <a:ext cx="6126480" cy="201168"/>
           </a:xfrm>
           <a:prstGeom prst="rect">
             <a:avLst/>
@@ -7626,23 +7626,23 @@
         </p:nvSpPr>
         <p:spPr>
           <a:xfrm>
-            <a:off x="548640" y="2688336"/>
-            <a:ext cx="5989320" cy="182880"/>
-          </a:xfrm>
-          <a:prstGeom prst="rect">
-            <a:avLst/>
-          </a:prstGeom>
-          <a:noFill/>
-        </p:spPr>
-        <p:txBody>
-          <a:bodyPr wrap="square">
-            <a:spAutoFit/>
-          </a:bodyPr>
-          <a:lstStyle/>
-          <a:p>
-            <a:pPr algn="l"/>
-            <a:r>
-              <a:rPr sz="750" b="1" i="0">
+            <a:off x="548640" y="2487168"/>
+            <a:ext cx="5989320" cy="201168"/>
+          </a:xfrm>
+          <a:prstGeom prst="rect">
+            <a:avLst/>
+          </a:prstGeom>
+          <a:noFill/>
+        </p:spPr>
+        <p:txBody>
+          <a:bodyPr wrap="square">
+            <a:spAutoFit/>
+          </a:bodyPr>
+          <a:lstStyle/>
+          <a:p>
+            <a:pPr algn="l"/>
+            <a:r>
+              <a:rPr sz="800" b="1" i="0">
                 <a:solidFill>
                   <a:srgbClr val="FFFFFF"/>
                 </a:solidFill>
@@ -7669,8 +7669,8 @@
         </p:blipFill>
         <p:spPr>
           <a:xfrm>
-            <a:off x="457200" y="2889504"/>
-            <a:ext cx="6126480" cy="2423160"/>
+            <a:off x="457200" y="2688336"/>
+            <a:ext cx="6126480" cy="2633472"/>
           </a:xfrm>
           <a:prstGeom prst="rect">
             <a:avLst/>
@@ -7686,7 +7686,7 @@
         <p:spPr>
           <a:xfrm>
             <a:off x="457200" y="5358384"/>
-            <a:ext cx="6126480" cy="457200"/>
+            <a:ext cx="6126480" cy="475488"/>
           </a:xfrm>
           <a:prstGeom prst="rect">
             <a:avLst/>
@@ -7731,7 +7731,7 @@
         <p:spPr>
           <a:xfrm>
             <a:off x="548640" y="5394960"/>
-            <a:ext cx="5943600" cy="182880"/>
+            <a:ext cx="5943600" cy="164592"/>
           </a:xfrm>
           <a:prstGeom prst="rect">
             <a:avLst/>
@@ -7752,7 +7752,7 @@
                 </a:solidFill>
                 <a:latin typeface="Calibri"/>
               </a:rPr>
-              <a:t>TMC-2 STEREO — 710 INLIERS — ACCEPTED</a:t>
+              <a:t>TMC-2 STEREO — 686 INLIERS — ACCEPTED (EXP-TMC-E2E):</a:t>
             </a:r>
           </a:p>
         </p:txBody>
@@ -7781,13 +7781,13 @@
           <a:p>
             <a:pPr algn="l"/>
             <a:r>
-              <a:rPr sz="800" b="0" i="0">
+              <a:rPr sz="819" b="0" i="0">
                 <a:solidFill>
                   <a:srgbClr val="1A2B35"/>
                 </a:solidFill>
                 <a:latin typeface="Calibri"/>
               </a:rPr>
-              <a:t>Held-out RMSE: 1.52 → 0.84 px (44.7% error reduction vs Stage-3 baseline) · Continuous crater rims across seams</a:t>
+              <a:t>Held-out RMSE: 1.110 px (fitting: 0.841 px, N=138)  |  EXP-TMC-FIXED (N=150): 1.52 → 0.841 px (44.7% gain)</a:t>
             </a:r>
           </a:p>
         </p:txBody>
@@ -7800,8 +7800,8 @@
         </p:nvSpPr>
         <p:spPr>
           <a:xfrm>
-            <a:off x="6766560" y="2670048"/>
-            <a:ext cx="4965192" cy="182880"/>
+            <a:off x="6766560" y="2468880"/>
+            <a:ext cx="4965192" cy="201168"/>
           </a:xfrm>
           <a:prstGeom prst="rect">
             <a:avLst/>
@@ -7843,23 +7843,23 @@
         </p:nvSpPr>
         <p:spPr>
           <a:xfrm>
-            <a:off x="6858000" y="2688336"/>
-            <a:ext cx="4828031" cy="182880"/>
-          </a:xfrm>
-          <a:prstGeom prst="rect">
-            <a:avLst/>
-          </a:prstGeom>
-          <a:noFill/>
-        </p:spPr>
-        <p:txBody>
-          <a:bodyPr wrap="square">
-            <a:spAutoFit/>
-          </a:bodyPr>
-          <a:lstStyle/>
-          <a:p>
-            <a:pPr algn="l"/>
-            <a:r>
-              <a:rPr sz="750" b="1" i="0">
+            <a:off x="6858000" y="2487168"/>
+            <a:ext cx="4828031" cy="201168"/>
+          </a:xfrm>
+          <a:prstGeom prst="rect">
+            <a:avLst/>
+          </a:prstGeom>
+          <a:noFill/>
+        </p:spPr>
+        <p:txBody>
+          <a:bodyPr wrap="square">
+            <a:spAutoFit/>
+          </a:bodyPr>
+          <a:lstStyle/>
+          <a:p>
+            <a:pPr algn="l"/>
+            <a:r>
+              <a:rPr sz="800" b="1" i="0">
                 <a:solidFill>
                   <a:srgbClr val="FFFFFF"/>
                 </a:solidFill>
@@ -7878,7 +7878,7 @@
         </p:nvSpPr>
         <p:spPr>
           <a:xfrm>
-            <a:off x="6766560" y="2889504"/>
+            <a:off x="6766560" y="2688336"/>
             <a:ext cx="4965192" cy="292608"/>
           </a:xfrm>
           <a:prstGeom prst="rect">
@@ -7923,7 +7923,7 @@
         </p:nvSpPr>
         <p:spPr>
           <a:xfrm>
-            <a:off x="6858000" y="2926080"/>
+            <a:off x="6858000" y="2724912"/>
             <a:ext cx="1463040" cy="201168"/>
           </a:xfrm>
           <a:prstGeom prst="rect">
@@ -7939,7 +7939,7 @@
           <a:p>
             <a:pPr algn="l"/>
             <a:r>
-              <a:rPr sz="750" b="1" i="0">
+              <a:rPr sz="800" b="1" i="0">
                 <a:solidFill>
                   <a:srgbClr val="147D77"/>
                 </a:solidFill>
@@ -7958,7 +7958,7 @@
         </p:nvSpPr>
         <p:spPr>
           <a:xfrm>
-            <a:off x="8366760" y="2926080"/>
+            <a:off x="8366760" y="2724912"/>
             <a:ext cx="3291840" cy="201168"/>
           </a:xfrm>
           <a:prstGeom prst="rect">
@@ -7974,7 +7974,7 @@
           <a:p>
             <a:pPr algn="l"/>
             <a:r>
-              <a:rPr sz="750" b="0" i="0">
+              <a:rPr sz="800" b="0" i="0">
                 <a:solidFill>
                   <a:srgbClr val="1A2B35"/>
                 </a:solidFill>
@@ -7993,7 +7993,7 @@
         </p:nvSpPr>
         <p:spPr>
           <a:xfrm>
-            <a:off x="6766560" y="3218688"/>
+            <a:off x="6766560" y="3017520"/>
             <a:ext cx="4965192" cy="292608"/>
           </a:xfrm>
           <a:prstGeom prst="rect">
@@ -8038,7 +8038,7 @@
         </p:nvSpPr>
         <p:spPr>
           <a:xfrm>
-            <a:off x="6858000" y="3255264"/>
+            <a:off x="6858000" y="3054096"/>
             <a:ext cx="1463040" cy="201168"/>
           </a:xfrm>
           <a:prstGeom prst="rect">
@@ -8054,7 +8054,7 @@
           <a:p>
             <a:pPr algn="l"/>
             <a:r>
-              <a:rPr sz="750" b="1" i="0">
+              <a:rPr sz="800" b="1" i="0">
                 <a:solidFill>
                   <a:srgbClr val="147D77"/>
                 </a:solidFill>
@@ -8073,7 +8073,7 @@
         </p:nvSpPr>
         <p:spPr>
           <a:xfrm>
-            <a:off x="8366760" y="3255264"/>
+            <a:off x="8366760" y="3054096"/>
             <a:ext cx="3291840" cy="201168"/>
           </a:xfrm>
           <a:prstGeom prst="rect">
@@ -8089,7 +8089,7 @@
           <a:p>
             <a:pPr algn="l"/>
             <a:r>
-              <a:rPr sz="750" b="0" i="0">
+              <a:rPr sz="800" b="0" i="0">
                 <a:solidFill>
                   <a:srgbClr val="1A2B35"/>
                 </a:solidFill>
@@ -8108,7 +8108,7 @@
         </p:nvSpPr>
         <p:spPr>
           <a:xfrm>
-            <a:off x="6766560" y="3547872"/>
+            <a:off x="6766560" y="3346703"/>
             <a:ext cx="4965192" cy="292608"/>
           </a:xfrm>
           <a:prstGeom prst="rect">
@@ -8153,7 +8153,7 @@
         </p:nvSpPr>
         <p:spPr>
           <a:xfrm>
-            <a:off x="6858000" y="3584448"/>
+            <a:off x="6858000" y="3383279"/>
             <a:ext cx="1463040" cy="201168"/>
           </a:xfrm>
           <a:prstGeom prst="rect">
@@ -8169,7 +8169,7 @@
           <a:p>
             <a:pPr algn="l"/>
             <a:r>
-              <a:rPr sz="750" b="1" i="0">
+              <a:rPr sz="800" b="1" i="0">
                 <a:solidFill>
                   <a:srgbClr val="147D77"/>
                 </a:solidFill>
@@ -8188,7 +8188,7 @@
         </p:nvSpPr>
         <p:spPr>
           <a:xfrm>
-            <a:off x="8366760" y="3584448"/>
+            <a:off x="8366760" y="3383279"/>
             <a:ext cx="3291840" cy="201168"/>
           </a:xfrm>
           <a:prstGeom prst="rect">
@@ -8204,7 +8204,7 @@
           <a:p>
             <a:pPr algn="l"/>
             <a:r>
-              <a:rPr sz="750" b="0" i="0">
+              <a:rPr sz="800" b="0" i="0">
                 <a:solidFill>
                   <a:srgbClr val="1A2B35"/>
                 </a:solidFill>
@@ -8223,7 +8223,7 @@
         </p:nvSpPr>
         <p:spPr>
           <a:xfrm>
-            <a:off x="6766560" y="3877056"/>
+            <a:off x="6766560" y="3675887"/>
             <a:ext cx="4965192" cy="292608"/>
           </a:xfrm>
           <a:prstGeom prst="rect">
@@ -8268,7 +8268,7 @@
         </p:nvSpPr>
         <p:spPr>
           <a:xfrm>
-            <a:off x="6858000" y="3913632"/>
+            <a:off x="6858000" y="3712463"/>
             <a:ext cx="1463040" cy="201168"/>
           </a:xfrm>
           <a:prstGeom prst="rect">
@@ -8284,7 +8284,7 @@
           <a:p>
             <a:pPr algn="l"/>
             <a:r>
-              <a:rPr sz="750" b="1" i="0">
+              <a:rPr sz="800" b="1" i="0">
                 <a:solidFill>
                   <a:srgbClr val="147D77"/>
                 </a:solidFill>
@@ -8303,7 +8303,7 @@
         </p:nvSpPr>
         <p:spPr>
           <a:xfrm>
-            <a:off x="8366760" y="3913632"/>
+            <a:off x="8366760" y="3712463"/>
             <a:ext cx="3291840" cy="201168"/>
           </a:xfrm>
           <a:prstGeom prst="rect">
@@ -8319,7 +8319,7 @@
           <a:p>
             <a:pPr algn="l"/>
             <a:r>
-              <a:rPr sz="750" b="0" i="0">
+              <a:rPr sz="800" b="0" i="0">
                 <a:solidFill>
                   <a:srgbClr val="1A2B35"/>
                 </a:solidFill>
@@ -8338,8 +8338,8 @@
         </p:nvSpPr>
         <p:spPr>
           <a:xfrm>
-            <a:off x="6766560" y="4297680"/>
-            <a:ext cx="4965192" cy="182880"/>
+            <a:off x="6766560" y="4078224"/>
+            <a:ext cx="4965192" cy="201168"/>
           </a:xfrm>
           <a:prstGeom prst="rect">
             <a:avLst/>
@@ -8381,23 +8381,23 @@
         </p:nvSpPr>
         <p:spPr>
           <a:xfrm>
-            <a:off x="6858000" y="4315968"/>
-            <a:ext cx="4828031" cy="182880"/>
-          </a:xfrm>
-          <a:prstGeom prst="rect">
-            <a:avLst/>
-          </a:prstGeom>
-          <a:noFill/>
-        </p:spPr>
-        <p:txBody>
-          <a:bodyPr wrap="square">
-            <a:spAutoFit/>
-          </a:bodyPr>
-          <a:lstStyle/>
-          <a:p>
-            <a:pPr algn="l"/>
-            <a:r>
-              <a:rPr sz="750" b="1" i="0">
+            <a:off x="6858000" y="4096511"/>
+            <a:ext cx="4828031" cy="201168"/>
+          </a:xfrm>
+          <a:prstGeom prst="rect">
+            <a:avLst/>
+          </a:prstGeom>
+          <a:noFill/>
+        </p:spPr>
+        <p:txBody>
+          <a:bodyPr wrap="square">
+            <a:spAutoFit/>
+          </a:bodyPr>
+          <a:lstStyle/>
+          <a:p>
+            <a:pPr algn="l"/>
+            <a:r>
+              <a:rPr sz="800" b="1" i="0">
                 <a:solidFill>
                   <a:srgbClr val="FFFFFF"/>
                 </a:solidFill>
@@ -8416,7 +8416,7 @@
         </p:nvSpPr>
         <p:spPr>
           <a:xfrm>
-            <a:off x="6766560" y="4517136"/>
+            <a:off x="6766560" y="4297680"/>
             <a:ext cx="4965192" cy="640080"/>
           </a:xfrm>
           <a:prstGeom prst="rect">
@@ -8461,7 +8461,7 @@
         </p:nvSpPr>
         <p:spPr>
           <a:xfrm>
-            <a:off x="6858000" y="4553712"/>
+            <a:off x="6858000" y="4334256"/>
             <a:ext cx="4782312" cy="164592"/>
           </a:xfrm>
           <a:prstGeom prst="rect">
@@ -8477,7 +8477,7 @@
           <a:p>
             <a:pPr algn="l"/>
             <a:r>
-              <a:rPr sz="800" b="1" i="0">
+              <a:rPr sz="850" b="1" i="0">
                 <a:solidFill>
                   <a:srgbClr val="147D77"/>
                 </a:solidFill>
@@ -8496,7 +8496,7 @@
         </p:nvSpPr>
         <p:spPr>
           <a:xfrm>
-            <a:off x="6858000" y="4736592"/>
+            <a:off x="6858000" y="4517136"/>
             <a:ext cx="4782312" cy="402336"/>
           </a:xfrm>
           <a:prstGeom prst="rect">
@@ -8512,7 +8512,7 @@
           <a:p>
             <a:pPr algn="l"/>
             <a:r>
-              <a:rPr sz="750" b="0" i="0">
+              <a:rPr sz="800" b="0" i="0">
                 <a:solidFill>
                   <a:srgbClr val="1A2B35"/>
                 </a:solidFill>
@@ -8533,7 +8533,7 @@
         </p:nvSpPr>
         <p:spPr>
           <a:xfrm>
-            <a:off x="6766560" y="5230368"/>
+            <a:off x="6766560" y="5010912"/>
             <a:ext cx="4965192" cy="585216"/>
           </a:xfrm>
           <a:prstGeom prst="rect">
@@ -8578,7 +8578,7 @@
         </p:nvSpPr>
         <p:spPr>
           <a:xfrm>
-            <a:off x="6858000" y="5266944"/>
+            <a:off x="6858000" y="5047488"/>
             <a:ext cx="4782312" cy="164592"/>
           </a:xfrm>
           <a:prstGeom prst="rect">
@@ -8594,13 +8594,13 @@
           <a:p>
             <a:pPr algn="l"/>
             <a:r>
-              <a:rPr sz="800" b="1" i="0">
+              <a:rPr sz="850" b="1" i="0">
                 <a:solidFill>
                   <a:srgbClr val="147D77"/>
                 </a:solidFill>
                 <a:latin typeface="Calibri"/>
               </a:rPr>
-              <a:t>SOFTWARE DELIVERABLES:</a:t>
+              <a:t>SOFTWARE REPRODUCIBILITY DELIVERABLES:</a:t>
             </a:r>
           </a:p>
         </p:txBody>
@@ -8613,7 +8613,7 @@
         </p:nvSpPr>
         <p:spPr>
           <a:xfrm>
-            <a:off x="6858000" y="5449824"/>
+            <a:off x="6858000" y="5230368"/>
             <a:ext cx="4782312" cy="329184"/>
           </a:xfrm>
           <a:prstGeom prst="rect">
@@ -8629,14 +8629,14 @@
           <a:p>
             <a:pPr algn="l"/>
             <a:r>
-              <a:rPr sz="750" b="0" i="0">
+              <a:rPr sz="800" b="0" i="0">
                 <a:solidFill>
                   <a:srgbClr val="1A2B35"/>
                 </a:solidFill>
                 <a:latin typeface="Calibri"/>
               </a:rPr>
-              <a:t>• Runnable Python pipeline package (lunacorr/) with modular CLI
-• Container / environment specification (Docker / pip) + automated test suite</a:t>
+              <a:t>• Packaged Python CLI (lunacorr/) + automated pytest test suite (5 passed)
+• Dockerfile containerization specification + BENCHMARK_MANIFEST.md</a:t>
             </a:r>
           </a:p>
         </p:txBody>
@@ -8710,7 +8710,7 @@
           <a:p>
             <a:pPr algn="l"/>
             <a:r>
-              <a:rPr sz="750" b="0" i="1">
+              <a:rPr sz="800" b="0" i="1">
                 <a:solidFill>
                   <a:srgbClr val="6B7E88"/>
                 </a:solidFill>
@@ -8788,13 +8788,13 @@
           <a:p>
             <a:pPr algn="l"/>
             <a:r>
-              <a:rPr sz="700" b="0" i="0">
+              <a:rPr sz="750" b="0" i="0">
                 <a:solidFill>
                   <a:srgbClr val="6B7E88"/>
                 </a:solidFill>
                 <a:latin typeface="Calibri"/>
               </a:rPr>
-              <a:t>LUNA-CORR     •     SIH 2026     •     03 / 06</a:t>
+              <a:t>LUNA-CORR     •     SIH 2026 PS 26166     •     03 / 06</a:t>
             </a:r>
           </a:p>
         </p:txBody>
@@ -9050,13 +9050,13 @@
           <a:p>
             <a:pPr algn="l"/>
             <a:r>
-              <a:rPr sz="800" b="1" i="0">
+              <a:rPr sz="850" b="1" i="0">
                 <a:solidFill>
                   <a:srgbClr val="2E9E6E"/>
                 </a:solidFill>
                 <a:latin typeface="Calibri"/>
               </a:rPr>
-              <a:t>ALL REPORTED VALUES FROM EXECUTABLE BENCHMARK RUNS · Real-mission and controlled-simulation results are explicitly labeled.</a:t>
+              <a:t>ALL REPORTED VALUES FROM EXECUTABLE BENCHMARK RUNS · Grounded in BENCHMARK_MANIFEST.md with explicit Experiment IDs.</a:t>
             </a:r>
           </a:p>
         </p:txBody>
@@ -9070,7 +9070,7 @@
         <p:spPr>
           <a:xfrm>
             <a:off x="457200" y="960120"/>
-            <a:ext cx="6949440" cy="182880"/>
+            <a:ext cx="6949440" cy="201168"/>
           </a:xfrm>
           <a:prstGeom prst="rect">
             <a:avLst/>
@@ -9113,28 +9113,28 @@
         <p:spPr>
           <a:xfrm>
             <a:off x="548640" y="978408"/>
-            <a:ext cx="6812279" cy="182880"/>
-          </a:xfrm>
-          <a:prstGeom prst="rect">
-            <a:avLst/>
-          </a:prstGeom>
-          <a:noFill/>
-        </p:spPr>
-        <p:txBody>
-          <a:bodyPr wrap="square">
-            <a:spAutoFit/>
-          </a:bodyPr>
-          <a:lstStyle/>
-          <a:p>
-            <a:pPr algn="l"/>
-            <a:r>
-              <a:rPr sz="750" b="1" i="0">
+            <a:ext cx="6812279" cy="201168"/>
+          </a:xfrm>
+          <a:prstGeom prst="rect">
+            <a:avLst/>
+          </a:prstGeom>
+          <a:noFill/>
+        </p:spPr>
+        <p:txBody>
+          <a:bodyPr wrap="square">
+            <a:spAutoFit/>
+          </a:bodyPr>
+          <a:lstStyle/>
+          <a:p>
+            <a:pPr algn="l"/>
+            <a:r>
+              <a:rPr sz="800" b="1" i="0">
                 <a:solidFill>
                   <a:srgbClr val="FFFFFF"/>
                 </a:solidFill>
                 <a:latin typeface="Calibri"/>
               </a:rPr>
-              <a:t>REAL MISSION DATA  /  TMC-2 STEREO ABLATION STUDY (N=150, SEED FROZEN)</a:t>
+              <a:t>REAL MISSION DATA  /  TMC-2 STEREO ABLATION STUDY (EXP-TMC-FIXED, N=150 FROZEN)</a:t>
             </a:r>
           </a:p>
         </p:txBody>
@@ -9172,7 +9172,7 @@
         <p:spPr>
           <a:xfrm>
             <a:off x="457200" y="3977639"/>
-            <a:ext cx="6949440" cy="731520"/>
+            <a:ext cx="6949440" cy="749808"/>
           </a:xfrm>
           <a:prstGeom prst="rect">
             <a:avLst/>
@@ -9232,13 +9232,13 @@
           <a:p>
             <a:pPr algn="l"/>
             <a:r>
-              <a:rPr sz="800" b="1" i="0">
+              <a:rPr sz="850" b="1" i="0">
                 <a:solidFill>
                   <a:srgbClr val="2E9E6E"/>
                 </a:solidFill>
                 <a:latin typeface="Calibri"/>
               </a:rPr>
-              <a:t>RESULT 1 — REAL CHANDRAYAAN-2 TMC-2 STEREO REGISTRATION:</a:t>
+              <a:t>RESULT 1 — REAL CHANDRAYAAN-2 TMC-2 STEREO BENCHMARKS:</a:t>
             </a:r>
           </a:p>
         </p:txBody>
@@ -9252,7 +9252,7 @@
         <p:spPr>
           <a:xfrm>
             <a:off x="548640" y="4187952"/>
-            <a:ext cx="6766560" cy="475488"/>
+            <a:ext cx="6766560" cy="512064"/>
           </a:xfrm>
           <a:prstGeom prst="rect">
             <a:avLst/>
@@ -9273,9 +9273,8 @@
                 </a:solidFill>
                 <a:latin typeface="Calibri"/>
               </a:rPr>
-              <a:t>• Held-out RMSE reduced: 1.52 px → 0.84 px (44.7% held-out RMSE reduction vs Stage-3 rigid/projective baseline)
-• 95% Bootstrap Confidence Interval: [0.71, 0.97] px (B = 1000, seed frozen)
-• Evaluated on N=150 fixed held-out set, strictly withheld from transform fitting.</a:t>
+              <a:t>• EXP-TMC-FIXED (Ablation): Held-out RMSE reduced 1.52 px → 0.841 px (44.7% gain vs Stage-3 homography; 95% CI: [0.71, 0.97] px on N=150 frozen set with zero training leakage)
+• EXP-TMC-E2E (End-to-End Run): 686 inliers (77.0% ratio), TPS model chosen, held-out RMSE = 1.110 px on N=138 withheld correspondences (fitting RMSE = 0.841 px on N=548)</a:t>
             </a:r>
           </a:p>
         </p:txBody>
@@ -9349,13 +9348,13 @@
           <a:p>
             <a:pPr algn="l"/>
             <a:r>
-              <a:rPr sz="800" b="1" i="0">
+              <a:rPr sz="850" b="1" i="0">
                 <a:solidFill>
                   <a:srgbClr val="147D77"/>
                 </a:solidFill>
                 <a:latin typeface="Calibri"/>
               </a:rPr>
-              <a:t>RESULT 2 — DISJOINT SCENE NEGATIVE CONTROL (FAIL-SAFE ABSTENTION):</a:t>
+              <a:t>RESULT 2 — DISJOINT SCENE NEGATIVE CONTROL (EXP-NEG-DISJOINT):</a:t>
             </a:r>
           </a:p>
         </p:txBody>
@@ -9384,7 +9383,7 @@
           <a:p>
             <a:pPr algn="l"/>
             <a:r>
-              <a:rPr sz="800" b="0" i="0">
+              <a:rPr sz="819" b="0" i="0">
                 <a:solidFill>
                   <a:srgbClr val="1A2B35"/>
                 </a:solidFill>
@@ -9464,7 +9463,7 @@
           <a:p>
             <a:pPr algn="l"/>
             <a:r>
-              <a:rPr sz="750" b="0" i="1">
+              <a:rPr sz="780" b="0" i="1">
                 <a:solidFill>
                   <a:srgbClr val="6B7E88"/>
                 </a:solidFill>
@@ -9484,7 +9483,7 @@
         <p:spPr>
           <a:xfrm>
             <a:off x="7635240" y="960120"/>
-            <a:ext cx="4343400" cy="182880"/>
+            <a:ext cx="4343400" cy="201168"/>
           </a:xfrm>
           <a:prstGeom prst="rect">
             <a:avLst/>
@@ -9527,22 +9526,22 @@
         <p:spPr>
           <a:xfrm>
             <a:off x="7726679" y="978408"/>
-            <a:ext cx="4206240" cy="182880"/>
-          </a:xfrm>
-          <a:prstGeom prst="rect">
-            <a:avLst/>
-          </a:prstGeom>
-          <a:noFill/>
-        </p:spPr>
-        <p:txBody>
-          <a:bodyPr wrap="square">
-            <a:spAutoFit/>
-          </a:bodyPr>
-          <a:lstStyle/>
-          <a:p>
-            <a:pPr algn="l"/>
-            <a:r>
-              <a:rPr sz="750" b="1" i="0">
+            <a:ext cx="4206240" cy="201168"/>
+          </a:xfrm>
+          <a:prstGeom prst="rect">
+            <a:avLst/>
+          </a:prstGeom>
+          <a:noFill/>
+        </p:spPr>
+        <p:txBody>
+          <a:bodyPr wrap="square">
+            <a:spAutoFit/>
+          </a:bodyPr>
+          <a:lstStyle/>
+          <a:p>
+            <a:pPr algn="l"/>
+            <a:r>
+              <a:rPr sz="800" b="1" i="0">
                 <a:solidFill>
                   <a:srgbClr val="FFFFFF"/>
                 </a:solidFill>
@@ -9562,7 +9561,7 @@
         <p:spPr>
           <a:xfrm>
             <a:off x="7635240" y="1170432"/>
-            <a:ext cx="4343400" cy="237744"/>
+            <a:ext cx="4343400" cy="256032"/>
           </a:xfrm>
           <a:prstGeom prst="rect">
             <a:avLst/>
@@ -9642,28 +9641,28 @@
         <p:spPr>
           <a:xfrm>
             <a:off x="7882127" y="1197864"/>
-            <a:ext cx="1920240" cy="182880"/>
-          </a:xfrm>
-          <a:prstGeom prst="rect">
-            <a:avLst/>
-          </a:prstGeom>
-          <a:noFill/>
-        </p:spPr>
-        <p:txBody>
-          <a:bodyPr wrap="square">
-            <a:spAutoFit/>
-          </a:bodyPr>
-          <a:lstStyle/>
-          <a:p>
-            <a:pPr algn="l"/>
-            <a:r>
-              <a:rPr sz="750" b="1" i="0">
+            <a:ext cx="1965960" cy="201168"/>
+          </a:xfrm>
+          <a:prstGeom prst="rect">
+            <a:avLst/>
+          </a:prstGeom>
+          <a:noFill/>
+        </p:spPr>
+        <p:txBody>
+          <a:bodyPr wrap="square">
+            <a:spAutoFit/>
+          </a:bodyPr>
+          <a:lstStyle/>
+          <a:p>
+            <a:pPr algn="l"/>
+            <a:r>
+              <a:rPr sz="800" b="1" i="0">
                 <a:solidFill>
                   <a:srgbClr val="1A2B35"/>
                 </a:solidFill>
                 <a:latin typeface="Calibri"/>
               </a:rPr>
-              <a:t>LCN representation yield</a:t>
+              <a:t>EXP-OHRC-E2E (repeat)</a:t>
             </a:r>
           </a:p>
         </p:txBody>
@@ -9676,29 +9675,29 @@
         </p:nvSpPr>
         <p:spPr>
           <a:xfrm>
-            <a:off x="9829800" y="1197864"/>
-            <a:ext cx="1463040" cy="182880"/>
-          </a:xfrm>
-          <a:prstGeom prst="rect">
-            <a:avLst/>
-          </a:prstGeom>
-          <a:noFill/>
-        </p:spPr>
-        <p:txBody>
-          <a:bodyPr wrap="square">
-            <a:spAutoFit/>
-          </a:bodyPr>
-          <a:lstStyle/>
-          <a:p>
-            <a:pPr algn="l"/>
-            <a:r>
-              <a:rPr sz="750" b="0" i="0">
+            <a:off x="9875520" y="1197864"/>
+            <a:ext cx="1417320" cy="201168"/>
+          </a:xfrm>
+          <a:prstGeom prst="rect">
+            <a:avLst/>
+          </a:prstGeom>
+          <a:noFill/>
+        </p:spPr>
+        <p:txBody>
+          <a:bodyPr wrap="square">
+            <a:spAutoFit/>
+          </a:bodyPr>
+          <a:lstStyle/>
+          <a:p>
+            <a:pPr algn="l"/>
+            <a:r>
+              <a:rPr sz="800" b="0" i="0">
                 <a:solidFill>
                   <a:srgbClr val="2E9E6E"/>
                 </a:solidFill>
                 <a:latin typeface="Calibri"/>
               </a:rPr>
-              <a:t>+58.1% candidates vs raw</a:t>
+              <a:t>0.679 px RMSE (822 inliers)</a:t>
             </a:r>
           </a:p>
         </p:txBody>
@@ -9712,7 +9711,7 @@
         <p:spPr>
           <a:xfrm>
             <a:off x="11292840" y="1197864"/>
-            <a:ext cx="640080" cy="182880"/>
+            <a:ext cx="640080" cy="201168"/>
           </a:xfrm>
           <a:prstGeom prst="rect">
             <a:avLst/>
@@ -9727,7 +9726,7 @@
           <a:p>
             <a:pPr algn="r"/>
             <a:r>
-              <a:rPr sz="650" b="0" i="0">
+              <a:rPr sz="700" b="0" i="0">
                 <a:solidFill>
                   <a:srgbClr val="6B7E88"/>
                 </a:solidFill>
@@ -9746,8 +9745,8 @@
         </p:nvSpPr>
         <p:spPr>
           <a:xfrm>
-            <a:off x="7635240" y="1426464"/>
-            <a:ext cx="4343400" cy="237744"/>
+            <a:off x="7635240" y="1453896"/>
+            <a:ext cx="4343400" cy="256032"/>
           </a:xfrm>
           <a:prstGeom prst="rect">
             <a:avLst/>
@@ -9791,7 +9790,7 @@
         </p:nvSpPr>
         <p:spPr>
           <a:xfrm>
-            <a:off x="7680960" y="1463040"/>
+            <a:off x="7680960" y="1490472"/>
             <a:ext cx="182880" cy="182880"/>
           </a:xfrm>
           <a:prstGeom prst="rect">
@@ -9826,29 +9825,29 @@
         </p:nvSpPr>
         <p:spPr>
           <a:xfrm>
-            <a:off x="7882127" y="1453896"/>
-            <a:ext cx="1920240" cy="182880"/>
-          </a:xfrm>
-          <a:prstGeom prst="rect">
-            <a:avLst/>
-          </a:prstGeom>
-          <a:noFill/>
-        </p:spPr>
-        <p:txBody>
-          <a:bodyPr wrap="square">
-            <a:spAutoFit/>
-          </a:bodyPr>
-          <a:lstStyle/>
-          <a:p>
-            <a:pPr algn="l"/>
-            <a:r>
-              <a:rPr sz="750" b="1" i="0">
+            <a:off x="7882127" y="1481328"/>
+            <a:ext cx="1965960" cy="201168"/>
+          </a:xfrm>
+          <a:prstGeom prst="rect">
+            <a:avLst/>
+          </a:prstGeom>
+          <a:noFill/>
+        </p:spPr>
+        <p:txBody>
+          <a:bodyPr wrap="square">
+            <a:spAutoFit/>
+          </a:bodyPr>
+          <a:lstStyle/>
+          <a:p>
+            <a:pPr algn="l"/>
+            <a:r>
+              <a:rPr sz="800" b="1" i="0">
                 <a:solidFill>
                   <a:srgbClr val="1A2B35"/>
                 </a:solidFill>
                 <a:latin typeface="Calibri"/>
               </a:rPr>
-              <a:t>TMC-2 stereo held-out</a:t>
+              <a:t>EXP-TMC-E2E (stereo)</a:t>
             </a:r>
           </a:p>
         </p:txBody>
@@ -9861,29 +9860,29 @@
         </p:nvSpPr>
         <p:spPr>
           <a:xfrm>
-            <a:off x="9829800" y="1453896"/>
-            <a:ext cx="1463040" cy="182880"/>
-          </a:xfrm>
-          <a:prstGeom prst="rect">
-            <a:avLst/>
-          </a:prstGeom>
-          <a:noFill/>
-        </p:spPr>
-        <p:txBody>
-          <a:bodyPr wrap="square">
-            <a:spAutoFit/>
-          </a:bodyPr>
-          <a:lstStyle/>
-          <a:p>
-            <a:pPr algn="l"/>
-            <a:r>
-              <a:rPr sz="750" b="0" i="0">
+            <a:off x="9875520" y="1481328"/>
+            <a:ext cx="1417320" cy="201168"/>
+          </a:xfrm>
+          <a:prstGeom prst="rect">
+            <a:avLst/>
+          </a:prstGeom>
+          <a:noFill/>
+        </p:spPr>
+        <p:txBody>
+          <a:bodyPr wrap="square">
+            <a:spAutoFit/>
+          </a:bodyPr>
+          <a:lstStyle/>
+          <a:p>
+            <a:pPr algn="l"/>
+            <a:r>
+              <a:rPr sz="800" b="0" i="0">
                 <a:solidFill>
                   <a:srgbClr val="2E9E6E"/>
                 </a:solidFill>
                 <a:latin typeface="Calibri"/>
               </a:rPr>
-              <a:t>0.84 px RMSE (44.7% gain)</a:t>
+              <a:t>1.110 px RMSE (686 inliers)</a:t>
             </a:r>
           </a:p>
         </p:txBody>
@@ -9896,8 +9895,8 @@
         </p:nvSpPr>
         <p:spPr>
           <a:xfrm>
-            <a:off x="11292840" y="1453896"/>
-            <a:ext cx="640080" cy="182880"/>
+            <a:off x="11292840" y="1481328"/>
+            <a:ext cx="640080" cy="201168"/>
           </a:xfrm>
           <a:prstGeom prst="rect">
             <a:avLst/>
@@ -9912,7 +9911,7 @@
           <a:p>
             <a:pPr algn="r"/>
             <a:r>
-              <a:rPr sz="650" b="0" i="0">
+              <a:rPr sz="700" b="0" i="0">
                 <a:solidFill>
                   <a:srgbClr val="6B7E88"/>
                 </a:solidFill>
@@ -9931,8 +9930,8 @@
         </p:nvSpPr>
         <p:spPr>
           <a:xfrm>
-            <a:off x="7635240" y="1682496"/>
-            <a:ext cx="4343400" cy="237744"/>
+            <a:off x="7635240" y="1737360"/>
+            <a:ext cx="4343400" cy="256032"/>
           </a:xfrm>
           <a:prstGeom prst="rect">
             <a:avLst/>
@@ -9976,7 +9975,7 @@
         </p:nvSpPr>
         <p:spPr>
           <a:xfrm>
-            <a:off x="7680960" y="1719072"/>
+            <a:off x="7680960" y="1773936"/>
             <a:ext cx="182880" cy="182880"/>
           </a:xfrm>
           <a:prstGeom prst="rect">
@@ -10011,29 +10010,29 @@
         </p:nvSpPr>
         <p:spPr>
           <a:xfrm>
-            <a:off x="7882127" y="1709928"/>
-            <a:ext cx="1920240" cy="182880"/>
-          </a:xfrm>
-          <a:prstGeom prst="rect">
-            <a:avLst/>
-          </a:prstGeom>
-          <a:noFill/>
-        </p:spPr>
-        <p:txBody>
-          <a:bodyPr wrap="square">
-            <a:spAutoFit/>
-          </a:bodyPr>
-          <a:lstStyle/>
-          <a:p>
-            <a:pPr algn="l"/>
-            <a:r>
-              <a:rPr sz="750" b="1" i="0">
+            <a:off x="7882127" y="1764792"/>
+            <a:ext cx="1965960" cy="201168"/>
+          </a:xfrm>
+          <a:prstGeom prst="rect">
+            <a:avLst/>
+          </a:prstGeom>
+          <a:noFill/>
+        </p:spPr>
+        <p:txBody>
+          <a:bodyPr wrap="square">
+            <a:spAutoFit/>
+          </a:bodyPr>
+          <a:lstStyle/>
+          <a:p>
+            <a:pPr algn="l"/>
+            <a:r>
+              <a:rPr sz="800" b="1" i="0">
                 <a:solidFill>
                   <a:srgbClr val="1A2B35"/>
                 </a:solidFill>
                 <a:latin typeface="Calibri"/>
               </a:rPr>
-              <a:t>Bootstrap 95% CI (B=1000)</a:t>
+              <a:t>EXP-TMC-FIXED (ablation)</a:t>
             </a:r>
           </a:p>
         </p:txBody>
@@ -10046,29 +10045,29 @@
         </p:nvSpPr>
         <p:spPr>
           <a:xfrm>
-            <a:off x="9829800" y="1709928"/>
-            <a:ext cx="1463040" cy="182880"/>
-          </a:xfrm>
-          <a:prstGeom prst="rect">
-            <a:avLst/>
-          </a:prstGeom>
-          <a:noFill/>
-        </p:spPr>
-        <p:txBody>
-          <a:bodyPr wrap="square">
-            <a:spAutoFit/>
-          </a:bodyPr>
-          <a:lstStyle/>
-          <a:p>
-            <a:pPr algn="l"/>
-            <a:r>
-              <a:rPr sz="750" b="0" i="0">
+            <a:off x="9875520" y="1764792"/>
+            <a:ext cx="1417320" cy="201168"/>
+          </a:xfrm>
+          <a:prstGeom prst="rect">
+            <a:avLst/>
+          </a:prstGeom>
+          <a:noFill/>
+        </p:spPr>
+        <p:txBody>
+          <a:bodyPr wrap="square">
+            <a:spAutoFit/>
+          </a:bodyPr>
+          <a:lstStyle/>
+          <a:p>
+            <a:pPr algn="l"/>
+            <a:r>
+              <a:rPr sz="800" b="0" i="0">
                 <a:solidFill>
                   <a:srgbClr val="2E9E6E"/>
                 </a:solidFill>
                 <a:latin typeface="Calibri"/>
               </a:rPr>
-              <a:t>[0.71, 0.97] px, frozen</a:t>
+              <a:t>0.841 px [0.71, 0.97] px</a:t>
             </a:r>
           </a:p>
         </p:txBody>
@@ -10081,8 +10080,8 @@
         </p:nvSpPr>
         <p:spPr>
           <a:xfrm>
-            <a:off x="11292840" y="1709928"/>
-            <a:ext cx="640080" cy="182880"/>
+            <a:off x="11292840" y="1764792"/>
+            <a:ext cx="640080" cy="201168"/>
           </a:xfrm>
           <a:prstGeom prst="rect">
             <a:avLst/>
@@ -10097,7 +10096,7 @@
           <a:p>
             <a:pPr algn="r"/>
             <a:r>
-              <a:rPr sz="650" b="0" i="0">
+              <a:rPr sz="700" b="0" i="0">
                 <a:solidFill>
                   <a:srgbClr val="6B7E88"/>
                 </a:solidFill>
@@ -10116,8 +10115,8 @@
         </p:nvSpPr>
         <p:spPr>
           <a:xfrm>
-            <a:off x="7635240" y="1938528"/>
-            <a:ext cx="4343400" cy="237744"/>
+            <a:off x="7635240" y="2020824"/>
+            <a:ext cx="4343400" cy="256032"/>
           </a:xfrm>
           <a:prstGeom prst="rect">
             <a:avLst/>
@@ -10161,7 +10160,7 @@
         </p:nvSpPr>
         <p:spPr>
           <a:xfrm>
-            <a:off x="7680960" y="1975104"/>
+            <a:off x="7680960" y="2057400"/>
             <a:ext cx="182880" cy="182880"/>
           </a:xfrm>
           <a:prstGeom prst="rect">
@@ -10179,7 +10178,7 @@
             <a:r>
               <a:rPr sz="850" b="1" i="0">
                 <a:solidFill>
-                  <a:srgbClr val="147D77"/>
+                  <a:srgbClr val="2E9E6E"/>
                 </a:solidFill>
                 <a:latin typeface="Calibri"/>
               </a:rPr>
@@ -10196,29 +10195,29 @@
         </p:nvSpPr>
         <p:spPr>
           <a:xfrm>
-            <a:off x="7882127" y="1965960"/>
-            <a:ext cx="1920240" cy="182880"/>
-          </a:xfrm>
-          <a:prstGeom prst="rect">
-            <a:avLst/>
-          </a:prstGeom>
-          <a:noFill/>
-        </p:spPr>
-        <p:txBody>
-          <a:bodyPr wrap="square">
-            <a:spAutoFit/>
-          </a:bodyPr>
-          <a:lstStyle/>
-          <a:p>
-            <a:pPr algn="l"/>
-            <a:r>
-              <a:rPr sz="750" b="1" i="0">
+            <a:off x="7882127" y="2048255"/>
+            <a:ext cx="1965960" cy="201168"/>
+          </a:xfrm>
+          <a:prstGeom prst="rect">
+            <a:avLst/>
+          </a:prstGeom>
+          <a:noFill/>
+        </p:spPr>
+        <p:txBody>
+          <a:bodyPr wrap="square">
+            <a:spAutoFit/>
+          </a:bodyPr>
+          <a:lstStyle/>
+          <a:p>
+            <a:pPr algn="l"/>
+            <a:r>
+              <a:rPr sz="800" b="1" i="0">
                 <a:solidFill>
                   <a:srgbClr val="1A2B35"/>
                 </a:solidFill>
                 <a:latin typeface="Calibri"/>
               </a:rPr>
-              <a:t>Controlled synthetic GT</a:t>
+              <a:t>EXP-NEG-DISJOINT (control)</a:t>
             </a:r>
           </a:p>
         </p:txBody>
@@ -10231,29 +10230,29 @@
         </p:nvSpPr>
         <p:spPr>
           <a:xfrm>
-            <a:off x="9829800" y="1965960"/>
-            <a:ext cx="1463040" cy="182880"/>
-          </a:xfrm>
-          <a:prstGeom prst="rect">
-            <a:avLst/>
-          </a:prstGeom>
-          <a:noFill/>
-        </p:spPr>
-        <p:txBody>
-          <a:bodyPr wrap="square">
-            <a:spAutoFit/>
-          </a:bodyPr>
-          <a:lstStyle/>
-          <a:p>
-            <a:pPr algn="l"/>
-            <a:r>
-              <a:rPr sz="750" b="0" i="0">
-                <a:solidFill>
-                  <a:srgbClr val="147D77"/>
-                </a:solidFill>
-                <a:latin typeface="Calibri"/>
-              </a:rPr>
-              <a:t>0.18 px median error</a:t>
+            <a:off x="9875520" y="2048255"/>
+            <a:ext cx="1417320" cy="201168"/>
+          </a:xfrm>
+          <a:prstGeom prst="rect">
+            <a:avLst/>
+          </a:prstGeom>
+          <a:noFill/>
+        </p:spPr>
+        <p:txBody>
+          <a:bodyPr wrap="square">
+            <a:spAutoFit/>
+          </a:bodyPr>
+          <a:lstStyle/>
+          <a:p>
+            <a:pPr algn="l"/>
+            <a:r>
+              <a:rPr sz="800" b="0" i="0">
+                <a:solidFill>
+                  <a:srgbClr val="2E9E6E"/>
+                </a:solidFill>
+                <a:latin typeface="Calibri"/>
+              </a:rPr>
+              <a:t>1/1 rejected (fails safely)</a:t>
             </a:r>
           </a:p>
         </p:txBody>
@@ -10266,8 +10265,8 @@
         </p:nvSpPr>
         <p:spPr>
           <a:xfrm>
-            <a:off x="11292840" y="1965960"/>
-            <a:ext cx="640080" cy="182880"/>
+            <a:off x="11292840" y="2048255"/>
+            <a:ext cx="640080" cy="201168"/>
           </a:xfrm>
           <a:prstGeom prst="rect">
             <a:avLst/>
@@ -10282,13 +10281,13 @@
           <a:p>
             <a:pPr algn="r"/>
             <a:r>
-              <a:rPr sz="650" b="0" i="0">
+              <a:rPr sz="700" b="0" i="0">
                 <a:solidFill>
                   <a:srgbClr val="6B7E88"/>
                 </a:solidFill>
                 <a:latin typeface="Calibri"/>
               </a:rPr>
-              <a:t>[Simulation]</a:t>
+              <a:t>[Real Data]</a:t>
             </a:r>
           </a:p>
         </p:txBody>
@@ -10301,8 +10300,8 @@
         </p:nvSpPr>
         <p:spPr>
           <a:xfrm>
-            <a:off x="7635240" y="2194560"/>
-            <a:ext cx="4343400" cy="237744"/>
+            <a:off x="7635240" y="2304288"/>
+            <a:ext cx="4343400" cy="256032"/>
           </a:xfrm>
           <a:prstGeom prst="rect">
             <a:avLst/>
@@ -10346,7 +10345,7 @@
         </p:nvSpPr>
         <p:spPr>
           <a:xfrm>
-            <a:off x="7680960" y="2231136"/>
+            <a:off x="7680960" y="2340864"/>
             <a:ext cx="182880" cy="182880"/>
           </a:xfrm>
           <a:prstGeom prst="rect">
@@ -10381,29 +10380,29 @@
         </p:nvSpPr>
         <p:spPr>
           <a:xfrm>
-            <a:off x="7882127" y="2221992"/>
-            <a:ext cx="1920240" cy="182880"/>
-          </a:xfrm>
-          <a:prstGeom prst="rect">
-            <a:avLst/>
-          </a:prstGeom>
-          <a:noFill/>
-        </p:spPr>
-        <p:txBody>
-          <a:bodyPr wrap="square">
-            <a:spAutoFit/>
-          </a:bodyPr>
-          <a:lstStyle/>
-          <a:p>
-            <a:pPr algn="l"/>
-            <a:r>
-              <a:rPr sz="750" b="1" i="0">
+            <a:off x="7882127" y="2331720"/>
+            <a:ext cx="1965960" cy="201168"/>
+          </a:xfrm>
+          <a:prstGeom prst="rect">
+            <a:avLst/>
+          </a:prstGeom>
+          <a:noFill/>
+        </p:spPr>
+        <p:txBody>
+          <a:bodyPr wrap="square">
+            <a:spAutoFit/>
+          </a:bodyPr>
+          <a:lstStyle/>
+          <a:p>
+            <a:pPr algn="l"/>
+            <a:r>
+              <a:rPr sz="800" b="1" i="0">
                 <a:solidFill>
                   <a:srgbClr val="1A2B35"/>
                 </a:solidFill>
                 <a:latin typeface="Calibri"/>
               </a:rPr>
-              <a:t>Disjoint negative control</a:t>
+              <a:t>I/O latency (pyramid)</a:t>
             </a:r>
           </a:p>
         </p:txBody>
@@ -10416,29 +10415,29 @@
         </p:nvSpPr>
         <p:spPr>
           <a:xfrm>
-            <a:off x="9829800" y="2221992"/>
-            <a:ext cx="1463040" cy="182880"/>
-          </a:xfrm>
-          <a:prstGeom prst="rect">
-            <a:avLst/>
-          </a:prstGeom>
-          <a:noFill/>
-        </p:spPr>
-        <p:txBody>
-          <a:bodyPr wrap="square">
-            <a:spAutoFit/>
-          </a:bodyPr>
-          <a:lstStyle/>
-          <a:p>
-            <a:pPr algn="l"/>
-            <a:r>
-              <a:rPr sz="750" b="0" i="0">
+            <a:off x="9875520" y="2331720"/>
+            <a:ext cx="1417320" cy="201168"/>
+          </a:xfrm>
+          <a:prstGeom prst="rect">
+            <a:avLst/>
+          </a:prstGeom>
+          <a:noFill/>
+        </p:spPr>
+        <p:txBody>
+          <a:bodyPr wrap="square">
+            <a:spAutoFit/>
+          </a:bodyPr>
+          <a:lstStyle/>
+          <a:p>
+            <a:pPr algn="l"/>
+            <a:r>
+              <a:rPr sz="800" b="0" i="0">
                 <a:solidFill>
                   <a:srgbClr val="2E9E6E"/>
                 </a:solidFill>
                 <a:latin typeface="Calibri"/>
               </a:rPr>
-              <a:t>1/1 rejected (fails safely)</a:t>
+              <a:t>Median 34.4 ms, p95 &lt; 80 ms</a:t>
             </a:r>
           </a:p>
         </p:txBody>
@@ -10451,8 +10450,8 @@
         </p:nvSpPr>
         <p:spPr>
           <a:xfrm>
-            <a:off x="11292840" y="2221992"/>
-            <a:ext cx="640080" cy="182880"/>
+            <a:off x="11292840" y="2331720"/>
+            <a:ext cx="640080" cy="201168"/>
           </a:xfrm>
           <a:prstGeom prst="rect">
             <a:avLst/>
@@ -10467,7 +10466,7 @@
           <a:p>
             <a:pPr algn="r"/>
             <a:r>
-              <a:rPr sz="650" b="0" i="0">
+              <a:rPr sz="700" b="0" i="0">
                 <a:solidFill>
                   <a:srgbClr val="6B7E88"/>
                 </a:solidFill>
@@ -10486,8 +10485,8 @@
         </p:nvSpPr>
         <p:spPr>
           <a:xfrm>
-            <a:off x="7635240" y="2450592"/>
-            <a:ext cx="4343400" cy="237744"/>
+            <a:off x="7635240" y="2587752"/>
+            <a:ext cx="4343400" cy="256032"/>
           </a:xfrm>
           <a:prstGeom prst="rect">
             <a:avLst/>
@@ -10531,7 +10530,7 @@
         </p:nvSpPr>
         <p:spPr>
           <a:xfrm>
-            <a:off x="7680960" y="2487168"/>
+            <a:off x="7680960" y="2624328"/>
             <a:ext cx="182880" cy="182880"/>
           </a:xfrm>
           <a:prstGeom prst="rect">
@@ -10549,7 +10548,7 @@
             <a:r>
               <a:rPr sz="850" b="1" i="0">
                 <a:solidFill>
-                  <a:srgbClr val="2E9E6E"/>
+                  <a:srgbClr val="147D77"/>
                 </a:solidFill>
                 <a:latin typeface="Calibri"/>
               </a:rPr>
@@ -10566,29 +10565,29 @@
         </p:nvSpPr>
         <p:spPr>
           <a:xfrm>
-            <a:off x="7882127" y="2478024"/>
-            <a:ext cx="1920240" cy="182880"/>
-          </a:xfrm>
-          <a:prstGeom prst="rect">
-            <a:avLst/>
-          </a:prstGeom>
-          <a:noFill/>
-        </p:spPr>
-        <p:txBody>
-          <a:bodyPr wrap="square">
-            <a:spAutoFit/>
-          </a:bodyPr>
-          <a:lstStyle/>
-          <a:p>
-            <a:pPr algn="l"/>
-            <a:r>
-              <a:rPr sz="750" b="1" i="0">
+            <a:off x="7882127" y="2615184"/>
+            <a:ext cx="1965960" cy="201168"/>
+          </a:xfrm>
+          <a:prstGeom prst="rect">
+            <a:avLst/>
+          </a:prstGeom>
+          <a:noFill/>
+        </p:spPr>
+        <p:txBody>
+          <a:bodyPr wrap="square">
+            <a:spAutoFit/>
+          </a:bodyPr>
+          <a:lstStyle/>
+          <a:p>
+            <a:pPr algn="l"/>
+            <a:r>
+              <a:rPr sz="800" b="1" i="0">
                 <a:solidFill>
                   <a:srgbClr val="1A2B35"/>
                 </a:solidFill>
                 <a:latin typeface="Calibri"/>
               </a:rPr>
-              <a:t>I/O latency (pyramid reader)</a:t>
+              <a:t>EXP-SYN-ILLUM (Mode C)</a:t>
             </a:r>
           </a:p>
         </p:txBody>
@@ -10601,29 +10600,29 @@
         </p:nvSpPr>
         <p:spPr>
           <a:xfrm>
-            <a:off x="9829800" y="2478024"/>
-            <a:ext cx="1463040" cy="182880"/>
-          </a:xfrm>
-          <a:prstGeom prst="rect">
-            <a:avLst/>
-          </a:prstGeom>
-          <a:noFill/>
-        </p:spPr>
-        <p:txBody>
-          <a:bodyPr wrap="square">
-            <a:spAutoFit/>
-          </a:bodyPr>
-          <a:lstStyle/>
-          <a:p>
-            <a:pPr algn="l"/>
-            <a:r>
-              <a:rPr sz="750" b="0" i="0">
-                <a:solidFill>
-                  <a:srgbClr val="2E9E6E"/>
-                </a:solidFill>
-                <a:latin typeface="Calibri"/>
-              </a:rPr>
-              <a:t>Median 34.4 ms, p95 &lt; 80 ms</a:t>
+            <a:off x="9875520" y="2615184"/>
+            <a:ext cx="1417320" cy="201168"/>
+          </a:xfrm>
+          <a:prstGeom prst="rect">
+            <a:avLst/>
+          </a:prstGeom>
+          <a:noFill/>
+        </p:spPr>
+        <p:txBody>
+          <a:bodyPr wrap="square">
+            <a:spAutoFit/>
+          </a:bodyPr>
+          <a:lstStyle/>
+          <a:p>
+            <a:pPr algn="l"/>
+            <a:r>
+              <a:rPr sz="800" b="0" i="0">
+                <a:solidFill>
+                  <a:srgbClr val="147D77"/>
+                </a:solidFill>
+                <a:latin typeface="Calibri"/>
+              </a:rPr>
+              <a:t>742–1,187 inliers (&gt;99% prec)</a:t>
             </a:r>
           </a:p>
         </p:txBody>
@@ -10636,8 +10635,8 @@
         </p:nvSpPr>
         <p:spPr>
           <a:xfrm>
-            <a:off x="11292840" y="2478024"/>
-            <a:ext cx="640080" cy="182880"/>
+            <a:off x="11292840" y="2615184"/>
+            <a:ext cx="640080" cy="201168"/>
           </a:xfrm>
           <a:prstGeom prst="rect">
             <a:avLst/>
@@ -10652,13 +10651,13 @@
           <a:p>
             <a:pPr algn="r"/>
             <a:r>
-              <a:rPr sz="650" b="0" i="0">
+              <a:rPr sz="700" b="0" i="0">
                 <a:solidFill>
                   <a:srgbClr val="6B7E88"/>
                 </a:solidFill>
                 <a:latin typeface="Calibri"/>
               </a:rPr>
-              <a:t>[Real Data]</a:t>
+              <a:t>[Simulation]</a:t>
             </a:r>
           </a:p>
         </p:txBody>
@@ -10671,8 +10670,8 @@
         </p:nvSpPr>
         <p:spPr>
           <a:xfrm>
-            <a:off x="7635240" y="2706624"/>
-            <a:ext cx="4343400" cy="237744"/>
+            <a:off x="7635240" y="2871216"/>
+            <a:ext cx="4343400" cy="256032"/>
           </a:xfrm>
           <a:prstGeom prst="rect">
             <a:avLst/>
@@ -10716,7 +10715,7 @@
         </p:nvSpPr>
         <p:spPr>
           <a:xfrm>
-            <a:off x="7680960" y="2743200"/>
+            <a:off x="7680960" y="2907792"/>
             <a:ext cx="182880" cy="182880"/>
           </a:xfrm>
           <a:prstGeom prst="rect">
@@ -10734,7 +10733,7 @@
             <a:r>
               <a:rPr sz="850" b="1" i="0">
                 <a:solidFill>
-                  <a:srgbClr val="147D77"/>
+                  <a:srgbClr val="C4891E"/>
                 </a:solidFill>
                 <a:latin typeface="Calibri"/>
               </a:rPr>
@@ -10751,29 +10750,29 @@
         </p:nvSpPr>
         <p:spPr>
           <a:xfrm>
-            <a:off x="7882127" y="2734056"/>
-            <a:ext cx="1920240" cy="182880"/>
-          </a:xfrm>
-          <a:prstGeom prst="rect">
-            <a:avLst/>
-          </a:prstGeom>
-          <a:noFill/>
-        </p:spPr>
-        <p:txBody>
-          <a:bodyPr wrap="square">
-            <a:spAutoFit/>
-          </a:bodyPr>
-          <a:lstStyle/>
-          <a:p>
-            <a:pPr algn="l"/>
-            <a:r>
-              <a:rPr sz="750" b="1" i="0">
+            <a:off x="7882127" y="2898648"/>
+            <a:ext cx="1965960" cy="201168"/>
+          </a:xfrm>
+          <a:prstGeom prst="rect">
+            <a:avLst/>
+          </a:prstGeom>
+          <a:noFill/>
+        </p:spPr>
+        <p:txBody>
+          <a:bodyPr wrap="square">
+            <a:spAutoFit/>
+          </a:bodyPr>
+          <a:lstStyle/>
+          <a:p>
+            <a:pPr algn="l"/>
+            <a:r>
+              <a:rPr sz="800" b="1" i="0">
                 <a:solidFill>
                   <a:srgbClr val="1A2B35"/>
                 </a:solidFill>
                 <a:latin typeface="Calibri"/>
               </a:rPr>
-              <a:t>Controlled re-illumination</a:t>
+              <a:t>Real cross-sensor overlap</a:t>
             </a:r>
           </a:p>
         </p:txBody>
@@ -10786,29 +10785,29 @@
         </p:nvSpPr>
         <p:spPr>
           <a:xfrm>
-            <a:off x="9829800" y="2734056"/>
-            <a:ext cx="1463040" cy="182880"/>
-          </a:xfrm>
-          <a:prstGeom prst="rect">
-            <a:avLst/>
-          </a:prstGeom>
-          <a:noFill/>
-        </p:spPr>
-        <p:txBody>
-          <a:bodyPr wrap="square">
-            <a:spAutoFit/>
-          </a:bodyPr>
-          <a:lstStyle/>
-          <a:p>
-            <a:pPr algn="l"/>
-            <a:r>
-              <a:rPr sz="750" b="0" i="0">
-                <a:solidFill>
-                  <a:srgbClr val="147D77"/>
-                </a:solidFill>
-                <a:latin typeface="Calibri"/>
-              </a:rPr>
-              <a:t>1,679–2,859 inliers</a:t>
+            <a:off x="9875520" y="2898648"/>
+            <a:ext cx="1417320" cy="201168"/>
+          </a:xfrm>
+          <a:prstGeom prst="rect">
+            <a:avLst/>
+          </a:prstGeom>
+          <a:noFill/>
+        </p:spPr>
+        <p:txBody>
+          <a:bodyPr wrap="square">
+            <a:spAutoFit/>
+          </a:bodyPr>
+          <a:lstStyle/>
+          <a:p>
+            <a:pPr algn="l"/>
+            <a:r>
+              <a:rPr sz="800" b="0" i="0">
+                <a:solidFill>
+                  <a:srgbClr val="C4891E"/>
+                </a:solidFill>
+                <a:latin typeface="Calibri"/>
+              </a:rPr>
+              <a:t>Experiment pending</a:t>
             </a:r>
           </a:p>
         </p:txBody>
@@ -10821,8 +10820,8 @@
         </p:nvSpPr>
         <p:spPr>
           <a:xfrm>
-            <a:off x="11292840" y="2734056"/>
-            <a:ext cx="640080" cy="182880"/>
+            <a:off x="11292840" y="2898648"/>
+            <a:ext cx="640080" cy="201168"/>
           </a:xfrm>
           <a:prstGeom prst="rect">
             <a:avLst/>
@@ -10837,13 +10836,13 @@
           <a:p>
             <a:pPr algn="r"/>
             <a:r>
-              <a:rPr sz="650" b="0" i="0">
+              <a:rPr sz="700" b="0" i="0">
                 <a:solidFill>
                   <a:srgbClr val="6B7E88"/>
                 </a:solidFill>
                 <a:latin typeface="Calibri"/>
               </a:rPr>
-              <a:t>[Simulation]</a:t>
+              <a:t>[Roadmap]</a:t>
             </a:r>
           </a:p>
         </p:txBody>
@@ -10856,8 +10855,86 @@
         </p:nvSpPr>
         <p:spPr>
           <a:xfrm>
-            <a:off x="7635240" y="2962656"/>
-            <a:ext cx="4343400" cy="237744"/>
+            <a:off x="7635240" y="3429000"/>
+            <a:ext cx="4343400" cy="201168"/>
+          </a:xfrm>
+          <a:prstGeom prst="rect">
+            <a:avLst/>
+          </a:prstGeom>
+          <a:solidFill>
+            <a:srgbClr val="147D77"/>
+          </a:solidFill>
+          <a:ln>
+            <a:noFill/>
+          </a:ln>
+        </p:spPr>
+        <p:style>
+          <a:lnRef idx="1">
+            <a:schemeClr val="accent1"/>
+          </a:lnRef>
+          <a:fillRef idx="3">
+            <a:schemeClr val="accent1"/>
+          </a:fillRef>
+          <a:effectRef idx="2">
+            <a:schemeClr val="accent1"/>
+          </a:effectRef>
+          <a:fontRef idx="minor">
+            <a:schemeClr val="lt1"/>
+          </a:fontRef>
+        </p:style>
+        <p:txBody>
+          <a:bodyPr rtlCol="0" anchor="ctr"/>
+          <a:lstStyle/>
+          <a:p>
+            <a:pPr algn="ctr"/>
+          </a:p>
+        </p:txBody>
+      </p:sp>
+      <p:sp>
+        <p:nvSpPr>
+          <p:cNvPr id="57" name="TextBox 56"/>
+          <p:cNvSpPr txBox="1"/>
+          <p:nvPr/>
+        </p:nvSpPr>
+        <p:spPr>
+          <a:xfrm>
+            <a:off x="7726679" y="3447288"/>
+            <a:ext cx="4206240" cy="201168"/>
+          </a:xfrm>
+          <a:prstGeom prst="rect">
+            <a:avLst/>
+          </a:prstGeom>
+          <a:noFill/>
+        </p:spPr>
+        <p:txBody>
+          <a:bodyPr wrap="square">
+            <a:spAutoFit/>
+          </a:bodyPr>
+          <a:lstStyle/>
+          <a:p>
+            <a:pPr algn="l"/>
+            <a:r>
+              <a:rPr sz="800" b="1" i="0">
+                <a:solidFill>
+                  <a:srgbClr val="FFFFFF"/>
+                </a:solidFill>
+                <a:latin typeface="Calibri"/>
+              </a:rPr>
+              <a:t>CLAIMS / EVIDENCE LEDGER</a:t>
+            </a:r>
+          </a:p>
+        </p:txBody>
+      </p:sp>
+      <p:sp>
+        <p:nvSpPr>
+          <p:cNvPr id="58" name="Rectangle 57"/>
+          <p:cNvSpPr/>
+          <p:nvPr/>
+        </p:nvSpPr>
+        <p:spPr>
+          <a:xfrm>
+            <a:off x="7635240" y="3675887"/>
+            <a:ext cx="4343400" cy="365760"/>
           </a:xfrm>
           <a:prstGeom prst="rect">
             <a:avLst/>
@@ -10895,13 +10972,13 @@
       </p:sp>
       <p:sp>
         <p:nvSpPr>
-          <p:cNvPr id="57" name="TextBox 56"/>
-          <p:cNvSpPr txBox="1"/>
-          <p:nvPr/>
-        </p:nvSpPr>
-        <p:spPr>
-          <a:xfrm>
-            <a:off x="7680960" y="2999232"/>
+          <p:cNvPr id="59" name="TextBox 58"/>
+          <p:cNvSpPr txBox="1"/>
+          <p:nvPr/>
+        </p:nvSpPr>
+        <p:spPr>
+          <a:xfrm>
+            <a:off x="7699248" y="3712463"/>
             <a:ext cx="182880" cy="182880"/>
           </a:xfrm>
           <a:prstGeom prst="rect">
@@ -10919,207 +10996,94 @@
             <a:r>
               <a:rPr sz="850" b="1" i="0">
                 <a:solidFill>
-                  <a:srgbClr val="C4891E"/>
-                </a:solidFill>
-                <a:latin typeface="Calibri"/>
-              </a:rPr>
-              <a:t>●</a:t>
-            </a:r>
-          </a:p>
-        </p:txBody>
-      </p:sp>
-      <p:sp>
-        <p:nvSpPr>
-          <p:cNvPr id="58" name="TextBox 57"/>
-          <p:cNvSpPr txBox="1"/>
-          <p:nvPr/>
-        </p:nvSpPr>
-        <p:spPr>
-          <a:xfrm>
-            <a:off x="7882127" y="2990088"/>
-            <a:ext cx="1920240" cy="182880"/>
-          </a:xfrm>
-          <a:prstGeom prst="rect">
-            <a:avLst/>
-          </a:prstGeom>
-          <a:noFill/>
-        </p:spPr>
-        <p:txBody>
-          <a:bodyPr wrap="square">
-            <a:spAutoFit/>
-          </a:bodyPr>
-          <a:lstStyle/>
-          <a:p>
-            <a:pPr algn="l"/>
-            <a:r>
-              <a:rPr sz="750" b="1" i="0">
+                  <a:srgbClr val="2E9E6E"/>
+                </a:solidFill>
+                <a:latin typeface="Calibri"/>
+              </a:rPr>
+              <a:t>■</a:t>
+            </a:r>
+          </a:p>
+        </p:txBody>
+      </p:sp>
+      <p:sp>
+        <p:nvSpPr>
+          <p:cNvPr id="60" name="TextBox 59"/>
+          <p:cNvSpPr txBox="1"/>
+          <p:nvPr/>
+        </p:nvSpPr>
+        <p:spPr>
+          <a:xfrm>
+            <a:off x="7900416" y="3694175"/>
+            <a:ext cx="3977639" cy="164592"/>
+          </a:xfrm>
+          <a:prstGeom prst="rect">
+            <a:avLst/>
+          </a:prstGeom>
+          <a:noFill/>
+        </p:spPr>
+        <p:txBody>
+          <a:bodyPr wrap="square">
+            <a:spAutoFit/>
+          </a:bodyPr>
+          <a:lstStyle/>
+          <a:p>
+            <a:pPr algn="l"/>
+            <a:r>
+              <a:rPr sz="800" b="1" i="0">
+                <a:solidFill>
+                  <a:srgbClr val="2E9E6E"/>
+                </a:solidFill>
+                <a:latin typeface="Calibri"/>
+              </a:rPr>
+              <a:t>DEMONSTRATED ON REAL-DATA BENCHMARKS</a:t>
+            </a:r>
+          </a:p>
+        </p:txBody>
+      </p:sp>
+      <p:sp>
+        <p:nvSpPr>
+          <p:cNvPr id="61" name="TextBox 60"/>
+          <p:cNvSpPr txBox="1"/>
+          <p:nvPr/>
+        </p:nvSpPr>
+        <p:spPr>
+          <a:xfrm>
+            <a:off x="7900416" y="3858768"/>
+            <a:ext cx="3977639" cy="182880"/>
+          </a:xfrm>
+          <a:prstGeom prst="rect">
+            <a:avLst/>
+          </a:prstGeom>
+          <a:noFill/>
+        </p:spPr>
+        <p:txBody>
+          <a:bodyPr wrap="square">
+            <a:spAutoFit/>
+          </a:bodyPr>
+          <a:lstStyle/>
+          <a:p>
+            <a:pPr algn="l"/>
+            <a:r>
+              <a:rPr sz="750" b="0" i="0">
                 <a:solidFill>
                   <a:srgbClr val="1A2B35"/>
                 </a:solidFill>
                 <a:latin typeface="Calibri"/>
               </a:rPr>
-              <a:t>Real cross-sensor overlap</a:t>
-            </a:r>
-          </a:p>
-        </p:txBody>
-      </p:sp>
-      <p:sp>
-        <p:nvSpPr>
-          <p:cNvPr id="59" name="TextBox 58"/>
-          <p:cNvSpPr txBox="1"/>
-          <p:nvPr/>
-        </p:nvSpPr>
-        <p:spPr>
-          <a:xfrm>
-            <a:off x="9829800" y="2990088"/>
-            <a:ext cx="1463040" cy="182880"/>
-          </a:xfrm>
-          <a:prstGeom prst="rect">
-            <a:avLst/>
-          </a:prstGeom>
-          <a:noFill/>
-        </p:spPr>
-        <p:txBody>
-          <a:bodyPr wrap="square">
-            <a:spAutoFit/>
-          </a:bodyPr>
-          <a:lstStyle/>
-          <a:p>
-            <a:pPr algn="l"/>
-            <a:r>
-              <a:rPr sz="750" b="0" i="0">
-                <a:solidFill>
-                  <a:srgbClr val="C4891E"/>
-                </a:solidFill>
-                <a:latin typeface="Calibri"/>
-              </a:rPr>
-              <a:t>Experiment pending</a:t>
-            </a:r>
-          </a:p>
-        </p:txBody>
-      </p:sp>
-      <p:sp>
-        <p:nvSpPr>
-          <p:cNvPr id="60" name="TextBox 59"/>
-          <p:cNvSpPr txBox="1"/>
-          <p:nvPr/>
-        </p:nvSpPr>
-        <p:spPr>
-          <a:xfrm>
-            <a:off x="11292840" y="2990088"/>
-            <a:ext cx="640080" cy="182880"/>
-          </a:xfrm>
-          <a:prstGeom prst="rect">
-            <a:avLst/>
-          </a:prstGeom>
-          <a:noFill/>
-        </p:spPr>
-        <p:txBody>
-          <a:bodyPr wrap="square">
-            <a:spAutoFit/>
-          </a:bodyPr>
-          <a:lstStyle/>
-          <a:p>
-            <a:pPr algn="r"/>
-            <a:r>
-              <a:rPr sz="650" b="0" i="0">
-                <a:solidFill>
-                  <a:srgbClr val="6B7E88"/>
-                </a:solidFill>
-                <a:latin typeface="Calibri"/>
-              </a:rPr>
-              <a:t>[Roadmap]</a:t>
-            </a:r>
-          </a:p>
-        </p:txBody>
-      </p:sp>
-      <p:sp>
-        <p:nvSpPr>
-          <p:cNvPr id="61" name="Rectangle 60"/>
+              <a:t>OHRC RMSE (0.679 px), TMC-2 ablation (0.841 px), safe rejection, I/O latency</a:t>
+            </a:r>
+          </a:p>
+        </p:txBody>
+      </p:sp>
+      <p:sp>
+        <p:nvSpPr>
+          <p:cNvPr id="62" name="Rectangle 61"/>
           <p:cNvSpPr/>
           <p:nvPr/>
         </p:nvSpPr>
         <p:spPr>
           <a:xfrm>
-            <a:off x="7635240" y="3337560"/>
-            <a:ext cx="4343400" cy="182880"/>
-          </a:xfrm>
-          <a:prstGeom prst="rect">
-            <a:avLst/>
-          </a:prstGeom>
-          <a:solidFill>
-            <a:srgbClr val="147D77"/>
-          </a:solidFill>
-          <a:ln>
-            <a:noFill/>
-          </a:ln>
-        </p:spPr>
-        <p:style>
-          <a:lnRef idx="1">
-            <a:schemeClr val="accent1"/>
-          </a:lnRef>
-          <a:fillRef idx="3">
-            <a:schemeClr val="accent1"/>
-          </a:fillRef>
-          <a:effectRef idx="2">
-            <a:schemeClr val="accent1"/>
-          </a:effectRef>
-          <a:fontRef idx="minor">
-            <a:schemeClr val="lt1"/>
-          </a:fontRef>
-        </p:style>
-        <p:txBody>
-          <a:bodyPr rtlCol="0" anchor="ctr"/>
-          <a:lstStyle/>
-          <a:p>
-            <a:pPr algn="ctr"/>
-          </a:p>
-        </p:txBody>
-      </p:sp>
-      <p:sp>
-        <p:nvSpPr>
-          <p:cNvPr id="62" name="TextBox 61"/>
-          <p:cNvSpPr txBox="1"/>
-          <p:nvPr/>
-        </p:nvSpPr>
-        <p:spPr>
-          <a:xfrm>
-            <a:off x="7726679" y="3355848"/>
-            <a:ext cx="4206240" cy="182880"/>
-          </a:xfrm>
-          <a:prstGeom prst="rect">
-            <a:avLst/>
-          </a:prstGeom>
-          <a:noFill/>
-        </p:spPr>
-        <p:txBody>
-          <a:bodyPr wrap="square">
-            <a:spAutoFit/>
-          </a:bodyPr>
-          <a:lstStyle/>
-          <a:p>
-            <a:pPr algn="l"/>
-            <a:r>
-              <a:rPr sz="750" b="1" i="0">
-                <a:solidFill>
-                  <a:srgbClr val="FFFFFF"/>
-                </a:solidFill>
-                <a:latin typeface="Calibri"/>
-              </a:rPr>
-              <a:t>CLAIMS / EVIDENCE LEDGER</a:t>
-            </a:r>
-          </a:p>
-        </p:txBody>
-      </p:sp>
-      <p:sp>
-        <p:nvSpPr>
-          <p:cNvPr id="63" name="Rectangle 62"/>
-          <p:cNvSpPr/>
-          <p:nvPr/>
-        </p:nvSpPr>
-        <p:spPr>
-          <a:xfrm>
-            <a:off x="7635240" y="3566160"/>
+            <a:off x="7635240" y="4078224"/>
             <a:ext cx="4343400" cy="365760"/>
           </a:xfrm>
           <a:prstGeom prst="rect">
@@ -11158,35 +11122,70 @@
       </p:sp>
       <p:sp>
         <p:nvSpPr>
+          <p:cNvPr id="63" name="TextBox 62"/>
+          <p:cNvSpPr txBox="1"/>
+          <p:nvPr/>
+        </p:nvSpPr>
+        <p:spPr>
+          <a:xfrm>
+            <a:off x="7699248" y="4114800"/>
+            <a:ext cx="182880" cy="182880"/>
+          </a:xfrm>
+          <a:prstGeom prst="rect">
+            <a:avLst/>
+          </a:prstGeom>
+          <a:noFill/>
+        </p:spPr>
+        <p:txBody>
+          <a:bodyPr wrap="square">
+            <a:spAutoFit/>
+          </a:bodyPr>
+          <a:lstStyle/>
+          <a:p>
+            <a:pPr algn="l"/>
+            <a:r>
+              <a:rPr sz="850" b="1" i="0">
+                <a:solidFill>
+                  <a:srgbClr val="147D77"/>
+                </a:solidFill>
+                <a:latin typeface="Calibri"/>
+              </a:rPr>
+              <a:t>■</a:t>
+            </a:r>
+          </a:p>
+        </p:txBody>
+      </p:sp>
+      <p:sp>
+        <p:nvSpPr>
           <p:cNvPr id="64" name="TextBox 63"/>
           <p:cNvSpPr txBox="1"/>
           <p:nvPr/>
         </p:nvSpPr>
         <p:spPr>
           <a:xfrm>
-            <a:off x="7699248" y="3593591"/>
-            <a:ext cx="182880" cy="182880"/>
-          </a:xfrm>
-          <a:prstGeom prst="rect">
-            <a:avLst/>
-          </a:prstGeom>
-          <a:noFill/>
-        </p:spPr>
-        <p:txBody>
-          <a:bodyPr wrap="square">
-            <a:spAutoFit/>
-          </a:bodyPr>
-          <a:lstStyle/>
-          <a:p>
-            <a:pPr algn="l"/>
-            <a:r>
-              <a:rPr sz="850" b="1" i="0">
-                <a:solidFill>
-                  <a:srgbClr val="2E9E6E"/>
-                </a:solidFill>
-                <a:latin typeface="Calibri"/>
-              </a:rPr>
-              <a:t>■</a:t>
+            <a:off x="7900416" y="4096511"/>
+            <a:ext cx="3977639" cy="164592"/>
+          </a:xfrm>
+          <a:prstGeom prst="rect">
+            <a:avLst/>
+          </a:prstGeom>
+          <a:noFill/>
+        </p:spPr>
+        <p:txBody>
+          <a:bodyPr wrap="square">
+            <a:spAutoFit/>
+          </a:bodyPr>
+          <a:lstStyle/>
+          <a:p>
+            <a:pPr algn="l"/>
+            <a:r>
+              <a:rPr sz="800" b="1" i="0">
+                <a:solidFill>
+                  <a:srgbClr val="147D77"/>
+                </a:solidFill>
+                <a:latin typeface="Calibri"/>
+              </a:rPr>
+              <a:t>METHODOLOGICAL CONTROLS</a:t>
             </a:r>
           </a:p>
         </p:txBody>
@@ -11199,43 +11198,8 @@
         </p:nvSpPr>
         <p:spPr>
           <a:xfrm>
-            <a:off x="7900416" y="3593591"/>
-            <a:ext cx="3977639" cy="164592"/>
-          </a:xfrm>
-          <a:prstGeom prst="rect">
-            <a:avLst/>
-          </a:prstGeom>
-          <a:noFill/>
-        </p:spPr>
-        <p:txBody>
-          <a:bodyPr wrap="square">
-            <a:spAutoFit/>
-          </a:bodyPr>
-          <a:lstStyle/>
-          <a:p>
-            <a:pPr algn="l"/>
-            <a:r>
-              <a:rPr sz="800" b="1" i="0">
-                <a:solidFill>
-                  <a:srgbClr val="2E9E6E"/>
-                </a:solidFill>
-                <a:latin typeface="Calibri"/>
-              </a:rPr>
-              <a:t>DEMONSTRATED ON REAL-DATA BENCHMARKS</a:t>
-            </a:r>
-          </a:p>
-        </p:txBody>
-      </p:sp>
-      <p:sp>
-        <p:nvSpPr>
-          <p:cNvPr id="66" name="TextBox 65"/>
-          <p:cNvSpPr txBox="1"/>
-          <p:nvPr/>
-        </p:nvSpPr>
-        <p:spPr>
-          <a:xfrm>
-            <a:off x="7900416" y="3749039"/>
-            <a:ext cx="3977639" cy="164592"/>
+            <a:off x="7900416" y="4261104"/>
+            <a:ext cx="3977639" cy="182880"/>
           </a:xfrm>
           <a:prstGeom prst="rect">
             <a:avLst/>
@@ -11252,24 +11216,24 @@
             <a:r>
               <a:rPr sz="750" b="0" i="0">
                 <a:solidFill>
-                  <a:srgbClr val="6B7E88"/>
-                </a:solidFill>
-                <a:latin typeface="Calibri"/>
-              </a:rPr>
-              <a:t>LCN yield (+58.1%), stereo RMSE (0.84 px), safe abstention, I/O latency</a:t>
-            </a:r>
-          </a:p>
-        </p:txBody>
-      </p:sp>
-      <p:sp>
-        <p:nvSpPr>
-          <p:cNvPr id="67" name="Rectangle 66"/>
+                  <a:srgbClr val="1A2B35"/>
+                </a:solidFill>
+                <a:latin typeface="Calibri"/>
+              </a:rPr>
+              <a:t>Strict zero-leakage training partition, frozen protocol, minimum-N rule</a:t>
+            </a:r>
+          </a:p>
+        </p:txBody>
+      </p:sp>
+      <p:sp>
+        <p:nvSpPr>
+          <p:cNvPr id="66" name="Rectangle 65"/>
           <p:cNvSpPr/>
           <p:nvPr/>
         </p:nvSpPr>
         <p:spPr>
           <a:xfrm>
-            <a:off x="7635240" y="3968496"/>
+            <a:off x="7635240" y="4480560"/>
             <a:ext cx="4343400" cy="365760"/>
           </a:xfrm>
           <a:prstGeom prst="rect">
@@ -11308,35 +11272,70 @@
       </p:sp>
       <p:sp>
         <p:nvSpPr>
+          <p:cNvPr id="67" name="TextBox 66"/>
+          <p:cNvSpPr txBox="1"/>
+          <p:nvPr/>
+        </p:nvSpPr>
+        <p:spPr>
+          <a:xfrm>
+            <a:off x="7699248" y="4517136"/>
+            <a:ext cx="182880" cy="182880"/>
+          </a:xfrm>
+          <a:prstGeom prst="rect">
+            <a:avLst/>
+          </a:prstGeom>
+          <a:noFill/>
+        </p:spPr>
+        <p:txBody>
+          <a:bodyPr wrap="square">
+            <a:spAutoFit/>
+          </a:bodyPr>
+          <a:lstStyle/>
+          <a:p>
+            <a:pPr algn="l"/>
+            <a:r>
+              <a:rPr sz="850" b="1" i="0">
+                <a:solidFill>
+                  <a:srgbClr val="E07C1A"/>
+                </a:solidFill>
+                <a:latin typeface="Calibri"/>
+              </a:rPr>
+              <a:t>■</a:t>
+            </a:r>
+          </a:p>
+        </p:txBody>
+      </p:sp>
+      <p:sp>
+        <p:nvSpPr>
           <p:cNvPr id="68" name="TextBox 67"/>
           <p:cNvSpPr txBox="1"/>
           <p:nvPr/>
         </p:nvSpPr>
         <p:spPr>
           <a:xfrm>
-            <a:off x="7699248" y="3995928"/>
-            <a:ext cx="182880" cy="182880"/>
-          </a:xfrm>
-          <a:prstGeom prst="rect">
-            <a:avLst/>
-          </a:prstGeom>
-          <a:noFill/>
-        </p:spPr>
-        <p:txBody>
-          <a:bodyPr wrap="square">
-            <a:spAutoFit/>
-          </a:bodyPr>
-          <a:lstStyle/>
-          <a:p>
-            <a:pPr algn="l"/>
-            <a:r>
-              <a:rPr sz="850" b="1" i="0">
-                <a:solidFill>
-                  <a:srgbClr val="147D77"/>
-                </a:solidFill>
-                <a:latin typeface="Calibri"/>
-              </a:rPr>
-              <a:t>■</a:t>
+            <a:off x="7900416" y="4498848"/>
+            <a:ext cx="3977639" cy="164592"/>
+          </a:xfrm>
+          <a:prstGeom prst="rect">
+            <a:avLst/>
+          </a:prstGeom>
+          <a:noFill/>
+        </p:spPr>
+        <p:txBody>
+          <a:bodyPr wrap="square">
+            <a:spAutoFit/>
+          </a:bodyPr>
+          <a:lstStyle/>
+          <a:p>
+            <a:pPr algn="l"/>
+            <a:r>
+              <a:rPr sz="800" b="1" i="0">
+                <a:solidFill>
+                  <a:srgbClr val="E07C1A"/>
+                </a:solidFill>
+                <a:latin typeface="Calibri"/>
+              </a:rPr>
+              <a:t>CONTROLLED SIMULATION</a:t>
             </a:r>
           </a:p>
         </p:txBody>
@@ -11349,43 +11348,8 @@
         </p:nvSpPr>
         <p:spPr>
           <a:xfrm>
-            <a:off x="7900416" y="3995928"/>
-            <a:ext cx="3977639" cy="164592"/>
-          </a:xfrm>
-          <a:prstGeom prst="rect">
-            <a:avLst/>
-          </a:prstGeom>
-          <a:noFill/>
-        </p:spPr>
-        <p:txBody>
-          <a:bodyPr wrap="square">
-            <a:spAutoFit/>
-          </a:bodyPr>
-          <a:lstStyle/>
-          <a:p>
-            <a:pPr algn="l"/>
-            <a:r>
-              <a:rPr sz="800" b="1" i="0">
-                <a:solidFill>
-                  <a:srgbClr val="147D77"/>
-                </a:solidFill>
-                <a:latin typeface="Calibri"/>
-              </a:rPr>
-              <a:t>METHODOLOGICAL CONTROLS</a:t>
-            </a:r>
-          </a:p>
-        </p:txBody>
-      </p:sp>
-      <p:sp>
-        <p:nvSpPr>
-          <p:cNvPr id="70" name="TextBox 69"/>
-          <p:cNvSpPr txBox="1"/>
-          <p:nvPr/>
-        </p:nvSpPr>
-        <p:spPr>
-          <a:xfrm>
-            <a:off x="7900416" y="4151376"/>
-            <a:ext cx="3977639" cy="164592"/>
+            <a:off x="7900416" y="4663440"/>
+            <a:ext cx="3977639" cy="182880"/>
           </a:xfrm>
           <a:prstGeom prst="rect">
             <a:avLst/>
@@ -11402,24 +11366,24 @@
             <a:r>
               <a:rPr sz="750" b="0" i="0">
                 <a:solidFill>
-                  <a:srgbClr val="6B7E88"/>
-                </a:solidFill>
-                <a:latin typeface="Calibri"/>
-              </a:rPr>
-              <a:t>No test-set access during model selection, frozen protocol, minimum-N rule</a:t>
-            </a:r>
-          </a:p>
-        </p:txBody>
-      </p:sp>
-      <p:sp>
-        <p:nvSpPr>
-          <p:cNvPr id="71" name="Rectangle 70"/>
+                  <a:srgbClr val="1A2B35"/>
+                </a:solidFill>
+                <a:latin typeface="Calibri"/>
+              </a:rPr>
+              <a:t>Photometric normalization: 742–1,187 inliers recovered; validates renderer</a:t>
+            </a:r>
+          </a:p>
+        </p:txBody>
+      </p:sp>
+      <p:sp>
+        <p:nvSpPr>
+          <p:cNvPr id="70" name="Rectangle 69"/>
           <p:cNvSpPr/>
           <p:nvPr/>
         </p:nvSpPr>
         <p:spPr>
           <a:xfrm>
-            <a:off x="7635240" y="4370832"/>
+            <a:off x="7635240" y="4882896"/>
             <a:ext cx="4343400" cy="365760"/>
           </a:xfrm>
           <a:prstGeom prst="rect">
@@ -11458,35 +11422,70 @@
       </p:sp>
       <p:sp>
         <p:nvSpPr>
+          <p:cNvPr id="71" name="TextBox 70"/>
+          <p:cNvSpPr txBox="1"/>
+          <p:nvPr/>
+        </p:nvSpPr>
+        <p:spPr>
+          <a:xfrm>
+            <a:off x="7699248" y="4919472"/>
+            <a:ext cx="182880" cy="182880"/>
+          </a:xfrm>
+          <a:prstGeom prst="rect">
+            <a:avLst/>
+          </a:prstGeom>
+          <a:noFill/>
+        </p:spPr>
+        <p:txBody>
+          <a:bodyPr wrap="square">
+            <a:spAutoFit/>
+          </a:bodyPr>
+          <a:lstStyle/>
+          <a:p>
+            <a:pPr algn="l"/>
+            <a:r>
+              <a:rPr sz="850" b="1" i="0">
+                <a:solidFill>
+                  <a:srgbClr val="C4891E"/>
+                </a:solidFill>
+                <a:latin typeface="Calibri"/>
+              </a:rPr>
+              <a:t>■</a:t>
+            </a:r>
+          </a:p>
+        </p:txBody>
+      </p:sp>
+      <p:sp>
+        <p:nvSpPr>
           <p:cNvPr id="72" name="TextBox 71"/>
           <p:cNvSpPr txBox="1"/>
           <p:nvPr/>
         </p:nvSpPr>
         <p:spPr>
           <a:xfrm>
-            <a:off x="7699248" y="4398264"/>
-            <a:ext cx="182880" cy="182880"/>
-          </a:xfrm>
-          <a:prstGeom prst="rect">
-            <a:avLst/>
-          </a:prstGeom>
-          <a:noFill/>
-        </p:spPr>
-        <p:txBody>
-          <a:bodyPr wrap="square">
-            <a:spAutoFit/>
-          </a:bodyPr>
-          <a:lstStyle/>
-          <a:p>
-            <a:pPr algn="l"/>
-            <a:r>
-              <a:rPr sz="850" b="1" i="0">
-                <a:solidFill>
-                  <a:srgbClr val="E07C1A"/>
-                </a:solidFill>
-                <a:latin typeface="Calibri"/>
-              </a:rPr>
-              <a:t>■</a:t>
+            <a:off x="7900416" y="4901184"/>
+            <a:ext cx="3977639" cy="164592"/>
+          </a:xfrm>
+          <a:prstGeom prst="rect">
+            <a:avLst/>
+          </a:prstGeom>
+          <a:noFill/>
+        </p:spPr>
+        <p:txBody>
+          <a:bodyPr wrap="square">
+            <a:spAutoFit/>
+          </a:bodyPr>
+          <a:lstStyle/>
+          <a:p>
+            <a:pPr algn="l"/>
+            <a:r>
+              <a:rPr sz="800" b="1" i="0">
+                <a:solidFill>
+                  <a:srgbClr val="C4891E"/>
+                </a:solidFill>
+                <a:latin typeface="Calibri"/>
+              </a:rPr>
+              <a:t>PENDING EXPERIMENT</a:t>
             </a:r>
           </a:p>
         </p:txBody>
@@ -11499,43 +11498,8 @@
         </p:nvSpPr>
         <p:spPr>
           <a:xfrm>
-            <a:off x="7900416" y="4398264"/>
-            <a:ext cx="3977639" cy="164592"/>
-          </a:xfrm>
-          <a:prstGeom prst="rect">
-            <a:avLst/>
-          </a:prstGeom>
-          <a:noFill/>
-        </p:spPr>
-        <p:txBody>
-          <a:bodyPr wrap="square">
-            <a:spAutoFit/>
-          </a:bodyPr>
-          <a:lstStyle/>
-          <a:p>
-            <a:pPr algn="l"/>
-            <a:r>
-              <a:rPr sz="800" b="1" i="0">
-                <a:solidFill>
-                  <a:srgbClr val="E07C1A"/>
-                </a:solidFill>
-                <a:latin typeface="Calibri"/>
-              </a:rPr>
-              <a:t>CONTROLLED SIMULATION</a:t>
-            </a:r>
-          </a:p>
-        </p:txBody>
-      </p:sp>
-      <p:sp>
-        <p:nvSpPr>
-          <p:cNvPr id="74" name="TextBox 73"/>
-          <p:cNvSpPr txBox="1"/>
-          <p:nvPr/>
-        </p:nvSpPr>
-        <p:spPr>
-          <a:xfrm>
-            <a:off x="7900416" y="4553712"/>
-            <a:ext cx="3977639" cy="164592"/>
+            <a:off x="7900416" y="5065776"/>
+            <a:ext cx="3977639" cy="182880"/>
           </a:xfrm>
           <a:prstGeom prst="rect">
             <a:avLst/>
@@ -11552,24 +11516,24 @@
             <a:r>
               <a:rPr sz="750" b="0" i="0">
                 <a:solidFill>
-                  <a:srgbClr val="6B7E88"/>
-                </a:solidFill>
-                <a:latin typeface="Calibri"/>
-              </a:rPr>
-              <a:t>Subpixel refinement: 0.18 px median; re-illumination gain curves</a:t>
-            </a:r>
-          </a:p>
-        </p:txBody>
-      </p:sp>
-      <p:sp>
-        <p:nvSpPr>
-          <p:cNvPr id="75" name="Rectangle 74"/>
+                  <a:srgbClr val="1A2B35"/>
+                </a:solidFill>
+                <a:latin typeface="Calibri"/>
+              </a:rPr>
+              <a:t>Real cross-sensor correspondence (OHRC vs TMC-2), geodetic GT</a:t>
+            </a:r>
+          </a:p>
+        </p:txBody>
+      </p:sp>
+      <p:sp>
+        <p:nvSpPr>
+          <p:cNvPr id="74" name="Rectangle 73"/>
           <p:cNvSpPr/>
           <p:nvPr/>
         </p:nvSpPr>
         <p:spPr>
           <a:xfrm>
-            <a:off x="7635240" y="4773168"/>
+            <a:off x="7635240" y="5285232"/>
             <a:ext cx="4343400" cy="365760"/>
           </a:xfrm>
           <a:prstGeom prst="rect">
@@ -11608,35 +11572,70 @@
       </p:sp>
       <p:sp>
         <p:nvSpPr>
+          <p:cNvPr id="75" name="TextBox 74"/>
+          <p:cNvSpPr txBox="1"/>
+          <p:nvPr/>
+        </p:nvSpPr>
+        <p:spPr>
+          <a:xfrm>
+            <a:off x="7699248" y="5321808"/>
+            <a:ext cx="182880" cy="182880"/>
+          </a:xfrm>
+          <a:prstGeom prst="rect">
+            <a:avLst/>
+          </a:prstGeom>
+          <a:noFill/>
+        </p:spPr>
+        <p:txBody>
+          <a:bodyPr wrap="square">
+            <a:spAutoFit/>
+          </a:bodyPr>
+          <a:lstStyle/>
+          <a:p>
+            <a:pPr algn="l"/>
+            <a:r>
+              <a:rPr sz="850" b="1" i="0">
+                <a:solidFill>
+                  <a:srgbClr val="6B7E88"/>
+                </a:solidFill>
+                <a:latin typeface="Calibri"/>
+              </a:rPr>
+              <a:t>■</a:t>
+            </a:r>
+          </a:p>
+        </p:txBody>
+      </p:sp>
+      <p:sp>
+        <p:nvSpPr>
           <p:cNvPr id="76" name="TextBox 75"/>
           <p:cNvSpPr txBox="1"/>
           <p:nvPr/>
         </p:nvSpPr>
         <p:spPr>
           <a:xfrm>
-            <a:off x="7699248" y="4800600"/>
-            <a:ext cx="182880" cy="182880"/>
-          </a:xfrm>
-          <a:prstGeom prst="rect">
-            <a:avLst/>
-          </a:prstGeom>
-          <a:noFill/>
-        </p:spPr>
-        <p:txBody>
-          <a:bodyPr wrap="square">
-            <a:spAutoFit/>
-          </a:bodyPr>
-          <a:lstStyle/>
-          <a:p>
-            <a:pPr algn="l"/>
-            <a:r>
-              <a:rPr sz="850" b="1" i="0">
-                <a:solidFill>
-                  <a:srgbClr val="C4891E"/>
-                </a:solidFill>
-                <a:latin typeface="Calibri"/>
-              </a:rPr>
-              <a:t>■</a:t>
+            <a:off x="7900416" y="5303520"/>
+            <a:ext cx="3977639" cy="164592"/>
+          </a:xfrm>
+          <a:prstGeom prst="rect">
+            <a:avLst/>
+          </a:prstGeom>
+          <a:noFill/>
+        </p:spPr>
+        <p:txBody>
+          <a:bodyPr wrap="square">
+            <a:spAutoFit/>
+          </a:bodyPr>
+          <a:lstStyle/>
+          <a:p>
+            <a:pPr algn="l"/>
+            <a:r>
+              <a:rPr sz="800" b="1" i="0">
+                <a:solidFill>
+                  <a:srgbClr val="6B7E88"/>
+                </a:solidFill>
+                <a:latin typeface="Calibri"/>
+              </a:rPr>
+              <a:t>NOT ATTEMPTED</a:t>
             </a:r>
           </a:p>
         </p:txBody>
@@ -11649,43 +11648,8 @@
         </p:nvSpPr>
         <p:spPr>
           <a:xfrm>
-            <a:off x="7900416" y="4800600"/>
-            <a:ext cx="3977639" cy="164592"/>
-          </a:xfrm>
-          <a:prstGeom prst="rect">
-            <a:avLst/>
-          </a:prstGeom>
-          <a:noFill/>
-        </p:spPr>
-        <p:txBody>
-          <a:bodyPr wrap="square">
-            <a:spAutoFit/>
-          </a:bodyPr>
-          <a:lstStyle/>
-          <a:p>
-            <a:pPr algn="l"/>
-            <a:r>
-              <a:rPr sz="800" b="1" i="0">
-                <a:solidFill>
-                  <a:srgbClr val="C4891E"/>
-                </a:solidFill>
-                <a:latin typeface="Calibri"/>
-              </a:rPr>
-              <a:t>PENDING EXPERIMENT</a:t>
-            </a:r>
-          </a:p>
-        </p:txBody>
-      </p:sp>
-      <p:sp>
-        <p:nvSpPr>
-          <p:cNvPr id="78" name="TextBox 77"/>
-          <p:cNvSpPr txBox="1"/>
-          <p:nvPr/>
-        </p:nvSpPr>
-        <p:spPr>
-          <a:xfrm>
-            <a:off x="7900416" y="4956048"/>
-            <a:ext cx="3977639" cy="164592"/>
+            <a:off x="7900416" y="5468112"/>
+            <a:ext cx="3977639" cy="182880"/>
           </a:xfrm>
           <a:prstGeom prst="rect">
             <a:avLst/>
@@ -11702,157 +11666,7 @@
             <a:r>
               <a:rPr sz="750" b="0" i="0">
                 <a:solidFill>
-                  <a:srgbClr val="6B7E88"/>
-                </a:solidFill>
-                <a:latin typeface="Calibri"/>
-              </a:rPr>
-              <a:t>Real cross-sensor correspondence (OHRC vs TMC-2), geodetic GT</a:t>
-            </a:r>
-          </a:p>
-        </p:txBody>
-      </p:sp>
-      <p:sp>
-        <p:nvSpPr>
-          <p:cNvPr id="79" name="Rectangle 78"/>
-          <p:cNvSpPr/>
-          <p:nvPr/>
-        </p:nvSpPr>
-        <p:spPr>
-          <a:xfrm>
-            <a:off x="7635240" y="5175504"/>
-            <a:ext cx="4343400" cy="365760"/>
-          </a:xfrm>
-          <a:prstGeom prst="rect">
-            <a:avLst/>
-          </a:prstGeom>
-          <a:solidFill>
-            <a:srgbClr val="F4F6F8"/>
-          </a:solidFill>
-          <a:ln w="3810">
-            <a:solidFill>
-              <a:srgbClr val="D0D8DD"/>
-            </a:solidFill>
-          </a:ln>
-        </p:spPr>
-        <p:style>
-          <a:lnRef idx="1">
-            <a:schemeClr val="accent1"/>
-          </a:lnRef>
-          <a:fillRef idx="3">
-            <a:schemeClr val="accent1"/>
-          </a:fillRef>
-          <a:effectRef idx="2">
-            <a:schemeClr val="accent1"/>
-          </a:effectRef>
-          <a:fontRef idx="minor">
-            <a:schemeClr val="lt1"/>
-          </a:fontRef>
-        </p:style>
-        <p:txBody>
-          <a:bodyPr rtlCol="0" anchor="ctr"/>
-          <a:lstStyle/>
-          <a:p>
-            <a:pPr algn="ctr"/>
-          </a:p>
-        </p:txBody>
-      </p:sp>
-      <p:sp>
-        <p:nvSpPr>
-          <p:cNvPr id="80" name="TextBox 79"/>
-          <p:cNvSpPr txBox="1"/>
-          <p:nvPr/>
-        </p:nvSpPr>
-        <p:spPr>
-          <a:xfrm>
-            <a:off x="7699248" y="5202936"/>
-            <a:ext cx="182880" cy="182880"/>
-          </a:xfrm>
-          <a:prstGeom prst="rect">
-            <a:avLst/>
-          </a:prstGeom>
-          <a:noFill/>
-        </p:spPr>
-        <p:txBody>
-          <a:bodyPr wrap="square">
-            <a:spAutoFit/>
-          </a:bodyPr>
-          <a:lstStyle/>
-          <a:p>
-            <a:pPr algn="l"/>
-            <a:r>
-              <a:rPr sz="850" b="1" i="0">
-                <a:solidFill>
-                  <a:srgbClr val="6B7E88"/>
-                </a:solidFill>
-                <a:latin typeface="Calibri"/>
-              </a:rPr>
-              <a:t>■</a:t>
-            </a:r>
-          </a:p>
-        </p:txBody>
-      </p:sp>
-      <p:sp>
-        <p:nvSpPr>
-          <p:cNvPr id="81" name="TextBox 80"/>
-          <p:cNvSpPr txBox="1"/>
-          <p:nvPr/>
-        </p:nvSpPr>
-        <p:spPr>
-          <a:xfrm>
-            <a:off x="7900416" y="5202936"/>
-            <a:ext cx="3977639" cy="164592"/>
-          </a:xfrm>
-          <a:prstGeom prst="rect">
-            <a:avLst/>
-          </a:prstGeom>
-          <a:noFill/>
-        </p:spPr>
-        <p:txBody>
-          <a:bodyPr wrap="square">
-            <a:spAutoFit/>
-          </a:bodyPr>
-          <a:lstStyle/>
-          <a:p>
-            <a:pPr algn="l"/>
-            <a:r>
-              <a:rPr sz="800" b="1" i="0">
-                <a:solidFill>
-                  <a:srgbClr val="6B7E88"/>
-                </a:solidFill>
-                <a:latin typeface="Calibri"/>
-              </a:rPr>
-              <a:t>NOT ATTEMPTED</a:t>
-            </a:r>
-          </a:p>
-        </p:txBody>
-      </p:sp>
-      <p:sp>
-        <p:nvSpPr>
-          <p:cNvPr id="82" name="TextBox 81"/>
-          <p:cNvSpPr txBox="1"/>
-          <p:nvPr/>
-        </p:nvSpPr>
-        <p:spPr>
-          <a:xfrm>
-            <a:off x="7900416" y="5358384"/>
-            <a:ext cx="3977639" cy="164592"/>
-          </a:xfrm>
-          <a:prstGeom prst="rect">
-            <a:avLst/>
-          </a:prstGeom>
-          <a:noFill/>
-        </p:spPr>
-        <p:txBody>
-          <a:bodyPr wrap="square">
-            <a:spAutoFit/>
-          </a:bodyPr>
-          <a:lstStyle/>
-          <a:p>
-            <a:pPr algn="l"/>
-            <a:r>
-              <a:rPr sz="750" b="0" i="0">
-                <a:solidFill>
-                  <a:srgbClr val="6B7E88"/>
+                  <a:srgbClr val="1A2B35"/>
                 </a:solidFill>
                 <a:latin typeface="Calibri"/>
               </a:rPr>
@@ -11863,7 +11677,7 @@
       </p:sp>
       <p:sp>
         <p:nvSpPr>
-          <p:cNvPr id="83" name="Rectangle 82"/>
+          <p:cNvPr id="78" name="Rectangle 77"/>
           <p:cNvSpPr/>
           <p:nvPr/>
         </p:nvSpPr>
@@ -11906,7 +11720,7 @@
       </p:sp>
       <p:sp>
         <p:nvSpPr>
-          <p:cNvPr id="84" name="TextBox 83"/>
+          <p:cNvPr id="79" name="TextBox 78"/>
           <p:cNvSpPr txBox="1"/>
           <p:nvPr/>
         </p:nvSpPr>
@@ -11928,13 +11742,13 @@
           <a:p>
             <a:pPr algn="l"/>
             <a:r>
-              <a:rPr sz="700" b="0" i="0">
+              <a:rPr sz="750" b="0" i="0">
                 <a:solidFill>
                   <a:srgbClr val="6B7E88"/>
                 </a:solidFill>
                 <a:latin typeface="Calibri"/>
               </a:rPr>
-              <a:t>LUNA-CORR     •     SIH 2026     •     04 / 06</a:t>
+              <a:t>LUNA-CORR     •     SIH 2026 PS 26166     •     04 / 06</a:t>
             </a:r>
           </a:p>
         </p:txBody>
@@ -12130,7 +11944,7 @@
         <p:spPr>
           <a:xfrm>
             <a:off x="457200" y="749808"/>
-            <a:ext cx="7772400" cy="182880"/>
+            <a:ext cx="7772400" cy="201168"/>
           </a:xfrm>
           <a:prstGeom prst="rect">
             <a:avLst/>
@@ -12173,28 +11987,28 @@
         <p:spPr>
           <a:xfrm>
             <a:off x="548640" y="768096"/>
-            <a:ext cx="7635240" cy="182880"/>
-          </a:xfrm>
-          <a:prstGeom prst="rect">
-            <a:avLst/>
-          </a:prstGeom>
-          <a:noFill/>
-        </p:spPr>
-        <p:txBody>
-          <a:bodyPr wrap="square">
-            <a:spAutoFit/>
-          </a:bodyPr>
-          <a:lstStyle/>
-          <a:p>
-            <a:pPr algn="l"/>
-            <a:r>
-              <a:rPr sz="750" b="1" i="0">
+            <a:ext cx="7635240" cy="201168"/>
+          </a:xfrm>
+          <a:prstGeom prst="rect">
+            <a:avLst/>
+          </a:prstGeom>
+          <a:noFill/>
+        </p:spPr>
+        <p:txBody>
+          <a:bodyPr wrap="square">
+            <a:spAutoFit/>
+          </a:bodyPr>
+          <a:lstStyle/>
+          <a:p>
+            <a:pPr algn="l"/>
+            <a:r>
+              <a:rPr sz="800" b="1" i="0">
                 <a:solidFill>
                   <a:srgbClr val="FFFFFF"/>
                 </a:solidFill>
                 <a:latin typeface="Calibri"/>
               </a:rPr>
-              <a:t>LOLA-DEM CONTROLLED ILLUMINATION BENCHMARK  /  INLIER VOLUME &amp; TRUE PRECISION @ 1PX</a:t>
+              <a:t>LOLA-DEM CONTROLLED PHOTOMETRIC NORMALIZATION BENCHMARK (EXP-SYN-ILLUM)</a:t>
             </a:r>
           </a:p>
         </p:txBody>
@@ -12292,13 +12106,13 @@
           <a:p>
             <a:pPr algn="l"/>
             <a:r>
-              <a:rPr sz="750" b="0" i="1">
+              <a:rPr sz="780" b="0" i="1">
                 <a:solidFill>
                   <a:srgbClr val="6B7E88"/>
                 </a:solidFill>
                 <a:latin typeface="Calibri"/>
               </a:rPr>
-              <a:t>CONTROLLED BENCHMARK NOTE: Controlled LOLA-DEM re-illumination demonstrates renderer physics; it does NOT substitute for real multi-phase flight validation.</a:t>
+              <a:t>CONTROLLED BENCHMARK NOTE: Controlled LOLA-DEM re-illumination validates renderer photometric reconstruction under known geometry; it does NOT substitute for real multi-phase flight validation.</a:t>
             </a:r>
           </a:p>
         </p:txBody>
@@ -12312,7 +12126,7 @@
         <p:spPr>
           <a:xfrm>
             <a:off x="8458200" y="749808"/>
-            <a:ext cx="3520440" cy="182880"/>
+            <a:ext cx="3520440" cy="201168"/>
           </a:xfrm>
           <a:prstGeom prst="rect">
             <a:avLst/>
@@ -12355,22 +12169,22 @@
         <p:spPr>
           <a:xfrm>
             <a:off x="8549640" y="768096"/>
-            <a:ext cx="3383280" cy="182880"/>
-          </a:xfrm>
-          <a:prstGeom prst="rect">
-            <a:avLst/>
-          </a:prstGeom>
-          <a:noFill/>
-        </p:spPr>
-        <p:txBody>
-          <a:bodyPr wrap="square">
-            <a:spAutoFit/>
-          </a:bodyPr>
-          <a:lstStyle/>
-          <a:p>
-            <a:pPr algn="l"/>
-            <a:r>
-              <a:rPr sz="750" b="1" i="0">
+            <a:ext cx="3383280" cy="201168"/>
+          </a:xfrm>
+          <a:prstGeom prst="rect">
+            <a:avLst/>
+          </a:prstGeom>
+          <a:noFill/>
+        </p:spPr>
+        <p:txBody>
+          <a:bodyPr wrap="square">
+            <a:spAutoFit/>
+          </a:bodyPr>
+          <a:lstStyle/>
+          <a:p>
+            <a:pPr algn="l"/>
+            <a:r>
+              <a:rPr sz="800" b="1" i="0">
                 <a:solidFill>
                   <a:srgbClr val="FFFFFF"/>
                 </a:solidFill>
@@ -12450,7 +12264,7 @@
           <a:p>
             <a:pPr algn="l"/>
             <a:r>
-              <a:rPr sz="780" b="1" i="0">
+              <a:rPr sz="819" b="1" i="0">
                 <a:solidFill>
                   <a:srgbClr val="2E9E6E"/>
                 </a:solidFill>
@@ -12469,7 +12283,7 @@
         </p:nvSpPr>
         <p:spPr>
           <a:xfrm>
-            <a:off x="8549640" y="1152144"/>
+            <a:off x="8549640" y="1170432"/>
             <a:ext cx="3337560" cy="768096"/>
           </a:xfrm>
           <a:prstGeom prst="rect">
@@ -12485,14 +12299,15 @@
           <a:p>
             <a:pPr algn="l"/>
             <a:r>
-              <a:rPr sz="750" b="0" i="0">
+              <a:rPr sz="780" b="0" i="0">
                 <a:solidFill>
                   <a:srgbClr val="1A2B35"/>
                 </a:solidFill>
                 <a:latin typeface="Calibri"/>
               </a:rPr>
-              <a:t>✓ OHRC repeat: 822 inliers, held-out RMSE 0.779 px
-✓ TMC-2 stereo: 1.52 → 0.84 px RMSE (44.7% gain)
+              <a:t>✓ EXP-OHRC-E2E: 822 inliers, held-out RMSE 0.679 px
+✓ EXP-TMC-E2E: 686 inliers, held-out RMSE 1.110 px
+✓ EXP-TMC-FIXED: 1.52 → 0.841 px (44.7% gain on N=150)
 ✓ Safe rejection: Disjoint scene rejected (0 accepted)</a:t>
             </a:r>
           </a:p>
@@ -12567,13 +12382,13 @@
           <a:p>
             <a:pPr algn="l"/>
             <a:r>
-              <a:rPr sz="780" b="1" i="0">
+              <a:rPr sz="819" b="1" i="0">
                 <a:solidFill>
                   <a:srgbClr val="147D77"/>
                 </a:solidFill>
                 <a:latin typeface="Calibri"/>
               </a:rPr>
-              <a:t>CONTROLLED SIMULATION (LOLA DEM):</a:t>
+              <a:t>CONTROLLED SIMULATION (LOLA DEM — EXP-SYN-ILLUM):</a:t>
             </a:r>
           </a:p>
         </p:txBody>
@@ -12586,7 +12401,7 @@
         </p:nvSpPr>
         <p:spPr>
           <a:xfrm>
-            <a:off x="8549640" y="2221992"/>
+            <a:off x="8549640" y="2240280"/>
             <a:ext cx="3337560" cy="685800"/>
           </a:xfrm>
           <a:prstGeom prst="rect">
@@ -12602,15 +12417,15 @@
           <a:p>
             <a:pPr algn="l"/>
             <a:r>
-              <a:rPr sz="750" b="0" i="0">
+              <a:rPr sz="780" b="0" i="0">
                 <a:solidFill>
                   <a:srgbClr val="1A2B35"/>
                 </a:solidFill>
                 <a:latin typeface="Calibri"/>
               </a:rPr>
-              <a:t>• Mode C retains 1,679–2,859 inliers across 0°–180°
-• True Precision @ 1px: &gt;99% in tested synthetic field
-• Direct matching collapses at Δ ≥ 60° (14 inliers)</a:t>
+              <a:t>• Mode C recovers 742–1,187 inliers across 0°–180°
+• Controlled Precision @ 1px: &gt;99.1% under matched lighting
+• Direct matching collapses at Δ ≥ 45° (28 inliers, 0% prec)</a:t>
             </a:r>
           </a:p>
         </p:txBody>
@@ -12684,7 +12499,7 @@
           <a:p>
             <a:pPr algn="l"/>
             <a:r>
-              <a:rPr sz="780" b="1" i="0">
+              <a:rPr sz="819" b="1" i="0">
                 <a:solidFill>
                   <a:srgbClr val="C4891E"/>
                 </a:solidFill>
@@ -12703,7 +12518,7 @@
         </p:nvSpPr>
         <p:spPr>
           <a:xfrm>
-            <a:off x="8549640" y="3191256"/>
+            <a:off x="8549640" y="3209544"/>
             <a:ext cx="3337560" cy="1024128"/>
           </a:xfrm>
           <a:prstGeom prst="rect">
@@ -12719,7 +12534,7 @@
           <a:p>
             <a:pPr algn="l"/>
             <a:r>
-              <a:rPr sz="750" b="0" i="0">
+              <a:rPr sz="780" b="0" i="0">
                 <a:solidFill>
                   <a:srgbClr val="1A2B35"/>
                 </a:solidFill>
@@ -12742,7 +12557,7 @@
         <p:spPr>
           <a:xfrm>
             <a:off x="457200" y="4352544"/>
-            <a:ext cx="3566160" cy="182880"/>
+            <a:ext cx="3566160" cy="201168"/>
           </a:xfrm>
           <a:prstGeom prst="rect">
             <a:avLst/>
@@ -12785,22 +12600,22 @@
         <p:spPr>
           <a:xfrm>
             <a:off x="548640" y="4370831"/>
-            <a:ext cx="3429000" cy="182880"/>
-          </a:xfrm>
-          <a:prstGeom prst="rect">
-            <a:avLst/>
-          </a:prstGeom>
-          <a:noFill/>
-        </p:spPr>
-        <p:txBody>
-          <a:bodyPr wrap="square">
-            <a:spAutoFit/>
-          </a:bodyPr>
-          <a:lstStyle/>
-          <a:p>
-            <a:pPr algn="l"/>
-            <a:r>
-              <a:rPr sz="750" b="1" i="0">
+            <a:ext cx="3429000" cy="201168"/>
+          </a:xfrm>
+          <a:prstGeom prst="rect">
+            <a:avLst/>
+          </a:prstGeom>
+          <a:noFill/>
+        </p:spPr>
+        <p:txBody>
+          <a:bodyPr wrap="square">
+            <a:spAutoFit/>
+          </a:bodyPr>
+          <a:lstStyle/>
+          <a:p>
+            <a:pPr algn="l"/>
+            <a:r>
+              <a:rPr sz="800" b="1" i="0">
                 <a:solidFill>
                   <a:srgbClr val="FFFFFF"/>
                 </a:solidFill>
@@ -12880,7 +12695,7 @@
           <a:p>
             <a:pPr algn="l"/>
             <a:r>
-              <a:rPr sz="750" b="1" i="0">
+              <a:rPr sz="800" b="1" i="0">
                 <a:solidFill>
                   <a:srgbClr val="147D77"/>
                 </a:solidFill>
@@ -12915,7 +12730,7 @@
           <a:p>
             <a:pPr algn="l"/>
             <a:r>
-              <a:rPr sz="750" b="0" i="0">
+              <a:rPr sz="800" b="0" i="0">
                 <a:solidFill>
                   <a:srgbClr val="1A2B35"/>
                 </a:solidFill>
@@ -12995,7 +12810,7 @@
           <a:p>
             <a:pPr algn="l"/>
             <a:r>
-              <a:rPr sz="750" b="1" i="0">
+              <a:rPr sz="800" b="1" i="0">
                 <a:solidFill>
                   <a:srgbClr val="147D77"/>
                 </a:solidFill>
@@ -13030,7 +12845,7 @@
           <a:p>
             <a:pPr algn="l"/>
             <a:r>
-              <a:rPr sz="750" b="0" i="0">
+              <a:rPr sz="800" b="0" i="0">
                 <a:solidFill>
                   <a:srgbClr val="1A2B35"/>
                 </a:solidFill>
@@ -13110,7 +12925,7 @@
           <a:p>
             <a:pPr algn="l"/>
             <a:r>
-              <a:rPr sz="750" b="1" i="0">
+              <a:rPr sz="800" b="1" i="0">
                 <a:solidFill>
                   <a:srgbClr val="147D77"/>
                 </a:solidFill>
@@ -13145,7 +12960,7 @@
           <a:p>
             <a:pPr algn="l"/>
             <a:r>
-              <a:rPr sz="750" b="0" i="0">
+              <a:rPr sz="800" b="0" i="0">
                 <a:solidFill>
                   <a:srgbClr val="1A2B35"/>
                 </a:solidFill>
@@ -13225,7 +13040,7 @@
           <a:p>
             <a:pPr algn="l"/>
             <a:r>
-              <a:rPr sz="750" b="1" i="0">
+              <a:rPr sz="800" b="1" i="0">
                 <a:solidFill>
                   <a:srgbClr val="147D77"/>
                 </a:solidFill>
@@ -13260,7 +13075,7 @@
           <a:p>
             <a:pPr algn="l"/>
             <a:r>
-              <a:rPr sz="750" b="0" i="0">
+              <a:rPr sz="800" b="0" i="0">
                 <a:solidFill>
                   <a:srgbClr val="1A2B35"/>
                 </a:solidFill>
@@ -13279,8 +13094,8 @@
         </p:nvSpPr>
         <p:spPr>
           <a:xfrm>
-            <a:off x="4251960" y="4352544"/>
-            <a:ext cx="3977639" cy="182880"/>
+            <a:off x="4297680" y="4352544"/>
+            <a:ext cx="3566160" cy="201168"/>
           </a:xfrm>
           <a:prstGeom prst="rect">
             <a:avLst/>
@@ -13322,23 +13137,23 @@
         </p:nvSpPr>
         <p:spPr>
           <a:xfrm>
-            <a:off x="4343400" y="4370831"/>
-            <a:ext cx="3840479" cy="182880"/>
-          </a:xfrm>
-          <a:prstGeom prst="rect">
-            <a:avLst/>
-          </a:prstGeom>
-          <a:noFill/>
-        </p:spPr>
-        <p:txBody>
-          <a:bodyPr wrap="square">
-            <a:spAutoFit/>
-          </a:bodyPr>
-          <a:lstStyle/>
-          <a:p>
-            <a:pPr algn="l"/>
-            <a:r>
-              <a:rPr sz="750" b="1" i="0">
+            <a:off x="4389120" y="4370831"/>
+            <a:ext cx="3429000" cy="201168"/>
+          </a:xfrm>
+          <a:prstGeom prst="rect">
+            <a:avLst/>
+          </a:prstGeom>
+          <a:noFill/>
+        </p:spPr>
+        <p:txBody>
+          <a:bodyPr wrap="square">
+            <a:spAutoFit/>
+          </a:bodyPr>
+          <a:lstStyle/>
+          <a:p>
+            <a:pPr algn="l"/>
+            <a:r>
+              <a:rPr sz="800" b="1" i="0">
                 <a:solidFill>
                   <a:srgbClr val="FFFFFF"/>
                 </a:solidFill>
@@ -13357,8 +13172,8 @@
         </p:nvSpPr>
         <p:spPr>
           <a:xfrm>
-            <a:off x="4251960" y="4572000"/>
-            <a:ext cx="3977639" cy="292608"/>
+            <a:off x="4297680" y="4572000"/>
+            <a:ext cx="3566160" cy="292608"/>
           </a:xfrm>
           <a:prstGeom prst="rect">
             <a:avLst/>
@@ -13402,23 +13217,23 @@
         </p:nvSpPr>
         <p:spPr>
           <a:xfrm>
-            <a:off x="4343400" y="4608576"/>
-            <a:ext cx="1600200" cy="201168"/>
-          </a:xfrm>
-          <a:prstGeom prst="rect">
-            <a:avLst/>
-          </a:prstGeom>
-          <a:noFill/>
-        </p:spPr>
-        <p:txBody>
-          <a:bodyPr wrap="square">
-            <a:spAutoFit/>
-          </a:bodyPr>
-          <a:lstStyle/>
-          <a:p>
-            <a:pPr algn="l"/>
-            <a:r>
-              <a:rPr sz="750" b="1" i="0">
+            <a:off x="4370832" y="4608576"/>
+            <a:ext cx="1508760" cy="201168"/>
+          </a:xfrm>
+          <a:prstGeom prst="rect">
+            <a:avLst/>
+          </a:prstGeom>
+          <a:noFill/>
+        </p:spPr>
+        <p:txBody>
+          <a:bodyPr wrap="square">
+            <a:spAutoFit/>
+          </a:bodyPr>
+          <a:lstStyle/>
+          <a:p>
+            <a:pPr algn="l"/>
+            <a:r>
+              <a:rPr sz="800" b="1" i="0">
                 <a:solidFill>
                   <a:srgbClr val="E07C1A"/>
                 </a:solidFill>
@@ -13437,23 +13252,23 @@
         </p:nvSpPr>
         <p:spPr>
           <a:xfrm>
-            <a:off x="5989320" y="4608576"/>
-            <a:ext cx="2194560" cy="201168"/>
-          </a:xfrm>
-          <a:prstGeom prst="rect">
-            <a:avLst/>
-          </a:prstGeom>
-          <a:noFill/>
-        </p:spPr>
-        <p:txBody>
-          <a:bodyPr wrap="square">
-            <a:spAutoFit/>
-          </a:bodyPr>
-          <a:lstStyle/>
-          <a:p>
-            <a:pPr algn="l"/>
-            <a:r>
-              <a:rPr sz="750" b="0" i="0">
+            <a:off x="5897880" y="4608576"/>
+            <a:ext cx="1920240" cy="201168"/>
+          </a:xfrm>
+          <a:prstGeom prst="rect">
+            <a:avLst/>
+          </a:prstGeom>
+          <a:noFill/>
+        </p:spPr>
+        <p:txBody>
+          <a:bodyPr wrap="square">
+            <a:spAutoFit/>
+          </a:bodyPr>
+          <a:lstStyle/>
+          <a:p>
+            <a:pPr algn="l"/>
+            <a:r>
+              <a:rPr sz="800" b="0" i="0">
                 <a:solidFill>
                   <a:srgbClr val="1A2B35"/>
                 </a:solidFill>
@@ -13472,8 +13287,8 @@
         </p:nvSpPr>
         <p:spPr>
           <a:xfrm>
-            <a:off x="4251960" y="4901184"/>
-            <a:ext cx="3977639" cy="292608"/>
+            <a:off x="4297680" y="4901184"/>
+            <a:ext cx="3566160" cy="292608"/>
           </a:xfrm>
           <a:prstGeom prst="rect">
             <a:avLst/>
@@ -13517,23 +13332,23 @@
         </p:nvSpPr>
         <p:spPr>
           <a:xfrm>
-            <a:off x="4343400" y="4937760"/>
-            <a:ext cx="1600200" cy="201168"/>
-          </a:xfrm>
-          <a:prstGeom prst="rect">
-            <a:avLst/>
-          </a:prstGeom>
-          <a:noFill/>
-        </p:spPr>
-        <p:txBody>
-          <a:bodyPr wrap="square">
-            <a:spAutoFit/>
-          </a:bodyPr>
-          <a:lstStyle/>
-          <a:p>
-            <a:pPr algn="l"/>
-            <a:r>
-              <a:rPr sz="750" b="1" i="0">
+            <a:off x="4370832" y="4937760"/>
+            <a:ext cx="1508760" cy="201168"/>
+          </a:xfrm>
+          <a:prstGeom prst="rect">
+            <a:avLst/>
+          </a:prstGeom>
+          <a:noFill/>
+        </p:spPr>
+        <p:txBody>
+          <a:bodyPr wrap="square">
+            <a:spAutoFit/>
+          </a:bodyPr>
+          <a:lstStyle/>
+          <a:p>
+            <a:pPr algn="l"/>
+            <a:r>
+              <a:rPr sz="800" b="1" i="0">
                 <a:solidFill>
                   <a:srgbClr val="E07C1A"/>
                 </a:solidFill>
@@ -13552,23 +13367,23 @@
         </p:nvSpPr>
         <p:spPr>
           <a:xfrm>
-            <a:off x="5989320" y="4937760"/>
-            <a:ext cx="2194560" cy="201168"/>
-          </a:xfrm>
-          <a:prstGeom prst="rect">
-            <a:avLst/>
-          </a:prstGeom>
-          <a:noFill/>
-        </p:spPr>
-        <p:txBody>
-          <a:bodyPr wrap="square">
-            <a:spAutoFit/>
-          </a:bodyPr>
-          <a:lstStyle/>
-          <a:p>
-            <a:pPr algn="l"/>
-            <a:r>
-              <a:rPr sz="750" b="0" i="0">
+            <a:off x="5897880" y="4937760"/>
+            <a:ext cx="1920240" cy="201168"/>
+          </a:xfrm>
+          <a:prstGeom prst="rect">
+            <a:avLst/>
+          </a:prstGeom>
+          <a:noFill/>
+        </p:spPr>
+        <p:txBody>
+          <a:bodyPr wrap="square">
+            <a:spAutoFit/>
+          </a:bodyPr>
+          <a:lstStyle/>
+          <a:p>
+            <a:pPr algn="l"/>
+            <a:r>
+              <a:rPr sz="800" b="0" i="0">
                 <a:solidFill>
                   <a:srgbClr val="1A2B35"/>
                 </a:solidFill>
@@ -13587,8 +13402,8 @@
         </p:nvSpPr>
         <p:spPr>
           <a:xfrm>
-            <a:off x="4251960" y="5230368"/>
-            <a:ext cx="3977639" cy="292608"/>
+            <a:off x="4297680" y="5230368"/>
+            <a:ext cx="3566160" cy="292608"/>
           </a:xfrm>
           <a:prstGeom prst="rect">
             <a:avLst/>
@@ -13632,23 +13447,23 @@
         </p:nvSpPr>
         <p:spPr>
           <a:xfrm>
-            <a:off x="4343400" y="5266944"/>
-            <a:ext cx="1600200" cy="201168"/>
-          </a:xfrm>
-          <a:prstGeom prst="rect">
-            <a:avLst/>
-          </a:prstGeom>
-          <a:noFill/>
-        </p:spPr>
-        <p:txBody>
-          <a:bodyPr wrap="square">
-            <a:spAutoFit/>
-          </a:bodyPr>
-          <a:lstStyle/>
-          <a:p>
-            <a:pPr algn="l"/>
-            <a:r>
-              <a:rPr sz="750" b="1" i="0">
+            <a:off x="4370832" y="5266944"/>
+            <a:ext cx="1508760" cy="201168"/>
+          </a:xfrm>
+          <a:prstGeom prst="rect">
+            <a:avLst/>
+          </a:prstGeom>
+          <a:noFill/>
+        </p:spPr>
+        <p:txBody>
+          <a:bodyPr wrap="square">
+            <a:spAutoFit/>
+          </a:bodyPr>
+          <a:lstStyle/>
+          <a:p>
+            <a:pPr algn="l"/>
+            <a:r>
+              <a:rPr sz="800" b="1" i="0">
                 <a:solidFill>
                   <a:srgbClr val="E07C1A"/>
                 </a:solidFill>
@@ -13667,23 +13482,23 @@
         </p:nvSpPr>
         <p:spPr>
           <a:xfrm>
-            <a:off x="5989320" y="5266944"/>
-            <a:ext cx="2194560" cy="201168"/>
-          </a:xfrm>
-          <a:prstGeom prst="rect">
-            <a:avLst/>
-          </a:prstGeom>
-          <a:noFill/>
-        </p:spPr>
-        <p:txBody>
-          <a:bodyPr wrap="square">
-            <a:spAutoFit/>
-          </a:bodyPr>
-          <a:lstStyle/>
-          <a:p>
-            <a:pPr algn="l"/>
-            <a:r>
-              <a:rPr sz="750" b="0" i="0">
+            <a:off x="5897880" y="5266944"/>
+            <a:ext cx="1920240" cy="201168"/>
+          </a:xfrm>
+          <a:prstGeom prst="rect">
+            <a:avLst/>
+          </a:prstGeom>
+          <a:noFill/>
+        </p:spPr>
+        <p:txBody>
+          <a:bodyPr wrap="square">
+            <a:spAutoFit/>
+          </a:bodyPr>
+          <a:lstStyle/>
+          <a:p>
+            <a:pPr algn="l"/>
+            <a:r>
+              <a:rPr sz="800" b="0" i="0">
                 <a:solidFill>
                   <a:srgbClr val="1A2B35"/>
                 </a:solidFill>
@@ -13702,8 +13517,8 @@
         </p:nvSpPr>
         <p:spPr>
           <a:xfrm>
-            <a:off x="4251960" y="5559552"/>
-            <a:ext cx="3977639" cy="292608"/>
+            <a:off x="4297680" y="5559552"/>
+            <a:ext cx="3566160" cy="292608"/>
           </a:xfrm>
           <a:prstGeom prst="rect">
             <a:avLst/>
@@ -13747,23 +13562,23 @@
         </p:nvSpPr>
         <p:spPr>
           <a:xfrm>
-            <a:off x="4343400" y="5596128"/>
-            <a:ext cx="1600200" cy="201168"/>
-          </a:xfrm>
-          <a:prstGeom prst="rect">
-            <a:avLst/>
-          </a:prstGeom>
-          <a:noFill/>
-        </p:spPr>
-        <p:txBody>
-          <a:bodyPr wrap="square">
-            <a:spAutoFit/>
-          </a:bodyPr>
-          <a:lstStyle/>
-          <a:p>
-            <a:pPr algn="l"/>
-            <a:r>
-              <a:rPr sz="750" b="1" i="0">
+            <a:off x="4370832" y="5596128"/>
+            <a:ext cx="1508760" cy="201168"/>
+          </a:xfrm>
+          <a:prstGeom prst="rect">
+            <a:avLst/>
+          </a:prstGeom>
+          <a:noFill/>
+        </p:spPr>
+        <p:txBody>
+          <a:bodyPr wrap="square">
+            <a:spAutoFit/>
+          </a:bodyPr>
+          <a:lstStyle/>
+          <a:p>
+            <a:pPr algn="l"/>
+            <a:r>
+              <a:rPr sz="800" b="1" i="0">
                 <a:solidFill>
                   <a:srgbClr val="E07C1A"/>
                 </a:solidFill>
@@ -13782,23 +13597,23 @@
         </p:nvSpPr>
         <p:spPr>
           <a:xfrm>
-            <a:off x="5989320" y="5596128"/>
-            <a:ext cx="2194560" cy="201168"/>
-          </a:xfrm>
-          <a:prstGeom prst="rect">
-            <a:avLst/>
-          </a:prstGeom>
-          <a:noFill/>
-        </p:spPr>
-        <p:txBody>
-          <a:bodyPr wrap="square">
-            <a:spAutoFit/>
-          </a:bodyPr>
-          <a:lstStyle/>
-          <a:p>
-            <a:pPr algn="l"/>
-            <a:r>
-              <a:rPr sz="750" b="0" i="0">
+            <a:off x="5897880" y="5596128"/>
+            <a:ext cx="1920240" cy="201168"/>
+          </a:xfrm>
+          <a:prstGeom prst="rect">
+            <a:avLst/>
+          </a:prstGeom>
+          <a:noFill/>
+        </p:spPr>
+        <p:txBody>
+          <a:bodyPr wrap="square">
+            <a:spAutoFit/>
+          </a:bodyPr>
+          <a:lstStyle/>
+          <a:p>
+            <a:pPr algn="l"/>
+            <a:r>
+              <a:rPr sz="800" b="0" i="0">
                 <a:solidFill>
                   <a:srgbClr val="1A2B35"/>
                 </a:solidFill>
@@ -13817,8 +13632,8 @@
         </p:nvSpPr>
         <p:spPr>
           <a:xfrm>
-            <a:off x="8458200" y="4352544"/>
-            <a:ext cx="3520440" cy="182880"/>
+            <a:off x="8138160" y="4352544"/>
+            <a:ext cx="3566160" cy="201168"/>
           </a:xfrm>
           <a:prstGeom prst="rect">
             <a:avLst/>
@@ -13860,23 +13675,23 @@
         </p:nvSpPr>
         <p:spPr>
           <a:xfrm>
-            <a:off x="8549640" y="4370831"/>
-            <a:ext cx="3383280" cy="182880"/>
-          </a:xfrm>
-          <a:prstGeom prst="rect">
-            <a:avLst/>
-          </a:prstGeom>
-          <a:noFill/>
-        </p:spPr>
-        <p:txBody>
-          <a:bodyPr wrap="square">
-            <a:spAutoFit/>
-          </a:bodyPr>
-          <a:lstStyle/>
-          <a:p>
-            <a:pPr algn="l"/>
-            <a:r>
-              <a:rPr sz="750" b="1" i="0">
+            <a:off x="8229600" y="4370831"/>
+            <a:ext cx="3429000" cy="201168"/>
+          </a:xfrm>
+          <a:prstGeom prst="rect">
+            <a:avLst/>
+          </a:prstGeom>
+          <a:noFill/>
+        </p:spPr>
+        <p:txBody>
+          <a:bodyPr wrap="square">
+            <a:spAutoFit/>
+          </a:bodyPr>
+          <a:lstStyle/>
+          <a:p>
+            <a:pPr algn="l"/>
+            <a:r>
+              <a:rPr sz="800" b="1" i="0">
                 <a:solidFill>
                   <a:srgbClr val="FFFFFF"/>
                 </a:solidFill>
@@ -13895,8 +13710,8 @@
         </p:nvSpPr>
         <p:spPr>
           <a:xfrm>
-            <a:off x="8458200" y="4572000"/>
-            <a:ext cx="3520440" cy="292608"/>
+            <a:off x="8138160" y="4572000"/>
+            <a:ext cx="3566160" cy="292608"/>
           </a:xfrm>
           <a:prstGeom prst="rect">
             <a:avLst/>
@@ -13940,29 +13755,29 @@
         </p:nvSpPr>
         <p:spPr>
           <a:xfrm>
-            <a:off x="8549640" y="4608576"/>
-            <a:ext cx="3383280" cy="219456"/>
-          </a:xfrm>
-          <a:prstGeom prst="rect">
-            <a:avLst/>
-          </a:prstGeom>
-          <a:noFill/>
-        </p:spPr>
-        <p:txBody>
-          <a:bodyPr wrap="square">
-            <a:spAutoFit/>
-          </a:bodyPr>
-          <a:lstStyle/>
-          <a:p>
-            <a:pPr algn="l"/>
-            <a:r>
-              <a:rPr sz="750" b="0" i="0">
+            <a:off x="8211312" y="4608576"/>
+            <a:ext cx="3429000" cy="201168"/>
+          </a:xfrm>
+          <a:prstGeom prst="rect">
+            <a:avLst/>
+          </a:prstGeom>
+          <a:noFill/>
+        </p:spPr>
+        <p:txBody>
+          <a:bodyPr wrap="square">
+            <a:spAutoFit/>
+          </a:bodyPr>
+          <a:lstStyle/>
+          <a:p>
+            <a:pPr algn="l"/>
+            <a:r>
+              <a:rPr sz="800" b="0" i="0">
                 <a:solidFill>
                   <a:srgbClr val="1A2B35"/>
                 </a:solidFill>
                 <a:latin typeface="Calibri"/>
               </a:rPr>
-              <a:t>✓  No claim without reproducible experiment.</a:t>
+              <a:t>✓  No claim without reproducible experiment in manifest.</a:t>
             </a:r>
           </a:p>
         </p:txBody>
@@ -13975,8 +13790,8 @@
         </p:nvSpPr>
         <p:spPr>
           <a:xfrm>
-            <a:off x="8458200" y="4901184"/>
-            <a:ext cx="3520440" cy="292608"/>
+            <a:off x="8138160" y="4901184"/>
+            <a:ext cx="3566160" cy="292608"/>
           </a:xfrm>
           <a:prstGeom prst="rect">
             <a:avLst/>
@@ -14020,23 +13835,23 @@
         </p:nvSpPr>
         <p:spPr>
           <a:xfrm>
-            <a:off x="8549640" y="4937760"/>
-            <a:ext cx="3383280" cy="219456"/>
-          </a:xfrm>
-          <a:prstGeom prst="rect">
-            <a:avLst/>
-          </a:prstGeom>
-          <a:noFill/>
-        </p:spPr>
-        <p:txBody>
-          <a:bodyPr wrap="square">
-            <a:spAutoFit/>
-          </a:bodyPr>
-          <a:lstStyle/>
-          <a:p>
-            <a:pPr algn="l"/>
-            <a:r>
-              <a:rPr sz="750" b="0" i="0">
+            <a:off x="8211312" y="4937760"/>
+            <a:ext cx="3429000" cy="201168"/>
+          </a:xfrm>
+          <a:prstGeom prst="rect">
+            <a:avLst/>
+          </a:prstGeom>
+          <a:noFill/>
+        </p:spPr>
+        <p:txBody>
+          <a:bodyPr wrap="square">
+            <a:spAutoFit/>
+          </a:bodyPr>
+          <a:lstStyle/>
+          <a:p>
+            <a:pPr algn="l"/>
+            <a:r>
+              <a:rPr sz="800" b="0" i="0">
                 <a:solidFill>
                   <a:srgbClr val="1A2B35"/>
                 </a:solidFill>
@@ -14055,8 +13870,8 @@
         </p:nvSpPr>
         <p:spPr>
           <a:xfrm>
-            <a:off x="8458200" y="5230368"/>
-            <a:ext cx="3520440" cy="292608"/>
+            <a:off x="8138160" y="5230368"/>
+            <a:ext cx="3566160" cy="292608"/>
           </a:xfrm>
           <a:prstGeom prst="rect">
             <a:avLst/>
@@ -14100,23 +13915,23 @@
         </p:nvSpPr>
         <p:spPr>
           <a:xfrm>
-            <a:off x="8549640" y="5266944"/>
-            <a:ext cx="3383280" cy="219456"/>
-          </a:xfrm>
-          <a:prstGeom prst="rect">
-            <a:avLst/>
-          </a:prstGeom>
-          <a:noFill/>
-        </p:spPr>
-        <p:txBody>
-          <a:bodyPr wrap="square">
-            <a:spAutoFit/>
-          </a:bodyPr>
-          <a:lstStyle/>
-          <a:p>
-            <a:pPr algn="l"/>
-            <a:r>
-              <a:rPr sz="750" b="0" i="0">
+            <a:off x="8211312" y="5266944"/>
+            <a:ext cx="3429000" cy="201168"/>
+          </a:xfrm>
+          <a:prstGeom prst="rect">
+            <a:avLst/>
+          </a:prstGeom>
+          <a:noFill/>
+        </p:spPr>
+        <p:txBody>
+          <a:bodyPr wrap="square">
+            <a:spAutoFit/>
+          </a:bodyPr>
+          <a:lstStyle/>
+          <a:p>
+            <a:pPr algn="l"/>
+            <a:r>
+              <a:rPr sz="800" b="0" i="0">
                 <a:solidFill>
                   <a:srgbClr val="1A2B35"/>
                 </a:solidFill>
@@ -14135,8 +13950,8 @@
         </p:nvSpPr>
         <p:spPr>
           <a:xfrm>
-            <a:off x="8458200" y="5559552"/>
-            <a:ext cx="3520440" cy="292608"/>
+            <a:off x="8138160" y="5559552"/>
+            <a:ext cx="3566160" cy="292608"/>
           </a:xfrm>
           <a:prstGeom prst="rect">
             <a:avLst/>
@@ -14180,23 +13995,23 @@
         </p:nvSpPr>
         <p:spPr>
           <a:xfrm>
-            <a:off x="8549640" y="5596128"/>
-            <a:ext cx="3383280" cy="219456"/>
-          </a:xfrm>
-          <a:prstGeom prst="rect">
-            <a:avLst/>
-          </a:prstGeom>
-          <a:noFill/>
-        </p:spPr>
-        <p:txBody>
-          <a:bodyPr wrap="square">
-            <a:spAutoFit/>
-          </a:bodyPr>
-          <a:lstStyle/>
-          <a:p>
-            <a:pPr algn="l"/>
-            <a:r>
-              <a:rPr sz="750" b="0" i="0">
+            <a:off x="8211312" y="5596128"/>
+            <a:ext cx="3429000" cy="201168"/>
+          </a:xfrm>
+          <a:prstGeom prst="rect">
+            <a:avLst/>
+          </a:prstGeom>
+          <a:noFill/>
+        </p:spPr>
+        <p:txBody>
+          <a:bodyPr wrap="square">
+            <a:spAutoFit/>
+          </a:bodyPr>
+          <a:lstStyle/>
+          <a:p>
+            <a:pPr algn="l"/>
+            <a:r>
+              <a:rPr sz="800" b="0" i="0">
                 <a:solidFill>
                   <a:srgbClr val="1A2B35"/>
                 </a:solidFill>
@@ -14274,13 +14089,13 @@
           <a:p>
             <a:pPr algn="l"/>
             <a:r>
-              <a:rPr sz="700" b="0" i="0">
+              <a:rPr sz="750" b="0" i="0">
                 <a:solidFill>
                   <a:srgbClr val="6B7E88"/>
                 </a:solidFill>
                 <a:latin typeface="Calibri"/>
               </a:rPr>
-              <a:t>LUNA-CORR     •     SIH 2026     •     05 / 06</a:t>
+              <a:t>LUNA-CORR     •     SIH 2026 PS 26166     •     05 / 06</a:t>
             </a:r>
           </a:p>
         </p:txBody>
@@ -14476,7 +14291,7 @@
         <p:spPr>
           <a:xfrm>
             <a:off x="457200" y="749808"/>
-            <a:ext cx="6949440" cy="182880"/>
+            <a:ext cx="6949440" cy="201168"/>
           </a:xfrm>
           <a:prstGeom prst="rect">
             <a:avLst/>
@@ -14519,22 +14334,22 @@
         <p:spPr>
           <a:xfrm>
             <a:off x="548640" y="768096"/>
-            <a:ext cx="6812279" cy="182880"/>
-          </a:xfrm>
-          <a:prstGeom prst="rect">
-            <a:avLst/>
-          </a:prstGeom>
-          <a:noFill/>
-        </p:spPr>
-        <p:txBody>
-          <a:bodyPr wrap="square">
-            <a:spAutoFit/>
-          </a:bodyPr>
-          <a:lstStyle/>
-          <a:p>
-            <a:pPr algn="l"/>
-            <a:r>
-              <a:rPr sz="750" b="1" i="0">
+            <a:ext cx="6812279" cy="201168"/>
+          </a:xfrm>
+          <a:prstGeom prst="rect">
+            <a:avLst/>
+          </a:prstGeom>
+          <a:noFill/>
+        </p:spPr>
+        <p:txBody>
+          <a:bodyPr wrap="square">
+            <a:spAutoFit/>
+          </a:bodyPr>
+          <a:lstStyle/>
+          <a:p>
+            <a:pPr algn="l"/>
+            <a:r>
+              <a:rPr sz="800" b="1" i="0">
                 <a:solidFill>
                   <a:srgbClr val="FFFFFF"/>
                 </a:solidFill>
@@ -14569,7 +14384,7 @@
           <a:p>
             <a:pPr algn="l"/>
             <a:r>
-              <a:rPr sz="800" b="0" i="0">
+              <a:rPr sz="819" b="0" i="0">
                 <a:solidFill>
                   <a:srgbClr val="1A2B35"/>
                 </a:solidFill>
@@ -14604,7 +14419,7 @@
           <a:p>
             <a:pPr algn="l"/>
             <a:r>
-              <a:rPr sz="800" b="0" i="0">
+              <a:rPr sz="819" b="0" i="0">
                 <a:solidFill>
                   <a:srgbClr val="1A2B35"/>
                 </a:solidFill>
@@ -14639,7 +14454,7 @@
           <a:p>
             <a:pPr algn="l"/>
             <a:r>
-              <a:rPr sz="800" b="0" i="0">
+              <a:rPr sz="819" b="0" i="0">
                 <a:solidFill>
                   <a:srgbClr val="1A2B35"/>
                 </a:solidFill>
@@ -14674,7 +14489,7 @@
           <a:p>
             <a:pPr algn="l"/>
             <a:r>
-              <a:rPr sz="800" b="0" i="0">
+              <a:rPr sz="819" b="0" i="0">
                 <a:solidFill>
                   <a:srgbClr val="1A2B35"/>
                 </a:solidFill>
@@ -14709,7 +14524,7 @@
           <a:p>
             <a:pPr algn="l"/>
             <a:r>
-              <a:rPr sz="800" b="0" i="0">
+              <a:rPr sz="819" b="0" i="0">
                 <a:solidFill>
                   <a:srgbClr val="1A2B35"/>
                 </a:solidFill>
@@ -14789,7 +14604,7 @@
           <a:p>
             <a:pPr algn="l"/>
             <a:r>
-              <a:rPr sz="800" b="0" i="1">
+              <a:rPr sz="819" b="0" i="1">
                 <a:solidFill>
                   <a:srgbClr val="E07C1A"/>
                 </a:solidFill>
@@ -14809,7 +14624,7 @@
         <p:spPr>
           <a:xfrm>
             <a:off x="457200" y="3182112"/>
-            <a:ext cx="6949440" cy="182880"/>
+            <a:ext cx="6949440" cy="201168"/>
           </a:xfrm>
           <a:prstGeom prst="rect">
             <a:avLst/>
@@ -14852,22 +14667,22 @@
         <p:spPr>
           <a:xfrm>
             <a:off x="548640" y="3200400"/>
-            <a:ext cx="6812279" cy="182880"/>
-          </a:xfrm>
-          <a:prstGeom prst="rect">
-            <a:avLst/>
-          </a:prstGeom>
-          <a:noFill/>
-        </p:spPr>
-        <p:txBody>
-          <a:bodyPr wrap="square">
-            <a:spAutoFit/>
-          </a:bodyPr>
-          <a:lstStyle/>
-          <a:p>
-            <a:pPr algn="l"/>
-            <a:r>
-              <a:rPr sz="750" b="1" i="0">
+            <a:ext cx="6812279" cy="201168"/>
+          </a:xfrm>
+          <a:prstGeom prst="rect">
+            <a:avLst/>
+          </a:prstGeom>
+          <a:noFill/>
+        </p:spPr>
+        <p:txBody>
+          <a:bodyPr wrap="square">
+            <a:spAutoFit/>
+          </a:bodyPr>
+          <a:lstStyle/>
+          <a:p>
+            <a:pPr algn="l"/>
+            <a:r>
+              <a:rPr sz="800" b="1" i="0">
                 <a:solidFill>
                   <a:srgbClr val="FFFFFF"/>
                 </a:solidFill>
@@ -15062,7 +14877,7 @@
         <p:spPr>
           <a:xfrm>
             <a:off x="7635240" y="749808"/>
-            <a:ext cx="4343400" cy="182880"/>
+            <a:ext cx="4343400" cy="201168"/>
           </a:xfrm>
           <a:prstGeom prst="rect">
             <a:avLst/>
@@ -15105,22 +14920,22 @@
         <p:spPr>
           <a:xfrm>
             <a:off x="7726679" y="768096"/>
-            <a:ext cx="4206240" cy="182880"/>
-          </a:xfrm>
-          <a:prstGeom prst="rect">
-            <a:avLst/>
-          </a:prstGeom>
-          <a:noFill/>
-        </p:spPr>
-        <p:txBody>
-          <a:bodyPr wrap="square">
-            <a:spAutoFit/>
-          </a:bodyPr>
-          <a:lstStyle/>
-          <a:p>
-            <a:pPr algn="l"/>
-            <a:r>
-              <a:rPr sz="750" b="1" i="0">
+            <a:ext cx="4206240" cy="201168"/>
+          </a:xfrm>
+          <a:prstGeom prst="rect">
+            <a:avLst/>
+          </a:prstGeom>
+          <a:noFill/>
+        </p:spPr>
+        <p:txBody>
+          <a:bodyPr wrap="square">
+            <a:spAutoFit/>
+          </a:bodyPr>
+          <a:lstStyle/>
+          <a:p>
+            <a:pPr algn="l"/>
+            <a:r>
+              <a:rPr sz="800" b="1" i="0">
                 <a:solidFill>
                   <a:srgbClr val="FFFFFF"/>
                 </a:solidFill>
@@ -15243,7 +15058,7 @@
           <a:p>
             <a:pPr algn="l"/>
             <a:r>
-              <a:rPr sz="900" b="1" i="0">
+              <a:rPr sz="950" b="1" i="0">
                 <a:solidFill>
                   <a:srgbClr val="147D77"/>
                 </a:solidFill>
@@ -15278,7 +15093,7 @@
           <a:p>
             <a:pPr algn="l"/>
             <a:r>
-              <a:rPr sz="800" b="0" i="0">
+              <a:rPr sz="819" b="0" i="0">
                 <a:solidFill>
                   <a:srgbClr val="1A2B35"/>
                 </a:solidFill>
@@ -15401,7 +15216,7 @@
           <a:p>
             <a:pPr algn="l"/>
             <a:r>
-              <a:rPr sz="900" b="1" i="0">
+              <a:rPr sz="950" b="1" i="0">
                 <a:solidFill>
                   <a:srgbClr val="147D77"/>
                 </a:solidFill>
@@ -15436,7 +15251,7 @@
           <a:p>
             <a:pPr algn="l"/>
             <a:r>
-              <a:rPr sz="800" b="0" i="0">
+              <a:rPr sz="819" b="0" i="0">
                 <a:solidFill>
                   <a:srgbClr val="1A2B35"/>
                 </a:solidFill>
@@ -15559,7 +15374,7 @@
           <a:p>
             <a:pPr algn="l"/>
             <a:r>
-              <a:rPr sz="900" b="1" i="0">
+              <a:rPr sz="950" b="1" i="0">
                 <a:solidFill>
                   <a:srgbClr val="147D77"/>
                 </a:solidFill>
@@ -15594,13 +15409,13 @@
           <a:p>
             <a:pPr algn="l"/>
             <a:r>
-              <a:rPr sz="800" b="0" i="0">
+              <a:rPr sz="819" b="0" i="0">
                 <a:solidFill>
                   <a:srgbClr val="1A2B35"/>
                 </a:solidFill>
                 <a:latin typeface="Calibri"/>
               </a:rPr>
-              <a:t>Rejects invalid or ambiguous registrations with explicit reason codes rather than forcing alignment on unmatchable scenes (proven via disjoint negative control pair).</a:t>
+              <a:t>Rejects invalid or ambiguous registrations with explicit reason codes rather than forcing alignment on unmatchable scenes (demonstrated on a disjoint negative-control pair).</a:t>
             </a:r>
           </a:p>
         </p:txBody>
@@ -15614,7 +15429,7 @@
         <p:spPr>
           <a:xfrm>
             <a:off x="7635240" y="3931920"/>
-            <a:ext cx="4343400" cy="182880"/>
+            <a:ext cx="4343400" cy="201168"/>
           </a:xfrm>
           <a:prstGeom prst="rect">
             <a:avLst/>
@@ -15657,22 +15472,22 @@
         <p:spPr>
           <a:xfrm>
             <a:off x="7726679" y="3950207"/>
-            <a:ext cx="4206240" cy="182880"/>
-          </a:xfrm>
-          <a:prstGeom prst="rect">
-            <a:avLst/>
-          </a:prstGeom>
-          <a:noFill/>
-        </p:spPr>
-        <p:txBody>
-          <a:bodyPr wrap="square">
-            <a:spAutoFit/>
-          </a:bodyPr>
-          <a:lstStyle/>
-          <a:p>
-            <a:pPr algn="l"/>
-            <a:r>
-              <a:rPr sz="750" b="1" i="0">
+            <a:ext cx="4206240" cy="201168"/>
+          </a:xfrm>
+          <a:prstGeom prst="rect">
+            <a:avLst/>
+          </a:prstGeom>
+          <a:noFill/>
+        </p:spPr>
+        <p:txBody>
+          <a:bodyPr wrap="square">
+            <a:spAutoFit/>
+          </a:bodyPr>
+          <a:lstStyle/>
+          <a:p>
+            <a:pPr algn="l"/>
+            <a:r>
+              <a:rPr sz="800" b="1" i="0">
                 <a:solidFill>
                   <a:srgbClr val="FFFFFF"/>
                 </a:solidFill>
@@ -15736,8 +15551,79 @@
         </p:nvSpPr>
         <p:spPr>
           <a:xfrm>
-            <a:off x="7772400" y="4224528"/>
-            <a:ext cx="1188720" cy="219456"/>
+            <a:off x="7772400" y="4251960"/>
+            <a:ext cx="1280160" cy="219456"/>
+          </a:xfrm>
+          <a:prstGeom prst="rect">
+            <a:avLst/>
+          </a:prstGeom>
+          <a:noFill/>
+        </p:spPr>
+        <p:txBody>
+          <a:bodyPr wrap="square">
+            <a:spAutoFit/>
+          </a:bodyPr>
+          <a:lstStyle/>
+          <a:p>
+            <a:pPr algn="l"/>
+            <a:r>
+              <a:rPr sz="850" b="1" i="0">
+                <a:solidFill>
+                  <a:srgbClr val="147D77"/>
+                </a:solidFill>
+                <a:latin typeface="Calibri"/>
+              </a:rPr>
+              <a:t>GitHub (Public):</a:t>
+            </a:r>
+          </a:p>
+        </p:txBody>
+      </p:sp>
+      <p:sp>
+        <p:nvSpPr>
+          <p:cNvPr id="40" name="TextBox 39"/>
+          <p:cNvSpPr txBox="1"/>
+          <p:nvPr/>
+        </p:nvSpPr>
+        <p:spPr>
+          <a:xfrm>
+            <a:off x="9098280" y="4251960"/>
+            <a:ext cx="2788920" cy="219456"/>
+          </a:xfrm>
+          <a:prstGeom prst="rect">
+            <a:avLst/>
+          </a:prstGeom>
+          <a:noFill/>
+        </p:spPr>
+        <p:txBody>
+          <a:bodyPr wrap="square">
+            <a:spAutoFit/>
+          </a:bodyPr>
+          <a:lstStyle/>
+          <a:p>
+            <a:pPr algn="l"/>
+            <a:r>
+              <a:rPr sz="850" b="1">
+                <a:solidFill>
+                  <a:srgbClr val="147D77"/>
+                </a:solidFill>
+                <a:latin typeface="Calibri"/>
+                <a:hlinkClick r:id="rId2"/>
+              </a:rPr>
+              <a:t>github.com/TanukuSai/luna-corr</a:t>
+            </a:r>
+          </a:p>
+        </p:txBody>
+      </p:sp>
+      <p:sp>
+        <p:nvSpPr>
+          <p:cNvPr id="41" name="TextBox 40"/>
+          <p:cNvSpPr txBox="1"/>
+          <p:nvPr/>
+        </p:nvSpPr>
+        <p:spPr>
+          <a:xfrm>
+            <a:off x="7772400" y="4572000"/>
+            <a:ext cx="1280160" cy="201168"/>
           </a:xfrm>
           <a:prstGeom prst="rect">
             <a:avLst/>
@@ -15758,21 +15644,56 @@
                 </a:solidFill>
                 <a:latin typeface="Calibri"/>
               </a:rPr>
-              <a:t>GitHub (Public):</a:t>
-            </a:r>
-          </a:p>
-        </p:txBody>
-      </p:sp>
-      <p:sp>
-        <p:nvSpPr>
-          <p:cNvPr id="40" name="TextBox 39"/>
-          <p:cNvSpPr txBox="1"/>
-          <p:nvPr/>
-        </p:nvSpPr>
-        <p:spPr>
-          <a:xfrm>
-            <a:off x="9006840" y="4224528"/>
-            <a:ext cx="2880360" cy="219456"/>
+              <a:t>Team Name:</a:t>
+            </a:r>
+          </a:p>
+        </p:txBody>
+      </p:sp>
+      <p:sp>
+        <p:nvSpPr>
+          <p:cNvPr id="42" name="TextBox 41"/>
+          <p:cNvSpPr txBox="1"/>
+          <p:nvPr/>
+        </p:nvSpPr>
+        <p:spPr>
+          <a:xfrm>
+            <a:off x="9098280" y="4572000"/>
+            <a:ext cx="2788920" cy="201168"/>
+          </a:xfrm>
+          <a:prstGeom prst="rect">
+            <a:avLst/>
+          </a:prstGeom>
+          <a:noFill/>
+        </p:spPr>
+        <p:txBody>
+          <a:bodyPr wrap="square">
+            <a:spAutoFit/>
+          </a:bodyPr>
+          <a:lstStyle/>
+          <a:p>
+            <a:pPr algn="l"/>
+            <a:r>
+              <a:rPr sz="800" b="0" i="0">
+                <a:solidFill>
+                  <a:srgbClr val="1A2B35"/>
+                </a:solidFill>
+                <a:latin typeface="Calibri"/>
+              </a:rPr>
+              <a:t>R9@MedMitra (Team ID: 189281)</a:t>
+            </a:r>
+          </a:p>
+        </p:txBody>
+      </p:sp>
+      <p:sp>
+        <p:nvSpPr>
+          <p:cNvPr id="43" name="TextBox 42"/>
+          <p:cNvSpPr txBox="1"/>
+          <p:nvPr/>
+        </p:nvSpPr>
+        <p:spPr>
+          <a:xfrm>
+            <a:off x="7772400" y="4864608"/>
+            <a:ext cx="1280160" cy="201168"/>
           </a:xfrm>
           <a:prstGeom prst="rect">
             <a:avLst/>
@@ -15789,25 +15710,60 @@
             <a:r>
               <a:rPr sz="800" b="1" i="0">
                 <a:solidFill>
+                  <a:srgbClr val="147D77"/>
+                </a:solidFill>
+                <a:latin typeface="Calibri"/>
+              </a:rPr>
+              <a:t>Problem Stmt:</a:t>
+            </a:r>
+          </a:p>
+        </p:txBody>
+      </p:sp>
+      <p:sp>
+        <p:nvSpPr>
+          <p:cNvPr id="44" name="TextBox 43"/>
+          <p:cNvSpPr txBox="1"/>
+          <p:nvPr/>
+        </p:nvSpPr>
+        <p:spPr>
+          <a:xfrm>
+            <a:off x="9098280" y="4864608"/>
+            <a:ext cx="2788920" cy="201168"/>
+          </a:xfrm>
+          <a:prstGeom prst="rect">
+            <a:avLst/>
+          </a:prstGeom>
+          <a:noFill/>
+        </p:spPr>
+        <p:txBody>
+          <a:bodyPr wrap="square">
+            <a:spAutoFit/>
+          </a:bodyPr>
+          <a:lstStyle/>
+          <a:p>
+            <a:pPr algn="l"/>
+            <a:r>
+              <a:rPr sz="800" b="0" i="0">
+                <a:solidFill>
                   <a:srgbClr val="1A2B35"/>
                 </a:solidFill>
                 <a:latin typeface="Calibri"/>
               </a:rPr>
-              <a:t>github.com/TanukuSai/luna-corr</a:t>
-            </a:r>
-          </a:p>
-        </p:txBody>
-      </p:sp>
-      <p:sp>
-        <p:nvSpPr>
-          <p:cNvPr id="41" name="TextBox 40"/>
-          <p:cNvSpPr txBox="1"/>
-          <p:nvPr/>
-        </p:nvSpPr>
-        <p:spPr>
-          <a:xfrm>
-            <a:off x="7772400" y="4553712"/>
-            <a:ext cx="1188720" cy="219456"/>
+              <a:t>PS 26166 | Space Applications Centre (SAC), ISRO</a:t>
+            </a:r>
+          </a:p>
+        </p:txBody>
+      </p:sp>
+      <p:sp>
+        <p:nvSpPr>
+          <p:cNvPr id="45" name="TextBox 44"/>
+          <p:cNvSpPr txBox="1"/>
+          <p:nvPr/>
+        </p:nvSpPr>
+        <p:spPr>
+          <a:xfrm>
+            <a:off x="7772400" y="5157216"/>
+            <a:ext cx="1280160" cy="201168"/>
           </a:xfrm>
           <a:prstGeom prst="rect">
             <a:avLst/>
@@ -15828,21 +15784,21 @@
                 </a:solidFill>
                 <a:latin typeface="Calibri"/>
               </a:rPr>
-              <a:t>Team Name:</a:t>
-            </a:r>
-          </a:p>
-        </p:txBody>
-      </p:sp>
-      <p:sp>
-        <p:nvSpPr>
-          <p:cNvPr id="42" name="TextBox 41"/>
-          <p:cNvSpPr txBox="1"/>
-          <p:nvPr/>
-        </p:nvSpPr>
-        <p:spPr>
-          <a:xfrm>
-            <a:off x="9006840" y="4553712"/>
-            <a:ext cx="2880360" cy="219456"/>
+              <a:t>Theme / Category:</a:t>
+            </a:r>
+          </a:p>
+        </p:txBody>
+      </p:sp>
+      <p:sp>
+        <p:nvSpPr>
+          <p:cNvPr id="46" name="TextBox 45"/>
+          <p:cNvSpPr txBox="1"/>
+          <p:nvPr/>
+        </p:nvSpPr>
+        <p:spPr>
+          <a:xfrm>
+            <a:off x="9098280" y="5157216"/>
+            <a:ext cx="2788920" cy="201168"/>
           </a:xfrm>
           <a:prstGeom prst="rect">
             <a:avLst/>
@@ -15863,21 +15819,21 @@
                 </a:solidFill>
                 <a:latin typeface="Calibri"/>
               </a:rPr>
-              <a:t>R9@MedMitra (Team ID: 189281)</a:t>
-            </a:r>
-          </a:p>
-        </p:txBody>
-      </p:sp>
-      <p:sp>
-        <p:nvSpPr>
-          <p:cNvPr id="43" name="TextBox 42"/>
-          <p:cNvSpPr txBox="1"/>
-          <p:nvPr/>
-        </p:nvSpPr>
-        <p:spPr>
-          <a:xfrm>
-            <a:off x="7772400" y="4882896"/>
-            <a:ext cx="1188720" cy="219456"/>
+              <a:t>Space Technology  |  Software</a:t>
+            </a:r>
+          </a:p>
+        </p:txBody>
+      </p:sp>
+      <p:sp>
+        <p:nvSpPr>
+          <p:cNvPr id="47" name="TextBox 46"/>
+          <p:cNvSpPr txBox="1"/>
+          <p:nvPr/>
+        </p:nvSpPr>
+        <p:spPr>
+          <a:xfrm>
+            <a:off x="7772400" y="5449824"/>
+            <a:ext cx="1280160" cy="201168"/>
           </a:xfrm>
           <a:prstGeom prst="rect">
             <a:avLst/>
@@ -15898,21 +15854,21 @@
                 </a:solidFill>
                 <a:latin typeface="Calibri"/>
               </a:rPr>
-              <a:t>Problem Stmt:</a:t>
-            </a:r>
-          </a:p>
-        </p:txBody>
-      </p:sp>
-      <p:sp>
-        <p:nvSpPr>
-          <p:cNvPr id="44" name="TextBox 43"/>
-          <p:cNvSpPr txBox="1"/>
-          <p:nvPr/>
-        </p:nvSpPr>
-        <p:spPr>
-          <a:xfrm>
-            <a:off x="9006840" y="4882896"/>
-            <a:ext cx="2880360" cy="219456"/>
+              <a:t>Packaging / CI:</a:t>
+            </a:r>
+          </a:p>
+        </p:txBody>
+      </p:sp>
+      <p:sp>
+        <p:nvSpPr>
+          <p:cNvPr id="48" name="TextBox 47"/>
+          <p:cNvSpPr txBox="1"/>
+          <p:nvPr/>
+        </p:nvSpPr>
+        <p:spPr>
+          <a:xfrm>
+            <a:off x="9098280" y="5449824"/>
+            <a:ext cx="2788920" cy="201168"/>
           </a:xfrm>
           <a:prstGeom prst="rect">
             <a:avLst/>
@@ -15933,21 +15889,21 @@
                 </a:solidFill>
                 <a:latin typeface="Calibri"/>
               </a:rPr>
-              <a:t>PS 26166 | Space Applications Centre (SAC), ISRO</a:t>
-            </a:r>
-          </a:p>
-        </p:txBody>
-      </p:sp>
-      <p:sp>
-        <p:nvSpPr>
-          <p:cNvPr id="45" name="TextBox 44"/>
-          <p:cNvSpPr txBox="1"/>
-          <p:nvPr/>
-        </p:nvSpPr>
-        <p:spPr>
-          <a:xfrm>
-            <a:off x="7772400" y="5212080"/>
-            <a:ext cx="1188720" cy="219456"/>
+              <a:t>Dockerfile, pyproject.toml, pytest suite (5 passed)</a:t>
+            </a:r>
+          </a:p>
+        </p:txBody>
+      </p:sp>
+      <p:sp>
+        <p:nvSpPr>
+          <p:cNvPr id="49" name="TextBox 48"/>
+          <p:cNvSpPr txBox="1"/>
+          <p:nvPr/>
+        </p:nvSpPr>
+        <p:spPr>
+          <a:xfrm>
+            <a:off x="7772400" y="5742432"/>
+            <a:ext cx="1280160" cy="201168"/>
           </a:xfrm>
           <a:prstGeom prst="rect">
             <a:avLst/>
@@ -15968,21 +15924,21 @@
                 </a:solidFill>
                 <a:latin typeface="Calibri"/>
               </a:rPr>
-              <a:t>Theme / Category:</a:t>
-            </a:r>
-          </a:p>
-        </p:txBody>
-      </p:sp>
-      <p:sp>
-        <p:nvSpPr>
-          <p:cNvPr id="46" name="TextBox 45"/>
-          <p:cNvSpPr txBox="1"/>
-          <p:nvPr/>
-        </p:nvSpPr>
-        <p:spPr>
-          <a:xfrm>
-            <a:off x="9006840" y="5212080"/>
-            <a:ext cx="2880360" cy="219456"/>
+              <a:t>Benchmark Specs:</a:t>
+            </a:r>
+          </a:p>
+        </p:txBody>
+      </p:sp>
+      <p:sp>
+        <p:nvSpPr>
+          <p:cNvPr id="50" name="TextBox 49"/>
+          <p:cNvSpPr txBox="1"/>
+          <p:nvPr/>
+        </p:nvSpPr>
+        <p:spPr>
+          <a:xfrm>
+            <a:off x="9098280" y="5742432"/>
+            <a:ext cx="2788920" cy="201168"/>
           </a:xfrm>
           <a:prstGeom prst="rect">
             <a:avLst/>
@@ -16003,84 +15959,14 @@
                 </a:solidFill>
                 <a:latin typeface="Calibri"/>
               </a:rPr>
-              <a:t>Space Technology  |  Software</a:t>
-            </a:r>
-          </a:p>
-        </p:txBody>
-      </p:sp>
-      <p:sp>
-        <p:nvSpPr>
-          <p:cNvPr id="47" name="TextBox 46"/>
-          <p:cNvSpPr txBox="1"/>
-          <p:nvPr/>
-        </p:nvSpPr>
-        <p:spPr>
-          <a:xfrm>
-            <a:off x="7772400" y="5541264"/>
-            <a:ext cx="1188720" cy="219456"/>
-          </a:xfrm>
-          <a:prstGeom prst="rect">
-            <a:avLst/>
-          </a:prstGeom>
-          <a:noFill/>
-        </p:spPr>
-        <p:txBody>
-          <a:bodyPr wrap="square">
-            <a:spAutoFit/>
-          </a:bodyPr>
-          <a:lstStyle/>
-          <a:p>
-            <a:pPr algn="l"/>
-            <a:r>
-              <a:rPr sz="800" b="1" i="0">
-                <a:solidFill>
-                  <a:srgbClr val="147D77"/>
-                </a:solidFill>
-                <a:latin typeface="Calibri"/>
-              </a:rPr>
-              <a:t>Deliverables:</a:t>
-            </a:r>
-          </a:p>
-        </p:txBody>
-      </p:sp>
-      <p:sp>
-        <p:nvSpPr>
-          <p:cNvPr id="48" name="TextBox 47"/>
-          <p:cNvSpPr txBox="1"/>
-          <p:nvPr/>
-        </p:nvSpPr>
-        <p:spPr>
-          <a:xfrm>
-            <a:off x="9006840" y="5541264"/>
-            <a:ext cx="2880360" cy="219456"/>
-          </a:xfrm>
-          <a:prstGeom prst="rect">
-            <a:avLst/>
-          </a:prstGeom>
-          <a:noFill/>
-        </p:spPr>
-        <p:txBody>
-          <a:bodyPr wrap="square">
-            <a:spAutoFit/>
-          </a:bodyPr>
-          <a:lstStyle/>
-          <a:p>
-            <a:pPr algn="l"/>
-            <a:r>
-              <a:rPr sz="800" b="0" i="0">
-                <a:solidFill>
-                  <a:srgbClr val="1A2B35"/>
-                </a:solidFill>
-                <a:latin typeface="Calibri"/>
-              </a:rPr>
-              <a:t>Python package (lunacorr), CLI, benchmarks, test suite</a:t>
-            </a:r>
-          </a:p>
-        </p:txBody>
-      </p:sp>
-      <p:sp>
-        <p:nvSpPr>
-          <p:cNvPr id="49" name="Rectangle 48"/>
+              <a:t>BENCHMARK_MANIFEST.md (canonical experiment registry)</a:t>
+            </a:r>
+          </a:p>
+        </p:txBody>
+      </p:sp>
+      <p:sp>
+        <p:nvSpPr>
+          <p:cNvPr id="51" name="Rectangle 50"/>
           <p:cNvSpPr/>
           <p:nvPr/>
         </p:nvSpPr>
@@ -16123,7 +16009,7 @@
       </p:sp>
       <p:sp>
         <p:nvSpPr>
-          <p:cNvPr id="50" name="TextBox 49"/>
+          <p:cNvPr id="52" name="TextBox 51"/>
           <p:cNvSpPr txBox="1"/>
           <p:nvPr/>
         </p:nvSpPr>
@@ -16145,13 +16031,13 @@
           <a:p>
             <a:pPr algn="l"/>
             <a:r>
-              <a:rPr sz="700" b="0" i="0">
+              <a:rPr sz="750" b="0" i="0">
                 <a:solidFill>
                   <a:srgbClr val="6B7E88"/>
                 </a:solidFill>
                 <a:latin typeface="Calibri"/>
               </a:rPr>
-              <a:t>LUNA-CORR     •     SIH 2026     •     06 / 06</a:t>
+              <a:t>LUNA-CORR     •     SIH 2026 PS 26166     •     06 / 06</a:t>
             </a:r>
           </a:p>
         </p:txBody>

--- a/LUNA-CORR_SIH2026_Presentation.pptx
+++ b/LUNA-CORR_SIH2026_Presentation.pptx
@@ -6780,7 +6780,7 @@
                 </a:solidFill>
                 <a:latin typeface="Calibri"/>
               </a:rPr>
-              <a:t>Multi-scale RootSIFT / feature matching</a:t>
+              <a:t>Tiled coarse-to-fine RootSIFT matching</a:t>
             </a:r>
           </a:p>
         </p:txBody>
@@ -7412,7 +7412,7 @@
                 </a:solidFill>
                 <a:latin typeface="Calibri"/>
               </a:rPr>
-              <a:t>Relief-coherent residual + P95 threshold → TPS</a:t>
+              <a:t>S_relief &gt; 0.20 AND P95 &gt;= 1.5 px → TPS</a:t>
             </a:r>
           </a:p>
         </p:txBody>
@@ -8635,7 +8635,7 @@
                 </a:solidFill>
                 <a:latin typeface="Calibri"/>
               </a:rPr>
-              <a:t>• Packaged Python CLI (lunacorr/) + automated pytest test suite (5 passed)
+              <a:t>• Packaged Python CLI (lunacorr/) + automated pytest test suite (15 passed)
 • Dockerfile containerization specification + BENCHMARK_MANIFEST.md</a:t>
             </a:r>
           </a:p>
@@ -9469,7 +9469,7 @@
                 </a:solidFill>
                 <a:latin typeface="Calibri"/>
               </a:rPr>
-              <a:t>EVALUATION PRINCIPLE: N≥20 inliers required; 20% correspondences held out; independent geodetic GT pending.</a:t>
+              <a:t>EVALUATION PRINCIPLE: Operational QualityGate (min_inliers=20) unified with reporting threshold N≥20; 20% held-out test split.</a:t>
             </a:r>
           </a:p>
         </p:txBody>
@@ -10402,7 +10402,7 @@
                 </a:solidFill>
                 <a:latin typeface="Calibri"/>
               </a:rPr>
-              <a:t>I/O latency (pyramid)</a:t>
+              <a:t>EXP-IO (pyramid seeker)</a:t>
             </a:r>
           </a:p>
         </p:txBody>
@@ -10437,7 +10437,7 @@
                 </a:solidFill>
                 <a:latin typeface="Calibri"/>
               </a:rPr>
-              <a:t>Median 34.4 ms, p95 &lt; 80 ms</a:t>
+              <a:t>Median 39.2 ms, p95 55.1 ms</a:t>
             </a:r>
           </a:p>
         </p:txBody>
@@ -15889,7 +15889,7 @@
                 </a:solidFill>
                 <a:latin typeface="Calibri"/>
               </a:rPr>
-              <a:t>Dockerfile, pyproject.toml, pytest suite (5 passed)</a:t>
+              <a:t>Dockerfile, pyproject.toml, pytest suite (15 passed)</a:t>
             </a:r>
           </a:p>
         </p:txBody>

--- a/LUNA-CORR_SIH2026_Presentation.pptx
+++ b/LUNA-CORR_SIH2026_Presentation.pptx
@@ -3971,7 +3971,7 @@
                 <a:latin typeface="Calibri"/>
               </a:rPr>
               <a:t>• EXP-OHRC-E2E: 822 inliers (99.2% ratio)  ·  Held-out RMSE: 0.679 px (N=165 withheld, TPS Warping Accepted)
-• EXP-TMC-FIXED: 1.52 px → 0.84 px RMSE (44.7% gain vs Stage 3, N=150)  |  EXP-TMC-E2E: 686 inliers, 1.110 px RMSE</a:t>
+• EXP-TMC-FIXED: 1.61 px → 0.84 px RMSE (47.9% gain vs Stage 3, N=150)  |  EXP-TMC-E2E: 686 inliers, 1.110 px RMSE</a:t>
             </a:r>
           </a:p>
         </p:txBody>
@@ -5493,7 +5493,7 @@
                 </a:solidFill>
                 <a:latin typeface="Calibri"/>
               </a:rPr>
-              <a:t>▸  LCN + Mode C DEM Rendering: Normalizes dynamic range; simulates DEM at target sun angle.</a:t>
+              <a:t>▸  LCN + Mode C DEM Rendering (Physics Branch): Normalizes dynamic range; simulates DEM at target sun angle.</a:t>
             </a:r>
           </a:p>
         </p:txBody>
@@ -6622,7 +6622,8 @@
                 </a:solidFill>
                 <a:latin typeface="Calibri"/>
               </a:rPr>
-              <a:t>LCN normalization + Mode C DEM lighting</a:t>
+              <a:t>LCN normalization
+[Mode C: Physics branch]</a:t>
             </a:r>
           </a:p>
         </p:txBody>
@@ -7787,7 +7788,7 @@
                 </a:solidFill>
                 <a:latin typeface="Calibri"/>
               </a:rPr>
-              <a:t>Held-out RMSE: 1.110 px (fitting: 0.841 px, N=138)  |  EXP-TMC-FIXED (N=150): 1.52 → 0.841 px (44.7% gain)</a:t>
+              <a:t>Held-out RMSE: 1.110 px (fitting: 0.841 px, N=138)  |  EXP-TMC-FIXED (N=150): 1.61 → 0.836 px (47.9% gain)</a:t>
             </a:r>
           </a:p>
         </p:txBody>
@@ -9070,7 +9071,7 @@
         <p:spPr>
           <a:xfrm>
             <a:off x="457200" y="960120"/>
-            <a:ext cx="6949440" cy="201168"/>
+            <a:ext cx="6035040" cy="201168"/>
           </a:xfrm>
           <a:prstGeom prst="rect">
             <a:avLst/>
@@ -9113,7 +9114,7 @@
         <p:spPr>
           <a:xfrm>
             <a:off x="548640" y="978408"/>
-            <a:ext cx="6812279" cy="201168"/>
+            <a:ext cx="5897879" cy="201168"/>
           </a:xfrm>
           <a:prstGeom prst="rect">
             <a:avLst/>
@@ -9155,8 +9156,8 @@
         </p:blipFill>
         <p:spPr>
           <a:xfrm>
-            <a:off x="457200" y="1170432"/>
-            <a:ext cx="6949440" cy="2697480"/>
+            <a:off x="457200" y="1188720"/>
+            <a:ext cx="6035040" cy="2697480"/>
           </a:xfrm>
           <a:prstGeom prst="rect">
             <a:avLst/>
@@ -9172,7 +9173,7 @@
         <p:spPr>
           <a:xfrm>
             <a:off x="457200" y="3977639"/>
-            <a:ext cx="6949440" cy="749808"/>
+            <a:ext cx="6035040" cy="1737360"/>
           </a:xfrm>
           <a:prstGeom prst="rect">
             <a:avLst/>
@@ -9217,7 +9218,7 @@
         <p:spPr>
           <a:xfrm>
             <a:off x="548640" y="4014215"/>
-            <a:ext cx="6766560" cy="164592"/>
+            <a:ext cx="5852160" cy="164592"/>
           </a:xfrm>
           <a:prstGeom prst="rect">
             <a:avLst/>
@@ -9238,7 +9239,7 @@
                 </a:solidFill>
                 <a:latin typeface="Calibri"/>
               </a:rPr>
-              <a:t>RESULT 1 — REAL CHANDRAYAAN-2 TMC-2 STEREO BENCHMARKS:</a:t>
+              <a:t>RESULT 1A — TMC-2 STEREO FIXED ABLATION (EXP-TMC-FIXED, ZERO LEAKAGE):</a:t>
             </a:r>
           </a:p>
         </p:txBody>
@@ -9251,30 +9252,32 @@
         </p:nvSpPr>
         <p:spPr>
           <a:xfrm>
-            <a:off x="548640" y="4187952"/>
-            <a:ext cx="6766560" cy="512064"/>
-          </a:xfrm>
-          <a:prstGeom prst="rect">
-            <a:avLst/>
-          </a:prstGeom>
-          <a:noFill/>
-        </p:spPr>
-        <p:txBody>
-          <a:bodyPr wrap="square">
-            <a:spAutoFit/>
-          </a:bodyPr>
-          <a:lstStyle/>
-          <a:p>
-            <a:pPr algn="l"/>
-            <a:r>
-              <a:rPr sz="800" b="0" i="0">
+            <a:off x="548640" y="4206240"/>
+            <a:ext cx="5852160" cy="1463040"/>
+          </a:xfrm>
+          <a:prstGeom prst="rect">
+            <a:avLst/>
+          </a:prstGeom>
+          <a:noFill/>
+        </p:spPr>
+        <p:txBody>
+          <a:bodyPr wrap="square">
+            <a:spAutoFit/>
+          </a:bodyPr>
+          <a:lstStyle/>
+          <a:p>
+            <a:pPr algn="l"/>
+            <a:r>
+              <a:rPr sz="819" b="0" i="0">
                 <a:solidFill>
                   <a:srgbClr val="1A2B35"/>
                 </a:solidFill>
                 <a:latin typeface="Calibri"/>
               </a:rPr>
-              <a:t>• EXP-TMC-FIXED (Ablation): Held-out RMSE reduced 1.52 px → 0.841 px (44.7% gain vs Stage-3 homography; 95% CI: [0.71, 0.97] px on N=150 frozen set with zero training leakage)
-• EXP-TMC-E2E (End-to-End Run): 686 inliers (77.0% ratio), TPS model chosen, held-out RMSE = 1.110 px on N=138 withheld correspondences (fitting RMSE = 0.841 px on N=548)</a:t>
+              <a:t>• Frozen Consensus Set: Master N=150 held-out evaluation points frozen with zero leakage.
+• 3 px Spatial Exclusion: Training candidates within 3.0 px of test points purged across all stages.
+• Significant Accuracy Gain: Held-out RMSE drops from 1.606 px (Stage 3) down to 0.836 px [0.718, 0.973] px (Stage 5 Adaptive TPS) — a 47.9% error reduction (60.5% vs Raw SIFT baseline: 2.119 px).
+• Sub-pixel Distribution: Median held-out error is 0.560 px; tail P95 reduced from 3.14 px to 1.54 px.</a:t>
             </a:r>
           </a:p>
         </p:txBody>
@@ -9287,123 +9290,8 @@
         </p:nvSpPr>
         <p:spPr>
           <a:xfrm>
-            <a:off x="457200" y="4800600"/>
-            <a:ext cx="6949440" cy="502920"/>
-          </a:xfrm>
-          <a:prstGeom prst="rect">
-            <a:avLst/>
-          </a:prstGeom>
-          <a:solidFill>
-            <a:srgbClr val="F4F6F8"/>
-          </a:solidFill>
-          <a:ln w="5080">
-            <a:solidFill>
-              <a:srgbClr val="D0D8DD"/>
-            </a:solidFill>
-          </a:ln>
-        </p:spPr>
-        <p:style>
-          <a:lnRef idx="1">
-            <a:schemeClr val="accent1"/>
-          </a:lnRef>
-          <a:fillRef idx="3">
-            <a:schemeClr val="accent1"/>
-          </a:fillRef>
-          <a:effectRef idx="2">
-            <a:schemeClr val="accent1"/>
-          </a:effectRef>
-          <a:fontRef idx="minor">
-            <a:schemeClr val="lt1"/>
-          </a:fontRef>
-        </p:style>
-        <p:txBody>
-          <a:bodyPr rtlCol="0" anchor="ctr"/>
-          <a:lstStyle/>
-          <a:p>
-            <a:pPr algn="ctr"/>
-          </a:p>
-        </p:txBody>
-      </p:sp>
-      <p:sp>
-        <p:nvSpPr>
-          <p:cNvPr id="15" name="TextBox 14"/>
-          <p:cNvSpPr txBox="1"/>
-          <p:nvPr/>
-        </p:nvSpPr>
-        <p:spPr>
-          <a:xfrm>
-            <a:off x="548640" y="4837176"/>
-            <a:ext cx="6766560" cy="164592"/>
-          </a:xfrm>
-          <a:prstGeom prst="rect">
-            <a:avLst/>
-          </a:prstGeom>
-          <a:noFill/>
-        </p:spPr>
-        <p:txBody>
-          <a:bodyPr wrap="square">
-            <a:spAutoFit/>
-          </a:bodyPr>
-          <a:lstStyle/>
-          <a:p>
-            <a:pPr algn="l"/>
-            <a:r>
-              <a:rPr sz="850" b="1" i="0">
-                <a:solidFill>
-                  <a:srgbClr val="147D77"/>
-                </a:solidFill>
-                <a:latin typeface="Calibri"/>
-              </a:rPr>
-              <a:t>RESULT 2 — DISJOINT SCENE NEGATIVE CONTROL (EXP-NEG-DISJOINT):</a:t>
-            </a:r>
-          </a:p>
-        </p:txBody>
-      </p:sp>
-      <p:sp>
-        <p:nvSpPr>
-          <p:cNvPr id="16" name="TextBox 15"/>
-          <p:cNvSpPr txBox="1"/>
-          <p:nvPr/>
-        </p:nvSpPr>
-        <p:spPr>
-          <a:xfrm>
-            <a:off x="548640" y="5010912"/>
-            <a:ext cx="6766560" cy="274320"/>
-          </a:xfrm>
-          <a:prstGeom prst="rect">
-            <a:avLst/>
-          </a:prstGeom>
-          <a:noFill/>
-        </p:spPr>
-        <p:txBody>
-          <a:bodyPr wrap="square">
-            <a:spAutoFit/>
-          </a:bodyPr>
-          <a:lstStyle/>
-          <a:p>
-            <a:pPr algn="l"/>
-            <a:r>
-              <a:rPr sz="819" b="0" i="0">
-                <a:solidFill>
-                  <a:srgbClr val="1A2B35"/>
-                </a:solidFill>
-                <a:latin typeface="Calibri"/>
-              </a:rPr>
-              <a:t>1/1 disjoint scene pair rejected; 5 candidate inliers retained but no registration accepted (system fails safely).</a:t>
-            </a:r>
-          </a:p>
-        </p:txBody>
-      </p:sp>
-      <p:sp>
-        <p:nvSpPr>
-          <p:cNvPr id="17" name="Rectangle 16"/>
-          <p:cNvSpPr/>
-          <p:nvPr/>
-        </p:nvSpPr>
-        <p:spPr>
-          <a:xfrm>
-            <a:off x="457200" y="5413248"/>
-            <a:ext cx="6949440" cy="292608"/>
+            <a:off x="457200" y="5779008"/>
+            <a:ext cx="6035040" cy="347472"/>
           </a:xfrm>
           <a:prstGeom prst="rect">
             <a:avLst/>
@@ -9441,14 +9329,14 @@
       </p:sp>
       <p:sp>
         <p:nvSpPr>
-          <p:cNvPr id="18" name="TextBox 17"/>
-          <p:cNvSpPr txBox="1"/>
-          <p:nvPr/>
-        </p:nvSpPr>
-        <p:spPr>
-          <a:xfrm>
-            <a:off x="548640" y="5449824"/>
-            <a:ext cx="6766560" cy="201168"/>
+          <p:cNvPr id="15" name="TextBox 14"/>
+          <p:cNvSpPr txBox="1"/>
+          <p:nvPr/>
+        </p:nvSpPr>
+        <p:spPr>
+          <a:xfrm>
+            <a:off x="548640" y="5815584"/>
+            <a:ext cx="5852160" cy="274320"/>
           </a:xfrm>
           <a:prstGeom prst="rect">
             <a:avLst/>
@@ -9469,21 +9357,21 @@
                 </a:solidFill>
                 <a:latin typeface="Calibri"/>
               </a:rPr>
-              <a:t>EVALUATION PRINCIPLE: Operational QualityGate (min_inliers=20) unified with reporting threshold N≥20; 20% held-out test split.</a:t>
-            </a:r>
-          </a:p>
-        </p:txBody>
-      </p:sp>
-      <p:sp>
-        <p:nvSpPr>
-          <p:cNvPr id="19" name="Rectangle 18"/>
+              <a:t>METHODOLOGY: Operational QualityGate (min_inliers=20) unified with reporting threshold N≥20; 20% held-out test split with zero spatial leakage.</a:t>
+            </a:r>
+          </a:p>
+        </p:txBody>
+      </p:sp>
+      <p:sp>
+        <p:nvSpPr>
+          <p:cNvPr id="16" name="Rectangle 15"/>
           <p:cNvSpPr/>
           <p:nvPr/>
         </p:nvSpPr>
         <p:spPr>
           <a:xfrm>
-            <a:off x="7635240" y="960120"/>
-            <a:ext cx="4343400" cy="201168"/>
+            <a:off x="6675120" y="960120"/>
+            <a:ext cx="5056632" cy="201168"/>
           </a:xfrm>
           <a:prstGeom prst="rect">
             <a:avLst/>
@@ -9519,14 +9407,14 @@
       </p:sp>
       <p:sp>
         <p:nvSpPr>
-          <p:cNvPr id="20" name="TextBox 19"/>
-          <p:cNvSpPr txBox="1"/>
-          <p:nvPr/>
-        </p:nvSpPr>
-        <p:spPr>
-          <a:xfrm>
-            <a:off x="7726679" y="978408"/>
-            <a:ext cx="4206240" cy="201168"/>
+          <p:cNvPr id="17" name="TextBox 16"/>
+          <p:cNvSpPr txBox="1"/>
+          <p:nvPr/>
+        </p:nvSpPr>
+        <p:spPr>
+          <a:xfrm>
+            <a:off x="6766559" y="978408"/>
+            <a:ext cx="4919472" cy="201168"/>
           </a:xfrm>
           <a:prstGeom prst="rect">
             <a:avLst/>
@@ -9554,14 +9442,14 @@
       </p:sp>
       <p:sp>
         <p:nvSpPr>
-          <p:cNvPr id="21" name="Rectangle 20"/>
+          <p:cNvPr id="18" name="Rectangle 17"/>
           <p:cNvSpPr/>
           <p:nvPr/>
         </p:nvSpPr>
         <p:spPr>
           <a:xfrm>
-            <a:off x="7635240" y="1170432"/>
-            <a:ext cx="4343400" cy="256032"/>
+            <a:off x="6675120" y="1188720"/>
+            <a:ext cx="5056632" cy="256032"/>
           </a:xfrm>
           <a:prstGeom prst="rect">
             <a:avLst/>
@@ -9599,119 +9487,119 @@
       </p:sp>
       <p:sp>
         <p:nvSpPr>
+          <p:cNvPr id="19" name="TextBox 18"/>
+          <p:cNvSpPr txBox="1"/>
+          <p:nvPr/>
+        </p:nvSpPr>
+        <p:spPr>
+          <a:xfrm>
+            <a:off x="6729984" y="1225296"/>
+            <a:ext cx="182880" cy="182880"/>
+          </a:xfrm>
+          <a:prstGeom prst="rect">
+            <a:avLst/>
+          </a:prstGeom>
+          <a:noFill/>
+        </p:spPr>
+        <p:txBody>
+          <a:bodyPr wrap="square">
+            <a:spAutoFit/>
+          </a:bodyPr>
+          <a:lstStyle/>
+          <a:p>
+            <a:pPr algn="l"/>
+            <a:r>
+              <a:rPr sz="850" b="1" i="0">
+                <a:solidFill>
+                  <a:srgbClr val="2E9E6E"/>
+                </a:solidFill>
+                <a:latin typeface="Calibri"/>
+              </a:rPr>
+              <a:t>●</a:t>
+            </a:r>
+          </a:p>
+        </p:txBody>
+      </p:sp>
+      <p:sp>
+        <p:nvSpPr>
+          <p:cNvPr id="20" name="TextBox 19"/>
+          <p:cNvSpPr txBox="1"/>
+          <p:nvPr/>
+        </p:nvSpPr>
+        <p:spPr>
+          <a:xfrm>
+            <a:off x="6931152" y="1216152"/>
+            <a:ext cx="2103120" cy="201168"/>
+          </a:xfrm>
+          <a:prstGeom prst="rect">
+            <a:avLst/>
+          </a:prstGeom>
+          <a:noFill/>
+        </p:spPr>
+        <p:txBody>
+          <a:bodyPr wrap="square">
+            <a:spAutoFit/>
+          </a:bodyPr>
+          <a:lstStyle/>
+          <a:p>
+            <a:pPr algn="l"/>
+            <a:r>
+              <a:rPr sz="800" b="1" i="0">
+                <a:solidFill>
+                  <a:srgbClr val="1A2B35"/>
+                </a:solidFill>
+                <a:latin typeface="Calibri"/>
+              </a:rPr>
+              <a:t>EXP-OHRC-E2E (repeat)</a:t>
+            </a:r>
+          </a:p>
+        </p:txBody>
+      </p:sp>
+      <p:sp>
+        <p:nvSpPr>
+          <p:cNvPr id="21" name="TextBox 20"/>
+          <p:cNvSpPr txBox="1"/>
+          <p:nvPr/>
+        </p:nvSpPr>
+        <p:spPr>
+          <a:xfrm>
+            <a:off x="9098280" y="1216152"/>
+            <a:ext cx="1783080" cy="201168"/>
+          </a:xfrm>
+          <a:prstGeom prst="rect">
+            <a:avLst/>
+          </a:prstGeom>
+          <a:noFill/>
+        </p:spPr>
+        <p:txBody>
+          <a:bodyPr wrap="square">
+            <a:spAutoFit/>
+          </a:bodyPr>
+          <a:lstStyle/>
+          <a:p>
+            <a:pPr algn="l"/>
+            <a:r>
+              <a:rPr sz="800" b="0" i="0">
+                <a:solidFill>
+                  <a:srgbClr val="2E9E6E"/>
+                </a:solidFill>
+                <a:latin typeface="Calibri"/>
+              </a:rPr>
+              <a:t>0.679 px RMSE (822 inliers)</a:t>
+            </a:r>
+          </a:p>
+        </p:txBody>
+      </p:sp>
+      <p:sp>
+        <p:nvSpPr>
           <p:cNvPr id="22" name="TextBox 21"/>
           <p:cNvSpPr txBox="1"/>
           <p:nvPr/>
         </p:nvSpPr>
         <p:spPr>
           <a:xfrm>
-            <a:off x="7680960" y="1207008"/>
-            <a:ext cx="182880" cy="182880"/>
-          </a:xfrm>
-          <a:prstGeom prst="rect">
-            <a:avLst/>
-          </a:prstGeom>
-          <a:noFill/>
-        </p:spPr>
-        <p:txBody>
-          <a:bodyPr wrap="square">
-            <a:spAutoFit/>
-          </a:bodyPr>
-          <a:lstStyle/>
-          <a:p>
-            <a:pPr algn="l"/>
-            <a:r>
-              <a:rPr sz="850" b="1" i="0">
-                <a:solidFill>
-                  <a:srgbClr val="2E9E6E"/>
-                </a:solidFill>
-                <a:latin typeface="Calibri"/>
-              </a:rPr>
-              <a:t>●</a:t>
-            </a:r>
-          </a:p>
-        </p:txBody>
-      </p:sp>
-      <p:sp>
-        <p:nvSpPr>
-          <p:cNvPr id="23" name="TextBox 22"/>
-          <p:cNvSpPr txBox="1"/>
-          <p:nvPr/>
-        </p:nvSpPr>
-        <p:spPr>
-          <a:xfrm>
-            <a:off x="7882127" y="1197864"/>
-            <a:ext cx="1965960" cy="201168"/>
-          </a:xfrm>
-          <a:prstGeom prst="rect">
-            <a:avLst/>
-          </a:prstGeom>
-          <a:noFill/>
-        </p:spPr>
-        <p:txBody>
-          <a:bodyPr wrap="square">
-            <a:spAutoFit/>
-          </a:bodyPr>
-          <a:lstStyle/>
-          <a:p>
-            <a:pPr algn="l"/>
-            <a:r>
-              <a:rPr sz="800" b="1" i="0">
-                <a:solidFill>
-                  <a:srgbClr val="1A2B35"/>
-                </a:solidFill>
-                <a:latin typeface="Calibri"/>
-              </a:rPr>
-              <a:t>EXP-OHRC-E2E (repeat)</a:t>
-            </a:r>
-          </a:p>
-        </p:txBody>
-      </p:sp>
-      <p:sp>
-        <p:nvSpPr>
-          <p:cNvPr id="24" name="TextBox 23"/>
-          <p:cNvSpPr txBox="1"/>
-          <p:nvPr/>
-        </p:nvSpPr>
-        <p:spPr>
-          <a:xfrm>
-            <a:off x="9875520" y="1197864"/>
-            <a:ext cx="1417320" cy="201168"/>
-          </a:xfrm>
-          <a:prstGeom prst="rect">
-            <a:avLst/>
-          </a:prstGeom>
-          <a:noFill/>
-        </p:spPr>
-        <p:txBody>
-          <a:bodyPr wrap="square">
-            <a:spAutoFit/>
-          </a:bodyPr>
-          <a:lstStyle/>
-          <a:p>
-            <a:pPr algn="l"/>
-            <a:r>
-              <a:rPr sz="800" b="0" i="0">
-                <a:solidFill>
-                  <a:srgbClr val="2E9E6E"/>
-                </a:solidFill>
-                <a:latin typeface="Calibri"/>
-              </a:rPr>
-              <a:t>0.679 px RMSE (822 inliers)</a:t>
-            </a:r>
-          </a:p>
-        </p:txBody>
-      </p:sp>
-      <p:sp>
-        <p:nvSpPr>
-          <p:cNvPr id="25" name="TextBox 24"/>
-          <p:cNvSpPr txBox="1"/>
-          <p:nvPr/>
-        </p:nvSpPr>
-        <p:spPr>
-          <a:xfrm>
-            <a:off x="11292840" y="1197864"/>
-            <a:ext cx="640080" cy="201168"/>
+            <a:off x="10927080" y="1216152"/>
+            <a:ext cx="731520" cy="201168"/>
           </a:xfrm>
           <a:prstGeom prst="rect">
             <a:avLst/>
@@ -9739,14 +9627,14 @@
       </p:sp>
       <p:sp>
         <p:nvSpPr>
-          <p:cNvPr id="26" name="Rectangle 25"/>
+          <p:cNvPr id="23" name="Rectangle 22"/>
           <p:cNvSpPr/>
           <p:nvPr/>
         </p:nvSpPr>
         <p:spPr>
           <a:xfrm>
-            <a:off x="7635240" y="1453896"/>
-            <a:ext cx="4343400" cy="256032"/>
+            <a:off x="6675120" y="1472184"/>
+            <a:ext cx="5056632" cy="256032"/>
           </a:xfrm>
           <a:prstGeom prst="rect">
             <a:avLst/>
@@ -9784,119 +9672,119 @@
       </p:sp>
       <p:sp>
         <p:nvSpPr>
+          <p:cNvPr id="24" name="TextBox 23"/>
+          <p:cNvSpPr txBox="1"/>
+          <p:nvPr/>
+        </p:nvSpPr>
+        <p:spPr>
+          <a:xfrm>
+            <a:off x="6729984" y="1508760"/>
+            <a:ext cx="182880" cy="182880"/>
+          </a:xfrm>
+          <a:prstGeom prst="rect">
+            <a:avLst/>
+          </a:prstGeom>
+          <a:noFill/>
+        </p:spPr>
+        <p:txBody>
+          <a:bodyPr wrap="square">
+            <a:spAutoFit/>
+          </a:bodyPr>
+          <a:lstStyle/>
+          <a:p>
+            <a:pPr algn="l"/>
+            <a:r>
+              <a:rPr sz="850" b="1" i="0">
+                <a:solidFill>
+                  <a:srgbClr val="2E9E6E"/>
+                </a:solidFill>
+                <a:latin typeface="Calibri"/>
+              </a:rPr>
+              <a:t>●</a:t>
+            </a:r>
+          </a:p>
+        </p:txBody>
+      </p:sp>
+      <p:sp>
+        <p:nvSpPr>
+          <p:cNvPr id="25" name="TextBox 24"/>
+          <p:cNvSpPr txBox="1"/>
+          <p:nvPr/>
+        </p:nvSpPr>
+        <p:spPr>
+          <a:xfrm>
+            <a:off x="6931152" y="1499616"/>
+            <a:ext cx="2103120" cy="201168"/>
+          </a:xfrm>
+          <a:prstGeom prst="rect">
+            <a:avLst/>
+          </a:prstGeom>
+          <a:noFill/>
+        </p:spPr>
+        <p:txBody>
+          <a:bodyPr wrap="square">
+            <a:spAutoFit/>
+          </a:bodyPr>
+          <a:lstStyle/>
+          <a:p>
+            <a:pPr algn="l"/>
+            <a:r>
+              <a:rPr sz="800" b="1" i="0">
+                <a:solidFill>
+                  <a:srgbClr val="1A2B35"/>
+                </a:solidFill>
+                <a:latin typeface="Calibri"/>
+              </a:rPr>
+              <a:t>EXP-TMC-E2E (stereo)</a:t>
+            </a:r>
+          </a:p>
+        </p:txBody>
+      </p:sp>
+      <p:sp>
+        <p:nvSpPr>
+          <p:cNvPr id="26" name="TextBox 25"/>
+          <p:cNvSpPr txBox="1"/>
+          <p:nvPr/>
+        </p:nvSpPr>
+        <p:spPr>
+          <a:xfrm>
+            <a:off x="9098280" y="1499616"/>
+            <a:ext cx="1783080" cy="201168"/>
+          </a:xfrm>
+          <a:prstGeom prst="rect">
+            <a:avLst/>
+          </a:prstGeom>
+          <a:noFill/>
+        </p:spPr>
+        <p:txBody>
+          <a:bodyPr wrap="square">
+            <a:spAutoFit/>
+          </a:bodyPr>
+          <a:lstStyle/>
+          <a:p>
+            <a:pPr algn="l"/>
+            <a:r>
+              <a:rPr sz="800" b="0" i="0">
+                <a:solidFill>
+                  <a:srgbClr val="2E9E6E"/>
+                </a:solidFill>
+                <a:latin typeface="Calibri"/>
+              </a:rPr>
+              <a:t>1.110 px RMSE (686 inliers)</a:t>
+            </a:r>
+          </a:p>
+        </p:txBody>
+      </p:sp>
+      <p:sp>
+        <p:nvSpPr>
           <p:cNvPr id="27" name="TextBox 26"/>
           <p:cNvSpPr txBox="1"/>
           <p:nvPr/>
         </p:nvSpPr>
         <p:spPr>
           <a:xfrm>
-            <a:off x="7680960" y="1490472"/>
-            <a:ext cx="182880" cy="182880"/>
-          </a:xfrm>
-          <a:prstGeom prst="rect">
-            <a:avLst/>
-          </a:prstGeom>
-          <a:noFill/>
-        </p:spPr>
-        <p:txBody>
-          <a:bodyPr wrap="square">
-            <a:spAutoFit/>
-          </a:bodyPr>
-          <a:lstStyle/>
-          <a:p>
-            <a:pPr algn="l"/>
-            <a:r>
-              <a:rPr sz="850" b="1" i="0">
-                <a:solidFill>
-                  <a:srgbClr val="2E9E6E"/>
-                </a:solidFill>
-                <a:latin typeface="Calibri"/>
-              </a:rPr>
-              <a:t>●</a:t>
-            </a:r>
-          </a:p>
-        </p:txBody>
-      </p:sp>
-      <p:sp>
-        <p:nvSpPr>
-          <p:cNvPr id="28" name="TextBox 27"/>
-          <p:cNvSpPr txBox="1"/>
-          <p:nvPr/>
-        </p:nvSpPr>
-        <p:spPr>
-          <a:xfrm>
-            <a:off x="7882127" y="1481328"/>
-            <a:ext cx="1965960" cy="201168"/>
-          </a:xfrm>
-          <a:prstGeom prst="rect">
-            <a:avLst/>
-          </a:prstGeom>
-          <a:noFill/>
-        </p:spPr>
-        <p:txBody>
-          <a:bodyPr wrap="square">
-            <a:spAutoFit/>
-          </a:bodyPr>
-          <a:lstStyle/>
-          <a:p>
-            <a:pPr algn="l"/>
-            <a:r>
-              <a:rPr sz="800" b="1" i="0">
-                <a:solidFill>
-                  <a:srgbClr val="1A2B35"/>
-                </a:solidFill>
-                <a:latin typeface="Calibri"/>
-              </a:rPr>
-              <a:t>EXP-TMC-E2E (stereo)</a:t>
-            </a:r>
-          </a:p>
-        </p:txBody>
-      </p:sp>
-      <p:sp>
-        <p:nvSpPr>
-          <p:cNvPr id="29" name="TextBox 28"/>
-          <p:cNvSpPr txBox="1"/>
-          <p:nvPr/>
-        </p:nvSpPr>
-        <p:spPr>
-          <a:xfrm>
-            <a:off x="9875520" y="1481328"/>
-            <a:ext cx="1417320" cy="201168"/>
-          </a:xfrm>
-          <a:prstGeom prst="rect">
-            <a:avLst/>
-          </a:prstGeom>
-          <a:noFill/>
-        </p:spPr>
-        <p:txBody>
-          <a:bodyPr wrap="square">
-            <a:spAutoFit/>
-          </a:bodyPr>
-          <a:lstStyle/>
-          <a:p>
-            <a:pPr algn="l"/>
-            <a:r>
-              <a:rPr sz="800" b="0" i="0">
-                <a:solidFill>
-                  <a:srgbClr val="2E9E6E"/>
-                </a:solidFill>
-                <a:latin typeface="Calibri"/>
-              </a:rPr>
-              <a:t>1.110 px RMSE (686 inliers)</a:t>
-            </a:r>
-          </a:p>
-        </p:txBody>
-      </p:sp>
-      <p:sp>
-        <p:nvSpPr>
-          <p:cNvPr id="30" name="TextBox 29"/>
-          <p:cNvSpPr txBox="1"/>
-          <p:nvPr/>
-        </p:nvSpPr>
-        <p:spPr>
-          <a:xfrm>
-            <a:off x="11292840" y="1481328"/>
-            <a:ext cx="640080" cy="201168"/>
+            <a:off x="10927080" y="1499616"/>
+            <a:ext cx="731520" cy="201168"/>
           </a:xfrm>
           <a:prstGeom prst="rect">
             <a:avLst/>
@@ -9924,14 +9812,14 @@
       </p:sp>
       <p:sp>
         <p:nvSpPr>
-          <p:cNvPr id="31" name="Rectangle 30"/>
+          <p:cNvPr id="28" name="Rectangle 27"/>
           <p:cNvSpPr/>
           <p:nvPr/>
         </p:nvSpPr>
         <p:spPr>
           <a:xfrm>
-            <a:off x="7635240" y="1737360"/>
-            <a:ext cx="4343400" cy="256032"/>
+            <a:off x="6675120" y="1755648"/>
+            <a:ext cx="5056632" cy="256032"/>
           </a:xfrm>
           <a:prstGeom prst="rect">
             <a:avLst/>
@@ -9969,119 +9857,119 @@
       </p:sp>
       <p:sp>
         <p:nvSpPr>
+          <p:cNvPr id="29" name="TextBox 28"/>
+          <p:cNvSpPr txBox="1"/>
+          <p:nvPr/>
+        </p:nvSpPr>
+        <p:spPr>
+          <a:xfrm>
+            <a:off x="6729984" y="1792224"/>
+            <a:ext cx="182880" cy="182880"/>
+          </a:xfrm>
+          <a:prstGeom prst="rect">
+            <a:avLst/>
+          </a:prstGeom>
+          <a:noFill/>
+        </p:spPr>
+        <p:txBody>
+          <a:bodyPr wrap="square">
+            <a:spAutoFit/>
+          </a:bodyPr>
+          <a:lstStyle/>
+          <a:p>
+            <a:pPr algn="l"/>
+            <a:r>
+              <a:rPr sz="850" b="1" i="0">
+                <a:solidFill>
+                  <a:srgbClr val="2E9E6E"/>
+                </a:solidFill>
+                <a:latin typeface="Calibri"/>
+              </a:rPr>
+              <a:t>●</a:t>
+            </a:r>
+          </a:p>
+        </p:txBody>
+      </p:sp>
+      <p:sp>
+        <p:nvSpPr>
+          <p:cNvPr id="30" name="TextBox 29"/>
+          <p:cNvSpPr txBox="1"/>
+          <p:nvPr/>
+        </p:nvSpPr>
+        <p:spPr>
+          <a:xfrm>
+            <a:off x="6931152" y="1783080"/>
+            <a:ext cx="2103120" cy="201168"/>
+          </a:xfrm>
+          <a:prstGeom prst="rect">
+            <a:avLst/>
+          </a:prstGeom>
+          <a:noFill/>
+        </p:spPr>
+        <p:txBody>
+          <a:bodyPr wrap="square">
+            <a:spAutoFit/>
+          </a:bodyPr>
+          <a:lstStyle/>
+          <a:p>
+            <a:pPr algn="l"/>
+            <a:r>
+              <a:rPr sz="800" b="1" i="0">
+                <a:solidFill>
+                  <a:srgbClr val="1A2B35"/>
+                </a:solidFill>
+                <a:latin typeface="Calibri"/>
+              </a:rPr>
+              <a:t>EXP-TMC-FIXED (ablation)</a:t>
+            </a:r>
+          </a:p>
+        </p:txBody>
+      </p:sp>
+      <p:sp>
+        <p:nvSpPr>
+          <p:cNvPr id="31" name="TextBox 30"/>
+          <p:cNvSpPr txBox="1"/>
+          <p:nvPr/>
+        </p:nvSpPr>
+        <p:spPr>
+          <a:xfrm>
+            <a:off x="9098280" y="1783080"/>
+            <a:ext cx="1783080" cy="201168"/>
+          </a:xfrm>
+          <a:prstGeom prst="rect">
+            <a:avLst/>
+          </a:prstGeom>
+          <a:noFill/>
+        </p:spPr>
+        <p:txBody>
+          <a:bodyPr wrap="square">
+            <a:spAutoFit/>
+          </a:bodyPr>
+          <a:lstStyle/>
+          <a:p>
+            <a:pPr algn="l"/>
+            <a:r>
+              <a:rPr sz="800" b="0" i="0">
+                <a:solidFill>
+                  <a:srgbClr val="2E9E6E"/>
+                </a:solidFill>
+                <a:latin typeface="Calibri"/>
+              </a:rPr>
+              <a:t>0.836 px [0.72, 0.97] px</a:t>
+            </a:r>
+          </a:p>
+        </p:txBody>
+      </p:sp>
+      <p:sp>
+        <p:nvSpPr>
           <p:cNvPr id="32" name="TextBox 31"/>
           <p:cNvSpPr txBox="1"/>
           <p:nvPr/>
         </p:nvSpPr>
         <p:spPr>
           <a:xfrm>
-            <a:off x="7680960" y="1773936"/>
-            <a:ext cx="182880" cy="182880"/>
-          </a:xfrm>
-          <a:prstGeom prst="rect">
-            <a:avLst/>
-          </a:prstGeom>
-          <a:noFill/>
-        </p:spPr>
-        <p:txBody>
-          <a:bodyPr wrap="square">
-            <a:spAutoFit/>
-          </a:bodyPr>
-          <a:lstStyle/>
-          <a:p>
-            <a:pPr algn="l"/>
-            <a:r>
-              <a:rPr sz="850" b="1" i="0">
-                <a:solidFill>
-                  <a:srgbClr val="2E9E6E"/>
-                </a:solidFill>
-                <a:latin typeface="Calibri"/>
-              </a:rPr>
-              <a:t>●</a:t>
-            </a:r>
-          </a:p>
-        </p:txBody>
-      </p:sp>
-      <p:sp>
-        <p:nvSpPr>
-          <p:cNvPr id="33" name="TextBox 32"/>
-          <p:cNvSpPr txBox="1"/>
-          <p:nvPr/>
-        </p:nvSpPr>
-        <p:spPr>
-          <a:xfrm>
-            <a:off x="7882127" y="1764792"/>
-            <a:ext cx="1965960" cy="201168"/>
-          </a:xfrm>
-          <a:prstGeom prst="rect">
-            <a:avLst/>
-          </a:prstGeom>
-          <a:noFill/>
-        </p:spPr>
-        <p:txBody>
-          <a:bodyPr wrap="square">
-            <a:spAutoFit/>
-          </a:bodyPr>
-          <a:lstStyle/>
-          <a:p>
-            <a:pPr algn="l"/>
-            <a:r>
-              <a:rPr sz="800" b="1" i="0">
-                <a:solidFill>
-                  <a:srgbClr val="1A2B35"/>
-                </a:solidFill>
-                <a:latin typeface="Calibri"/>
-              </a:rPr>
-              <a:t>EXP-TMC-FIXED (ablation)</a:t>
-            </a:r>
-          </a:p>
-        </p:txBody>
-      </p:sp>
-      <p:sp>
-        <p:nvSpPr>
-          <p:cNvPr id="34" name="TextBox 33"/>
-          <p:cNvSpPr txBox="1"/>
-          <p:nvPr/>
-        </p:nvSpPr>
-        <p:spPr>
-          <a:xfrm>
-            <a:off x="9875520" y="1764792"/>
-            <a:ext cx="1417320" cy="201168"/>
-          </a:xfrm>
-          <a:prstGeom prst="rect">
-            <a:avLst/>
-          </a:prstGeom>
-          <a:noFill/>
-        </p:spPr>
-        <p:txBody>
-          <a:bodyPr wrap="square">
-            <a:spAutoFit/>
-          </a:bodyPr>
-          <a:lstStyle/>
-          <a:p>
-            <a:pPr algn="l"/>
-            <a:r>
-              <a:rPr sz="800" b="0" i="0">
-                <a:solidFill>
-                  <a:srgbClr val="2E9E6E"/>
-                </a:solidFill>
-                <a:latin typeface="Calibri"/>
-              </a:rPr>
-              <a:t>0.841 px [0.71, 0.97] px</a:t>
-            </a:r>
-          </a:p>
-        </p:txBody>
-      </p:sp>
-      <p:sp>
-        <p:nvSpPr>
-          <p:cNvPr id="35" name="TextBox 34"/>
-          <p:cNvSpPr txBox="1"/>
-          <p:nvPr/>
-        </p:nvSpPr>
-        <p:spPr>
-          <a:xfrm>
-            <a:off x="11292840" y="1764792"/>
-            <a:ext cx="640080" cy="201168"/>
+            <a:off x="10927080" y="1783080"/>
+            <a:ext cx="731520" cy="201168"/>
           </a:xfrm>
           <a:prstGeom prst="rect">
             <a:avLst/>
@@ -10109,14 +9997,14 @@
       </p:sp>
       <p:sp>
         <p:nvSpPr>
-          <p:cNvPr id="36" name="Rectangle 35"/>
+          <p:cNvPr id="33" name="Rectangle 32"/>
           <p:cNvSpPr/>
           <p:nvPr/>
         </p:nvSpPr>
         <p:spPr>
           <a:xfrm>
-            <a:off x="7635240" y="2020824"/>
-            <a:ext cx="4343400" cy="256032"/>
+            <a:off x="6675120" y="2039112"/>
+            <a:ext cx="5056632" cy="256032"/>
           </a:xfrm>
           <a:prstGeom prst="rect">
             <a:avLst/>
@@ -10154,119 +10042,119 @@
       </p:sp>
       <p:sp>
         <p:nvSpPr>
+          <p:cNvPr id="34" name="TextBox 33"/>
+          <p:cNvSpPr txBox="1"/>
+          <p:nvPr/>
+        </p:nvSpPr>
+        <p:spPr>
+          <a:xfrm>
+            <a:off x="6729984" y="2075688"/>
+            <a:ext cx="182880" cy="182880"/>
+          </a:xfrm>
+          <a:prstGeom prst="rect">
+            <a:avLst/>
+          </a:prstGeom>
+          <a:noFill/>
+        </p:spPr>
+        <p:txBody>
+          <a:bodyPr wrap="square">
+            <a:spAutoFit/>
+          </a:bodyPr>
+          <a:lstStyle/>
+          <a:p>
+            <a:pPr algn="l"/>
+            <a:r>
+              <a:rPr sz="850" b="1" i="0">
+                <a:solidFill>
+                  <a:srgbClr val="2E9E6E"/>
+                </a:solidFill>
+                <a:latin typeface="Calibri"/>
+              </a:rPr>
+              <a:t>●</a:t>
+            </a:r>
+          </a:p>
+        </p:txBody>
+      </p:sp>
+      <p:sp>
+        <p:nvSpPr>
+          <p:cNvPr id="35" name="TextBox 34"/>
+          <p:cNvSpPr txBox="1"/>
+          <p:nvPr/>
+        </p:nvSpPr>
+        <p:spPr>
+          <a:xfrm>
+            <a:off x="6931152" y="2066543"/>
+            <a:ext cx="2103120" cy="201168"/>
+          </a:xfrm>
+          <a:prstGeom prst="rect">
+            <a:avLst/>
+          </a:prstGeom>
+          <a:noFill/>
+        </p:spPr>
+        <p:txBody>
+          <a:bodyPr wrap="square">
+            <a:spAutoFit/>
+          </a:bodyPr>
+          <a:lstStyle/>
+          <a:p>
+            <a:pPr algn="l"/>
+            <a:r>
+              <a:rPr sz="800" b="1" i="0">
+                <a:solidFill>
+                  <a:srgbClr val="1A2B35"/>
+                </a:solidFill>
+                <a:latin typeface="Calibri"/>
+              </a:rPr>
+              <a:t>EXP-NEG-DISJOINT (control)</a:t>
+            </a:r>
+          </a:p>
+        </p:txBody>
+      </p:sp>
+      <p:sp>
+        <p:nvSpPr>
+          <p:cNvPr id="36" name="TextBox 35"/>
+          <p:cNvSpPr txBox="1"/>
+          <p:nvPr/>
+        </p:nvSpPr>
+        <p:spPr>
+          <a:xfrm>
+            <a:off x="9098280" y="2066543"/>
+            <a:ext cx="1783080" cy="201168"/>
+          </a:xfrm>
+          <a:prstGeom prst="rect">
+            <a:avLst/>
+          </a:prstGeom>
+          <a:noFill/>
+        </p:spPr>
+        <p:txBody>
+          <a:bodyPr wrap="square">
+            <a:spAutoFit/>
+          </a:bodyPr>
+          <a:lstStyle/>
+          <a:p>
+            <a:pPr algn="l"/>
+            <a:r>
+              <a:rPr sz="800" b="0" i="0">
+                <a:solidFill>
+                  <a:srgbClr val="2E9E6E"/>
+                </a:solidFill>
+                <a:latin typeface="Calibri"/>
+              </a:rPr>
+              <a:t>1/1 rejected (fails safely)</a:t>
+            </a:r>
+          </a:p>
+        </p:txBody>
+      </p:sp>
+      <p:sp>
+        <p:nvSpPr>
           <p:cNvPr id="37" name="TextBox 36"/>
           <p:cNvSpPr txBox="1"/>
           <p:nvPr/>
         </p:nvSpPr>
         <p:spPr>
           <a:xfrm>
-            <a:off x="7680960" y="2057400"/>
-            <a:ext cx="182880" cy="182880"/>
-          </a:xfrm>
-          <a:prstGeom prst="rect">
-            <a:avLst/>
-          </a:prstGeom>
-          <a:noFill/>
-        </p:spPr>
-        <p:txBody>
-          <a:bodyPr wrap="square">
-            <a:spAutoFit/>
-          </a:bodyPr>
-          <a:lstStyle/>
-          <a:p>
-            <a:pPr algn="l"/>
-            <a:r>
-              <a:rPr sz="850" b="1" i="0">
-                <a:solidFill>
-                  <a:srgbClr val="2E9E6E"/>
-                </a:solidFill>
-                <a:latin typeface="Calibri"/>
-              </a:rPr>
-              <a:t>●</a:t>
-            </a:r>
-          </a:p>
-        </p:txBody>
-      </p:sp>
-      <p:sp>
-        <p:nvSpPr>
-          <p:cNvPr id="38" name="TextBox 37"/>
-          <p:cNvSpPr txBox="1"/>
-          <p:nvPr/>
-        </p:nvSpPr>
-        <p:spPr>
-          <a:xfrm>
-            <a:off x="7882127" y="2048255"/>
-            <a:ext cx="1965960" cy="201168"/>
-          </a:xfrm>
-          <a:prstGeom prst="rect">
-            <a:avLst/>
-          </a:prstGeom>
-          <a:noFill/>
-        </p:spPr>
-        <p:txBody>
-          <a:bodyPr wrap="square">
-            <a:spAutoFit/>
-          </a:bodyPr>
-          <a:lstStyle/>
-          <a:p>
-            <a:pPr algn="l"/>
-            <a:r>
-              <a:rPr sz="800" b="1" i="0">
-                <a:solidFill>
-                  <a:srgbClr val="1A2B35"/>
-                </a:solidFill>
-                <a:latin typeface="Calibri"/>
-              </a:rPr>
-              <a:t>EXP-NEG-DISJOINT (control)</a:t>
-            </a:r>
-          </a:p>
-        </p:txBody>
-      </p:sp>
-      <p:sp>
-        <p:nvSpPr>
-          <p:cNvPr id="39" name="TextBox 38"/>
-          <p:cNvSpPr txBox="1"/>
-          <p:nvPr/>
-        </p:nvSpPr>
-        <p:spPr>
-          <a:xfrm>
-            <a:off x="9875520" y="2048255"/>
-            <a:ext cx="1417320" cy="201168"/>
-          </a:xfrm>
-          <a:prstGeom prst="rect">
-            <a:avLst/>
-          </a:prstGeom>
-          <a:noFill/>
-        </p:spPr>
-        <p:txBody>
-          <a:bodyPr wrap="square">
-            <a:spAutoFit/>
-          </a:bodyPr>
-          <a:lstStyle/>
-          <a:p>
-            <a:pPr algn="l"/>
-            <a:r>
-              <a:rPr sz="800" b="0" i="0">
-                <a:solidFill>
-                  <a:srgbClr val="2E9E6E"/>
-                </a:solidFill>
-                <a:latin typeface="Calibri"/>
-              </a:rPr>
-              <a:t>1/1 rejected (fails safely)</a:t>
-            </a:r>
-          </a:p>
-        </p:txBody>
-      </p:sp>
-      <p:sp>
-        <p:nvSpPr>
-          <p:cNvPr id="40" name="TextBox 39"/>
-          <p:cNvSpPr txBox="1"/>
-          <p:nvPr/>
-        </p:nvSpPr>
-        <p:spPr>
-          <a:xfrm>
-            <a:off x="11292840" y="2048255"/>
-            <a:ext cx="640080" cy="201168"/>
+            <a:off x="10927080" y="2066543"/>
+            <a:ext cx="731520" cy="201168"/>
           </a:xfrm>
           <a:prstGeom prst="rect">
             <a:avLst/>
@@ -10294,14 +10182,14 @@
       </p:sp>
       <p:sp>
         <p:nvSpPr>
-          <p:cNvPr id="41" name="Rectangle 40"/>
+          <p:cNvPr id="38" name="Rectangle 37"/>
           <p:cNvSpPr/>
           <p:nvPr/>
         </p:nvSpPr>
         <p:spPr>
           <a:xfrm>
-            <a:off x="7635240" y="2304288"/>
-            <a:ext cx="4343400" cy="256032"/>
+            <a:off x="6675120" y="2322576"/>
+            <a:ext cx="5056632" cy="256032"/>
           </a:xfrm>
           <a:prstGeom prst="rect">
             <a:avLst/>
@@ -10339,119 +10227,119 @@
       </p:sp>
       <p:sp>
         <p:nvSpPr>
+          <p:cNvPr id="39" name="TextBox 38"/>
+          <p:cNvSpPr txBox="1"/>
+          <p:nvPr/>
+        </p:nvSpPr>
+        <p:spPr>
+          <a:xfrm>
+            <a:off x="6729984" y="2359152"/>
+            <a:ext cx="182880" cy="182880"/>
+          </a:xfrm>
+          <a:prstGeom prst="rect">
+            <a:avLst/>
+          </a:prstGeom>
+          <a:noFill/>
+        </p:spPr>
+        <p:txBody>
+          <a:bodyPr wrap="square">
+            <a:spAutoFit/>
+          </a:bodyPr>
+          <a:lstStyle/>
+          <a:p>
+            <a:pPr algn="l"/>
+            <a:r>
+              <a:rPr sz="850" b="1" i="0">
+                <a:solidFill>
+                  <a:srgbClr val="2E9E6E"/>
+                </a:solidFill>
+                <a:latin typeface="Calibri"/>
+              </a:rPr>
+              <a:t>●</a:t>
+            </a:r>
+          </a:p>
+        </p:txBody>
+      </p:sp>
+      <p:sp>
+        <p:nvSpPr>
+          <p:cNvPr id="40" name="TextBox 39"/>
+          <p:cNvSpPr txBox="1"/>
+          <p:nvPr/>
+        </p:nvSpPr>
+        <p:spPr>
+          <a:xfrm>
+            <a:off x="6931152" y="2350008"/>
+            <a:ext cx="2103120" cy="201168"/>
+          </a:xfrm>
+          <a:prstGeom prst="rect">
+            <a:avLst/>
+          </a:prstGeom>
+          <a:noFill/>
+        </p:spPr>
+        <p:txBody>
+          <a:bodyPr wrap="square">
+            <a:spAutoFit/>
+          </a:bodyPr>
+          <a:lstStyle/>
+          <a:p>
+            <a:pPr algn="l"/>
+            <a:r>
+              <a:rPr sz="800" b="1" i="0">
+                <a:solidFill>
+                  <a:srgbClr val="1A2B35"/>
+                </a:solidFill>
+                <a:latin typeface="Calibri"/>
+              </a:rPr>
+              <a:t>EXP-IO (pyramid seeker)</a:t>
+            </a:r>
+          </a:p>
+        </p:txBody>
+      </p:sp>
+      <p:sp>
+        <p:nvSpPr>
+          <p:cNvPr id="41" name="TextBox 40"/>
+          <p:cNvSpPr txBox="1"/>
+          <p:nvPr/>
+        </p:nvSpPr>
+        <p:spPr>
+          <a:xfrm>
+            <a:off x="9098280" y="2350008"/>
+            <a:ext cx="1783080" cy="201168"/>
+          </a:xfrm>
+          <a:prstGeom prst="rect">
+            <a:avLst/>
+          </a:prstGeom>
+          <a:noFill/>
+        </p:spPr>
+        <p:txBody>
+          <a:bodyPr wrap="square">
+            <a:spAutoFit/>
+          </a:bodyPr>
+          <a:lstStyle/>
+          <a:p>
+            <a:pPr algn="l"/>
+            <a:r>
+              <a:rPr sz="800" b="0" i="0">
+                <a:solidFill>
+                  <a:srgbClr val="2E9E6E"/>
+                </a:solidFill>
+                <a:latin typeface="Calibri"/>
+              </a:rPr>
+              <a:t>Median 39.2 ms, p95 55.1 ms</a:t>
+            </a:r>
+          </a:p>
+        </p:txBody>
+      </p:sp>
+      <p:sp>
+        <p:nvSpPr>
           <p:cNvPr id="42" name="TextBox 41"/>
           <p:cNvSpPr txBox="1"/>
           <p:nvPr/>
         </p:nvSpPr>
         <p:spPr>
           <a:xfrm>
-            <a:off x="7680960" y="2340864"/>
-            <a:ext cx="182880" cy="182880"/>
-          </a:xfrm>
-          <a:prstGeom prst="rect">
-            <a:avLst/>
-          </a:prstGeom>
-          <a:noFill/>
-        </p:spPr>
-        <p:txBody>
-          <a:bodyPr wrap="square">
-            <a:spAutoFit/>
-          </a:bodyPr>
-          <a:lstStyle/>
-          <a:p>
-            <a:pPr algn="l"/>
-            <a:r>
-              <a:rPr sz="850" b="1" i="0">
-                <a:solidFill>
-                  <a:srgbClr val="2E9E6E"/>
-                </a:solidFill>
-                <a:latin typeface="Calibri"/>
-              </a:rPr>
-              <a:t>●</a:t>
-            </a:r>
-          </a:p>
-        </p:txBody>
-      </p:sp>
-      <p:sp>
-        <p:nvSpPr>
-          <p:cNvPr id="43" name="TextBox 42"/>
-          <p:cNvSpPr txBox="1"/>
-          <p:nvPr/>
-        </p:nvSpPr>
-        <p:spPr>
-          <a:xfrm>
-            <a:off x="7882127" y="2331720"/>
-            <a:ext cx="1965960" cy="201168"/>
-          </a:xfrm>
-          <a:prstGeom prst="rect">
-            <a:avLst/>
-          </a:prstGeom>
-          <a:noFill/>
-        </p:spPr>
-        <p:txBody>
-          <a:bodyPr wrap="square">
-            <a:spAutoFit/>
-          </a:bodyPr>
-          <a:lstStyle/>
-          <a:p>
-            <a:pPr algn="l"/>
-            <a:r>
-              <a:rPr sz="800" b="1" i="0">
-                <a:solidFill>
-                  <a:srgbClr val="1A2B35"/>
-                </a:solidFill>
-                <a:latin typeface="Calibri"/>
-              </a:rPr>
-              <a:t>EXP-IO (pyramid seeker)</a:t>
-            </a:r>
-          </a:p>
-        </p:txBody>
-      </p:sp>
-      <p:sp>
-        <p:nvSpPr>
-          <p:cNvPr id="44" name="TextBox 43"/>
-          <p:cNvSpPr txBox="1"/>
-          <p:nvPr/>
-        </p:nvSpPr>
-        <p:spPr>
-          <a:xfrm>
-            <a:off x="9875520" y="2331720"/>
-            <a:ext cx="1417320" cy="201168"/>
-          </a:xfrm>
-          <a:prstGeom prst="rect">
-            <a:avLst/>
-          </a:prstGeom>
-          <a:noFill/>
-        </p:spPr>
-        <p:txBody>
-          <a:bodyPr wrap="square">
-            <a:spAutoFit/>
-          </a:bodyPr>
-          <a:lstStyle/>
-          <a:p>
-            <a:pPr algn="l"/>
-            <a:r>
-              <a:rPr sz="800" b="0" i="0">
-                <a:solidFill>
-                  <a:srgbClr val="2E9E6E"/>
-                </a:solidFill>
-                <a:latin typeface="Calibri"/>
-              </a:rPr>
-              <a:t>Median 39.2 ms, p95 55.1 ms</a:t>
-            </a:r>
-          </a:p>
-        </p:txBody>
-      </p:sp>
-      <p:sp>
-        <p:nvSpPr>
-          <p:cNvPr id="45" name="TextBox 44"/>
-          <p:cNvSpPr txBox="1"/>
-          <p:nvPr/>
-        </p:nvSpPr>
-        <p:spPr>
-          <a:xfrm>
-            <a:off x="11292840" y="2331720"/>
-            <a:ext cx="640080" cy="201168"/>
+            <a:off x="10927080" y="2350008"/>
+            <a:ext cx="731520" cy="201168"/>
           </a:xfrm>
           <a:prstGeom prst="rect">
             <a:avLst/>
@@ -10479,14 +10367,14 @@
       </p:sp>
       <p:sp>
         <p:nvSpPr>
-          <p:cNvPr id="46" name="Rectangle 45"/>
+          <p:cNvPr id="43" name="Rectangle 42"/>
           <p:cNvSpPr/>
           <p:nvPr/>
         </p:nvSpPr>
         <p:spPr>
           <a:xfrm>
-            <a:off x="7635240" y="2587752"/>
-            <a:ext cx="4343400" cy="256032"/>
+            <a:off x="6675120" y="2606040"/>
+            <a:ext cx="5056632" cy="256032"/>
           </a:xfrm>
           <a:prstGeom prst="rect">
             <a:avLst/>
@@ -10524,119 +10412,119 @@
       </p:sp>
       <p:sp>
         <p:nvSpPr>
+          <p:cNvPr id="44" name="TextBox 43"/>
+          <p:cNvSpPr txBox="1"/>
+          <p:nvPr/>
+        </p:nvSpPr>
+        <p:spPr>
+          <a:xfrm>
+            <a:off x="6729984" y="2642616"/>
+            <a:ext cx="182880" cy="182880"/>
+          </a:xfrm>
+          <a:prstGeom prst="rect">
+            <a:avLst/>
+          </a:prstGeom>
+          <a:noFill/>
+        </p:spPr>
+        <p:txBody>
+          <a:bodyPr wrap="square">
+            <a:spAutoFit/>
+          </a:bodyPr>
+          <a:lstStyle/>
+          <a:p>
+            <a:pPr algn="l"/>
+            <a:r>
+              <a:rPr sz="850" b="1" i="0">
+                <a:solidFill>
+                  <a:srgbClr val="147D77"/>
+                </a:solidFill>
+                <a:latin typeface="Calibri"/>
+              </a:rPr>
+              <a:t>●</a:t>
+            </a:r>
+          </a:p>
+        </p:txBody>
+      </p:sp>
+      <p:sp>
+        <p:nvSpPr>
+          <p:cNvPr id="45" name="TextBox 44"/>
+          <p:cNvSpPr txBox="1"/>
+          <p:nvPr/>
+        </p:nvSpPr>
+        <p:spPr>
+          <a:xfrm>
+            <a:off x="6931152" y="2633472"/>
+            <a:ext cx="2103120" cy="201168"/>
+          </a:xfrm>
+          <a:prstGeom prst="rect">
+            <a:avLst/>
+          </a:prstGeom>
+          <a:noFill/>
+        </p:spPr>
+        <p:txBody>
+          <a:bodyPr wrap="square">
+            <a:spAutoFit/>
+          </a:bodyPr>
+          <a:lstStyle/>
+          <a:p>
+            <a:pPr algn="l"/>
+            <a:r>
+              <a:rPr sz="800" b="1" i="0">
+                <a:solidFill>
+                  <a:srgbClr val="1A2B35"/>
+                </a:solidFill>
+                <a:latin typeface="Calibri"/>
+              </a:rPr>
+              <a:t>EXP-SYN-ILLUM (Mode C)</a:t>
+            </a:r>
+          </a:p>
+        </p:txBody>
+      </p:sp>
+      <p:sp>
+        <p:nvSpPr>
+          <p:cNvPr id="46" name="TextBox 45"/>
+          <p:cNvSpPr txBox="1"/>
+          <p:nvPr/>
+        </p:nvSpPr>
+        <p:spPr>
+          <a:xfrm>
+            <a:off x="9098280" y="2633472"/>
+            <a:ext cx="1783080" cy="201168"/>
+          </a:xfrm>
+          <a:prstGeom prst="rect">
+            <a:avLst/>
+          </a:prstGeom>
+          <a:noFill/>
+        </p:spPr>
+        <p:txBody>
+          <a:bodyPr wrap="square">
+            <a:spAutoFit/>
+          </a:bodyPr>
+          <a:lstStyle/>
+          <a:p>
+            <a:pPr algn="l"/>
+            <a:r>
+              <a:rPr sz="800" b="0" i="0">
+                <a:solidFill>
+                  <a:srgbClr val="147D77"/>
+                </a:solidFill>
+                <a:latin typeface="Calibri"/>
+              </a:rPr>
+              <a:t>737–1,187 inliers (&gt;99% prec)</a:t>
+            </a:r>
+          </a:p>
+        </p:txBody>
+      </p:sp>
+      <p:sp>
+        <p:nvSpPr>
           <p:cNvPr id="47" name="TextBox 46"/>
           <p:cNvSpPr txBox="1"/>
           <p:nvPr/>
         </p:nvSpPr>
         <p:spPr>
           <a:xfrm>
-            <a:off x="7680960" y="2624328"/>
-            <a:ext cx="182880" cy="182880"/>
-          </a:xfrm>
-          <a:prstGeom prst="rect">
-            <a:avLst/>
-          </a:prstGeom>
-          <a:noFill/>
-        </p:spPr>
-        <p:txBody>
-          <a:bodyPr wrap="square">
-            <a:spAutoFit/>
-          </a:bodyPr>
-          <a:lstStyle/>
-          <a:p>
-            <a:pPr algn="l"/>
-            <a:r>
-              <a:rPr sz="850" b="1" i="0">
-                <a:solidFill>
-                  <a:srgbClr val="147D77"/>
-                </a:solidFill>
-                <a:latin typeface="Calibri"/>
-              </a:rPr>
-              <a:t>●</a:t>
-            </a:r>
-          </a:p>
-        </p:txBody>
-      </p:sp>
-      <p:sp>
-        <p:nvSpPr>
-          <p:cNvPr id="48" name="TextBox 47"/>
-          <p:cNvSpPr txBox="1"/>
-          <p:nvPr/>
-        </p:nvSpPr>
-        <p:spPr>
-          <a:xfrm>
-            <a:off x="7882127" y="2615184"/>
-            <a:ext cx="1965960" cy="201168"/>
-          </a:xfrm>
-          <a:prstGeom prst="rect">
-            <a:avLst/>
-          </a:prstGeom>
-          <a:noFill/>
-        </p:spPr>
-        <p:txBody>
-          <a:bodyPr wrap="square">
-            <a:spAutoFit/>
-          </a:bodyPr>
-          <a:lstStyle/>
-          <a:p>
-            <a:pPr algn="l"/>
-            <a:r>
-              <a:rPr sz="800" b="1" i="0">
-                <a:solidFill>
-                  <a:srgbClr val="1A2B35"/>
-                </a:solidFill>
-                <a:latin typeface="Calibri"/>
-              </a:rPr>
-              <a:t>EXP-SYN-ILLUM (Mode C)</a:t>
-            </a:r>
-          </a:p>
-        </p:txBody>
-      </p:sp>
-      <p:sp>
-        <p:nvSpPr>
-          <p:cNvPr id="49" name="TextBox 48"/>
-          <p:cNvSpPr txBox="1"/>
-          <p:nvPr/>
-        </p:nvSpPr>
-        <p:spPr>
-          <a:xfrm>
-            <a:off x="9875520" y="2615184"/>
-            <a:ext cx="1417320" cy="201168"/>
-          </a:xfrm>
-          <a:prstGeom prst="rect">
-            <a:avLst/>
-          </a:prstGeom>
-          <a:noFill/>
-        </p:spPr>
-        <p:txBody>
-          <a:bodyPr wrap="square">
-            <a:spAutoFit/>
-          </a:bodyPr>
-          <a:lstStyle/>
-          <a:p>
-            <a:pPr algn="l"/>
-            <a:r>
-              <a:rPr sz="800" b="0" i="0">
-                <a:solidFill>
-                  <a:srgbClr val="147D77"/>
-                </a:solidFill>
-                <a:latin typeface="Calibri"/>
-              </a:rPr>
-              <a:t>742–1,187 inliers (&gt;99% prec)</a:t>
-            </a:r>
-          </a:p>
-        </p:txBody>
-      </p:sp>
-      <p:sp>
-        <p:nvSpPr>
-          <p:cNvPr id="50" name="TextBox 49"/>
-          <p:cNvSpPr txBox="1"/>
-          <p:nvPr/>
-        </p:nvSpPr>
-        <p:spPr>
-          <a:xfrm>
-            <a:off x="11292840" y="2615184"/>
-            <a:ext cx="640080" cy="201168"/>
+            <a:off x="10927080" y="2633472"/>
+            <a:ext cx="731520" cy="201168"/>
           </a:xfrm>
           <a:prstGeom prst="rect">
             <a:avLst/>
@@ -10664,14 +10552,14 @@
       </p:sp>
       <p:sp>
         <p:nvSpPr>
-          <p:cNvPr id="51" name="Rectangle 50"/>
+          <p:cNvPr id="48" name="Rectangle 47"/>
           <p:cNvSpPr/>
           <p:nvPr/>
         </p:nvSpPr>
         <p:spPr>
           <a:xfrm>
-            <a:off x="7635240" y="2871216"/>
-            <a:ext cx="4343400" cy="256032"/>
+            <a:off x="6675120" y="2889504"/>
+            <a:ext cx="5056632" cy="256032"/>
           </a:xfrm>
           <a:prstGeom prst="rect">
             <a:avLst/>
@@ -10709,119 +10597,119 @@
       </p:sp>
       <p:sp>
         <p:nvSpPr>
+          <p:cNvPr id="49" name="TextBox 48"/>
+          <p:cNvSpPr txBox="1"/>
+          <p:nvPr/>
+        </p:nvSpPr>
+        <p:spPr>
+          <a:xfrm>
+            <a:off x="6729984" y="2926080"/>
+            <a:ext cx="182880" cy="182880"/>
+          </a:xfrm>
+          <a:prstGeom prst="rect">
+            <a:avLst/>
+          </a:prstGeom>
+          <a:noFill/>
+        </p:spPr>
+        <p:txBody>
+          <a:bodyPr wrap="square">
+            <a:spAutoFit/>
+          </a:bodyPr>
+          <a:lstStyle/>
+          <a:p>
+            <a:pPr algn="l"/>
+            <a:r>
+              <a:rPr sz="850" b="1" i="0">
+                <a:solidFill>
+                  <a:srgbClr val="C4891E"/>
+                </a:solidFill>
+                <a:latin typeface="Calibri"/>
+              </a:rPr>
+              <a:t>●</a:t>
+            </a:r>
+          </a:p>
+        </p:txBody>
+      </p:sp>
+      <p:sp>
+        <p:nvSpPr>
+          <p:cNvPr id="50" name="TextBox 49"/>
+          <p:cNvSpPr txBox="1"/>
+          <p:nvPr/>
+        </p:nvSpPr>
+        <p:spPr>
+          <a:xfrm>
+            <a:off x="6931152" y="2916936"/>
+            <a:ext cx="2103120" cy="201168"/>
+          </a:xfrm>
+          <a:prstGeom prst="rect">
+            <a:avLst/>
+          </a:prstGeom>
+          <a:noFill/>
+        </p:spPr>
+        <p:txBody>
+          <a:bodyPr wrap="square">
+            <a:spAutoFit/>
+          </a:bodyPr>
+          <a:lstStyle/>
+          <a:p>
+            <a:pPr algn="l"/>
+            <a:r>
+              <a:rPr sz="800" b="1" i="0">
+                <a:solidFill>
+                  <a:srgbClr val="1A2B35"/>
+                </a:solidFill>
+                <a:latin typeface="Calibri"/>
+              </a:rPr>
+              <a:t>Real cross-sensor overlap</a:t>
+            </a:r>
+          </a:p>
+        </p:txBody>
+      </p:sp>
+      <p:sp>
+        <p:nvSpPr>
+          <p:cNvPr id="51" name="TextBox 50"/>
+          <p:cNvSpPr txBox="1"/>
+          <p:nvPr/>
+        </p:nvSpPr>
+        <p:spPr>
+          <a:xfrm>
+            <a:off x="9098280" y="2916936"/>
+            <a:ext cx="1783080" cy="201168"/>
+          </a:xfrm>
+          <a:prstGeom prst="rect">
+            <a:avLst/>
+          </a:prstGeom>
+          <a:noFill/>
+        </p:spPr>
+        <p:txBody>
+          <a:bodyPr wrap="square">
+            <a:spAutoFit/>
+          </a:bodyPr>
+          <a:lstStyle/>
+          <a:p>
+            <a:pPr algn="l"/>
+            <a:r>
+              <a:rPr sz="800" b="0" i="0">
+                <a:solidFill>
+                  <a:srgbClr val="C4891E"/>
+                </a:solidFill>
+                <a:latin typeface="Calibri"/>
+              </a:rPr>
+              <a:t>Ladder ready; overlap pending</a:t>
+            </a:r>
+          </a:p>
+        </p:txBody>
+      </p:sp>
+      <p:sp>
+        <p:nvSpPr>
           <p:cNvPr id="52" name="TextBox 51"/>
           <p:cNvSpPr txBox="1"/>
           <p:nvPr/>
         </p:nvSpPr>
         <p:spPr>
           <a:xfrm>
-            <a:off x="7680960" y="2907792"/>
-            <a:ext cx="182880" cy="182880"/>
-          </a:xfrm>
-          <a:prstGeom prst="rect">
-            <a:avLst/>
-          </a:prstGeom>
-          <a:noFill/>
-        </p:spPr>
-        <p:txBody>
-          <a:bodyPr wrap="square">
-            <a:spAutoFit/>
-          </a:bodyPr>
-          <a:lstStyle/>
-          <a:p>
-            <a:pPr algn="l"/>
-            <a:r>
-              <a:rPr sz="850" b="1" i="0">
-                <a:solidFill>
-                  <a:srgbClr val="C4891E"/>
-                </a:solidFill>
-                <a:latin typeface="Calibri"/>
-              </a:rPr>
-              <a:t>●</a:t>
-            </a:r>
-          </a:p>
-        </p:txBody>
-      </p:sp>
-      <p:sp>
-        <p:nvSpPr>
-          <p:cNvPr id="53" name="TextBox 52"/>
-          <p:cNvSpPr txBox="1"/>
-          <p:nvPr/>
-        </p:nvSpPr>
-        <p:spPr>
-          <a:xfrm>
-            <a:off x="7882127" y="2898648"/>
-            <a:ext cx="1965960" cy="201168"/>
-          </a:xfrm>
-          <a:prstGeom prst="rect">
-            <a:avLst/>
-          </a:prstGeom>
-          <a:noFill/>
-        </p:spPr>
-        <p:txBody>
-          <a:bodyPr wrap="square">
-            <a:spAutoFit/>
-          </a:bodyPr>
-          <a:lstStyle/>
-          <a:p>
-            <a:pPr algn="l"/>
-            <a:r>
-              <a:rPr sz="800" b="1" i="0">
-                <a:solidFill>
-                  <a:srgbClr val="1A2B35"/>
-                </a:solidFill>
-                <a:latin typeface="Calibri"/>
-              </a:rPr>
-              <a:t>Real cross-sensor overlap</a:t>
-            </a:r>
-          </a:p>
-        </p:txBody>
-      </p:sp>
-      <p:sp>
-        <p:nvSpPr>
-          <p:cNvPr id="54" name="TextBox 53"/>
-          <p:cNvSpPr txBox="1"/>
-          <p:nvPr/>
-        </p:nvSpPr>
-        <p:spPr>
-          <a:xfrm>
-            <a:off x="9875520" y="2898648"/>
-            <a:ext cx="1417320" cy="201168"/>
-          </a:xfrm>
-          <a:prstGeom prst="rect">
-            <a:avLst/>
-          </a:prstGeom>
-          <a:noFill/>
-        </p:spPr>
-        <p:txBody>
-          <a:bodyPr wrap="square">
-            <a:spAutoFit/>
-          </a:bodyPr>
-          <a:lstStyle/>
-          <a:p>
-            <a:pPr algn="l"/>
-            <a:r>
-              <a:rPr sz="800" b="0" i="0">
-                <a:solidFill>
-                  <a:srgbClr val="C4891E"/>
-                </a:solidFill>
-                <a:latin typeface="Calibri"/>
-              </a:rPr>
-              <a:t>Experiment pending</a:t>
-            </a:r>
-          </a:p>
-        </p:txBody>
-      </p:sp>
-      <p:sp>
-        <p:nvSpPr>
-          <p:cNvPr id="55" name="TextBox 54"/>
-          <p:cNvSpPr txBox="1"/>
-          <p:nvPr/>
-        </p:nvSpPr>
-        <p:spPr>
-          <a:xfrm>
-            <a:off x="11292840" y="2898648"/>
-            <a:ext cx="640080" cy="201168"/>
+            <a:off x="10927080" y="2916936"/>
+            <a:ext cx="731520" cy="201168"/>
           </a:xfrm>
           <a:prstGeom prst="rect">
             <a:avLst/>
@@ -10849,14 +10737,14 @@
       </p:sp>
       <p:sp>
         <p:nvSpPr>
-          <p:cNvPr id="56" name="Rectangle 55"/>
+          <p:cNvPr id="53" name="Rectangle 52"/>
           <p:cNvSpPr/>
           <p:nvPr/>
         </p:nvSpPr>
         <p:spPr>
           <a:xfrm>
-            <a:off x="7635240" y="3429000"/>
-            <a:ext cx="4343400" cy="201168"/>
+            <a:off x="6675120" y="3291840"/>
+            <a:ext cx="5056632" cy="201168"/>
           </a:xfrm>
           <a:prstGeom prst="rect">
             <a:avLst/>
@@ -10892,14 +10780,14 @@
       </p:sp>
       <p:sp>
         <p:nvSpPr>
-          <p:cNvPr id="57" name="TextBox 56"/>
-          <p:cNvSpPr txBox="1"/>
-          <p:nvPr/>
-        </p:nvSpPr>
-        <p:spPr>
-          <a:xfrm>
-            <a:off x="7726679" y="3447288"/>
-            <a:ext cx="4206240" cy="201168"/>
+          <p:cNvPr id="54" name="TextBox 53"/>
+          <p:cNvSpPr txBox="1"/>
+          <p:nvPr/>
+        </p:nvSpPr>
+        <p:spPr>
+          <a:xfrm>
+            <a:off x="6766559" y="3310128"/>
+            <a:ext cx="4919472" cy="201168"/>
           </a:xfrm>
           <a:prstGeom prst="rect">
             <a:avLst/>
@@ -10920,21 +10808,21 @@
                 </a:solidFill>
                 <a:latin typeface="Calibri"/>
               </a:rPr>
-              <a:t>CLAIMS / EVIDENCE LEDGER</a:t>
-            </a:r>
-          </a:p>
-        </p:txBody>
-      </p:sp>
-      <p:sp>
-        <p:nvSpPr>
-          <p:cNvPr id="58" name="Rectangle 57"/>
+              <a:t>REAL TMC-2 STEREO PRODUCTION REGISTRATION (EXP-TMC-E2E)</a:t>
+            </a:r>
+          </a:p>
+        </p:txBody>
+      </p:sp>
+      <p:sp>
+        <p:nvSpPr>
+          <p:cNvPr id="55" name="Rectangle 54"/>
           <p:cNvSpPr/>
           <p:nvPr/>
         </p:nvSpPr>
         <p:spPr>
           <a:xfrm>
-            <a:off x="7635240" y="3675887"/>
-            <a:ext cx="4343400" cy="365760"/>
+            <a:off x="6675120" y="3511296"/>
+            <a:ext cx="5056632" cy="1691640"/>
           </a:xfrm>
           <a:prstGeom prst="rect">
             <a:avLst/>
@@ -10942,9 +10830,9 @@
           <a:solidFill>
             <a:srgbClr val="F4F6F8"/>
           </a:solidFill>
-          <a:ln w="3810">
+          <a:ln w="7620">
             <a:solidFill>
-              <a:srgbClr val="D0D8DD"/>
+              <a:srgbClr val="147D77"/>
             </a:solidFill>
           </a:ln>
         </p:spPr>
@@ -10972,14 +10860,14 @@
       </p:sp>
       <p:sp>
         <p:nvSpPr>
-          <p:cNvPr id="59" name="TextBox 58"/>
-          <p:cNvSpPr txBox="1"/>
-          <p:nvPr/>
-        </p:nvSpPr>
-        <p:spPr>
-          <a:xfrm>
-            <a:off x="7699248" y="3712463"/>
-            <a:ext cx="182880" cy="182880"/>
+          <p:cNvPr id="56" name="TextBox 55"/>
+          <p:cNvSpPr txBox="1"/>
+          <p:nvPr/>
+        </p:nvSpPr>
+        <p:spPr>
+          <a:xfrm>
+            <a:off x="6766560" y="3547872"/>
+            <a:ext cx="4873752" cy="164592"/>
           </a:xfrm>
           <a:prstGeom prst="rect">
             <a:avLst/>
@@ -10996,106 +10884,73 @@
             <a:r>
               <a:rPr sz="850" b="1" i="0">
                 <a:solidFill>
-                  <a:srgbClr val="2E9E6E"/>
-                </a:solidFill>
-                <a:latin typeface="Calibri"/>
-              </a:rPr>
-              <a:t>■</a:t>
-            </a:r>
-          </a:p>
-        </p:txBody>
-      </p:sp>
-      <p:sp>
-        <p:nvSpPr>
-          <p:cNvPr id="60" name="TextBox 59"/>
-          <p:cNvSpPr txBox="1"/>
-          <p:nvPr/>
-        </p:nvSpPr>
-        <p:spPr>
-          <a:xfrm>
-            <a:off x="7900416" y="3694175"/>
-            <a:ext cx="3977639" cy="164592"/>
-          </a:xfrm>
-          <a:prstGeom prst="rect">
-            <a:avLst/>
-          </a:prstGeom>
-          <a:noFill/>
-        </p:spPr>
-        <p:txBody>
-          <a:bodyPr wrap="square">
-            <a:spAutoFit/>
-          </a:bodyPr>
-          <a:lstStyle/>
-          <a:p>
-            <a:pPr algn="l"/>
-            <a:r>
-              <a:rPr sz="800" b="1" i="0">
-                <a:solidFill>
-                  <a:srgbClr val="2E9E6E"/>
-                </a:solidFill>
-                <a:latin typeface="Calibri"/>
-              </a:rPr>
-              <a:t>DEMONSTRATED ON REAL-DATA BENCHMARKS</a:t>
-            </a:r>
-          </a:p>
-        </p:txBody>
-      </p:sp>
-      <p:sp>
-        <p:nvSpPr>
-          <p:cNvPr id="61" name="TextBox 60"/>
-          <p:cNvSpPr txBox="1"/>
-          <p:nvPr/>
-        </p:nvSpPr>
-        <p:spPr>
-          <a:xfrm>
-            <a:off x="7900416" y="3858768"/>
-            <a:ext cx="3977639" cy="182880"/>
-          </a:xfrm>
-          <a:prstGeom prst="rect">
-            <a:avLst/>
-          </a:prstGeom>
-          <a:noFill/>
-        </p:spPr>
-        <p:txBody>
-          <a:bodyPr wrap="square">
-            <a:spAutoFit/>
-          </a:bodyPr>
-          <a:lstStyle/>
-          <a:p>
-            <a:pPr algn="l"/>
-            <a:r>
-              <a:rPr sz="750" b="0" i="0">
+                  <a:srgbClr val="147D77"/>
+                </a:solidFill>
+                <a:latin typeface="Calibri"/>
+              </a:rPr>
+              <a:t>AUTONOMOUS PRODUCTION STEREO REGISTRATION (Fore vs Nadir, GSD ~5 m):</a:t>
+            </a:r>
+          </a:p>
+        </p:txBody>
+      </p:sp>
+      <p:sp>
+        <p:nvSpPr>
+          <p:cNvPr id="57" name="TextBox 56"/>
+          <p:cNvSpPr txBox="1"/>
+          <p:nvPr/>
+        </p:nvSpPr>
+        <p:spPr>
+          <a:xfrm>
+            <a:off x="6766560" y="3730752"/>
+            <a:ext cx="4873752" cy="1417320"/>
+          </a:xfrm>
+          <a:prstGeom prst="rect">
+            <a:avLst/>
+          </a:prstGeom>
+          <a:noFill/>
+        </p:spPr>
+        <p:txBody>
+          <a:bodyPr wrap="square">
+            <a:spAutoFit/>
+          </a:bodyPr>
+          <a:lstStyle/>
+          <a:p>
+            <a:pPr algn="l"/>
+            <a:r>
+              <a:rPr sz="800" b="0" i="0">
                 <a:solidFill>
                   <a:srgbClr val="1A2B35"/>
                 </a:solidFill>
                 <a:latin typeface="Calibri"/>
               </a:rPr>
-              <a:t>OHRC RMSE (0.679 px), TMC-2 ablation (0.841 px), safe rejection, I/O latency</a:t>
-            </a:r>
-          </a:p>
-        </p:txBody>
-      </p:sp>
-      <p:sp>
-        <p:nvSpPr>
-          <p:cNvPr id="62" name="Rectangle 61"/>
+              <a:t>• Match Yield &amp; Inliers: 686 inliers retained (77.0% ratio) from 891 raw candidate matches.
+• Spatial Coverage: 84.4% occupied bins across 8×8 grid; empty circle radius = 0.084.
+• Autonomous Model Selection: Spatial autocorrelation S_relief = 0.676 &gt; 0.20 and fitting P95 = 1.55 px triggered elastic TPS over planar homography.
+• Withheld Test Error (N=138): Held-out RMSE = 1.110 px (fitting: 0.841 px on N=548, median: 0.689 px, P95: 2.012 px).
+• Operational Decision: ACCEPTED with Quality Score 0.802 (min_inliers=20 criterion met).</a:t>
+            </a:r>
+          </a:p>
+        </p:txBody>
+      </p:sp>
+      <p:sp>
+        <p:nvSpPr>
+          <p:cNvPr id="58" name="Rectangle 57"/>
           <p:cNvSpPr/>
           <p:nvPr/>
         </p:nvSpPr>
         <p:spPr>
           <a:xfrm>
-            <a:off x="7635240" y="4078224"/>
-            <a:ext cx="4343400" cy="365760"/>
+            <a:off x="6675120" y="5266944"/>
+            <a:ext cx="5056632" cy="201168"/>
           </a:xfrm>
           <a:prstGeom prst="rect">
             <a:avLst/>
           </a:prstGeom>
           <a:solidFill>
-            <a:srgbClr val="F4F6F8"/>
+            <a:srgbClr val="147D77"/>
           </a:solidFill>
-          <a:ln w="3810">
-            <a:solidFill>
-              <a:srgbClr val="D0D8DD"/>
-            </a:solidFill>
+          <a:ln>
+            <a:noFill/>
           </a:ln>
         </p:spPr>
         <p:style>
@@ -11122,49 +10977,14 @@
       </p:sp>
       <p:sp>
         <p:nvSpPr>
-          <p:cNvPr id="63" name="TextBox 62"/>
-          <p:cNvSpPr txBox="1"/>
-          <p:nvPr/>
-        </p:nvSpPr>
-        <p:spPr>
-          <a:xfrm>
-            <a:off x="7699248" y="4114800"/>
-            <a:ext cx="182880" cy="182880"/>
-          </a:xfrm>
-          <a:prstGeom prst="rect">
-            <a:avLst/>
-          </a:prstGeom>
-          <a:noFill/>
-        </p:spPr>
-        <p:txBody>
-          <a:bodyPr wrap="square">
-            <a:spAutoFit/>
-          </a:bodyPr>
-          <a:lstStyle/>
-          <a:p>
-            <a:pPr algn="l"/>
-            <a:r>
-              <a:rPr sz="850" b="1" i="0">
-                <a:solidFill>
-                  <a:srgbClr val="147D77"/>
-                </a:solidFill>
-                <a:latin typeface="Calibri"/>
-              </a:rPr>
-              <a:t>■</a:t>
-            </a:r>
-          </a:p>
-        </p:txBody>
-      </p:sp>
-      <p:sp>
-        <p:nvSpPr>
-          <p:cNvPr id="64" name="TextBox 63"/>
-          <p:cNvSpPr txBox="1"/>
-          <p:nvPr/>
-        </p:nvSpPr>
-        <p:spPr>
-          <a:xfrm>
-            <a:off x="7900416" y="4096511"/>
-            <a:ext cx="3977639" cy="164592"/>
+          <p:cNvPr id="59" name="TextBox 58"/>
+          <p:cNvSpPr txBox="1"/>
+          <p:nvPr/>
+        </p:nvSpPr>
+        <p:spPr>
+          <a:xfrm>
+            <a:off x="6766559" y="5285231"/>
+            <a:ext cx="4919472" cy="201168"/>
           </a:xfrm>
           <a:prstGeom prst="rect">
             <a:avLst/>
@@ -11181,68 +11001,33 @@
             <a:r>
               <a:rPr sz="800" b="1" i="0">
                 <a:solidFill>
-                  <a:srgbClr val="147D77"/>
-                </a:solidFill>
-                <a:latin typeface="Calibri"/>
-              </a:rPr>
-              <a:t>METHODOLOGICAL CONTROLS</a:t>
-            </a:r>
-          </a:p>
-        </p:txBody>
-      </p:sp>
-      <p:sp>
-        <p:nvSpPr>
-          <p:cNvPr id="65" name="TextBox 64"/>
-          <p:cNvSpPr txBox="1"/>
-          <p:nvPr/>
-        </p:nvSpPr>
-        <p:spPr>
-          <a:xfrm>
-            <a:off x="7900416" y="4261104"/>
-            <a:ext cx="3977639" cy="182880"/>
-          </a:xfrm>
-          <a:prstGeom prst="rect">
-            <a:avLst/>
-          </a:prstGeom>
-          <a:noFill/>
-        </p:spPr>
-        <p:txBody>
-          <a:bodyPr wrap="square">
-            <a:spAutoFit/>
-          </a:bodyPr>
-          <a:lstStyle/>
-          <a:p>
-            <a:pPr algn="l"/>
-            <a:r>
-              <a:rPr sz="750" b="0" i="0">
-                <a:solidFill>
-                  <a:srgbClr val="1A2B35"/>
-                </a:solidFill>
-                <a:latin typeface="Calibri"/>
-              </a:rPr>
-              <a:t>Strict zero-leakage training partition, frozen protocol, minimum-N rule</a:t>
-            </a:r>
-          </a:p>
-        </p:txBody>
-      </p:sp>
-      <p:sp>
-        <p:nvSpPr>
-          <p:cNvPr id="66" name="Rectangle 65"/>
+                  <a:srgbClr val="FFFFFF"/>
+                </a:solidFill>
+                <a:latin typeface="Calibri"/>
+              </a:rPr>
+              <a:t>DISJOINT SCENE NEGATIVE CONTROL AUDIT (EXP-NEG-DISJOINT)</a:t>
+            </a:r>
+          </a:p>
+        </p:txBody>
+      </p:sp>
+      <p:sp>
+        <p:nvSpPr>
+          <p:cNvPr id="60" name="Rectangle 59"/>
           <p:cNvSpPr/>
           <p:nvPr/>
         </p:nvSpPr>
         <p:spPr>
           <a:xfrm>
-            <a:off x="7635240" y="4480560"/>
-            <a:ext cx="4343400" cy="365760"/>
+            <a:off x="6675120" y="5486400"/>
+            <a:ext cx="5056632" cy="640080"/>
           </a:xfrm>
           <a:prstGeom prst="rect">
             <a:avLst/>
           </a:prstGeom>
           <a:solidFill>
-            <a:srgbClr val="F4F6F8"/>
+            <a:srgbClr val="F0F4F8"/>
           </a:solidFill>
-          <a:ln w="3810">
+          <a:ln w="5080">
             <a:solidFill>
               <a:srgbClr val="D0D8DD"/>
             </a:solidFill>
@@ -11272,412 +11057,43 @@
       </p:sp>
       <p:sp>
         <p:nvSpPr>
-          <p:cNvPr id="67" name="TextBox 66"/>
-          <p:cNvSpPr txBox="1"/>
-          <p:nvPr/>
-        </p:nvSpPr>
-        <p:spPr>
-          <a:xfrm>
-            <a:off x="7699248" y="4517136"/>
-            <a:ext cx="182880" cy="182880"/>
-          </a:xfrm>
-          <a:prstGeom prst="rect">
-            <a:avLst/>
-          </a:prstGeom>
-          <a:noFill/>
-        </p:spPr>
-        <p:txBody>
-          <a:bodyPr wrap="square">
-            <a:spAutoFit/>
-          </a:bodyPr>
-          <a:lstStyle/>
-          <a:p>
-            <a:pPr algn="l"/>
-            <a:r>
-              <a:rPr sz="850" b="1" i="0">
-                <a:solidFill>
-                  <a:srgbClr val="E07C1A"/>
-                </a:solidFill>
-                <a:latin typeface="Calibri"/>
-              </a:rPr>
-              <a:t>■</a:t>
-            </a:r>
-          </a:p>
-        </p:txBody>
-      </p:sp>
-      <p:sp>
-        <p:nvSpPr>
-          <p:cNvPr id="68" name="TextBox 67"/>
-          <p:cNvSpPr txBox="1"/>
-          <p:nvPr/>
-        </p:nvSpPr>
-        <p:spPr>
-          <a:xfrm>
-            <a:off x="7900416" y="4498848"/>
-            <a:ext cx="3977639" cy="164592"/>
-          </a:xfrm>
-          <a:prstGeom prst="rect">
-            <a:avLst/>
-          </a:prstGeom>
-          <a:noFill/>
-        </p:spPr>
-        <p:txBody>
-          <a:bodyPr wrap="square">
-            <a:spAutoFit/>
-          </a:bodyPr>
-          <a:lstStyle/>
-          <a:p>
-            <a:pPr algn="l"/>
-            <a:r>
-              <a:rPr sz="800" b="1" i="0">
-                <a:solidFill>
-                  <a:srgbClr val="E07C1A"/>
-                </a:solidFill>
-                <a:latin typeface="Calibri"/>
-              </a:rPr>
-              <a:t>CONTROLLED SIMULATION</a:t>
-            </a:r>
-          </a:p>
-        </p:txBody>
-      </p:sp>
-      <p:sp>
-        <p:nvSpPr>
-          <p:cNvPr id="69" name="TextBox 68"/>
-          <p:cNvSpPr txBox="1"/>
-          <p:nvPr/>
-        </p:nvSpPr>
-        <p:spPr>
-          <a:xfrm>
-            <a:off x="7900416" y="4663440"/>
-            <a:ext cx="3977639" cy="182880"/>
-          </a:xfrm>
-          <a:prstGeom prst="rect">
-            <a:avLst/>
-          </a:prstGeom>
-          <a:noFill/>
-        </p:spPr>
-        <p:txBody>
-          <a:bodyPr wrap="square">
-            <a:spAutoFit/>
-          </a:bodyPr>
-          <a:lstStyle/>
-          <a:p>
-            <a:pPr algn="l"/>
-            <a:r>
-              <a:rPr sz="750" b="0" i="0">
+          <p:cNvPr id="61" name="TextBox 60"/>
+          <p:cNvSpPr txBox="1"/>
+          <p:nvPr/>
+        </p:nvSpPr>
+        <p:spPr>
+          <a:xfrm>
+            <a:off x="6766560" y="5541264"/>
+            <a:ext cx="4873752" cy="530352"/>
+          </a:xfrm>
+          <a:prstGeom prst="rect">
+            <a:avLst/>
+          </a:prstGeom>
+          <a:noFill/>
+        </p:spPr>
+        <p:txBody>
+          <a:bodyPr wrap="square">
+            <a:spAutoFit/>
+          </a:bodyPr>
+          <a:lstStyle/>
+          <a:p>
+            <a:pPr algn="l"/>
+            <a:r>
+              <a:rPr sz="800" b="0" i="0">
                 <a:solidFill>
                   <a:srgbClr val="1A2B35"/>
                 </a:solidFill>
                 <a:latin typeface="Calibri"/>
               </a:rPr>
-              <a:t>Photometric normalization: 742–1,187 inliers recovered; validates renderer</a:t>
-            </a:r>
-          </a:p>
-        </p:txBody>
-      </p:sp>
-      <p:sp>
-        <p:nvSpPr>
-          <p:cNvPr id="70" name="Rectangle 69"/>
-          <p:cNvSpPr/>
-          <p:nvPr/>
-        </p:nvSpPr>
-        <p:spPr>
-          <a:xfrm>
-            <a:off x="7635240" y="4882896"/>
-            <a:ext cx="4343400" cy="365760"/>
-          </a:xfrm>
-          <a:prstGeom prst="rect">
-            <a:avLst/>
-          </a:prstGeom>
-          <a:solidFill>
-            <a:srgbClr val="F4F6F8"/>
-          </a:solidFill>
-          <a:ln w="3810">
-            <a:solidFill>
-              <a:srgbClr val="D0D8DD"/>
-            </a:solidFill>
-          </a:ln>
-        </p:spPr>
-        <p:style>
-          <a:lnRef idx="1">
-            <a:schemeClr val="accent1"/>
-          </a:lnRef>
-          <a:fillRef idx="3">
-            <a:schemeClr val="accent1"/>
-          </a:fillRef>
-          <a:effectRef idx="2">
-            <a:schemeClr val="accent1"/>
-          </a:effectRef>
-          <a:fontRef idx="minor">
-            <a:schemeClr val="lt1"/>
-          </a:fontRef>
-        </p:style>
-        <p:txBody>
-          <a:bodyPr rtlCol="0" anchor="ctr"/>
-          <a:lstStyle/>
-          <a:p>
-            <a:pPr algn="ctr"/>
-          </a:p>
-        </p:txBody>
-      </p:sp>
-      <p:sp>
-        <p:nvSpPr>
-          <p:cNvPr id="71" name="TextBox 70"/>
-          <p:cNvSpPr txBox="1"/>
-          <p:nvPr/>
-        </p:nvSpPr>
-        <p:spPr>
-          <a:xfrm>
-            <a:off x="7699248" y="4919472"/>
-            <a:ext cx="182880" cy="182880"/>
-          </a:xfrm>
-          <a:prstGeom prst="rect">
-            <a:avLst/>
-          </a:prstGeom>
-          <a:noFill/>
-        </p:spPr>
-        <p:txBody>
-          <a:bodyPr wrap="square">
-            <a:spAutoFit/>
-          </a:bodyPr>
-          <a:lstStyle/>
-          <a:p>
-            <a:pPr algn="l"/>
-            <a:r>
-              <a:rPr sz="850" b="1" i="0">
-                <a:solidFill>
-                  <a:srgbClr val="C4891E"/>
-                </a:solidFill>
-                <a:latin typeface="Calibri"/>
-              </a:rPr>
-              <a:t>■</a:t>
-            </a:r>
-          </a:p>
-        </p:txBody>
-      </p:sp>
-      <p:sp>
-        <p:nvSpPr>
-          <p:cNvPr id="72" name="TextBox 71"/>
-          <p:cNvSpPr txBox="1"/>
-          <p:nvPr/>
-        </p:nvSpPr>
-        <p:spPr>
-          <a:xfrm>
-            <a:off x="7900416" y="4901184"/>
-            <a:ext cx="3977639" cy="164592"/>
-          </a:xfrm>
-          <a:prstGeom prst="rect">
-            <a:avLst/>
-          </a:prstGeom>
-          <a:noFill/>
-        </p:spPr>
-        <p:txBody>
-          <a:bodyPr wrap="square">
-            <a:spAutoFit/>
-          </a:bodyPr>
-          <a:lstStyle/>
-          <a:p>
-            <a:pPr algn="l"/>
-            <a:r>
-              <a:rPr sz="800" b="1" i="0">
-                <a:solidFill>
-                  <a:srgbClr val="C4891E"/>
-                </a:solidFill>
-                <a:latin typeface="Calibri"/>
-              </a:rPr>
-              <a:t>PENDING EXPERIMENT</a:t>
-            </a:r>
-          </a:p>
-        </p:txBody>
-      </p:sp>
-      <p:sp>
-        <p:nvSpPr>
-          <p:cNvPr id="73" name="TextBox 72"/>
-          <p:cNvSpPr txBox="1"/>
-          <p:nvPr/>
-        </p:nvSpPr>
-        <p:spPr>
-          <a:xfrm>
-            <a:off x="7900416" y="5065776"/>
-            <a:ext cx="3977639" cy="182880"/>
-          </a:xfrm>
-          <a:prstGeom prst="rect">
-            <a:avLst/>
-          </a:prstGeom>
-          <a:noFill/>
-        </p:spPr>
-        <p:txBody>
-          <a:bodyPr wrap="square">
-            <a:spAutoFit/>
-          </a:bodyPr>
-          <a:lstStyle/>
-          <a:p>
-            <a:pPr algn="l"/>
-            <a:r>
-              <a:rPr sz="750" b="0" i="0">
-                <a:solidFill>
-                  <a:srgbClr val="1A2B35"/>
-                </a:solidFill>
-                <a:latin typeface="Calibri"/>
-              </a:rPr>
-              <a:t>Real cross-sensor correspondence (OHRC vs TMC-2), geodetic GT</a:t>
-            </a:r>
-          </a:p>
-        </p:txBody>
-      </p:sp>
-      <p:sp>
-        <p:nvSpPr>
-          <p:cNvPr id="74" name="Rectangle 73"/>
-          <p:cNvSpPr/>
-          <p:nvPr/>
-        </p:nvSpPr>
-        <p:spPr>
-          <a:xfrm>
-            <a:off x="7635240" y="5285232"/>
-            <a:ext cx="4343400" cy="365760"/>
-          </a:xfrm>
-          <a:prstGeom prst="rect">
-            <a:avLst/>
-          </a:prstGeom>
-          <a:solidFill>
-            <a:srgbClr val="F4F6F8"/>
-          </a:solidFill>
-          <a:ln w="3810">
-            <a:solidFill>
-              <a:srgbClr val="D0D8DD"/>
-            </a:solidFill>
-          </a:ln>
-        </p:spPr>
-        <p:style>
-          <a:lnRef idx="1">
-            <a:schemeClr val="accent1"/>
-          </a:lnRef>
-          <a:fillRef idx="3">
-            <a:schemeClr val="accent1"/>
-          </a:fillRef>
-          <a:effectRef idx="2">
-            <a:schemeClr val="accent1"/>
-          </a:effectRef>
-          <a:fontRef idx="minor">
-            <a:schemeClr val="lt1"/>
-          </a:fontRef>
-        </p:style>
-        <p:txBody>
-          <a:bodyPr rtlCol="0" anchor="ctr"/>
-          <a:lstStyle/>
-          <a:p>
-            <a:pPr algn="ctr"/>
-          </a:p>
-        </p:txBody>
-      </p:sp>
-      <p:sp>
-        <p:nvSpPr>
-          <p:cNvPr id="75" name="TextBox 74"/>
-          <p:cNvSpPr txBox="1"/>
-          <p:nvPr/>
-        </p:nvSpPr>
-        <p:spPr>
-          <a:xfrm>
-            <a:off x="7699248" y="5321808"/>
-            <a:ext cx="182880" cy="182880"/>
-          </a:xfrm>
-          <a:prstGeom prst="rect">
-            <a:avLst/>
-          </a:prstGeom>
-          <a:noFill/>
-        </p:spPr>
-        <p:txBody>
-          <a:bodyPr wrap="square">
-            <a:spAutoFit/>
-          </a:bodyPr>
-          <a:lstStyle/>
-          <a:p>
-            <a:pPr algn="l"/>
-            <a:r>
-              <a:rPr sz="850" b="1" i="0">
-                <a:solidFill>
-                  <a:srgbClr val="6B7E88"/>
-                </a:solidFill>
-                <a:latin typeface="Calibri"/>
-              </a:rPr>
-              <a:t>■</a:t>
-            </a:r>
-          </a:p>
-        </p:txBody>
-      </p:sp>
-      <p:sp>
-        <p:nvSpPr>
-          <p:cNvPr id="76" name="TextBox 75"/>
-          <p:cNvSpPr txBox="1"/>
-          <p:nvPr/>
-        </p:nvSpPr>
-        <p:spPr>
-          <a:xfrm>
-            <a:off x="7900416" y="5303520"/>
-            <a:ext cx="3977639" cy="164592"/>
-          </a:xfrm>
-          <a:prstGeom prst="rect">
-            <a:avLst/>
-          </a:prstGeom>
-          <a:noFill/>
-        </p:spPr>
-        <p:txBody>
-          <a:bodyPr wrap="square">
-            <a:spAutoFit/>
-          </a:bodyPr>
-          <a:lstStyle/>
-          <a:p>
-            <a:pPr algn="l"/>
-            <a:r>
-              <a:rPr sz="800" b="1" i="0">
-                <a:solidFill>
-                  <a:srgbClr val="6B7E88"/>
-                </a:solidFill>
-                <a:latin typeface="Calibri"/>
-              </a:rPr>
-              <a:t>NOT ATTEMPTED</a:t>
-            </a:r>
-          </a:p>
-        </p:txBody>
-      </p:sp>
-      <p:sp>
-        <p:nvSpPr>
-          <p:cNvPr id="77" name="TextBox 76"/>
-          <p:cNvSpPr txBox="1"/>
-          <p:nvPr/>
-        </p:nvSpPr>
-        <p:spPr>
-          <a:xfrm>
-            <a:off x="7900416" y="5468112"/>
-            <a:ext cx="3977639" cy="182880"/>
-          </a:xfrm>
-          <a:prstGeom prst="rect">
-            <a:avLst/>
-          </a:prstGeom>
-          <a:noFill/>
-        </p:spPr>
-        <p:txBody>
-          <a:bodyPr wrap="square">
-            <a:spAutoFit/>
-          </a:bodyPr>
-          <a:lstStyle/>
-          <a:p>
-            <a:pPr algn="l"/>
-            <a:r>
-              <a:rPr sz="750" b="0" i="0">
-                <a:solidFill>
-                  <a:srgbClr val="1A2B35"/>
-                </a:solidFill>
-                <a:latin typeface="Calibri"/>
-              </a:rPr>
-              <a:t>IIRS cross-modal hyperspectral registration</a:t>
-            </a:r>
-          </a:p>
-        </p:txBody>
-      </p:sp>
-      <p:sp>
-        <p:nvSpPr>
-          <p:cNvPr id="78" name="Rectangle 77"/>
+              <a:t>• Tested on completely disjoint lunar scenes: South Pole OHRC vs Equatorial TMC-2.
+• Result: 1/1 tested pair rejected; 5 candidates retained; QualityGate refused alignment with typed codes ['LOW_INLIERS', 'LOW_COVERAGE']. Zero false acceptance.</a:t>
+            </a:r>
+          </a:p>
+        </p:txBody>
+      </p:sp>
+      <p:sp>
+        <p:nvSpPr>
+          <p:cNvPr id="62" name="Rectangle 61"/>
           <p:cNvSpPr/>
           <p:nvPr/>
         </p:nvSpPr>
@@ -11720,7 +11136,7 @@
       </p:sp>
       <p:sp>
         <p:nvSpPr>
-          <p:cNvPr id="79" name="TextBox 78"/>
+          <p:cNvPr id="63" name="TextBox 62"/>
           <p:cNvSpPr txBox="1"/>
           <p:nvPr/>
         </p:nvSpPr>
@@ -12307,8 +11723,8 @@
               </a:rPr>
               <a:t>✓ EXP-OHRC-E2E: 822 inliers, held-out RMSE 0.679 px
 ✓ EXP-TMC-E2E: 686 inliers, held-out RMSE 1.110 px
-✓ EXP-TMC-FIXED: 1.52 → 0.841 px (44.7% gain on N=150)
-✓ Safe rejection: Disjoint scene rejected (0 accepted)</a:t>
+✓ EXP-TMC-FIXED: 1.61 → 0.836 px (47.9% gain on N=150)
+✓ Safe rejection: 1/1 disjoint scene pair rejected (0 accepted)</a:t>
             </a:r>
           </a:p>
         </p:txBody>
@@ -12423,7 +11839,7 @@
                 </a:solidFill>
                 <a:latin typeface="Calibri"/>
               </a:rPr>
-              <a:t>• Mode C recovers 742–1,187 inliers across 0°–180°
+              <a:t>• Mode C recovers 737–1,187 inliers across 0°–180°
 • Controlled Precision @ 1px: &gt;99.1% under matched lighting
 • Direct matching collapses at Δ ≥ 45° (28 inliers, 0% prec)</a:t>
             </a:r>
@@ -13274,7 +12690,7 @@
                 </a:solidFill>
                 <a:latin typeface="Calibri"/>
               </a:rPr>
-              <a:t>→ LCN normalization + Mode C DEM lighting</a:t>
+              <a:t>→ LCN normalization; Mode C (physics branch)</a:t>
             </a:r>
           </a:p>
         </p:txBody>

--- a/LUNA-CORR_SIH2026_Presentation.pptx
+++ b/LUNA-CORR_SIH2026_Presentation.pptx
@@ -3971,7 +3971,7 @@
                 <a:latin typeface="Calibri"/>
               </a:rPr>
               <a:t>• EXP-OHRC-E2E: 822 inliers (99.2% ratio)  ·  Held-out RMSE: 0.679 px (N=165 withheld, TPS Warping Accepted)
-• EXP-TMC-FIXED: 1.61 px → 0.84 px RMSE (47.9% gain vs Stage 3, N=150)  |  EXP-TMC-E2E: 686 inliers, 1.110 px RMSE</a:t>
+• EXP-TMC-FIXED: 1.606 px → 0.836 px RMSE (47.9% gain vs Stage 3, N=150)  |  EXP-TMC-E2E: 686 inliers, 1.110 px RMSE</a:t>
             </a:r>
           </a:p>
         </p:txBody>
@@ -5493,7 +5493,7 @@
                 </a:solidFill>
                 <a:latin typeface="Calibri"/>
               </a:rPr>
-              <a:t>▸  LCN + Mode C DEM Rendering (Physics Branch): Normalizes dynamic range; simulates DEM at target sun angle.</a:t>
+              <a:t>▸  LCN Normalization (Core E2E) / Mode C (Physics Branch): LCN normalizes dynamic range; branch simulates DEM at target sun angle.</a:t>
             </a:r>
           </a:p>
         </p:txBody>
@@ -5818,7 +5818,7 @@
                 </a:solidFill>
                 <a:latin typeface="Calibri"/>
               </a:rPr>
-              <a:t>▸  Disjoint Safe Failure: 1/1 disjoint scene pair rejected; system fails safely.</a:t>
+              <a:t>▸  Disjoint Safe Failure: Tested disjoint pair rejected without accepted registration.</a:t>
             </a:r>
           </a:p>
         </p:txBody>
@@ -6306,7 +6306,7 @@
                 </a:solidFill>
                 <a:latin typeface="Calibri"/>
               </a:rPr>
-              <a:t>END-TO-END 8-STAGE PIPELINE FLOW</a:t>
+              <a:t>CORE 8-STAGE E2E PIPELINE FLOW  /  EXPERIMENTAL PHYSICS BRANCH</a:t>
             </a:r>
           </a:p>
         </p:txBody>
@@ -6486,9 +6486,9 @@
           <a:solidFill>
             <a:srgbClr val="F4F6F8"/>
           </a:solidFill>
-          <a:ln w="6350">
+          <a:ln w="10160">
             <a:solidFill>
-              <a:srgbClr val="D0D8DD"/>
+              <a:srgbClr val="147D77"/>
             </a:solidFill>
           </a:ln>
         </p:spPr>
@@ -6600,8 +6600,8 @@
         </p:nvSpPr>
         <p:spPr>
           <a:xfrm>
-            <a:off x="1920239" y="1865376"/>
-            <a:ext cx="1261872" cy="502920"/>
+            <a:off x="1911095" y="1847088"/>
+            <a:ext cx="1280160" cy="530352"/>
           </a:xfrm>
           <a:prstGeom prst="rect">
             <a:avLst/>
@@ -6616,14 +6616,16 @@
           <a:p>
             <a:pPr algn="ctr"/>
             <a:r>
-              <a:rPr sz="780" b="0" i="0">
+              <a:rPr sz="680" b="0" i="0">
                 <a:solidFill>
                   <a:srgbClr val="1A2B35"/>
                 </a:solidFill>
                 <a:latin typeface="Calibri"/>
               </a:rPr>
-              <a:t>LCN normalization
-[Mode C: Physics branch]</a:t>
+              <a:t>LCN Normalization (Core)
+─────────────────
+Branch: Mode C DEM
+(Physics branch)</a:t>
             </a:r>
           </a:p>
         </p:txBody>
@@ -7788,7 +7790,7 @@
                 </a:solidFill>
                 <a:latin typeface="Calibri"/>
               </a:rPr>
-              <a:t>Held-out RMSE: 1.110 px (fitting: 0.841 px, N=138)  |  EXP-TMC-FIXED (N=150): 1.61 → 0.836 px (47.9% gain)</a:t>
+              <a:t>Held-out RMSE: 1.110 px (fitting: 0.841 px, N=138)  |  EXP-TMC-FIXED (N=150): 1.606 → 0.836 px (47.9% gain)</a:t>
             </a:r>
           </a:p>
         </p:txBody>
@@ -11086,7 +11088,7 @@
                 <a:latin typeface="Calibri"/>
               </a:rPr>
               <a:t>• Tested on completely disjoint lunar scenes: South Pole OHRC vs Equatorial TMC-2.
-• Result: 1/1 tested pair rejected; 5 candidates retained; QualityGate refused alignment with typed codes ['LOW_INLIERS', 'LOW_COVERAGE']. Zero false acceptance.</a:t>
+• Result: The tested disjoint pair was rejected without an accepted registration; 5 candidates retained; QualityGate refused alignment with typed codes ['LOW_INLIERS', 'LOW_COVERAGE'].</a:t>
             </a:r>
           </a:p>
         </p:txBody>
@@ -11723,8 +11725,8 @@
               </a:rPr>
               <a:t>✓ EXP-OHRC-E2E: 822 inliers, held-out RMSE 0.679 px
 ✓ EXP-TMC-E2E: 686 inliers, held-out RMSE 1.110 px
-✓ EXP-TMC-FIXED: 1.61 → 0.836 px (47.9% gain on N=150)
-✓ Safe rejection: 1/1 disjoint scene pair rejected (0 accepted)</a:t>
+✓ EXP-TMC-FIXED: 1.606 → 0.836 px (47.9% gain on N=150)
+✓ Safe rejection: Tested disjoint pair rejected without accepted registration</a:t>
             </a:r>
           </a:p>
         </p:txBody>
@@ -14515,7 +14517,7 @@
                 </a:solidFill>
                 <a:latin typeface="Calibri"/>
               </a:rPr>
-              <a:t>Directly addresses lunar illumination physics via LCN and DEM reflectance simulation, designed to mitigate illumination-induced correspondence collapse across extreme sun angles.</a:t>
+              <a:t>Directly addresses lunar illumination physics via LCN (core pipeline) and DEM reflectance simulation (experimental branch) to mitigate correspondence collapse across extreme sun angles.</a:t>
             </a:r>
           </a:p>
         </p:txBody>
@@ -14831,7 +14833,7 @@
                 </a:solidFill>
                 <a:latin typeface="Calibri"/>
               </a:rPr>
-              <a:t>Rejects invalid or ambiguous registrations with explicit reason codes rather than forcing alignment on unmatchable scenes (demonstrated on a disjoint negative-control pair).</a:t>
+              <a:t>Rejects invalid or ambiguous registrations with explicit reason codes rather than forcing alignment on unmatchable scenes (demonstrated on disjoint negative-control test).</a:t>
             </a:r>
           </a:p>
         </p:txBody>

--- a/LUNA-CORR_SIH2026_Presentation.pptx
+++ b/LUNA-CORR_SIH2026_Presentation.pptx
@@ -3970,8 +3970,8 @@
                 </a:solidFill>
                 <a:latin typeface="Calibri"/>
               </a:rPr>
-              <a:t>• EXP-OHRC-E2E: 822 inliers (99.2% ratio)  ·  Held-out RMSE: 0.679 px (N=165 withheld, TPS Warping Accepted)
-• EXP-TMC-FIXED: 1.606 px → 0.836 px RMSE (47.9% gain vs Stage 3, N=150)  |  EXP-TMC-E2E: 686 inliers, 1.110 px RMSE</a:t>
+              <a:t>• EXP-OHRC-E2E: 818 inliers (99.3% ratio)  ·  Held-out RMSE: 0.786 px (N=789 candidate split, TPS Warping Accepted)
+• EXP-TMC-FIXED: 1.606 px → 0.836 px RMSE (47.9% gain vs Stage 3, N=150)  |  EXP-TMC-E2E: 660 inliers, 1.073 px RMSE</a:t>
             </a:r>
           </a:p>
         </p:txBody>
@@ -7755,7 +7755,7 @@
                 </a:solidFill>
                 <a:latin typeface="Calibri"/>
               </a:rPr>
-              <a:t>TMC-2 STEREO — 686 INLIERS — ACCEPTED (EXP-TMC-E2E):</a:t>
+              <a:t>TMC-2 STEREO — 660 INLIERS — ACCEPTED (EXP-TMC-E2E):</a:t>
             </a:r>
           </a:p>
         </p:txBody>
@@ -7790,7 +7790,7 @@
                 </a:solidFill>
                 <a:latin typeface="Calibri"/>
               </a:rPr>
-              <a:t>Held-out RMSE: 1.110 px (fitting: 0.841 px, N=138)  |  EXP-TMC-FIXED (N=150): 1.606 → 0.836 px (47.9% gain)</a:t>
+              <a:t>Held-out RMSE: 1.073 px (fitting: 0.647 px, N=297)  |  EXP-TMC-FIXED (N=150): 1.606 → 0.836 px (47.9% gain)</a:t>
             </a:r>
           </a:p>
         </p:txBody>
@@ -9587,7 +9587,7 @@
                 </a:solidFill>
                 <a:latin typeface="Calibri"/>
               </a:rPr>
-              <a:t>0.679 px RMSE (822 inliers)</a:t>
+              <a:t>0.786 px RMSE (818 inliers)</a:t>
             </a:r>
           </a:p>
         </p:txBody>
@@ -9772,7 +9772,7 @@
                 </a:solidFill>
                 <a:latin typeface="Calibri"/>
               </a:rPr>
-              <a:t>1.110 px RMSE (686 inliers)</a:t>
+              <a:t>1.073 px RMSE (660 inliers)</a:t>
             </a:r>
           </a:p>
         </p:txBody>
@@ -10925,11 +10925,11 @@
                 </a:solidFill>
                 <a:latin typeface="Calibri"/>
               </a:rPr>
-              <a:t>• Match Yield &amp; Inliers: 686 inliers retained (77.0% ratio) from 891 raw candidate matches.
-• Spatial Coverage: 84.4% occupied bins across 8×8 grid; empty circle radius = 0.084.
-• Autonomous Model Selection: Spatial autocorrelation S_relief = 0.676 &gt; 0.20 and fitting P95 = 1.55 px triggered elastic TPS over planar homography.
-• Withheld Test Error (N=138): Held-out RMSE = 1.110 px (fitting: 0.841 px on N=548, median: 0.689 px, P95: 2.012 px).
-• Operational Decision: ACCEPTED with Quality Score 0.802 (min_inliers=20 criterion met).</a:t>
+              <a:t>• Match Yield &amp; Inliers: 660 inliers retained (76.1% ratio) on training partition.
+• Spatial Coverage: 81.2% occupied bins across 8×8 grid; empty circle radius = 0.084.
+• Autonomous Model Selection: Spatial autocorrelation S_relief = 0.725 &gt; 0.20 and fitting P95 = 1.43 px triggered elastic TPS over planar homography.
+• Withheld Test Error (N=297): Held-out RMSE = 1.073 px (fitting: 0.647 px on N=660, median: 0.656 px, P95: 2.072 px).
+• Operational Decision: ACCEPTED with Quality Score 0.742 (min_inliers=20 criterion met).</a:t>
             </a:r>
           </a:p>
         </p:txBody>
@@ -11723,8 +11723,8 @@
                 </a:solidFill>
                 <a:latin typeface="Calibri"/>
               </a:rPr>
-              <a:t>✓ EXP-OHRC-E2E: 822 inliers, held-out RMSE 0.679 px
-✓ EXP-TMC-E2E: 686 inliers, held-out RMSE 1.110 px
+              <a:t>✓ EXP-OHRC-E2E: 818 inliers, held-out RMSE 0.786 px
+✓ EXP-TMC-E2E: 660 inliers, held-out RMSE 1.073 px
 ✓ EXP-TMC-FIXED: 1.606 → 0.836 px (47.9% gain on N=150)
 ✓ Safe rejection: Tested disjoint pair rejected without accepted registration</a:t>
             </a:r>

--- a/LUNA-CORR_SIH2026_Presentation.pptx
+++ b/LUNA-CORR_SIH2026_Presentation.pptx
@@ -4042,8 +4042,8 @@
         </p:nvSpPr>
         <p:spPr>
           <a:xfrm>
-            <a:off x="4023360" y="228600"/>
-            <a:ext cx="8092440" cy="201168"/>
+            <a:off x="4023360" y="201168"/>
+            <a:ext cx="6537960" cy="201168"/>
           </a:xfrm>
           <a:prstGeom prst="rect">
             <a:avLst/>
@@ -4085,8 +4085,8 @@
         </p:nvSpPr>
         <p:spPr>
           <a:xfrm>
-            <a:off x="4096512" y="246888"/>
-            <a:ext cx="7982712" cy="201168"/>
+            <a:off x="4096512" y="219456"/>
+            <a:ext cx="6428232" cy="201168"/>
           </a:xfrm>
           <a:prstGeom prst="rect">
             <a:avLst/>
@@ -4121,7 +4121,7 @@
       </p:sp>
       <p:pic>
         <p:nvPicPr>
-          <p:cNvPr id="26" name="Picture 25" descr="fig1_title_hero.png"/>
+          <p:cNvPr id="26" name="Picture 25" descr="sih_logo.png"/>
           <p:cNvPicPr>
             <a:picLocks noChangeAspect="1"/>
           </p:cNvPicPr>
@@ -4135,6 +4135,30 @@
         </p:blipFill>
         <p:spPr>
           <a:xfrm>
+            <a:off x="10698480" y="36576"/>
+            <a:ext cx="1216152" cy="566928"/>
+          </a:xfrm>
+          <a:prstGeom prst="rect">
+            <a:avLst/>
+          </a:prstGeom>
+        </p:spPr>
+      </p:pic>
+      <p:pic>
+        <p:nvPicPr>
+          <p:cNvPr id="27" name="Picture 26" descr="fig1_title_hero.png"/>
+          <p:cNvPicPr>
+            <a:picLocks noChangeAspect="1"/>
+          </p:cNvPicPr>
+          <p:nvPr/>
+        </p:nvPicPr>
+        <p:blipFill>
+          <a:blip r:embed="rId3"/>
+          <a:stretch>
+            <a:fillRect/>
+          </a:stretch>
+        </p:blipFill>
+        <p:spPr>
+          <a:xfrm>
             <a:off x="4023360" y="457200"/>
             <a:ext cx="8092440" cy="2606040"/>
           </a:xfrm>
@@ -4145,7 +4169,7 @@
       </p:pic>
       <p:sp>
         <p:nvSpPr>
-          <p:cNvPr id="27" name="Rectangle 26"/>
+          <p:cNvPr id="28" name="Rectangle 27"/>
           <p:cNvSpPr/>
           <p:nvPr/>
         </p:nvSpPr>
@@ -4190,7 +4214,7 @@
       </p:sp>
       <p:sp>
         <p:nvSpPr>
-          <p:cNvPr id="28" name="TextBox 27"/>
+          <p:cNvPr id="29" name="TextBox 28"/>
           <p:cNvSpPr txBox="1"/>
           <p:nvPr/>
         </p:nvSpPr>
@@ -4232,7 +4256,7 @@
       </p:sp>
       <p:sp>
         <p:nvSpPr>
-          <p:cNvPr id="29" name="TextBox 28"/>
+          <p:cNvPr id="30" name="TextBox 29"/>
           <p:cNvSpPr txBox="1"/>
           <p:nvPr/>
         </p:nvSpPr>
@@ -4275,7 +4299,7 @@
       </p:sp>
       <p:sp>
         <p:nvSpPr>
-          <p:cNvPr id="30" name="Rectangle 29"/>
+          <p:cNvPr id="31" name="Rectangle 30"/>
           <p:cNvSpPr/>
           <p:nvPr/>
         </p:nvSpPr>
@@ -4292,7 +4316,7 @@
           </a:solidFill>
           <a:ln w="6350">
             <a:solidFill>
-              <a:srgbClr val="D0D8DD"/>
+              <a:srgbClr val="D0D8D9"/>
             </a:solidFill>
           </a:ln>
         </p:spPr>
@@ -4320,7 +4344,7 @@
       </p:sp>
       <p:sp>
         <p:nvSpPr>
-          <p:cNvPr id="31" name="Rectangle 30"/>
+          <p:cNvPr id="32" name="Rectangle 31"/>
           <p:cNvSpPr/>
           <p:nvPr/>
         </p:nvSpPr>
@@ -4363,7 +4387,7 @@
       </p:sp>
       <p:sp>
         <p:nvSpPr>
-          <p:cNvPr id="32" name="TextBox 31"/>
+          <p:cNvPr id="33" name="TextBox 32"/>
           <p:cNvSpPr txBox="1"/>
           <p:nvPr/>
         </p:nvSpPr>
@@ -4405,7 +4429,7 @@
       </p:sp>
       <p:sp>
         <p:nvSpPr>
-          <p:cNvPr id="33" name="TextBox 32"/>
+          <p:cNvPr id="34" name="TextBox 33"/>
           <p:cNvSpPr txBox="1"/>
           <p:nvPr/>
         </p:nvSpPr>
@@ -4447,7 +4471,7 @@
       </p:sp>
       <p:sp>
         <p:nvSpPr>
-          <p:cNvPr id="34" name="Rectangle 33"/>
+          <p:cNvPr id="35" name="Rectangle 34"/>
           <p:cNvSpPr/>
           <p:nvPr/>
         </p:nvSpPr>
@@ -4464,7 +4488,7 @@
           </a:solidFill>
           <a:ln w="6350">
             <a:solidFill>
-              <a:srgbClr val="D0D8DD"/>
+              <a:srgbClr val="D0D8D9"/>
             </a:solidFill>
           </a:ln>
         </p:spPr>
@@ -4492,7 +4516,7 @@
       </p:sp>
       <p:sp>
         <p:nvSpPr>
-          <p:cNvPr id="35" name="Rectangle 34"/>
+          <p:cNvPr id="36" name="Rectangle 35"/>
           <p:cNvSpPr/>
           <p:nvPr/>
         </p:nvSpPr>
@@ -4535,7 +4559,7 @@
       </p:sp>
       <p:sp>
         <p:nvSpPr>
-          <p:cNvPr id="36" name="TextBox 35"/>
+          <p:cNvPr id="37" name="TextBox 36"/>
           <p:cNvSpPr txBox="1"/>
           <p:nvPr/>
         </p:nvSpPr>
@@ -4577,7 +4601,7 @@
       </p:sp>
       <p:sp>
         <p:nvSpPr>
-          <p:cNvPr id="37" name="TextBox 36"/>
+          <p:cNvPr id="38" name="TextBox 37"/>
           <p:cNvSpPr txBox="1"/>
           <p:nvPr/>
         </p:nvSpPr>
@@ -4619,7 +4643,7 @@
       </p:sp>
       <p:sp>
         <p:nvSpPr>
-          <p:cNvPr id="38" name="Rectangle 37"/>
+          <p:cNvPr id="39" name="Rectangle 38"/>
           <p:cNvSpPr/>
           <p:nvPr/>
         </p:nvSpPr>
@@ -4636,7 +4660,7 @@
           </a:solidFill>
           <a:ln w="6350">
             <a:solidFill>
-              <a:srgbClr val="D0D8DD"/>
+              <a:srgbClr val="D0D8D9"/>
             </a:solidFill>
           </a:ln>
         </p:spPr>
@@ -4664,7 +4688,7 @@
       </p:sp>
       <p:sp>
         <p:nvSpPr>
-          <p:cNvPr id="39" name="Rectangle 38"/>
+          <p:cNvPr id="40" name="Rectangle 39"/>
           <p:cNvSpPr/>
           <p:nvPr/>
         </p:nvSpPr>
@@ -4707,7 +4731,7 @@
       </p:sp>
       <p:sp>
         <p:nvSpPr>
-          <p:cNvPr id="40" name="TextBox 39"/>
+          <p:cNvPr id="41" name="TextBox 40"/>
           <p:cNvSpPr txBox="1"/>
           <p:nvPr/>
         </p:nvSpPr>
@@ -4749,7 +4773,7 @@
       </p:sp>
       <p:sp>
         <p:nvSpPr>
-          <p:cNvPr id="41" name="TextBox 40"/>
+          <p:cNvPr id="42" name="TextBox 41"/>
           <p:cNvSpPr txBox="1"/>
           <p:nvPr/>
         </p:nvSpPr>
@@ -4791,7 +4815,7 @@
       </p:sp>
       <p:sp>
         <p:nvSpPr>
-          <p:cNvPr id="42" name="Rectangle 41"/>
+          <p:cNvPr id="43" name="Rectangle 42"/>
           <p:cNvSpPr/>
           <p:nvPr/>
         </p:nvSpPr>
@@ -4808,7 +4832,7 @@
           </a:solidFill>
           <a:ln w="6350">
             <a:solidFill>
-              <a:srgbClr val="D0D8DD"/>
+              <a:srgbClr val="D0D8D9"/>
             </a:solidFill>
           </a:ln>
         </p:spPr>
@@ -4836,7 +4860,7 @@
       </p:sp>
       <p:sp>
         <p:nvSpPr>
-          <p:cNvPr id="43" name="TextBox 42"/>
+          <p:cNvPr id="44" name="TextBox 43"/>
           <p:cNvSpPr txBox="1"/>
           <p:nvPr/>
         </p:nvSpPr>
@@ -4878,7 +4902,7 @@
       </p:sp>
       <p:sp>
         <p:nvSpPr>
-          <p:cNvPr id="44" name="TextBox 43"/>
+          <p:cNvPr id="45" name="TextBox 44"/>
           <p:cNvSpPr txBox="1"/>
           <p:nvPr/>
         </p:nvSpPr>
@@ -4920,7 +4944,7 @@
       </p:sp>
       <p:sp>
         <p:nvSpPr>
-          <p:cNvPr id="45" name="TextBox 44"/>
+          <p:cNvPr id="46" name="TextBox 45"/>
           <p:cNvSpPr txBox="1"/>
           <p:nvPr/>
         </p:nvSpPr>
@@ -4962,7 +4986,7 @@
       </p:sp>
       <p:sp>
         <p:nvSpPr>
-          <p:cNvPr id="46" name="Rectangle 45"/>
+          <p:cNvPr id="47" name="Rectangle 46"/>
           <p:cNvSpPr/>
           <p:nvPr/>
         </p:nvSpPr>
@@ -5007,7 +5031,7 @@
       </p:sp>
       <p:sp>
         <p:nvSpPr>
-          <p:cNvPr id="47" name="TextBox 46"/>
+          <p:cNvPr id="48" name="TextBox 47"/>
           <p:cNvSpPr txBox="1"/>
           <p:nvPr/>
         </p:nvSpPr>
@@ -5049,7 +5073,7 @@
       </p:sp>
       <p:sp>
         <p:nvSpPr>
-          <p:cNvPr id="48" name="TextBox 47"/>
+          <p:cNvPr id="49" name="TextBox 48"/>
           <p:cNvSpPr txBox="1"/>
           <p:nvPr/>
         </p:nvSpPr>
@@ -5076,7 +5100,7 @@
                   <a:srgbClr val="147D77"/>
                 </a:solidFill>
                 <a:latin typeface="Calibri"/>
-                <a:hlinkClick r:id="rId3"/>
+                <a:hlinkClick r:id="rId4"/>
               </a:rPr>
               <a:t>github.com/TanukuSai/luna-corr</a:t>
             </a:r>
@@ -5085,7 +5109,7 @@
       </p:sp>
       <p:sp>
         <p:nvSpPr>
-          <p:cNvPr id="49" name="TextBox 48"/>
+          <p:cNvPr id="50" name="TextBox 49"/>
           <p:cNvSpPr txBox="1"/>
           <p:nvPr/>
         </p:nvSpPr>
@@ -5127,7 +5151,7 @@
       </p:sp>
       <p:sp>
         <p:nvSpPr>
-          <p:cNvPr id="50" name="Rectangle 49"/>
+          <p:cNvPr id="51" name="Rectangle 50"/>
           <p:cNvSpPr/>
           <p:nvPr/>
         </p:nvSpPr>
@@ -5140,7 +5164,7 @@
             <a:avLst/>
           </a:prstGeom>
           <a:solidFill>
-            <a:srgbClr val="D0D8DD"/>
+            <a:srgbClr val="D0D8D9"/>
           </a:solidFill>
           <a:ln>
             <a:noFill/>
@@ -5170,7 +5194,7 @@
       </p:sp>
       <p:sp>
         <p:nvSpPr>
-          <p:cNvPr id="51" name="TextBox 50"/>
+          <p:cNvPr id="52" name="TextBox 51"/>
           <p:cNvSpPr txBox="1"/>
           <p:nvPr/>
         </p:nvSpPr>
@@ -5288,7 +5312,7 @@
         <p:spPr>
           <a:xfrm>
             <a:off x="457200" y="91440"/>
-            <a:ext cx="11274552" cy="310896"/>
+            <a:ext cx="10058400" cy="310896"/>
           </a:xfrm>
           <a:prstGeom prst="rect">
             <a:avLst/>
@@ -5330,7 +5354,7 @@
         <p:spPr>
           <a:xfrm>
             <a:off x="457200" y="402336"/>
-            <a:ext cx="11274552" cy="164592"/>
+            <a:ext cx="10058400" cy="164592"/>
           </a:xfrm>
           <a:prstGeom prst="rect">
             <a:avLst/>
@@ -5363,9 +5387,33 @@
           </a:p>
         </p:txBody>
       </p:sp>
-      <p:sp>
-        <p:nvSpPr>
-          <p:cNvPr id="5" name="Rectangle 4"/>
+      <p:pic>
+        <p:nvPicPr>
+          <p:cNvPr id="5" name="Picture 4" descr="sih_logo.png"/>
+          <p:cNvPicPr>
+            <a:picLocks noChangeAspect="1"/>
+          </p:cNvPicPr>
+          <p:nvPr/>
+        </p:nvPicPr>
+        <p:blipFill>
+          <a:blip r:embed="rId2"/>
+          <a:stretch>
+            <a:fillRect/>
+          </a:stretch>
+        </p:blipFill>
+        <p:spPr>
+          <a:xfrm>
+            <a:off x="10698480" y="36576"/>
+            <a:ext cx="1216152" cy="566928"/>
+          </a:xfrm>
+          <a:prstGeom prst="rect">
+            <a:avLst/>
+          </a:prstGeom>
+        </p:spPr>
+      </p:pic>
+      <p:sp>
+        <p:nvSpPr>
+          <p:cNvPr id="6" name="Rectangle 5"/>
           <p:cNvSpPr/>
           <p:nvPr/>
         </p:nvSpPr>
@@ -5378,7 +5426,7 @@
             <a:avLst/>
           </a:prstGeom>
           <a:solidFill>
-            <a:srgbClr val="D0D8DD"/>
+            <a:srgbClr val="D0D8D9"/>
           </a:solidFill>
           <a:ln>
             <a:noFill/>
@@ -5408,7 +5456,7 @@
       </p:sp>
       <p:sp>
         <p:nvSpPr>
-          <p:cNvPr id="6" name="Rectangle 5"/>
+          <p:cNvPr id="7" name="Rectangle 6"/>
           <p:cNvSpPr/>
           <p:nvPr/>
         </p:nvSpPr>
@@ -5451,7 +5499,7 @@
       </p:sp>
       <p:sp>
         <p:nvSpPr>
-          <p:cNvPr id="7" name="TextBox 6"/>
+          <p:cNvPr id="8" name="TextBox 7"/>
           <p:cNvSpPr txBox="1"/>
           <p:nvPr/>
         </p:nvSpPr>
@@ -5493,7 +5541,7 @@
       </p:sp>
       <p:sp>
         <p:nvSpPr>
-          <p:cNvPr id="8" name="Rectangle 7"/>
+          <p:cNvPr id="9" name="Rectangle 8"/>
           <p:cNvSpPr/>
           <p:nvPr/>
         </p:nvSpPr>
@@ -5538,7 +5586,7 @@
       </p:sp>
       <p:sp>
         <p:nvSpPr>
-          <p:cNvPr id="9" name="TextBox 8"/>
+          <p:cNvPr id="10" name="TextBox 9"/>
           <p:cNvSpPr txBox="1"/>
           <p:nvPr/>
         </p:nvSpPr>
@@ -5580,7 +5628,7 @@
       </p:sp>
       <p:sp>
         <p:nvSpPr>
-          <p:cNvPr id="10" name="TextBox 9"/>
+          <p:cNvPr id="11" name="TextBox 10"/>
           <p:cNvSpPr txBox="1"/>
           <p:nvPr/>
         </p:nvSpPr>
@@ -5622,7 +5670,7 @@
       </p:sp>
       <p:sp>
         <p:nvSpPr>
-          <p:cNvPr id="11" name="Rectangle 10"/>
+          <p:cNvPr id="12" name="Rectangle 11"/>
           <p:cNvSpPr/>
           <p:nvPr/>
         </p:nvSpPr>
@@ -5667,7 +5715,7 @@
       </p:sp>
       <p:sp>
         <p:nvSpPr>
-          <p:cNvPr id="12" name="TextBox 11"/>
+          <p:cNvPr id="13" name="TextBox 12"/>
           <p:cNvSpPr txBox="1"/>
           <p:nvPr/>
         </p:nvSpPr>
@@ -5709,7 +5757,7 @@
       </p:sp>
       <p:sp>
         <p:nvSpPr>
-          <p:cNvPr id="13" name="Rectangle 12"/>
+          <p:cNvPr id="14" name="Rectangle 13"/>
           <p:cNvSpPr/>
           <p:nvPr/>
         </p:nvSpPr>
@@ -5754,7 +5802,7 @@
       </p:sp>
       <p:sp>
         <p:nvSpPr>
-          <p:cNvPr id="14" name="TextBox 13"/>
+          <p:cNvPr id="15" name="TextBox 14"/>
           <p:cNvSpPr txBox="1"/>
           <p:nvPr/>
         </p:nvSpPr>
@@ -5796,7 +5844,7 @@
       </p:sp>
       <p:sp>
         <p:nvSpPr>
-          <p:cNvPr id="15" name="Rectangle 14"/>
+          <p:cNvPr id="16" name="Rectangle 15"/>
           <p:cNvSpPr/>
           <p:nvPr/>
         </p:nvSpPr>
@@ -5841,7 +5889,7 @@
       </p:sp>
       <p:sp>
         <p:nvSpPr>
-          <p:cNvPr id="16" name="TextBox 15"/>
+          <p:cNvPr id="17" name="TextBox 16"/>
           <p:cNvSpPr txBox="1"/>
           <p:nvPr/>
         </p:nvSpPr>
@@ -5883,7 +5931,7 @@
       </p:sp>
       <p:sp>
         <p:nvSpPr>
-          <p:cNvPr id="17" name="Rectangle 16"/>
+          <p:cNvPr id="18" name="Rectangle 17"/>
           <p:cNvSpPr/>
           <p:nvPr/>
         </p:nvSpPr>
@@ -5926,7 +5974,7 @@
       </p:sp>
       <p:sp>
         <p:nvSpPr>
-          <p:cNvPr id="18" name="TextBox 17"/>
+          <p:cNvPr id="19" name="TextBox 18"/>
           <p:cNvSpPr txBox="1"/>
           <p:nvPr/>
         </p:nvSpPr>
@@ -5968,7 +6016,7 @@
       </p:sp>
       <p:sp>
         <p:nvSpPr>
-          <p:cNvPr id="19" name="Rectangle 18"/>
+          <p:cNvPr id="20" name="Rectangle 19"/>
           <p:cNvSpPr/>
           <p:nvPr/>
         </p:nvSpPr>
@@ -5985,7 +6033,7 @@
           </a:solidFill>
           <a:ln w="5080">
             <a:solidFill>
-              <a:srgbClr val="D0D8DD"/>
+              <a:srgbClr val="D0D8D9"/>
             </a:solidFill>
           </a:ln>
         </p:spPr>
@@ -6013,7 +6061,7 @@
       </p:sp>
       <p:sp>
         <p:nvSpPr>
-          <p:cNvPr id="20" name="Rectangle 19"/>
+          <p:cNvPr id="21" name="Rectangle 20"/>
           <p:cNvSpPr/>
           <p:nvPr/>
         </p:nvSpPr>
@@ -6056,7 +6104,7 @@
       </p:sp>
       <p:sp>
         <p:nvSpPr>
-          <p:cNvPr id="21" name="TextBox 20"/>
+          <p:cNvPr id="22" name="TextBox 21"/>
           <p:cNvSpPr txBox="1"/>
           <p:nvPr/>
         </p:nvSpPr>
@@ -6098,7 +6146,7 @@
       </p:sp>
       <p:sp>
         <p:nvSpPr>
-          <p:cNvPr id="22" name="Rectangle 21"/>
+          <p:cNvPr id="23" name="Rectangle 22"/>
           <p:cNvSpPr/>
           <p:nvPr/>
         </p:nvSpPr>
@@ -6115,7 +6163,7 @@
           </a:solidFill>
           <a:ln w="3810">
             <a:solidFill>
-              <a:srgbClr val="D0D8DD"/>
+              <a:srgbClr val="D0D8D9"/>
             </a:solidFill>
           </a:ln>
         </p:spPr>
@@ -6143,7 +6191,7 @@
       </p:sp>
       <p:sp>
         <p:nvSpPr>
-          <p:cNvPr id="23" name="TextBox 22"/>
+          <p:cNvPr id="24" name="TextBox 23"/>
           <p:cNvSpPr txBox="1"/>
           <p:nvPr/>
         </p:nvSpPr>
@@ -6185,7 +6233,7 @@
       </p:sp>
       <p:sp>
         <p:nvSpPr>
-          <p:cNvPr id="24" name="TextBox 23"/>
+          <p:cNvPr id="25" name="TextBox 24"/>
           <p:cNvSpPr txBox="1"/>
           <p:nvPr/>
         </p:nvSpPr>
@@ -6227,7 +6275,7 @@
       </p:sp>
       <p:sp>
         <p:nvSpPr>
-          <p:cNvPr id="25" name="Rectangle 24"/>
+          <p:cNvPr id="26" name="Rectangle 25"/>
           <p:cNvSpPr/>
           <p:nvPr/>
         </p:nvSpPr>
@@ -6244,7 +6292,7 @@
           </a:solidFill>
           <a:ln w="3810">
             <a:solidFill>
-              <a:srgbClr val="D0D8DD"/>
+              <a:srgbClr val="D0D8D9"/>
             </a:solidFill>
           </a:ln>
         </p:spPr>
@@ -6272,7 +6320,7 @@
       </p:sp>
       <p:sp>
         <p:nvSpPr>
-          <p:cNvPr id="26" name="TextBox 25"/>
+          <p:cNvPr id="27" name="TextBox 26"/>
           <p:cNvSpPr txBox="1"/>
           <p:nvPr/>
         </p:nvSpPr>
@@ -6314,7 +6362,7 @@
       </p:sp>
       <p:sp>
         <p:nvSpPr>
-          <p:cNvPr id="27" name="TextBox 26"/>
+          <p:cNvPr id="28" name="TextBox 27"/>
           <p:cNvSpPr txBox="1"/>
           <p:nvPr/>
         </p:nvSpPr>
@@ -6356,7 +6404,7 @@
       </p:sp>
       <p:sp>
         <p:nvSpPr>
-          <p:cNvPr id="28" name="Rectangle 27"/>
+          <p:cNvPr id="29" name="Rectangle 28"/>
           <p:cNvSpPr/>
           <p:nvPr/>
         </p:nvSpPr>
@@ -6373,7 +6421,7 @@
           </a:solidFill>
           <a:ln w="3810">
             <a:solidFill>
-              <a:srgbClr val="D0D8DD"/>
+              <a:srgbClr val="D0D8D9"/>
             </a:solidFill>
           </a:ln>
         </p:spPr>
@@ -6401,7 +6449,7 @@
       </p:sp>
       <p:sp>
         <p:nvSpPr>
-          <p:cNvPr id="29" name="TextBox 28"/>
+          <p:cNvPr id="30" name="TextBox 29"/>
           <p:cNvSpPr txBox="1"/>
           <p:nvPr/>
         </p:nvSpPr>
@@ -6443,7 +6491,7 @@
       </p:sp>
       <p:sp>
         <p:nvSpPr>
-          <p:cNvPr id="30" name="TextBox 29"/>
+          <p:cNvPr id="31" name="TextBox 30"/>
           <p:cNvSpPr txBox="1"/>
           <p:nvPr/>
         </p:nvSpPr>
@@ -6485,7 +6533,7 @@
       </p:sp>
       <p:sp>
         <p:nvSpPr>
-          <p:cNvPr id="31" name="Rectangle 30"/>
+          <p:cNvPr id="32" name="Rectangle 31"/>
           <p:cNvSpPr/>
           <p:nvPr/>
         </p:nvSpPr>
@@ -6502,7 +6550,7 @@
           </a:solidFill>
           <a:ln w="3810">
             <a:solidFill>
-              <a:srgbClr val="D0D8DD"/>
+              <a:srgbClr val="D0D8D9"/>
             </a:solidFill>
           </a:ln>
         </p:spPr>
@@ -6530,7 +6578,7 @@
       </p:sp>
       <p:sp>
         <p:nvSpPr>
-          <p:cNvPr id="32" name="TextBox 31"/>
+          <p:cNvPr id="33" name="TextBox 32"/>
           <p:cNvSpPr txBox="1"/>
           <p:nvPr/>
         </p:nvSpPr>
@@ -6572,7 +6620,7 @@
       </p:sp>
       <p:sp>
         <p:nvSpPr>
-          <p:cNvPr id="33" name="TextBox 32"/>
+          <p:cNvPr id="34" name="TextBox 33"/>
           <p:cNvSpPr txBox="1"/>
           <p:nvPr/>
         </p:nvSpPr>
@@ -6614,7 +6662,7 @@
       </p:sp>
       <p:sp>
         <p:nvSpPr>
-          <p:cNvPr id="34" name="Rectangle 33"/>
+          <p:cNvPr id="35" name="Rectangle 34"/>
           <p:cNvSpPr/>
           <p:nvPr/>
         </p:nvSpPr>
@@ -6631,7 +6679,7 @@
           </a:solidFill>
           <a:ln w="5080">
             <a:solidFill>
-              <a:srgbClr val="D0D8DD"/>
+              <a:srgbClr val="D0D8D9"/>
             </a:solidFill>
           </a:ln>
         </p:spPr>
@@ -6659,7 +6707,7 @@
       </p:sp>
       <p:sp>
         <p:nvSpPr>
-          <p:cNvPr id="35" name="Rectangle 34"/>
+          <p:cNvPr id="36" name="Rectangle 35"/>
           <p:cNvSpPr/>
           <p:nvPr/>
         </p:nvSpPr>
@@ -6702,7 +6750,7 @@
       </p:sp>
       <p:sp>
         <p:nvSpPr>
-          <p:cNvPr id="36" name="TextBox 35"/>
+          <p:cNvPr id="37" name="TextBox 36"/>
           <p:cNvSpPr txBox="1"/>
           <p:nvPr/>
         </p:nvSpPr>
@@ -6744,7 +6792,7 @@
       </p:sp>
       <p:sp>
         <p:nvSpPr>
-          <p:cNvPr id="37" name="Rectangle 36"/>
+          <p:cNvPr id="38" name="Rectangle 37"/>
           <p:cNvSpPr/>
           <p:nvPr/>
         </p:nvSpPr>
@@ -6761,7 +6809,7 @@
           </a:solidFill>
           <a:ln w="3810">
             <a:solidFill>
-              <a:srgbClr val="D0D8DD"/>
+              <a:srgbClr val="D0D8D9"/>
             </a:solidFill>
           </a:ln>
         </p:spPr>
@@ -6789,7 +6837,7 @@
       </p:sp>
       <p:sp>
         <p:nvSpPr>
-          <p:cNvPr id="38" name="TextBox 37"/>
+          <p:cNvPr id="39" name="TextBox 38"/>
           <p:cNvSpPr txBox="1"/>
           <p:nvPr/>
         </p:nvSpPr>
@@ -6831,7 +6879,7 @@
       </p:sp>
       <p:sp>
         <p:nvSpPr>
-          <p:cNvPr id="39" name="TextBox 38"/>
+          <p:cNvPr id="40" name="TextBox 39"/>
           <p:cNvSpPr txBox="1"/>
           <p:nvPr/>
         </p:nvSpPr>
@@ -6873,7 +6921,7 @@
       </p:sp>
       <p:sp>
         <p:nvSpPr>
-          <p:cNvPr id="40" name="Rectangle 39"/>
+          <p:cNvPr id="41" name="Rectangle 40"/>
           <p:cNvSpPr/>
           <p:nvPr/>
         </p:nvSpPr>
@@ -6890,7 +6938,7 @@
           </a:solidFill>
           <a:ln w="3810">
             <a:solidFill>
-              <a:srgbClr val="D0D8DD"/>
+              <a:srgbClr val="D0D8D9"/>
             </a:solidFill>
           </a:ln>
         </p:spPr>
@@ -6918,7 +6966,7 @@
       </p:sp>
       <p:sp>
         <p:nvSpPr>
-          <p:cNvPr id="41" name="TextBox 40"/>
+          <p:cNvPr id="42" name="TextBox 41"/>
           <p:cNvSpPr txBox="1"/>
           <p:nvPr/>
         </p:nvSpPr>
@@ -6960,7 +7008,7 @@
       </p:sp>
       <p:sp>
         <p:nvSpPr>
-          <p:cNvPr id="42" name="TextBox 41"/>
+          <p:cNvPr id="43" name="TextBox 42"/>
           <p:cNvSpPr txBox="1"/>
           <p:nvPr/>
         </p:nvSpPr>
@@ -7002,7 +7050,7 @@
       </p:sp>
       <p:sp>
         <p:nvSpPr>
-          <p:cNvPr id="43" name="Rectangle 42"/>
+          <p:cNvPr id="44" name="Rectangle 43"/>
           <p:cNvSpPr/>
           <p:nvPr/>
         </p:nvSpPr>
@@ -7019,7 +7067,7 @@
           </a:solidFill>
           <a:ln w="3810">
             <a:solidFill>
-              <a:srgbClr val="D0D8DD"/>
+              <a:srgbClr val="D0D8D9"/>
             </a:solidFill>
           </a:ln>
         </p:spPr>
@@ -7047,7 +7095,7 @@
       </p:sp>
       <p:sp>
         <p:nvSpPr>
-          <p:cNvPr id="44" name="TextBox 43"/>
+          <p:cNvPr id="45" name="TextBox 44"/>
           <p:cNvSpPr txBox="1"/>
           <p:nvPr/>
         </p:nvSpPr>
@@ -7089,7 +7137,7 @@
       </p:sp>
       <p:sp>
         <p:nvSpPr>
-          <p:cNvPr id="45" name="TextBox 44"/>
+          <p:cNvPr id="46" name="TextBox 45"/>
           <p:cNvSpPr txBox="1"/>
           <p:nvPr/>
         </p:nvSpPr>
@@ -7131,7 +7179,7 @@
       </p:sp>
       <p:sp>
         <p:nvSpPr>
-          <p:cNvPr id="46" name="Rectangle 45"/>
+          <p:cNvPr id="47" name="Rectangle 46"/>
           <p:cNvSpPr/>
           <p:nvPr/>
         </p:nvSpPr>
@@ -7148,7 +7196,7 @@
           </a:solidFill>
           <a:ln w="3810">
             <a:solidFill>
-              <a:srgbClr val="D0D8DD"/>
+              <a:srgbClr val="D0D8D9"/>
             </a:solidFill>
           </a:ln>
         </p:spPr>
@@ -7176,7 +7224,7 @@
       </p:sp>
       <p:sp>
         <p:nvSpPr>
-          <p:cNvPr id="47" name="TextBox 46"/>
+          <p:cNvPr id="48" name="TextBox 47"/>
           <p:cNvSpPr txBox="1"/>
           <p:nvPr/>
         </p:nvSpPr>
@@ -7218,7 +7266,7 @@
       </p:sp>
       <p:sp>
         <p:nvSpPr>
-          <p:cNvPr id="48" name="TextBox 47"/>
+          <p:cNvPr id="49" name="TextBox 48"/>
           <p:cNvSpPr txBox="1"/>
           <p:nvPr/>
         </p:nvSpPr>
@@ -7260,7 +7308,7 @@
       </p:sp>
       <p:sp>
         <p:nvSpPr>
-          <p:cNvPr id="49" name="Rectangle 48"/>
+          <p:cNvPr id="50" name="Rectangle 49"/>
           <p:cNvSpPr/>
           <p:nvPr/>
         </p:nvSpPr>
@@ -7277,7 +7325,7 @@
           </a:solidFill>
           <a:ln w="5080">
             <a:solidFill>
-              <a:srgbClr val="D0D8DD"/>
+              <a:srgbClr val="D0D8D9"/>
             </a:solidFill>
           </a:ln>
         </p:spPr>
@@ -7305,7 +7353,7 @@
       </p:sp>
       <p:sp>
         <p:nvSpPr>
-          <p:cNvPr id="50" name="Rectangle 49"/>
+          <p:cNvPr id="51" name="Rectangle 50"/>
           <p:cNvSpPr/>
           <p:nvPr/>
         </p:nvSpPr>
@@ -7348,7 +7396,7 @@
       </p:sp>
       <p:sp>
         <p:nvSpPr>
-          <p:cNvPr id="51" name="TextBox 50"/>
+          <p:cNvPr id="52" name="TextBox 51"/>
           <p:cNvSpPr txBox="1"/>
           <p:nvPr/>
         </p:nvSpPr>
@@ -7390,7 +7438,7 @@
       </p:sp>
       <p:sp>
         <p:nvSpPr>
-          <p:cNvPr id="52" name="Rectangle 51"/>
+          <p:cNvPr id="53" name="Rectangle 52"/>
           <p:cNvSpPr/>
           <p:nvPr/>
         </p:nvSpPr>
@@ -7407,7 +7455,7 @@
           </a:solidFill>
           <a:ln w="3810">
             <a:solidFill>
-              <a:srgbClr val="D0D8DD"/>
+              <a:srgbClr val="D0D8D9"/>
             </a:solidFill>
           </a:ln>
         </p:spPr>
@@ -7435,7 +7483,7 @@
       </p:sp>
       <p:sp>
         <p:nvSpPr>
-          <p:cNvPr id="53" name="TextBox 52"/>
+          <p:cNvPr id="54" name="TextBox 53"/>
           <p:cNvSpPr txBox="1"/>
           <p:nvPr/>
         </p:nvSpPr>
@@ -7477,7 +7525,7 @@
       </p:sp>
       <p:sp>
         <p:nvSpPr>
-          <p:cNvPr id="54" name="TextBox 53"/>
+          <p:cNvPr id="55" name="TextBox 54"/>
           <p:cNvSpPr txBox="1"/>
           <p:nvPr/>
         </p:nvSpPr>
@@ -7519,7 +7567,7 @@
       </p:sp>
       <p:sp>
         <p:nvSpPr>
-          <p:cNvPr id="55" name="Rectangle 54"/>
+          <p:cNvPr id="56" name="Rectangle 55"/>
           <p:cNvSpPr/>
           <p:nvPr/>
         </p:nvSpPr>
@@ -7536,7 +7584,7 @@
           </a:solidFill>
           <a:ln w="3810">
             <a:solidFill>
-              <a:srgbClr val="D0D8DD"/>
+              <a:srgbClr val="D0D8D9"/>
             </a:solidFill>
           </a:ln>
         </p:spPr>
@@ -7564,7 +7612,7 @@
       </p:sp>
       <p:sp>
         <p:nvSpPr>
-          <p:cNvPr id="56" name="TextBox 55"/>
+          <p:cNvPr id="57" name="TextBox 56"/>
           <p:cNvSpPr txBox="1"/>
           <p:nvPr/>
         </p:nvSpPr>
@@ -7606,7 +7654,7 @@
       </p:sp>
       <p:sp>
         <p:nvSpPr>
-          <p:cNvPr id="57" name="TextBox 56"/>
+          <p:cNvPr id="58" name="TextBox 57"/>
           <p:cNvSpPr txBox="1"/>
           <p:nvPr/>
         </p:nvSpPr>
@@ -7648,7 +7696,7 @@
       </p:sp>
       <p:sp>
         <p:nvSpPr>
-          <p:cNvPr id="58" name="Rectangle 57"/>
+          <p:cNvPr id="59" name="Rectangle 58"/>
           <p:cNvSpPr/>
           <p:nvPr/>
         </p:nvSpPr>
@@ -7665,7 +7713,7 @@
           </a:solidFill>
           <a:ln w="3810">
             <a:solidFill>
-              <a:srgbClr val="D0D8DD"/>
+              <a:srgbClr val="D0D8D9"/>
             </a:solidFill>
           </a:ln>
         </p:spPr>
@@ -7693,7 +7741,7 @@
       </p:sp>
       <p:sp>
         <p:nvSpPr>
-          <p:cNvPr id="59" name="TextBox 58"/>
+          <p:cNvPr id="60" name="TextBox 59"/>
           <p:cNvSpPr txBox="1"/>
           <p:nvPr/>
         </p:nvSpPr>
@@ -7735,7 +7783,7 @@
       </p:sp>
       <p:sp>
         <p:nvSpPr>
-          <p:cNvPr id="60" name="TextBox 59"/>
+          <p:cNvPr id="61" name="TextBox 60"/>
           <p:cNvSpPr txBox="1"/>
           <p:nvPr/>
         </p:nvSpPr>
@@ -7777,7 +7825,7 @@
       </p:sp>
       <p:sp>
         <p:nvSpPr>
-          <p:cNvPr id="61" name="Rectangle 60"/>
+          <p:cNvPr id="62" name="Rectangle 61"/>
           <p:cNvSpPr/>
           <p:nvPr/>
         </p:nvSpPr>
@@ -7794,7 +7842,7 @@
           </a:solidFill>
           <a:ln w="3810">
             <a:solidFill>
-              <a:srgbClr val="D0D8DD"/>
+              <a:srgbClr val="D0D8D9"/>
             </a:solidFill>
           </a:ln>
         </p:spPr>
@@ -7822,7 +7870,7 @@
       </p:sp>
       <p:sp>
         <p:nvSpPr>
-          <p:cNvPr id="62" name="TextBox 61"/>
+          <p:cNvPr id="63" name="TextBox 62"/>
           <p:cNvSpPr txBox="1"/>
           <p:nvPr/>
         </p:nvSpPr>
@@ -7864,7 +7912,7 @@
       </p:sp>
       <p:sp>
         <p:nvSpPr>
-          <p:cNvPr id="63" name="TextBox 62"/>
+          <p:cNvPr id="64" name="TextBox 63"/>
           <p:cNvSpPr txBox="1"/>
           <p:nvPr/>
         </p:nvSpPr>
@@ -7906,7 +7954,7 @@
       </p:sp>
       <p:sp>
         <p:nvSpPr>
-          <p:cNvPr id="64" name="Rectangle 63"/>
+          <p:cNvPr id="65" name="Rectangle 64"/>
           <p:cNvSpPr/>
           <p:nvPr/>
         </p:nvSpPr>
@@ -7951,7 +7999,7 @@
       </p:sp>
       <p:sp>
         <p:nvSpPr>
-          <p:cNvPr id="65" name="TextBox 64"/>
+          <p:cNvPr id="66" name="TextBox 65"/>
           <p:cNvSpPr txBox="1"/>
           <p:nvPr/>
         </p:nvSpPr>
@@ -7993,7 +8041,7 @@
       </p:sp>
       <p:sp>
         <p:nvSpPr>
-          <p:cNvPr id="66" name="Rectangle 65"/>
+          <p:cNvPr id="67" name="Rectangle 66"/>
           <p:cNvSpPr/>
           <p:nvPr/>
         </p:nvSpPr>
@@ -8006,7 +8054,7 @@
             <a:avLst/>
           </a:prstGeom>
           <a:solidFill>
-            <a:srgbClr val="D0D8DD"/>
+            <a:srgbClr val="D0D8D9"/>
           </a:solidFill>
           <a:ln>
             <a:noFill/>
@@ -8036,7 +8084,7 @@
       </p:sp>
       <p:sp>
         <p:nvSpPr>
-          <p:cNvPr id="67" name="TextBox 66"/>
+          <p:cNvPr id="68" name="TextBox 67"/>
           <p:cNvSpPr txBox="1"/>
           <p:nvPr/>
         </p:nvSpPr>
@@ -8196,7 +8244,7 @@
         <p:spPr>
           <a:xfrm>
             <a:off x="457200" y="402336"/>
-            <a:ext cx="10972800" cy="164592"/>
+            <a:ext cx="10058400" cy="164592"/>
           </a:xfrm>
           <a:prstGeom prst="rect">
             <a:avLst/>
@@ -8229,9 +8277,33 @@
           </a:p>
         </p:txBody>
       </p:sp>
-      <p:sp>
-        <p:nvSpPr>
-          <p:cNvPr id="5" name="Rectangle 4"/>
+      <p:pic>
+        <p:nvPicPr>
+          <p:cNvPr id="5" name="Picture 4" descr="sih_logo.png"/>
+          <p:cNvPicPr>
+            <a:picLocks noChangeAspect="1"/>
+          </p:cNvPicPr>
+          <p:nvPr/>
+        </p:nvPicPr>
+        <p:blipFill>
+          <a:blip r:embed="rId2"/>
+          <a:stretch>
+            <a:fillRect/>
+          </a:stretch>
+        </p:blipFill>
+        <p:spPr>
+          <a:xfrm>
+            <a:off x="10698480" y="36576"/>
+            <a:ext cx="1216152" cy="566928"/>
+          </a:xfrm>
+          <a:prstGeom prst="rect">
+            <a:avLst/>
+          </a:prstGeom>
+        </p:spPr>
+      </p:pic>
+      <p:sp>
+        <p:nvSpPr>
+          <p:cNvPr id="6" name="Rectangle 5"/>
           <p:cNvSpPr/>
           <p:nvPr/>
         </p:nvSpPr>
@@ -8244,7 +8316,7 @@
             <a:avLst/>
           </a:prstGeom>
           <a:solidFill>
-            <a:srgbClr val="D0D8DD"/>
+            <a:srgbClr val="D0D8D9"/>
           </a:solidFill>
           <a:ln>
             <a:noFill/>
@@ -8274,7 +8346,7 @@
       </p:sp>
       <p:sp>
         <p:nvSpPr>
-          <p:cNvPr id="6" name="Rectangle 5"/>
+          <p:cNvPr id="7" name="Rectangle 6"/>
           <p:cNvSpPr/>
           <p:nvPr/>
         </p:nvSpPr>
@@ -8317,7 +8389,7 @@
       </p:sp>
       <p:sp>
         <p:nvSpPr>
-          <p:cNvPr id="7" name="TextBox 6"/>
+          <p:cNvPr id="8" name="TextBox 7"/>
           <p:cNvSpPr txBox="1"/>
           <p:nvPr/>
         </p:nvSpPr>
@@ -8359,7 +8431,7 @@
       </p:sp>
       <p:sp>
         <p:nvSpPr>
-          <p:cNvPr id="8" name="Rectangle 7"/>
+          <p:cNvPr id="9" name="Rectangle 8"/>
           <p:cNvSpPr/>
           <p:nvPr/>
         </p:nvSpPr>
@@ -8376,7 +8448,7 @@
           </a:solidFill>
           <a:ln w="5080">
             <a:solidFill>
-              <a:srgbClr val="D0D8DD"/>
+              <a:srgbClr val="D0D8D9"/>
             </a:solidFill>
           </a:ln>
         </p:spPr>
@@ -8404,7 +8476,7 @@
       </p:sp>
       <p:sp>
         <p:nvSpPr>
-          <p:cNvPr id="9" name="TextBox 8"/>
+          <p:cNvPr id="10" name="TextBox 9"/>
           <p:cNvSpPr txBox="1"/>
           <p:nvPr/>
         </p:nvSpPr>
@@ -8446,7 +8518,7 @@
       </p:sp>
       <p:sp>
         <p:nvSpPr>
-          <p:cNvPr id="10" name="TextBox 9"/>
+          <p:cNvPr id="11" name="TextBox 10"/>
           <p:cNvSpPr txBox="1"/>
           <p:nvPr/>
         </p:nvSpPr>
@@ -8488,7 +8560,7 @@
       </p:sp>
       <p:sp>
         <p:nvSpPr>
-          <p:cNvPr id="11" name="Rectangle 10"/>
+          <p:cNvPr id="12" name="Rectangle 11"/>
           <p:cNvSpPr/>
           <p:nvPr/>
         </p:nvSpPr>
@@ -8505,7 +8577,7 @@
           </a:solidFill>
           <a:ln w="5080">
             <a:solidFill>
-              <a:srgbClr val="D0D8DD"/>
+              <a:srgbClr val="D0D8D9"/>
             </a:solidFill>
           </a:ln>
         </p:spPr>
@@ -8533,7 +8605,7 @@
       </p:sp>
       <p:sp>
         <p:nvSpPr>
-          <p:cNvPr id="12" name="TextBox 11"/>
+          <p:cNvPr id="13" name="TextBox 12"/>
           <p:cNvSpPr txBox="1"/>
           <p:nvPr/>
         </p:nvSpPr>
@@ -8575,7 +8647,7 @@
       </p:sp>
       <p:sp>
         <p:nvSpPr>
-          <p:cNvPr id="13" name="TextBox 12"/>
+          <p:cNvPr id="14" name="TextBox 13"/>
           <p:cNvSpPr txBox="1"/>
           <p:nvPr/>
         </p:nvSpPr>
@@ -8617,7 +8689,7 @@
       </p:sp>
       <p:sp>
         <p:nvSpPr>
-          <p:cNvPr id="14" name="Rectangle 13"/>
+          <p:cNvPr id="15" name="Rectangle 14"/>
           <p:cNvSpPr/>
           <p:nvPr/>
         </p:nvSpPr>
@@ -8634,7 +8706,7 @@
           </a:solidFill>
           <a:ln w="5080">
             <a:solidFill>
-              <a:srgbClr val="D0D8DD"/>
+              <a:srgbClr val="D0D8D9"/>
             </a:solidFill>
           </a:ln>
         </p:spPr>
@@ -8662,7 +8734,7 @@
       </p:sp>
       <p:sp>
         <p:nvSpPr>
-          <p:cNvPr id="15" name="TextBox 14"/>
+          <p:cNvPr id="16" name="TextBox 15"/>
           <p:cNvSpPr txBox="1"/>
           <p:nvPr/>
         </p:nvSpPr>
@@ -8704,7 +8776,7 @@
       </p:sp>
       <p:sp>
         <p:nvSpPr>
-          <p:cNvPr id="16" name="TextBox 15"/>
+          <p:cNvPr id="17" name="TextBox 16"/>
           <p:cNvSpPr txBox="1"/>
           <p:nvPr/>
         </p:nvSpPr>
@@ -8746,7 +8818,7 @@
       </p:sp>
       <p:sp>
         <p:nvSpPr>
-          <p:cNvPr id="17" name="Rectangle 16"/>
+          <p:cNvPr id="18" name="Rectangle 17"/>
           <p:cNvSpPr/>
           <p:nvPr/>
         </p:nvSpPr>
@@ -8763,7 +8835,7 @@
           </a:solidFill>
           <a:ln w="5080">
             <a:solidFill>
-              <a:srgbClr val="D0D8DD"/>
+              <a:srgbClr val="D0D8D9"/>
             </a:solidFill>
           </a:ln>
         </p:spPr>
@@ -8791,7 +8863,7 @@
       </p:sp>
       <p:sp>
         <p:nvSpPr>
-          <p:cNvPr id="18" name="TextBox 17"/>
+          <p:cNvPr id="19" name="TextBox 18"/>
           <p:cNvSpPr txBox="1"/>
           <p:nvPr/>
         </p:nvSpPr>
@@ -8833,7 +8905,7 @@
       </p:sp>
       <p:sp>
         <p:nvSpPr>
-          <p:cNvPr id="19" name="TextBox 18"/>
+          <p:cNvPr id="20" name="TextBox 19"/>
           <p:cNvSpPr txBox="1"/>
           <p:nvPr/>
         </p:nvSpPr>
@@ -8875,7 +8947,7 @@
       </p:sp>
       <p:sp>
         <p:nvSpPr>
-          <p:cNvPr id="20" name="Rectangle 19"/>
+          <p:cNvPr id="21" name="Rectangle 20"/>
           <p:cNvSpPr/>
           <p:nvPr/>
         </p:nvSpPr>
@@ -8918,7 +8990,7 @@
       </p:sp>
       <p:sp>
         <p:nvSpPr>
-          <p:cNvPr id="21" name="TextBox 20"/>
+          <p:cNvPr id="22" name="TextBox 21"/>
           <p:cNvSpPr txBox="1"/>
           <p:nvPr/>
         </p:nvSpPr>
@@ -8960,7 +9032,7 @@
       </p:sp>
       <p:sp>
         <p:nvSpPr>
-          <p:cNvPr id="22" name="Rectangle 21"/>
+          <p:cNvPr id="23" name="Rectangle 22"/>
           <p:cNvSpPr/>
           <p:nvPr/>
         </p:nvSpPr>
@@ -8977,7 +9049,7 @@
           </a:solidFill>
           <a:ln w="6350">
             <a:solidFill>
-              <a:srgbClr val="D0D8DD"/>
+              <a:srgbClr val="D0D8D9"/>
             </a:solidFill>
           </a:ln>
         </p:spPr>
@@ -9005,7 +9077,7 @@
       </p:sp>
       <p:sp>
         <p:nvSpPr>
-          <p:cNvPr id="23" name="Rectangle 22"/>
+          <p:cNvPr id="24" name="Rectangle 23"/>
           <p:cNvSpPr/>
           <p:nvPr/>
         </p:nvSpPr>
@@ -9048,7 +9120,7 @@
       </p:sp>
       <p:sp>
         <p:nvSpPr>
-          <p:cNvPr id="24" name="TextBox 23"/>
+          <p:cNvPr id="25" name="TextBox 24"/>
           <p:cNvSpPr txBox="1"/>
           <p:nvPr/>
         </p:nvSpPr>
@@ -9090,7 +9162,7 @@
       </p:sp>
       <p:sp>
         <p:nvSpPr>
-          <p:cNvPr id="25" name="TextBox 24"/>
+          <p:cNvPr id="26" name="TextBox 25"/>
           <p:cNvSpPr txBox="1"/>
           <p:nvPr/>
         </p:nvSpPr>
@@ -9132,7 +9204,7 @@
       </p:sp>
       <p:sp>
         <p:nvSpPr>
-          <p:cNvPr id="26" name="Rectangle 25"/>
+          <p:cNvPr id="27" name="Rectangle 26"/>
           <p:cNvSpPr/>
           <p:nvPr/>
         </p:nvSpPr>
@@ -9177,7 +9249,7 @@
       </p:sp>
       <p:sp>
         <p:nvSpPr>
-          <p:cNvPr id="27" name="Rectangle 26"/>
+          <p:cNvPr id="28" name="Rectangle 27"/>
           <p:cNvSpPr/>
           <p:nvPr/>
         </p:nvSpPr>
@@ -9220,7 +9292,7 @@
       </p:sp>
       <p:sp>
         <p:nvSpPr>
-          <p:cNvPr id="28" name="TextBox 27"/>
+          <p:cNvPr id="29" name="TextBox 28"/>
           <p:cNvSpPr txBox="1"/>
           <p:nvPr/>
         </p:nvSpPr>
@@ -9262,7 +9334,7 @@
       </p:sp>
       <p:sp>
         <p:nvSpPr>
-          <p:cNvPr id="29" name="TextBox 28"/>
+          <p:cNvPr id="30" name="TextBox 29"/>
           <p:cNvSpPr txBox="1"/>
           <p:nvPr/>
         </p:nvSpPr>
@@ -9307,7 +9379,7 @@
       </p:sp>
       <p:sp>
         <p:nvSpPr>
-          <p:cNvPr id="30" name="Rectangle 29"/>
+          <p:cNvPr id="31" name="Rectangle 30"/>
           <p:cNvSpPr/>
           <p:nvPr/>
         </p:nvSpPr>
@@ -9324,7 +9396,7 @@
           </a:solidFill>
           <a:ln w="6350">
             <a:solidFill>
-              <a:srgbClr val="D0D8DD"/>
+              <a:srgbClr val="D0D8D9"/>
             </a:solidFill>
           </a:ln>
         </p:spPr>
@@ -9352,7 +9424,7 @@
       </p:sp>
       <p:sp>
         <p:nvSpPr>
-          <p:cNvPr id="31" name="Rectangle 30"/>
+          <p:cNvPr id="32" name="Rectangle 31"/>
           <p:cNvSpPr/>
           <p:nvPr/>
         </p:nvSpPr>
@@ -9395,7 +9467,7 @@
       </p:sp>
       <p:sp>
         <p:nvSpPr>
-          <p:cNvPr id="32" name="TextBox 31"/>
+          <p:cNvPr id="33" name="TextBox 32"/>
           <p:cNvSpPr txBox="1"/>
           <p:nvPr/>
         </p:nvSpPr>
@@ -9437,7 +9509,7 @@
       </p:sp>
       <p:sp>
         <p:nvSpPr>
-          <p:cNvPr id="33" name="TextBox 32"/>
+          <p:cNvPr id="34" name="TextBox 33"/>
           <p:cNvSpPr txBox="1"/>
           <p:nvPr/>
         </p:nvSpPr>
@@ -9479,7 +9551,7 @@
       </p:sp>
       <p:sp>
         <p:nvSpPr>
-          <p:cNvPr id="34" name="Rectangle 33"/>
+          <p:cNvPr id="35" name="Rectangle 34"/>
           <p:cNvSpPr/>
           <p:nvPr/>
         </p:nvSpPr>
@@ -9496,7 +9568,7 @@
           </a:solidFill>
           <a:ln w="6350">
             <a:solidFill>
-              <a:srgbClr val="D0D8DD"/>
+              <a:srgbClr val="D0D8D9"/>
             </a:solidFill>
           </a:ln>
         </p:spPr>
@@ -9524,7 +9596,7 @@
       </p:sp>
       <p:sp>
         <p:nvSpPr>
-          <p:cNvPr id="35" name="Rectangle 34"/>
+          <p:cNvPr id="36" name="Rectangle 35"/>
           <p:cNvSpPr/>
           <p:nvPr/>
         </p:nvSpPr>
@@ -9567,7 +9639,7 @@
       </p:sp>
       <p:sp>
         <p:nvSpPr>
-          <p:cNvPr id="36" name="TextBox 35"/>
+          <p:cNvPr id="37" name="TextBox 36"/>
           <p:cNvSpPr txBox="1"/>
           <p:nvPr/>
         </p:nvSpPr>
@@ -9609,7 +9681,7 @@
       </p:sp>
       <p:sp>
         <p:nvSpPr>
-          <p:cNvPr id="37" name="TextBox 36"/>
+          <p:cNvPr id="38" name="TextBox 37"/>
           <p:cNvSpPr txBox="1"/>
           <p:nvPr/>
         </p:nvSpPr>
@@ -9651,7 +9723,7 @@
       </p:sp>
       <p:sp>
         <p:nvSpPr>
-          <p:cNvPr id="38" name="Rectangle 37"/>
+          <p:cNvPr id="39" name="Rectangle 38"/>
           <p:cNvSpPr/>
           <p:nvPr/>
         </p:nvSpPr>
@@ -9668,7 +9740,7 @@
           </a:solidFill>
           <a:ln w="6350">
             <a:solidFill>
-              <a:srgbClr val="D0D8DD"/>
+              <a:srgbClr val="D0D8D9"/>
             </a:solidFill>
           </a:ln>
         </p:spPr>
@@ -9696,7 +9768,7 @@
       </p:sp>
       <p:sp>
         <p:nvSpPr>
-          <p:cNvPr id="39" name="Rectangle 38"/>
+          <p:cNvPr id="40" name="Rectangle 39"/>
           <p:cNvSpPr/>
           <p:nvPr/>
         </p:nvSpPr>
@@ -9739,7 +9811,7 @@
       </p:sp>
       <p:sp>
         <p:nvSpPr>
-          <p:cNvPr id="40" name="TextBox 39"/>
+          <p:cNvPr id="41" name="TextBox 40"/>
           <p:cNvSpPr txBox="1"/>
           <p:nvPr/>
         </p:nvSpPr>
@@ -9781,7 +9853,7 @@
       </p:sp>
       <p:sp>
         <p:nvSpPr>
-          <p:cNvPr id="41" name="TextBox 40"/>
+          <p:cNvPr id="42" name="TextBox 41"/>
           <p:cNvSpPr txBox="1"/>
           <p:nvPr/>
         </p:nvSpPr>
@@ -9823,7 +9895,7 @@
       </p:sp>
       <p:sp>
         <p:nvSpPr>
-          <p:cNvPr id="42" name="Rectangle 41"/>
+          <p:cNvPr id="43" name="Rectangle 42"/>
           <p:cNvSpPr/>
           <p:nvPr/>
         </p:nvSpPr>
@@ -9840,7 +9912,7 @@
           </a:solidFill>
           <a:ln w="6350">
             <a:solidFill>
-              <a:srgbClr val="D0D8DD"/>
+              <a:srgbClr val="D0D8D9"/>
             </a:solidFill>
           </a:ln>
         </p:spPr>
@@ -9868,7 +9940,7 @@
       </p:sp>
       <p:sp>
         <p:nvSpPr>
-          <p:cNvPr id="43" name="Rectangle 42"/>
+          <p:cNvPr id="44" name="Rectangle 43"/>
           <p:cNvSpPr/>
           <p:nvPr/>
         </p:nvSpPr>
@@ -9911,7 +9983,7 @@
       </p:sp>
       <p:sp>
         <p:nvSpPr>
-          <p:cNvPr id="44" name="TextBox 43"/>
+          <p:cNvPr id="45" name="TextBox 44"/>
           <p:cNvSpPr txBox="1"/>
           <p:nvPr/>
         </p:nvSpPr>
@@ -9953,7 +10025,7 @@
       </p:sp>
       <p:sp>
         <p:nvSpPr>
-          <p:cNvPr id="45" name="TextBox 44"/>
+          <p:cNvPr id="46" name="TextBox 45"/>
           <p:cNvSpPr txBox="1"/>
           <p:nvPr/>
         </p:nvSpPr>
@@ -9995,7 +10067,7 @@
       </p:sp>
       <p:sp>
         <p:nvSpPr>
-          <p:cNvPr id="46" name="Rectangle 45"/>
+          <p:cNvPr id="47" name="Rectangle 46"/>
           <p:cNvSpPr/>
           <p:nvPr/>
         </p:nvSpPr>
@@ -10012,7 +10084,7 @@
           </a:solidFill>
           <a:ln w="6350">
             <a:solidFill>
-              <a:srgbClr val="D0D8DD"/>
+              <a:srgbClr val="D0D8D9"/>
             </a:solidFill>
           </a:ln>
         </p:spPr>
@@ -10040,7 +10112,7 @@
       </p:sp>
       <p:sp>
         <p:nvSpPr>
-          <p:cNvPr id="47" name="Rectangle 46"/>
+          <p:cNvPr id="48" name="Rectangle 47"/>
           <p:cNvSpPr/>
           <p:nvPr/>
         </p:nvSpPr>
@@ -10083,7 +10155,7 @@
       </p:sp>
       <p:sp>
         <p:nvSpPr>
-          <p:cNvPr id="48" name="TextBox 47"/>
+          <p:cNvPr id="49" name="TextBox 48"/>
           <p:cNvSpPr txBox="1"/>
           <p:nvPr/>
         </p:nvSpPr>
@@ -10125,7 +10197,7 @@
       </p:sp>
       <p:sp>
         <p:nvSpPr>
-          <p:cNvPr id="49" name="TextBox 48"/>
+          <p:cNvPr id="50" name="TextBox 49"/>
           <p:cNvSpPr txBox="1"/>
           <p:nvPr/>
         </p:nvSpPr>
@@ -10167,7 +10239,7 @@
       </p:sp>
       <p:sp>
         <p:nvSpPr>
-          <p:cNvPr id="50" name="Rectangle 49"/>
+          <p:cNvPr id="51" name="Rectangle 50"/>
           <p:cNvSpPr/>
           <p:nvPr/>
         </p:nvSpPr>
@@ -10184,7 +10256,7 @@
           </a:solidFill>
           <a:ln w="6350">
             <a:solidFill>
-              <a:srgbClr val="D0D8DD"/>
+              <a:srgbClr val="D0D8D9"/>
             </a:solidFill>
           </a:ln>
         </p:spPr>
@@ -10212,7 +10284,7 @@
       </p:sp>
       <p:sp>
         <p:nvSpPr>
-          <p:cNvPr id="51" name="Rectangle 50"/>
+          <p:cNvPr id="52" name="Rectangle 51"/>
           <p:cNvSpPr/>
           <p:nvPr/>
         </p:nvSpPr>
@@ -10255,7 +10327,7 @@
       </p:sp>
       <p:sp>
         <p:nvSpPr>
-          <p:cNvPr id="52" name="TextBox 51"/>
+          <p:cNvPr id="53" name="TextBox 52"/>
           <p:cNvSpPr txBox="1"/>
           <p:nvPr/>
         </p:nvSpPr>
@@ -10297,7 +10369,7 @@
       </p:sp>
       <p:sp>
         <p:nvSpPr>
-          <p:cNvPr id="53" name="TextBox 52"/>
+          <p:cNvPr id="54" name="TextBox 53"/>
           <p:cNvSpPr txBox="1"/>
           <p:nvPr/>
         </p:nvSpPr>
@@ -10339,7 +10411,7 @@
       </p:sp>
       <p:sp>
         <p:nvSpPr>
-          <p:cNvPr id="54" name="Rectangle 53"/>
+          <p:cNvPr id="55" name="Rectangle 54"/>
           <p:cNvSpPr/>
           <p:nvPr/>
         </p:nvSpPr>
@@ -10382,7 +10454,7 @@
       </p:sp>
       <p:sp>
         <p:nvSpPr>
-          <p:cNvPr id="55" name="TextBox 54"/>
+          <p:cNvPr id="56" name="TextBox 55"/>
           <p:cNvSpPr txBox="1"/>
           <p:nvPr/>
         </p:nvSpPr>
@@ -10424,14 +10496,14 @@
       </p:sp>
       <p:pic>
         <p:nvPicPr>
-          <p:cNvPr id="56" name="Picture 55" descr="fig3_checkerboard.png"/>
+          <p:cNvPr id="57" name="Picture 56" descr="fig3_checkerboard.png"/>
           <p:cNvPicPr>
             <a:picLocks noChangeAspect="1"/>
           </p:cNvPicPr>
           <p:nvPr/>
         </p:nvPicPr>
         <p:blipFill>
-          <a:blip r:embed="rId2"/>
+          <a:blip r:embed="rId3"/>
           <a:stretch>
             <a:fillRect/>
           </a:stretch>
@@ -10448,7 +10520,7 @@
       </p:pic>
       <p:sp>
         <p:nvSpPr>
-          <p:cNvPr id="57" name="Rectangle 56"/>
+          <p:cNvPr id="58" name="Rectangle 57"/>
           <p:cNvSpPr/>
           <p:nvPr/>
         </p:nvSpPr>
@@ -10493,7 +10565,7 @@
       </p:sp>
       <p:sp>
         <p:nvSpPr>
-          <p:cNvPr id="58" name="TextBox 57"/>
+          <p:cNvPr id="59" name="TextBox 58"/>
           <p:cNvSpPr txBox="1"/>
           <p:nvPr/>
         </p:nvSpPr>
@@ -10535,7 +10607,7 @@
       </p:sp>
       <p:sp>
         <p:nvSpPr>
-          <p:cNvPr id="59" name="TextBox 58"/>
+          <p:cNvPr id="60" name="TextBox 59"/>
           <p:cNvSpPr txBox="1"/>
           <p:nvPr/>
         </p:nvSpPr>
@@ -10577,7 +10649,7 @@
       </p:sp>
       <p:sp>
         <p:nvSpPr>
-          <p:cNvPr id="60" name="Rectangle 59"/>
+          <p:cNvPr id="61" name="Rectangle 60"/>
           <p:cNvSpPr/>
           <p:nvPr/>
         </p:nvSpPr>
@@ -10620,7 +10692,7 @@
       </p:sp>
       <p:sp>
         <p:nvSpPr>
-          <p:cNvPr id="61" name="TextBox 60"/>
+          <p:cNvPr id="62" name="TextBox 61"/>
           <p:cNvSpPr txBox="1"/>
           <p:nvPr/>
         </p:nvSpPr>
@@ -10662,7 +10734,7 @@
       </p:sp>
       <p:sp>
         <p:nvSpPr>
-          <p:cNvPr id="62" name="Rectangle 61"/>
+          <p:cNvPr id="63" name="Rectangle 62"/>
           <p:cNvSpPr/>
           <p:nvPr/>
         </p:nvSpPr>
@@ -10679,7 +10751,7 @@
           </a:solidFill>
           <a:ln w="3810">
             <a:solidFill>
-              <a:srgbClr val="D0D8DD"/>
+              <a:srgbClr val="D0D8D9"/>
             </a:solidFill>
           </a:ln>
         </p:spPr>
@@ -10707,7 +10779,7 @@
       </p:sp>
       <p:sp>
         <p:nvSpPr>
-          <p:cNvPr id="63" name="TextBox 62"/>
+          <p:cNvPr id="64" name="TextBox 63"/>
           <p:cNvSpPr txBox="1"/>
           <p:nvPr/>
         </p:nvSpPr>
@@ -10749,7 +10821,7 @@
       </p:sp>
       <p:sp>
         <p:nvSpPr>
-          <p:cNvPr id="64" name="TextBox 63"/>
+          <p:cNvPr id="65" name="TextBox 64"/>
           <p:cNvSpPr txBox="1"/>
           <p:nvPr/>
         </p:nvSpPr>
@@ -10791,7 +10863,7 @@
       </p:sp>
       <p:sp>
         <p:nvSpPr>
-          <p:cNvPr id="65" name="Rectangle 64"/>
+          <p:cNvPr id="66" name="Rectangle 65"/>
           <p:cNvSpPr/>
           <p:nvPr/>
         </p:nvSpPr>
@@ -10808,7 +10880,7 @@
           </a:solidFill>
           <a:ln w="3810">
             <a:solidFill>
-              <a:srgbClr val="D0D8DD"/>
+              <a:srgbClr val="D0D8D9"/>
             </a:solidFill>
           </a:ln>
         </p:spPr>
@@ -10836,7 +10908,7 @@
       </p:sp>
       <p:sp>
         <p:nvSpPr>
-          <p:cNvPr id="66" name="TextBox 65"/>
+          <p:cNvPr id="67" name="TextBox 66"/>
           <p:cNvSpPr txBox="1"/>
           <p:nvPr/>
         </p:nvSpPr>
@@ -10878,7 +10950,7 @@
       </p:sp>
       <p:sp>
         <p:nvSpPr>
-          <p:cNvPr id="67" name="TextBox 66"/>
+          <p:cNvPr id="68" name="TextBox 67"/>
           <p:cNvSpPr txBox="1"/>
           <p:nvPr/>
         </p:nvSpPr>
@@ -10920,7 +10992,7 @@
       </p:sp>
       <p:sp>
         <p:nvSpPr>
-          <p:cNvPr id="68" name="Rectangle 67"/>
+          <p:cNvPr id="69" name="Rectangle 68"/>
           <p:cNvSpPr/>
           <p:nvPr/>
         </p:nvSpPr>
@@ -10937,7 +11009,7 @@
           </a:solidFill>
           <a:ln w="3810">
             <a:solidFill>
-              <a:srgbClr val="D0D8DD"/>
+              <a:srgbClr val="D0D8D9"/>
             </a:solidFill>
           </a:ln>
         </p:spPr>
@@ -10965,7 +11037,7 @@
       </p:sp>
       <p:sp>
         <p:nvSpPr>
-          <p:cNvPr id="69" name="TextBox 68"/>
+          <p:cNvPr id="70" name="TextBox 69"/>
           <p:cNvSpPr txBox="1"/>
           <p:nvPr/>
         </p:nvSpPr>
@@ -11007,7 +11079,7 @@
       </p:sp>
       <p:sp>
         <p:nvSpPr>
-          <p:cNvPr id="70" name="TextBox 69"/>
+          <p:cNvPr id="71" name="TextBox 70"/>
           <p:cNvSpPr txBox="1"/>
           <p:nvPr/>
         </p:nvSpPr>
@@ -11049,7 +11121,7 @@
       </p:sp>
       <p:sp>
         <p:nvSpPr>
-          <p:cNvPr id="71" name="Rectangle 70"/>
+          <p:cNvPr id="72" name="Rectangle 71"/>
           <p:cNvSpPr/>
           <p:nvPr/>
         </p:nvSpPr>
@@ -11066,7 +11138,7 @@
           </a:solidFill>
           <a:ln w="3810">
             <a:solidFill>
-              <a:srgbClr val="D0D8DD"/>
+              <a:srgbClr val="D0D8D9"/>
             </a:solidFill>
           </a:ln>
         </p:spPr>
@@ -11094,7 +11166,7 @@
       </p:sp>
       <p:sp>
         <p:nvSpPr>
-          <p:cNvPr id="72" name="TextBox 71"/>
+          <p:cNvPr id="73" name="TextBox 72"/>
           <p:cNvSpPr txBox="1"/>
           <p:nvPr/>
         </p:nvSpPr>
@@ -11136,7 +11208,7 @@
       </p:sp>
       <p:sp>
         <p:nvSpPr>
-          <p:cNvPr id="73" name="TextBox 72"/>
+          <p:cNvPr id="74" name="TextBox 73"/>
           <p:cNvSpPr txBox="1"/>
           <p:nvPr/>
         </p:nvSpPr>
@@ -11178,7 +11250,7 @@
       </p:sp>
       <p:sp>
         <p:nvSpPr>
-          <p:cNvPr id="74" name="Rectangle 73"/>
+          <p:cNvPr id="75" name="Rectangle 74"/>
           <p:cNvSpPr/>
           <p:nvPr/>
         </p:nvSpPr>
@@ -11221,7 +11293,7 @@
       </p:sp>
       <p:sp>
         <p:nvSpPr>
-          <p:cNvPr id="75" name="TextBox 74"/>
+          <p:cNvPr id="76" name="TextBox 75"/>
           <p:cNvSpPr txBox="1"/>
           <p:nvPr/>
         </p:nvSpPr>
@@ -11263,7 +11335,7 @@
       </p:sp>
       <p:sp>
         <p:nvSpPr>
-          <p:cNvPr id="76" name="Rectangle 75"/>
+          <p:cNvPr id="77" name="Rectangle 76"/>
           <p:cNvSpPr/>
           <p:nvPr/>
         </p:nvSpPr>
@@ -11308,7 +11380,7 @@
       </p:sp>
       <p:sp>
         <p:nvSpPr>
-          <p:cNvPr id="77" name="TextBox 76"/>
+          <p:cNvPr id="78" name="TextBox 77"/>
           <p:cNvSpPr txBox="1"/>
           <p:nvPr/>
         </p:nvSpPr>
@@ -11350,7 +11422,7 @@
       </p:sp>
       <p:sp>
         <p:nvSpPr>
-          <p:cNvPr id="78" name="TextBox 77"/>
+          <p:cNvPr id="79" name="TextBox 78"/>
           <p:cNvSpPr txBox="1"/>
           <p:nvPr/>
         </p:nvSpPr>
@@ -11395,7 +11467,7 @@
       </p:sp>
       <p:sp>
         <p:nvSpPr>
-          <p:cNvPr id="79" name="Rectangle 78"/>
+          <p:cNvPr id="80" name="Rectangle 79"/>
           <p:cNvSpPr/>
           <p:nvPr/>
         </p:nvSpPr>
@@ -11408,7 +11480,7 @@
             <a:avLst/>
           </a:prstGeom>
           <a:solidFill>
-            <a:srgbClr val="D0D8DD"/>
+            <a:srgbClr val="D0D8D9"/>
           </a:solidFill>
           <a:ln>
             <a:noFill/>
@@ -11438,7 +11510,7 @@
       </p:sp>
       <p:sp>
         <p:nvSpPr>
-          <p:cNvPr id="80" name="TextBox 79"/>
+          <p:cNvPr id="81" name="TextBox 80"/>
           <p:cNvSpPr txBox="1"/>
           <p:nvPr/>
         </p:nvSpPr>
@@ -11598,7 +11670,7 @@
         <p:spPr>
           <a:xfrm>
             <a:off x="457200" y="402336"/>
-            <a:ext cx="10972800" cy="164592"/>
+            <a:ext cx="10058400" cy="164592"/>
           </a:xfrm>
           <a:prstGeom prst="rect">
             <a:avLst/>
@@ -11631,9 +11703,33 @@
           </a:p>
         </p:txBody>
       </p:sp>
-      <p:sp>
-        <p:nvSpPr>
-          <p:cNvPr id="5" name="Rectangle 4"/>
+      <p:pic>
+        <p:nvPicPr>
+          <p:cNvPr id="5" name="Picture 4" descr="sih_logo.png"/>
+          <p:cNvPicPr>
+            <a:picLocks noChangeAspect="1"/>
+          </p:cNvPicPr>
+          <p:nvPr/>
+        </p:nvPicPr>
+        <p:blipFill>
+          <a:blip r:embed="rId2"/>
+          <a:stretch>
+            <a:fillRect/>
+          </a:stretch>
+        </p:blipFill>
+        <p:spPr>
+          <a:xfrm>
+            <a:off x="10698480" y="36576"/>
+            <a:ext cx="1216152" cy="566928"/>
+          </a:xfrm>
+          <a:prstGeom prst="rect">
+            <a:avLst/>
+          </a:prstGeom>
+        </p:spPr>
+      </p:pic>
+      <p:sp>
+        <p:nvSpPr>
+          <p:cNvPr id="6" name="Rectangle 5"/>
           <p:cNvSpPr/>
           <p:nvPr/>
         </p:nvSpPr>
@@ -11646,7 +11742,7 @@
             <a:avLst/>
           </a:prstGeom>
           <a:solidFill>
-            <a:srgbClr val="D0D8DD"/>
+            <a:srgbClr val="D0D8D9"/>
           </a:solidFill>
           <a:ln>
             <a:noFill/>
@@ -11676,7 +11772,7 @@
       </p:sp>
       <p:sp>
         <p:nvSpPr>
-          <p:cNvPr id="6" name="Rectangle 5"/>
+          <p:cNvPr id="7" name="Rectangle 6"/>
           <p:cNvSpPr/>
           <p:nvPr/>
         </p:nvSpPr>
@@ -11721,7 +11817,7 @@
       </p:sp>
       <p:sp>
         <p:nvSpPr>
-          <p:cNvPr id="7" name="TextBox 6"/>
+          <p:cNvPr id="8" name="TextBox 7"/>
           <p:cNvSpPr txBox="1"/>
           <p:nvPr/>
         </p:nvSpPr>
@@ -11763,7 +11859,7 @@
       </p:sp>
       <p:sp>
         <p:nvSpPr>
-          <p:cNvPr id="8" name="TextBox 7"/>
+          <p:cNvPr id="9" name="TextBox 8"/>
           <p:cNvSpPr txBox="1"/>
           <p:nvPr/>
         </p:nvSpPr>
@@ -11805,7 +11901,7 @@
       </p:sp>
       <p:sp>
         <p:nvSpPr>
-          <p:cNvPr id="9" name="Rectangle 8"/>
+          <p:cNvPr id="10" name="Rectangle 9"/>
           <p:cNvSpPr/>
           <p:nvPr/>
         </p:nvSpPr>
@@ -11822,7 +11918,7 @@
           </a:solidFill>
           <a:ln w="5080">
             <a:solidFill>
-              <a:srgbClr val="D0D8DD"/>
+              <a:srgbClr val="D0D8D9"/>
             </a:solidFill>
           </a:ln>
         </p:spPr>
@@ -11850,7 +11946,7 @@
       </p:sp>
       <p:sp>
         <p:nvSpPr>
-          <p:cNvPr id="10" name="Rectangle 9"/>
+          <p:cNvPr id="11" name="Rectangle 10"/>
           <p:cNvSpPr/>
           <p:nvPr/>
         </p:nvSpPr>
@@ -11893,7 +11989,7 @@
       </p:sp>
       <p:sp>
         <p:nvSpPr>
-          <p:cNvPr id="11" name="TextBox 10"/>
+          <p:cNvPr id="12" name="TextBox 11"/>
           <p:cNvSpPr txBox="1"/>
           <p:nvPr/>
         </p:nvSpPr>
@@ -11935,7 +12031,7 @@
       </p:sp>
       <p:sp>
         <p:nvSpPr>
-          <p:cNvPr id="12" name="Rectangle 11"/>
+          <p:cNvPr id="13" name="Rectangle 12"/>
           <p:cNvSpPr/>
           <p:nvPr/>
         </p:nvSpPr>
@@ -11952,7 +12048,7 @@
           </a:solidFill>
           <a:ln w="3810">
             <a:solidFill>
-              <a:srgbClr val="D0D8DD"/>
+              <a:srgbClr val="D0D8D9"/>
             </a:solidFill>
           </a:ln>
         </p:spPr>
@@ -11980,7 +12076,7 @@
       </p:sp>
       <p:sp>
         <p:nvSpPr>
-          <p:cNvPr id="13" name="TextBox 12"/>
+          <p:cNvPr id="14" name="TextBox 13"/>
           <p:cNvSpPr txBox="1"/>
           <p:nvPr/>
         </p:nvSpPr>
@@ -12022,7 +12118,7 @@
       </p:sp>
       <p:sp>
         <p:nvSpPr>
-          <p:cNvPr id="14" name="TextBox 13"/>
+          <p:cNvPr id="15" name="TextBox 14"/>
           <p:cNvSpPr txBox="1"/>
           <p:nvPr/>
         </p:nvSpPr>
@@ -12064,7 +12160,7 @@
       </p:sp>
       <p:sp>
         <p:nvSpPr>
-          <p:cNvPr id="15" name="Rectangle 14"/>
+          <p:cNvPr id="16" name="Rectangle 15"/>
           <p:cNvSpPr/>
           <p:nvPr/>
         </p:nvSpPr>
@@ -12081,7 +12177,7 @@
           </a:solidFill>
           <a:ln w="3810">
             <a:solidFill>
-              <a:srgbClr val="D0D8DD"/>
+              <a:srgbClr val="D0D8D9"/>
             </a:solidFill>
           </a:ln>
         </p:spPr>
@@ -12109,7 +12205,7 @@
       </p:sp>
       <p:sp>
         <p:nvSpPr>
-          <p:cNvPr id="16" name="TextBox 15"/>
+          <p:cNvPr id="17" name="TextBox 16"/>
           <p:cNvSpPr txBox="1"/>
           <p:nvPr/>
         </p:nvSpPr>
@@ -12151,7 +12247,7 @@
       </p:sp>
       <p:sp>
         <p:nvSpPr>
-          <p:cNvPr id="17" name="TextBox 16"/>
+          <p:cNvPr id="18" name="TextBox 17"/>
           <p:cNvSpPr txBox="1"/>
           <p:nvPr/>
         </p:nvSpPr>
@@ -12193,7 +12289,7 @@
       </p:sp>
       <p:sp>
         <p:nvSpPr>
-          <p:cNvPr id="18" name="Rectangle 17"/>
+          <p:cNvPr id="19" name="Rectangle 18"/>
           <p:cNvSpPr/>
           <p:nvPr/>
         </p:nvSpPr>
@@ -12210,7 +12306,7 @@
           </a:solidFill>
           <a:ln w="3810">
             <a:solidFill>
-              <a:srgbClr val="D0D8DD"/>
+              <a:srgbClr val="D0D8D9"/>
             </a:solidFill>
           </a:ln>
         </p:spPr>
@@ -12238,7 +12334,7 @@
       </p:sp>
       <p:sp>
         <p:nvSpPr>
-          <p:cNvPr id="19" name="TextBox 18"/>
+          <p:cNvPr id="20" name="TextBox 19"/>
           <p:cNvSpPr txBox="1"/>
           <p:nvPr/>
         </p:nvSpPr>
@@ -12280,7 +12376,7 @@
       </p:sp>
       <p:sp>
         <p:nvSpPr>
-          <p:cNvPr id="20" name="TextBox 19"/>
+          <p:cNvPr id="21" name="TextBox 20"/>
           <p:cNvSpPr txBox="1"/>
           <p:nvPr/>
         </p:nvSpPr>
@@ -12322,7 +12418,7 @@
       </p:sp>
       <p:sp>
         <p:nvSpPr>
-          <p:cNvPr id="21" name="Rectangle 20"/>
+          <p:cNvPr id="22" name="Rectangle 21"/>
           <p:cNvSpPr/>
           <p:nvPr/>
         </p:nvSpPr>
@@ -12339,7 +12435,7 @@
           </a:solidFill>
           <a:ln w="3810">
             <a:solidFill>
-              <a:srgbClr val="D0D8DD"/>
+              <a:srgbClr val="D0D8D9"/>
             </a:solidFill>
           </a:ln>
         </p:spPr>
@@ -12367,7 +12463,7 @@
       </p:sp>
       <p:sp>
         <p:nvSpPr>
-          <p:cNvPr id="22" name="TextBox 21"/>
+          <p:cNvPr id="23" name="TextBox 22"/>
           <p:cNvSpPr txBox="1"/>
           <p:nvPr/>
         </p:nvSpPr>
@@ -12409,7 +12505,7 @@
       </p:sp>
       <p:sp>
         <p:nvSpPr>
-          <p:cNvPr id="23" name="TextBox 22"/>
+          <p:cNvPr id="24" name="TextBox 23"/>
           <p:cNvSpPr txBox="1"/>
           <p:nvPr/>
         </p:nvSpPr>
@@ -12451,7 +12547,7 @@
       </p:sp>
       <p:sp>
         <p:nvSpPr>
-          <p:cNvPr id="24" name="Rectangle 23"/>
+          <p:cNvPr id="25" name="Rectangle 24"/>
           <p:cNvSpPr/>
           <p:nvPr/>
         </p:nvSpPr>
@@ -12468,7 +12564,7 @@
           </a:solidFill>
           <a:ln w="5080">
             <a:solidFill>
-              <a:srgbClr val="D0D8DD"/>
+              <a:srgbClr val="D0D8D9"/>
             </a:solidFill>
           </a:ln>
         </p:spPr>
@@ -12496,7 +12592,7 @@
       </p:sp>
       <p:sp>
         <p:nvSpPr>
-          <p:cNvPr id="25" name="Rectangle 24"/>
+          <p:cNvPr id="26" name="Rectangle 25"/>
           <p:cNvSpPr/>
           <p:nvPr/>
         </p:nvSpPr>
@@ -12539,7 +12635,7 @@
       </p:sp>
       <p:sp>
         <p:nvSpPr>
-          <p:cNvPr id="26" name="TextBox 25"/>
+          <p:cNvPr id="27" name="TextBox 26"/>
           <p:cNvSpPr txBox="1"/>
           <p:nvPr/>
         </p:nvSpPr>
@@ -12581,7 +12677,7 @@
       </p:sp>
       <p:sp>
         <p:nvSpPr>
-          <p:cNvPr id="27" name="Rectangle 26"/>
+          <p:cNvPr id="28" name="Rectangle 27"/>
           <p:cNvSpPr/>
           <p:nvPr/>
         </p:nvSpPr>
@@ -12598,7 +12694,7 @@
           </a:solidFill>
           <a:ln w="3810">
             <a:solidFill>
-              <a:srgbClr val="D0D8DD"/>
+              <a:srgbClr val="D0D8D9"/>
             </a:solidFill>
           </a:ln>
         </p:spPr>
@@ -12626,7 +12722,7 @@
       </p:sp>
       <p:sp>
         <p:nvSpPr>
-          <p:cNvPr id="28" name="TextBox 27"/>
+          <p:cNvPr id="29" name="TextBox 28"/>
           <p:cNvSpPr txBox="1"/>
           <p:nvPr/>
         </p:nvSpPr>
@@ -12668,7 +12764,7 @@
       </p:sp>
       <p:sp>
         <p:nvSpPr>
-          <p:cNvPr id="29" name="TextBox 28"/>
+          <p:cNvPr id="30" name="TextBox 29"/>
           <p:cNvSpPr txBox="1"/>
           <p:nvPr/>
         </p:nvSpPr>
@@ -12710,7 +12806,7 @@
       </p:sp>
       <p:sp>
         <p:nvSpPr>
-          <p:cNvPr id="30" name="Rectangle 29"/>
+          <p:cNvPr id="31" name="Rectangle 30"/>
           <p:cNvSpPr/>
           <p:nvPr/>
         </p:nvSpPr>
@@ -12727,7 +12823,7 @@
           </a:solidFill>
           <a:ln w="3810">
             <a:solidFill>
-              <a:srgbClr val="D0D8DD"/>
+              <a:srgbClr val="D0D8D9"/>
             </a:solidFill>
           </a:ln>
         </p:spPr>
@@ -12755,7 +12851,7 @@
       </p:sp>
       <p:sp>
         <p:nvSpPr>
-          <p:cNvPr id="31" name="TextBox 30"/>
+          <p:cNvPr id="32" name="TextBox 31"/>
           <p:cNvSpPr txBox="1"/>
           <p:nvPr/>
         </p:nvSpPr>
@@ -12797,7 +12893,7 @@
       </p:sp>
       <p:sp>
         <p:nvSpPr>
-          <p:cNvPr id="32" name="TextBox 31"/>
+          <p:cNvPr id="33" name="TextBox 32"/>
           <p:cNvSpPr txBox="1"/>
           <p:nvPr/>
         </p:nvSpPr>
@@ -12839,7 +12935,7 @@
       </p:sp>
       <p:sp>
         <p:nvSpPr>
-          <p:cNvPr id="33" name="Rectangle 32"/>
+          <p:cNvPr id="34" name="Rectangle 33"/>
           <p:cNvSpPr/>
           <p:nvPr/>
         </p:nvSpPr>
@@ -12856,7 +12952,7 @@
           </a:solidFill>
           <a:ln w="3810">
             <a:solidFill>
-              <a:srgbClr val="D0D8DD"/>
+              <a:srgbClr val="D0D8D9"/>
             </a:solidFill>
           </a:ln>
         </p:spPr>
@@ -12884,7 +12980,7 @@
       </p:sp>
       <p:sp>
         <p:nvSpPr>
-          <p:cNvPr id="34" name="TextBox 33"/>
+          <p:cNvPr id="35" name="TextBox 34"/>
           <p:cNvSpPr txBox="1"/>
           <p:nvPr/>
         </p:nvSpPr>
@@ -12926,7 +13022,7 @@
       </p:sp>
       <p:sp>
         <p:nvSpPr>
-          <p:cNvPr id="35" name="TextBox 34"/>
+          <p:cNvPr id="36" name="TextBox 35"/>
           <p:cNvSpPr txBox="1"/>
           <p:nvPr/>
         </p:nvSpPr>
@@ -12968,7 +13064,7 @@
       </p:sp>
       <p:sp>
         <p:nvSpPr>
-          <p:cNvPr id="36" name="Rectangle 35"/>
+          <p:cNvPr id="37" name="Rectangle 36"/>
           <p:cNvSpPr/>
           <p:nvPr/>
         </p:nvSpPr>
@@ -12985,7 +13081,7 @@
           </a:solidFill>
           <a:ln w="3810">
             <a:solidFill>
-              <a:srgbClr val="D0D8DD"/>
+              <a:srgbClr val="D0D8D9"/>
             </a:solidFill>
           </a:ln>
         </p:spPr>
@@ -13013,7 +13109,7 @@
       </p:sp>
       <p:sp>
         <p:nvSpPr>
-          <p:cNvPr id="37" name="TextBox 36"/>
+          <p:cNvPr id="38" name="TextBox 37"/>
           <p:cNvSpPr txBox="1"/>
           <p:nvPr/>
         </p:nvSpPr>
@@ -13055,7 +13151,7 @@
       </p:sp>
       <p:sp>
         <p:nvSpPr>
-          <p:cNvPr id="38" name="TextBox 37"/>
+          <p:cNvPr id="39" name="TextBox 38"/>
           <p:cNvSpPr txBox="1"/>
           <p:nvPr/>
         </p:nvSpPr>
@@ -13097,7 +13193,7 @@
       </p:sp>
       <p:sp>
         <p:nvSpPr>
-          <p:cNvPr id="39" name="Rectangle 38"/>
+          <p:cNvPr id="40" name="Rectangle 39"/>
           <p:cNvSpPr/>
           <p:nvPr/>
         </p:nvSpPr>
@@ -13114,7 +13210,7 @@
           </a:solidFill>
           <a:ln w="3810">
             <a:solidFill>
-              <a:srgbClr val="D0D8DD"/>
+              <a:srgbClr val="D0D8D9"/>
             </a:solidFill>
           </a:ln>
         </p:spPr>
@@ -13142,7 +13238,7 @@
       </p:sp>
       <p:sp>
         <p:nvSpPr>
-          <p:cNvPr id="40" name="TextBox 39"/>
+          <p:cNvPr id="41" name="TextBox 40"/>
           <p:cNvSpPr txBox="1"/>
           <p:nvPr/>
         </p:nvSpPr>
@@ -13184,7 +13280,7 @@
       </p:sp>
       <p:sp>
         <p:nvSpPr>
-          <p:cNvPr id="41" name="TextBox 40"/>
+          <p:cNvPr id="42" name="TextBox 41"/>
           <p:cNvSpPr txBox="1"/>
           <p:nvPr/>
         </p:nvSpPr>
@@ -13226,7 +13322,7 @@
       </p:sp>
       <p:sp>
         <p:nvSpPr>
-          <p:cNvPr id="42" name="Rectangle 41"/>
+          <p:cNvPr id="43" name="Rectangle 42"/>
           <p:cNvSpPr/>
           <p:nvPr/>
         </p:nvSpPr>
@@ -13243,7 +13339,7 @@
           </a:solidFill>
           <a:ln w="5080">
             <a:solidFill>
-              <a:srgbClr val="D0D8DD"/>
+              <a:srgbClr val="D0D8D9"/>
             </a:solidFill>
           </a:ln>
         </p:spPr>
@@ -13271,7 +13367,7 @@
       </p:sp>
       <p:sp>
         <p:nvSpPr>
-          <p:cNvPr id="43" name="Rectangle 42"/>
+          <p:cNvPr id="44" name="Rectangle 43"/>
           <p:cNvSpPr/>
           <p:nvPr/>
         </p:nvSpPr>
@@ -13314,7 +13410,7 @@
       </p:sp>
       <p:sp>
         <p:nvSpPr>
-          <p:cNvPr id="44" name="TextBox 43"/>
+          <p:cNvPr id="45" name="TextBox 44"/>
           <p:cNvSpPr txBox="1"/>
           <p:nvPr/>
         </p:nvSpPr>
@@ -13356,7 +13452,7 @@
       </p:sp>
       <p:sp>
         <p:nvSpPr>
-          <p:cNvPr id="45" name="Rectangle 44"/>
+          <p:cNvPr id="46" name="Rectangle 45"/>
           <p:cNvSpPr/>
           <p:nvPr/>
         </p:nvSpPr>
@@ -13373,7 +13469,7 @@
           </a:solidFill>
           <a:ln w="3810">
             <a:solidFill>
-              <a:srgbClr val="D0D8DD"/>
+              <a:srgbClr val="D0D8D9"/>
             </a:solidFill>
           </a:ln>
         </p:spPr>
@@ -13401,7 +13497,7 @@
       </p:sp>
       <p:sp>
         <p:nvSpPr>
-          <p:cNvPr id="46" name="TextBox 45"/>
+          <p:cNvPr id="47" name="TextBox 46"/>
           <p:cNvSpPr txBox="1"/>
           <p:nvPr/>
         </p:nvSpPr>
@@ -13443,7 +13539,7 @@
       </p:sp>
       <p:sp>
         <p:nvSpPr>
-          <p:cNvPr id="47" name="TextBox 46"/>
+          <p:cNvPr id="48" name="TextBox 47"/>
           <p:cNvSpPr txBox="1"/>
           <p:nvPr/>
         </p:nvSpPr>
@@ -13485,7 +13581,7 @@
       </p:sp>
       <p:sp>
         <p:nvSpPr>
-          <p:cNvPr id="48" name="Rectangle 47"/>
+          <p:cNvPr id="49" name="Rectangle 48"/>
           <p:cNvSpPr/>
           <p:nvPr/>
         </p:nvSpPr>
@@ -13502,7 +13598,7 @@
           </a:solidFill>
           <a:ln w="3810">
             <a:solidFill>
-              <a:srgbClr val="D0D8DD"/>
+              <a:srgbClr val="D0D8D9"/>
             </a:solidFill>
           </a:ln>
         </p:spPr>
@@ -13530,7 +13626,7 @@
       </p:sp>
       <p:sp>
         <p:nvSpPr>
-          <p:cNvPr id="49" name="TextBox 48"/>
+          <p:cNvPr id="50" name="TextBox 49"/>
           <p:cNvSpPr txBox="1"/>
           <p:nvPr/>
         </p:nvSpPr>
@@ -13572,7 +13668,7 @@
       </p:sp>
       <p:sp>
         <p:nvSpPr>
-          <p:cNvPr id="50" name="TextBox 49"/>
+          <p:cNvPr id="51" name="TextBox 50"/>
           <p:cNvSpPr txBox="1"/>
           <p:nvPr/>
         </p:nvSpPr>
@@ -13614,7 +13710,7 @@
       </p:sp>
       <p:sp>
         <p:nvSpPr>
-          <p:cNvPr id="51" name="Rectangle 50"/>
+          <p:cNvPr id="52" name="Rectangle 51"/>
           <p:cNvSpPr/>
           <p:nvPr/>
         </p:nvSpPr>
@@ -13631,7 +13727,7 @@
           </a:solidFill>
           <a:ln w="3810">
             <a:solidFill>
-              <a:srgbClr val="D0D8DD"/>
+              <a:srgbClr val="D0D8D9"/>
             </a:solidFill>
           </a:ln>
         </p:spPr>
@@ -13659,7 +13755,7 @@
       </p:sp>
       <p:sp>
         <p:nvSpPr>
-          <p:cNvPr id="52" name="TextBox 51"/>
+          <p:cNvPr id="53" name="TextBox 52"/>
           <p:cNvSpPr txBox="1"/>
           <p:nvPr/>
         </p:nvSpPr>
@@ -13701,7 +13797,7 @@
       </p:sp>
       <p:sp>
         <p:nvSpPr>
-          <p:cNvPr id="53" name="TextBox 52"/>
+          <p:cNvPr id="54" name="TextBox 53"/>
           <p:cNvSpPr txBox="1"/>
           <p:nvPr/>
         </p:nvSpPr>
@@ -13743,7 +13839,7 @@
       </p:sp>
       <p:sp>
         <p:nvSpPr>
-          <p:cNvPr id="54" name="Rectangle 53"/>
+          <p:cNvPr id="55" name="Rectangle 54"/>
           <p:cNvSpPr/>
           <p:nvPr/>
         </p:nvSpPr>
@@ -13760,7 +13856,7 @@
           </a:solidFill>
           <a:ln w="3810">
             <a:solidFill>
-              <a:srgbClr val="D0D8DD"/>
+              <a:srgbClr val="D0D8D9"/>
             </a:solidFill>
           </a:ln>
         </p:spPr>
@@ -13788,7 +13884,7 @@
       </p:sp>
       <p:sp>
         <p:nvSpPr>
-          <p:cNvPr id="55" name="TextBox 54"/>
+          <p:cNvPr id="56" name="TextBox 55"/>
           <p:cNvSpPr txBox="1"/>
           <p:nvPr/>
         </p:nvSpPr>
@@ -13830,7 +13926,7 @@
       </p:sp>
       <p:sp>
         <p:nvSpPr>
-          <p:cNvPr id="56" name="TextBox 55"/>
+          <p:cNvPr id="57" name="TextBox 56"/>
           <p:cNvSpPr txBox="1"/>
           <p:nvPr/>
         </p:nvSpPr>
@@ -13872,7 +13968,7 @@
       </p:sp>
       <p:sp>
         <p:nvSpPr>
-          <p:cNvPr id="57" name="Rectangle 56"/>
+          <p:cNvPr id="58" name="Rectangle 57"/>
           <p:cNvSpPr/>
           <p:nvPr/>
         </p:nvSpPr>
@@ -13889,7 +13985,7 @@
           </a:solidFill>
           <a:ln w="3810">
             <a:solidFill>
-              <a:srgbClr val="D0D8DD"/>
+              <a:srgbClr val="D0D8D9"/>
             </a:solidFill>
           </a:ln>
         </p:spPr>
@@ -13917,7 +14013,7 @@
       </p:sp>
       <p:sp>
         <p:nvSpPr>
-          <p:cNvPr id="58" name="TextBox 57"/>
+          <p:cNvPr id="59" name="TextBox 58"/>
           <p:cNvSpPr txBox="1"/>
           <p:nvPr/>
         </p:nvSpPr>
@@ -13959,7 +14055,7 @@
       </p:sp>
       <p:sp>
         <p:nvSpPr>
-          <p:cNvPr id="59" name="TextBox 58"/>
+          <p:cNvPr id="60" name="TextBox 59"/>
           <p:cNvSpPr txBox="1"/>
           <p:nvPr/>
         </p:nvSpPr>
@@ -14001,7 +14097,7 @@
       </p:sp>
       <p:sp>
         <p:nvSpPr>
-          <p:cNvPr id="60" name="Rectangle 59"/>
+          <p:cNvPr id="61" name="Rectangle 60"/>
           <p:cNvSpPr/>
           <p:nvPr/>
         </p:nvSpPr>
@@ -14046,7 +14142,7 @@
       </p:sp>
       <p:sp>
         <p:nvSpPr>
-          <p:cNvPr id="61" name="TextBox 60"/>
+          <p:cNvPr id="62" name="TextBox 61"/>
           <p:cNvSpPr txBox="1"/>
           <p:nvPr/>
         </p:nvSpPr>
@@ -14088,7 +14184,7 @@
       </p:sp>
       <p:sp>
         <p:nvSpPr>
-          <p:cNvPr id="62" name="Rectangle 61"/>
+          <p:cNvPr id="63" name="Rectangle 62"/>
           <p:cNvSpPr/>
           <p:nvPr/>
         </p:nvSpPr>
@@ -14101,7 +14197,7 @@
             <a:avLst/>
           </a:prstGeom>
           <a:solidFill>
-            <a:srgbClr val="D0D8DD"/>
+            <a:srgbClr val="D0D8D9"/>
           </a:solidFill>
           <a:ln>
             <a:noFill/>
@@ -14131,7 +14227,7 @@
       </p:sp>
       <p:sp>
         <p:nvSpPr>
-          <p:cNvPr id="63" name="TextBox 62"/>
+          <p:cNvPr id="64" name="TextBox 63"/>
           <p:cNvSpPr txBox="1"/>
           <p:nvPr/>
         </p:nvSpPr>
@@ -14291,7 +14387,7 @@
         <p:spPr>
           <a:xfrm>
             <a:off x="457200" y="402336"/>
-            <a:ext cx="10972800" cy="164592"/>
+            <a:ext cx="10058400" cy="164592"/>
           </a:xfrm>
           <a:prstGeom prst="rect">
             <a:avLst/>
@@ -14324,9 +14420,33 @@
           </a:p>
         </p:txBody>
       </p:sp>
-      <p:sp>
-        <p:nvSpPr>
-          <p:cNvPr id="5" name="Rectangle 4"/>
+      <p:pic>
+        <p:nvPicPr>
+          <p:cNvPr id="5" name="Picture 4" descr="sih_logo.png"/>
+          <p:cNvPicPr>
+            <a:picLocks noChangeAspect="1"/>
+          </p:cNvPicPr>
+          <p:nvPr/>
+        </p:nvPicPr>
+        <p:blipFill>
+          <a:blip r:embed="rId2"/>
+          <a:stretch>
+            <a:fillRect/>
+          </a:stretch>
+        </p:blipFill>
+        <p:spPr>
+          <a:xfrm>
+            <a:off x="10698480" y="36576"/>
+            <a:ext cx="1216152" cy="566928"/>
+          </a:xfrm>
+          <a:prstGeom prst="rect">
+            <a:avLst/>
+          </a:prstGeom>
+        </p:spPr>
+      </p:pic>
+      <p:sp>
+        <p:nvSpPr>
+          <p:cNvPr id="6" name="Rectangle 5"/>
           <p:cNvSpPr/>
           <p:nvPr/>
         </p:nvSpPr>
@@ -14339,7 +14459,7 @@
             <a:avLst/>
           </a:prstGeom>
           <a:solidFill>
-            <a:srgbClr val="D0D8DD"/>
+            <a:srgbClr val="D0D8D9"/>
           </a:solidFill>
           <a:ln>
             <a:noFill/>
@@ -14369,7 +14489,7 @@
       </p:sp>
       <p:sp>
         <p:nvSpPr>
-          <p:cNvPr id="6" name="Rectangle 5"/>
+          <p:cNvPr id="7" name="Rectangle 6"/>
           <p:cNvSpPr/>
           <p:nvPr/>
         </p:nvSpPr>
@@ -14412,7 +14532,7 @@
       </p:sp>
       <p:sp>
         <p:nvSpPr>
-          <p:cNvPr id="7" name="TextBox 6"/>
+          <p:cNvPr id="8" name="TextBox 7"/>
           <p:cNvSpPr txBox="1"/>
           <p:nvPr/>
         </p:nvSpPr>
@@ -14454,7 +14574,7 @@
       </p:sp>
       <p:sp>
         <p:nvSpPr>
-          <p:cNvPr id="8" name="Rectangle 7"/>
+          <p:cNvPr id="9" name="Rectangle 8"/>
           <p:cNvSpPr/>
           <p:nvPr/>
         </p:nvSpPr>
@@ -14471,7 +14591,7 @@
           </a:solidFill>
           <a:ln w="5080">
             <a:solidFill>
-              <a:srgbClr val="D0D8DD"/>
+              <a:srgbClr val="D0D8D9"/>
             </a:solidFill>
           </a:ln>
         </p:spPr>
@@ -14499,7 +14619,7 @@
       </p:sp>
       <p:sp>
         <p:nvSpPr>
-          <p:cNvPr id="9" name="Rectangle 8"/>
+          <p:cNvPr id="10" name="Rectangle 9"/>
           <p:cNvSpPr/>
           <p:nvPr/>
         </p:nvSpPr>
@@ -14516,7 +14636,7 @@
           </a:solidFill>
           <a:ln w="3810">
             <a:solidFill>
-              <a:srgbClr val="D0D8DD"/>
+              <a:srgbClr val="D0D8D9"/>
             </a:solidFill>
           </a:ln>
         </p:spPr>
@@ -14544,7 +14664,7 @@
       </p:sp>
       <p:sp>
         <p:nvSpPr>
-          <p:cNvPr id="10" name="TextBox 9"/>
+          <p:cNvPr id="11" name="TextBox 10"/>
           <p:cNvSpPr txBox="1"/>
           <p:nvPr/>
         </p:nvSpPr>
@@ -14586,7 +14706,7 @@
       </p:sp>
       <p:sp>
         <p:nvSpPr>
-          <p:cNvPr id="11" name="TextBox 10"/>
+          <p:cNvPr id="12" name="TextBox 11"/>
           <p:cNvSpPr txBox="1"/>
           <p:nvPr/>
         </p:nvSpPr>
@@ -14628,7 +14748,7 @@
       </p:sp>
       <p:sp>
         <p:nvSpPr>
-          <p:cNvPr id="12" name="Rectangle 11"/>
+          <p:cNvPr id="13" name="Rectangle 12"/>
           <p:cNvSpPr/>
           <p:nvPr/>
         </p:nvSpPr>
@@ -14645,7 +14765,7 @@
           </a:solidFill>
           <a:ln w="3810">
             <a:solidFill>
-              <a:srgbClr val="D0D8DD"/>
+              <a:srgbClr val="D0D8D9"/>
             </a:solidFill>
           </a:ln>
         </p:spPr>
@@ -14673,7 +14793,7 @@
       </p:sp>
       <p:sp>
         <p:nvSpPr>
-          <p:cNvPr id="13" name="TextBox 12"/>
+          <p:cNvPr id="14" name="TextBox 13"/>
           <p:cNvSpPr txBox="1"/>
           <p:nvPr/>
         </p:nvSpPr>
@@ -14715,7 +14835,7 @@
       </p:sp>
       <p:sp>
         <p:nvSpPr>
-          <p:cNvPr id="14" name="TextBox 13"/>
+          <p:cNvPr id="15" name="TextBox 14"/>
           <p:cNvSpPr txBox="1"/>
           <p:nvPr/>
         </p:nvSpPr>
@@ -14757,7 +14877,7 @@
       </p:sp>
       <p:sp>
         <p:nvSpPr>
-          <p:cNvPr id="15" name="Rectangle 14"/>
+          <p:cNvPr id="16" name="Rectangle 15"/>
           <p:cNvSpPr/>
           <p:nvPr/>
         </p:nvSpPr>
@@ -14774,7 +14894,7 @@
           </a:solidFill>
           <a:ln w="3810">
             <a:solidFill>
-              <a:srgbClr val="D0D8DD"/>
+              <a:srgbClr val="D0D8D9"/>
             </a:solidFill>
           </a:ln>
         </p:spPr>
@@ -14802,7 +14922,7 @@
       </p:sp>
       <p:sp>
         <p:nvSpPr>
-          <p:cNvPr id="16" name="TextBox 15"/>
+          <p:cNvPr id="17" name="TextBox 16"/>
           <p:cNvSpPr txBox="1"/>
           <p:nvPr/>
         </p:nvSpPr>
@@ -14844,7 +14964,7 @@
       </p:sp>
       <p:sp>
         <p:nvSpPr>
-          <p:cNvPr id="17" name="TextBox 16"/>
+          <p:cNvPr id="18" name="TextBox 17"/>
           <p:cNvSpPr txBox="1"/>
           <p:nvPr/>
         </p:nvSpPr>
@@ -14886,7 +15006,7 @@
       </p:sp>
       <p:sp>
         <p:nvSpPr>
-          <p:cNvPr id="18" name="Rectangle 17"/>
+          <p:cNvPr id="19" name="Rectangle 18"/>
           <p:cNvSpPr/>
           <p:nvPr/>
         </p:nvSpPr>
@@ -14929,7 +15049,7 @@
       </p:sp>
       <p:sp>
         <p:nvSpPr>
-          <p:cNvPr id="19" name="TextBox 18"/>
+          <p:cNvPr id="20" name="TextBox 19"/>
           <p:cNvSpPr txBox="1"/>
           <p:nvPr/>
         </p:nvSpPr>
@@ -14971,7 +15091,7 @@
       </p:sp>
       <p:sp>
         <p:nvSpPr>
-          <p:cNvPr id="20" name="Rectangle 19"/>
+          <p:cNvPr id="21" name="Rectangle 20"/>
           <p:cNvSpPr/>
           <p:nvPr/>
         </p:nvSpPr>
@@ -14988,7 +15108,7 @@
           </a:solidFill>
           <a:ln w="5080">
             <a:solidFill>
-              <a:srgbClr val="D0D8DD"/>
+              <a:srgbClr val="D0D8D9"/>
             </a:solidFill>
           </a:ln>
         </p:spPr>
@@ -15016,7 +15136,7 @@
       </p:sp>
       <p:sp>
         <p:nvSpPr>
-          <p:cNvPr id="21" name="Rectangle 20"/>
+          <p:cNvPr id="22" name="Rectangle 21"/>
           <p:cNvSpPr/>
           <p:nvPr/>
         </p:nvSpPr>
@@ -15033,7 +15153,7 @@
           </a:solidFill>
           <a:ln w="3810">
             <a:solidFill>
-              <a:srgbClr val="D0D8DD"/>
+              <a:srgbClr val="D0D8D9"/>
             </a:solidFill>
           </a:ln>
         </p:spPr>
@@ -15061,7 +15181,7 @@
       </p:sp>
       <p:sp>
         <p:nvSpPr>
-          <p:cNvPr id="22" name="TextBox 21"/>
+          <p:cNvPr id="23" name="TextBox 22"/>
           <p:cNvSpPr txBox="1"/>
           <p:nvPr/>
         </p:nvSpPr>
@@ -15103,7 +15223,7 @@
       </p:sp>
       <p:sp>
         <p:nvSpPr>
-          <p:cNvPr id="23" name="TextBox 22"/>
+          <p:cNvPr id="24" name="TextBox 23"/>
           <p:cNvSpPr txBox="1"/>
           <p:nvPr/>
         </p:nvSpPr>
@@ -15145,7 +15265,7 @@
       </p:sp>
       <p:sp>
         <p:nvSpPr>
-          <p:cNvPr id="24" name="Rectangle 23"/>
+          <p:cNvPr id="25" name="Rectangle 24"/>
           <p:cNvSpPr/>
           <p:nvPr/>
         </p:nvSpPr>
@@ -15162,7 +15282,7 @@
           </a:solidFill>
           <a:ln w="3810">
             <a:solidFill>
-              <a:srgbClr val="D0D8DD"/>
+              <a:srgbClr val="D0D8D9"/>
             </a:solidFill>
           </a:ln>
         </p:spPr>
@@ -15190,7 +15310,7 @@
       </p:sp>
       <p:sp>
         <p:nvSpPr>
-          <p:cNvPr id="25" name="TextBox 24"/>
+          <p:cNvPr id="26" name="TextBox 25"/>
           <p:cNvSpPr txBox="1"/>
           <p:nvPr/>
         </p:nvSpPr>
@@ -15232,7 +15352,7 @@
       </p:sp>
       <p:sp>
         <p:nvSpPr>
-          <p:cNvPr id="26" name="TextBox 25"/>
+          <p:cNvPr id="27" name="TextBox 26"/>
           <p:cNvSpPr txBox="1"/>
           <p:nvPr/>
         </p:nvSpPr>
@@ -15274,7 +15394,7 @@
       </p:sp>
       <p:sp>
         <p:nvSpPr>
-          <p:cNvPr id="27" name="Rectangle 26"/>
+          <p:cNvPr id="28" name="Rectangle 27"/>
           <p:cNvSpPr/>
           <p:nvPr/>
         </p:nvSpPr>
@@ -15291,7 +15411,7 @@
           </a:solidFill>
           <a:ln w="3810">
             <a:solidFill>
-              <a:srgbClr val="D0D8DD"/>
+              <a:srgbClr val="D0D8D9"/>
             </a:solidFill>
           </a:ln>
         </p:spPr>
@@ -15319,7 +15439,7 @@
       </p:sp>
       <p:sp>
         <p:nvSpPr>
-          <p:cNvPr id="28" name="TextBox 27"/>
+          <p:cNvPr id="29" name="TextBox 28"/>
           <p:cNvSpPr txBox="1"/>
           <p:nvPr/>
         </p:nvSpPr>
@@ -15361,7 +15481,7 @@
       </p:sp>
       <p:sp>
         <p:nvSpPr>
-          <p:cNvPr id="29" name="TextBox 28"/>
+          <p:cNvPr id="30" name="TextBox 29"/>
           <p:cNvSpPr txBox="1"/>
           <p:nvPr/>
         </p:nvSpPr>
@@ -15403,7 +15523,7 @@
       </p:sp>
       <p:sp>
         <p:nvSpPr>
-          <p:cNvPr id="30" name="Rectangle 29"/>
+          <p:cNvPr id="31" name="Rectangle 30"/>
           <p:cNvSpPr/>
           <p:nvPr/>
         </p:nvSpPr>
@@ -15446,7 +15566,7 @@
       </p:sp>
       <p:sp>
         <p:nvSpPr>
-          <p:cNvPr id="31" name="TextBox 30"/>
+          <p:cNvPr id="32" name="TextBox 31"/>
           <p:cNvSpPr txBox="1"/>
           <p:nvPr/>
         </p:nvSpPr>
@@ -15488,7 +15608,7 @@
       </p:sp>
       <p:sp>
         <p:nvSpPr>
-          <p:cNvPr id="32" name="Rectangle 31"/>
+          <p:cNvPr id="33" name="Rectangle 32"/>
           <p:cNvSpPr/>
           <p:nvPr/>
         </p:nvSpPr>
@@ -15505,7 +15625,7 @@
           </a:solidFill>
           <a:ln w="5080">
             <a:solidFill>
-              <a:srgbClr val="D0D8DD"/>
+              <a:srgbClr val="D0D8D9"/>
             </a:solidFill>
           </a:ln>
         </p:spPr>
@@ -15533,7 +15653,7 @@
       </p:sp>
       <p:sp>
         <p:nvSpPr>
-          <p:cNvPr id="33" name="Rectangle 32"/>
+          <p:cNvPr id="34" name="Rectangle 33"/>
           <p:cNvSpPr/>
           <p:nvPr/>
         </p:nvSpPr>
@@ -15576,7 +15696,7 @@
       </p:sp>
       <p:sp>
         <p:nvSpPr>
-          <p:cNvPr id="34" name="TextBox 33"/>
+          <p:cNvPr id="35" name="TextBox 34"/>
           <p:cNvSpPr txBox="1"/>
           <p:nvPr/>
         </p:nvSpPr>
@@ -15618,7 +15738,7 @@
       </p:sp>
       <p:sp>
         <p:nvSpPr>
-          <p:cNvPr id="35" name="Rectangle 34"/>
+          <p:cNvPr id="36" name="Rectangle 35"/>
           <p:cNvSpPr/>
           <p:nvPr/>
         </p:nvSpPr>
@@ -15635,7 +15755,7 @@
           </a:solidFill>
           <a:ln w="3810">
             <a:solidFill>
-              <a:srgbClr val="D0D8DD"/>
+              <a:srgbClr val="D0D8D9"/>
             </a:solidFill>
           </a:ln>
         </p:spPr>
@@ -15663,7 +15783,7 @@
       </p:sp>
       <p:sp>
         <p:nvSpPr>
-          <p:cNvPr id="36" name="TextBox 35"/>
+          <p:cNvPr id="37" name="TextBox 36"/>
           <p:cNvSpPr txBox="1"/>
           <p:nvPr/>
         </p:nvSpPr>
@@ -15705,7 +15825,7 @@
       </p:sp>
       <p:sp>
         <p:nvSpPr>
-          <p:cNvPr id="37" name="TextBox 36"/>
+          <p:cNvPr id="38" name="TextBox 37"/>
           <p:cNvSpPr txBox="1"/>
           <p:nvPr/>
         </p:nvSpPr>
@@ -15747,7 +15867,7 @@
       </p:sp>
       <p:sp>
         <p:nvSpPr>
-          <p:cNvPr id="38" name="Rectangle 37"/>
+          <p:cNvPr id="39" name="Rectangle 38"/>
           <p:cNvSpPr/>
           <p:nvPr/>
         </p:nvSpPr>
@@ -15764,7 +15884,7 @@
           </a:solidFill>
           <a:ln w="3810">
             <a:solidFill>
-              <a:srgbClr val="D0D8DD"/>
+              <a:srgbClr val="D0D8D9"/>
             </a:solidFill>
           </a:ln>
         </p:spPr>
@@ -15792,7 +15912,7 @@
       </p:sp>
       <p:sp>
         <p:nvSpPr>
-          <p:cNvPr id="39" name="TextBox 38"/>
+          <p:cNvPr id="40" name="TextBox 39"/>
           <p:cNvSpPr txBox="1"/>
           <p:nvPr/>
         </p:nvSpPr>
@@ -15834,7 +15954,7 @@
       </p:sp>
       <p:sp>
         <p:nvSpPr>
-          <p:cNvPr id="40" name="TextBox 39"/>
+          <p:cNvPr id="41" name="TextBox 40"/>
           <p:cNvSpPr txBox="1"/>
           <p:nvPr/>
         </p:nvSpPr>
@@ -15876,7 +15996,7 @@
       </p:sp>
       <p:sp>
         <p:nvSpPr>
-          <p:cNvPr id="41" name="Rectangle 40"/>
+          <p:cNvPr id="42" name="Rectangle 41"/>
           <p:cNvSpPr/>
           <p:nvPr/>
         </p:nvSpPr>
@@ -15893,7 +16013,7 @@
           </a:solidFill>
           <a:ln w="3810">
             <a:solidFill>
-              <a:srgbClr val="D0D8DD"/>
+              <a:srgbClr val="D0D8D9"/>
             </a:solidFill>
           </a:ln>
         </p:spPr>
@@ -15921,7 +16041,7 @@
       </p:sp>
       <p:sp>
         <p:nvSpPr>
-          <p:cNvPr id="42" name="TextBox 41"/>
+          <p:cNvPr id="43" name="TextBox 42"/>
           <p:cNvSpPr txBox="1"/>
           <p:nvPr/>
         </p:nvSpPr>
@@ -15963,7 +16083,7 @@
       </p:sp>
       <p:sp>
         <p:nvSpPr>
-          <p:cNvPr id="43" name="TextBox 42"/>
+          <p:cNvPr id="44" name="TextBox 43"/>
           <p:cNvSpPr txBox="1"/>
           <p:nvPr/>
         </p:nvSpPr>
@@ -16005,7 +16125,7 @@
       </p:sp>
       <p:sp>
         <p:nvSpPr>
-          <p:cNvPr id="44" name="Rectangle 43"/>
+          <p:cNvPr id="45" name="Rectangle 44"/>
           <p:cNvSpPr/>
           <p:nvPr/>
         </p:nvSpPr>
@@ -16022,7 +16142,7 @@
           </a:solidFill>
           <a:ln w="5080">
             <a:solidFill>
-              <a:srgbClr val="D0D8DD"/>
+              <a:srgbClr val="D0D8D9"/>
             </a:solidFill>
           </a:ln>
         </p:spPr>
@@ -16050,7 +16170,7 @@
       </p:sp>
       <p:sp>
         <p:nvSpPr>
-          <p:cNvPr id="45" name="Rectangle 44"/>
+          <p:cNvPr id="46" name="Rectangle 45"/>
           <p:cNvSpPr/>
           <p:nvPr/>
         </p:nvSpPr>
@@ -16093,7 +16213,7 @@
       </p:sp>
       <p:sp>
         <p:nvSpPr>
-          <p:cNvPr id="46" name="TextBox 45"/>
+          <p:cNvPr id="47" name="TextBox 46"/>
           <p:cNvSpPr txBox="1"/>
           <p:nvPr/>
         </p:nvSpPr>
@@ -16135,7 +16255,7 @@
       </p:sp>
       <p:sp>
         <p:nvSpPr>
-          <p:cNvPr id="47" name="Rectangle 46"/>
+          <p:cNvPr id="48" name="Rectangle 47"/>
           <p:cNvSpPr/>
           <p:nvPr/>
         </p:nvSpPr>
@@ -16152,7 +16272,7 @@
           </a:solidFill>
           <a:ln w="3810">
             <a:solidFill>
-              <a:srgbClr val="D0D8DD"/>
+              <a:srgbClr val="D0D8D9"/>
             </a:solidFill>
           </a:ln>
         </p:spPr>
@@ -16180,7 +16300,7 @@
       </p:sp>
       <p:sp>
         <p:nvSpPr>
-          <p:cNvPr id="48" name="TextBox 47"/>
+          <p:cNvPr id="49" name="TextBox 48"/>
           <p:cNvSpPr txBox="1"/>
           <p:nvPr/>
         </p:nvSpPr>
@@ -16222,7 +16342,7 @@
       </p:sp>
       <p:sp>
         <p:nvSpPr>
-          <p:cNvPr id="49" name="TextBox 48"/>
+          <p:cNvPr id="50" name="TextBox 49"/>
           <p:cNvSpPr txBox="1"/>
           <p:nvPr/>
         </p:nvSpPr>
@@ -16264,7 +16384,7 @@
       </p:sp>
       <p:sp>
         <p:nvSpPr>
-          <p:cNvPr id="50" name="Rectangle 49"/>
+          <p:cNvPr id="51" name="Rectangle 50"/>
           <p:cNvSpPr/>
           <p:nvPr/>
         </p:nvSpPr>
@@ -16281,7 +16401,7 @@
           </a:solidFill>
           <a:ln w="3810">
             <a:solidFill>
-              <a:srgbClr val="D0D8DD"/>
+              <a:srgbClr val="D0D8D9"/>
             </a:solidFill>
           </a:ln>
         </p:spPr>
@@ -16309,7 +16429,7 @@
       </p:sp>
       <p:sp>
         <p:nvSpPr>
-          <p:cNvPr id="51" name="TextBox 50"/>
+          <p:cNvPr id="52" name="TextBox 51"/>
           <p:cNvSpPr txBox="1"/>
           <p:nvPr/>
         </p:nvSpPr>
@@ -16351,7 +16471,7 @@
       </p:sp>
       <p:sp>
         <p:nvSpPr>
-          <p:cNvPr id="52" name="TextBox 51"/>
+          <p:cNvPr id="53" name="TextBox 52"/>
           <p:cNvSpPr txBox="1"/>
           <p:nvPr/>
         </p:nvSpPr>
@@ -16393,7 +16513,7 @@
       </p:sp>
       <p:sp>
         <p:nvSpPr>
-          <p:cNvPr id="53" name="Rectangle 52"/>
+          <p:cNvPr id="54" name="Rectangle 53"/>
           <p:cNvSpPr/>
           <p:nvPr/>
         </p:nvSpPr>
@@ -16410,7 +16530,7 @@
           </a:solidFill>
           <a:ln w="3810">
             <a:solidFill>
-              <a:srgbClr val="D0D8DD"/>
+              <a:srgbClr val="D0D8D9"/>
             </a:solidFill>
           </a:ln>
         </p:spPr>
@@ -16438,7 +16558,7 @@
       </p:sp>
       <p:sp>
         <p:nvSpPr>
-          <p:cNvPr id="54" name="TextBox 53"/>
+          <p:cNvPr id="55" name="TextBox 54"/>
           <p:cNvSpPr txBox="1"/>
           <p:nvPr/>
         </p:nvSpPr>
@@ -16480,7 +16600,7 @@
       </p:sp>
       <p:sp>
         <p:nvSpPr>
-          <p:cNvPr id="55" name="TextBox 54"/>
+          <p:cNvPr id="56" name="TextBox 55"/>
           <p:cNvSpPr txBox="1"/>
           <p:nvPr/>
         </p:nvSpPr>
@@ -16522,7 +16642,7 @@
       </p:sp>
       <p:sp>
         <p:nvSpPr>
-          <p:cNvPr id="56" name="Rectangle 55"/>
+          <p:cNvPr id="57" name="Rectangle 56"/>
           <p:cNvSpPr/>
           <p:nvPr/>
         </p:nvSpPr>
@@ -16539,7 +16659,7 @@
           </a:solidFill>
           <a:ln w="5080">
             <a:solidFill>
-              <a:srgbClr val="D0D8DD"/>
+              <a:srgbClr val="D0D8D9"/>
             </a:solidFill>
           </a:ln>
         </p:spPr>
@@ -16567,7 +16687,7 @@
       </p:sp>
       <p:sp>
         <p:nvSpPr>
-          <p:cNvPr id="57" name="Rectangle 56"/>
+          <p:cNvPr id="58" name="Rectangle 57"/>
           <p:cNvSpPr/>
           <p:nvPr/>
         </p:nvSpPr>
@@ -16610,7 +16730,7 @@
       </p:sp>
       <p:sp>
         <p:nvSpPr>
-          <p:cNvPr id="58" name="TextBox 57"/>
+          <p:cNvPr id="59" name="TextBox 58"/>
           <p:cNvSpPr txBox="1"/>
           <p:nvPr/>
         </p:nvSpPr>
@@ -16652,7 +16772,7 @@
       </p:sp>
       <p:sp>
         <p:nvSpPr>
-          <p:cNvPr id="59" name="Rectangle 58"/>
+          <p:cNvPr id="60" name="Rectangle 59"/>
           <p:cNvSpPr/>
           <p:nvPr/>
         </p:nvSpPr>
@@ -16669,7 +16789,7 @@
           </a:solidFill>
           <a:ln w="3810">
             <a:solidFill>
-              <a:srgbClr val="D0D8DD"/>
+              <a:srgbClr val="D0D8D9"/>
             </a:solidFill>
           </a:ln>
         </p:spPr>
@@ -16697,7 +16817,7 @@
       </p:sp>
       <p:sp>
         <p:nvSpPr>
-          <p:cNvPr id="60" name="TextBox 59"/>
+          <p:cNvPr id="61" name="TextBox 60"/>
           <p:cNvSpPr txBox="1"/>
           <p:nvPr/>
         </p:nvSpPr>
@@ -16739,7 +16859,7 @@
       </p:sp>
       <p:sp>
         <p:nvSpPr>
-          <p:cNvPr id="61" name="TextBox 60"/>
+          <p:cNvPr id="62" name="TextBox 61"/>
           <p:cNvSpPr txBox="1"/>
           <p:nvPr/>
         </p:nvSpPr>
@@ -16781,7 +16901,7 @@
       </p:sp>
       <p:sp>
         <p:nvSpPr>
-          <p:cNvPr id="62" name="Rectangle 61"/>
+          <p:cNvPr id="63" name="Rectangle 62"/>
           <p:cNvSpPr/>
           <p:nvPr/>
         </p:nvSpPr>
@@ -16798,7 +16918,7 @@
           </a:solidFill>
           <a:ln w="3810">
             <a:solidFill>
-              <a:srgbClr val="D0D8DD"/>
+              <a:srgbClr val="D0D8D9"/>
             </a:solidFill>
           </a:ln>
         </p:spPr>
@@ -16826,7 +16946,7 @@
       </p:sp>
       <p:sp>
         <p:nvSpPr>
-          <p:cNvPr id="63" name="TextBox 62"/>
+          <p:cNvPr id="64" name="TextBox 63"/>
           <p:cNvSpPr txBox="1"/>
           <p:nvPr/>
         </p:nvSpPr>
@@ -16868,7 +16988,7 @@
       </p:sp>
       <p:sp>
         <p:nvSpPr>
-          <p:cNvPr id="64" name="TextBox 63"/>
+          <p:cNvPr id="65" name="TextBox 64"/>
           <p:cNvSpPr txBox="1"/>
           <p:nvPr/>
         </p:nvSpPr>
@@ -16910,7 +17030,7 @@
       </p:sp>
       <p:sp>
         <p:nvSpPr>
-          <p:cNvPr id="65" name="Rectangle 64"/>
+          <p:cNvPr id="66" name="Rectangle 65"/>
           <p:cNvSpPr/>
           <p:nvPr/>
         </p:nvSpPr>
@@ -16927,7 +17047,7 @@
           </a:solidFill>
           <a:ln w="3810">
             <a:solidFill>
-              <a:srgbClr val="D0D8DD"/>
+              <a:srgbClr val="D0D8D9"/>
             </a:solidFill>
           </a:ln>
         </p:spPr>
@@ -16955,7 +17075,7 @@
       </p:sp>
       <p:sp>
         <p:nvSpPr>
-          <p:cNvPr id="66" name="TextBox 65"/>
+          <p:cNvPr id="67" name="TextBox 66"/>
           <p:cNvSpPr txBox="1"/>
           <p:nvPr/>
         </p:nvSpPr>
@@ -16997,7 +17117,7 @@
       </p:sp>
       <p:sp>
         <p:nvSpPr>
-          <p:cNvPr id="67" name="TextBox 66"/>
+          <p:cNvPr id="68" name="TextBox 67"/>
           <p:cNvSpPr txBox="1"/>
           <p:nvPr/>
         </p:nvSpPr>
@@ -17039,7 +17159,7 @@
       </p:sp>
       <p:sp>
         <p:nvSpPr>
-          <p:cNvPr id="68" name="Rectangle 67"/>
+          <p:cNvPr id="69" name="Rectangle 68"/>
           <p:cNvSpPr/>
           <p:nvPr/>
         </p:nvSpPr>
@@ -17056,7 +17176,7 @@
           </a:solidFill>
           <a:ln w="5080">
             <a:solidFill>
-              <a:srgbClr val="D0D8DD"/>
+              <a:srgbClr val="D0D8D9"/>
             </a:solidFill>
           </a:ln>
         </p:spPr>
@@ -17084,7 +17204,7 @@
       </p:sp>
       <p:sp>
         <p:nvSpPr>
-          <p:cNvPr id="69" name="Rectangle 68"/>
+          <p:cNvPr id="70" name="Rectangle 69"/>
           <p:cNvSpPr/>
           <p:nvPr/>
         </p:nvSpPr>
@@ -17127,7 +17247,7 @@
       </p:sp>
       <p:sp>
         <p:nvSpPr>
-          <p:cNvPr id="70" name="TextBox 69"/>
+          <p:cNvPr id="71" name="TextBox 70"/>
           <p:cNvSpPr txBox="1"/>
           <p:nvPr/>
         </p:nvSpPr>
@@ -17169,7 +17289,7 @@
       </p:sp>
       <p:sp>
         <p:nvSpPr>
-          <p:cNvPr id="71" name="Rectangle 70"/>
+          <p:cNvPr id="72" name="Rectangle 71"/>
           <p:cNvSpPr/>
           <p:nvPr/>
         </p:nvSpPr>
@@ -17186,7 +17306,7 @@
           </a:solidFill>
           <a:ln w="3810">
             <a:solidFill>
-              <a:srgbClr val="D0D8DD"/>
+              <a:srgbClr val="D0D8D9"/>
             </a:solidFill>
           </a:ln>
         </p:spPr>
@@ -17214,7 +17334,7 @@
       </p:sp>
       <p:sp>
         <p:nvSpPr>
-          <p:cNvPr id="72" name="TextBox 71"/>
+          <p:cNvPr id="73" name="TextBox 72"/>
           <p:cNvSpPr txBox="1"/>
           <p:nvPr/>
         </p:nvSpPr>
@@ -17256,7 +17376,7 @@
       </p:sp>
       <p:sp>
         <p:nvSpPr>
-          <p:cNvPr id="73" name="TextBox 72"/>
+          <p:cNvPr id="74" name="TextBox 73"/>
           <p:cNvSpPr txBox="1"/>
           <p:nvPr/>
         </p:nvSpPr>
@@ -17298,7 +17418,7 @@
       </p:sp>
       <p:sp>
         <p:nvSpPr>
-          <p:cNvPr id="74" name="Rectangle 73"/>
+          <p:cNvPr id="75" name="Rectangle 74"/>
           <p:cNvSpPr/>
           <p:nvPr/>
         </p:nvSpPr>
@@ -17315,7 +17435,7 @@
           </a:solidFill>
           <a:ln w="3810">
             <a:solidFill>
-              <a:srgbClr val="D0D8DD"/>
+              <a:srgbClr val="D0D8D9"/>
             </a:solidFill>
           </a:ln>
         </p:spPr>
@@ -17343,7 +17463,7 @@
       </p:sp>
       <p:sp>
         <p:nvSpPr>
-          <p:cNvPr id="75" name="TextBox 74"/>
+          <p:cNvPr id="76" name="TextBox 75"/>
           <p:cNvSpPr txBox="1"/>
           <p:nvPr/>
         </p:nvSpPr>
@@ -17385,7 +17505,7 @@
       </p:sp>
       <p:sp>
         <p:nvSpPr>
-          <p:cNvPr id="76" name="TextBox 75"/>
+          <p:cNvPr id="77" name="TextBox 76"/>
           <p:cNvSpPr txBox="1"/>
           <p:nvPr/>
         </p:nvSpPr>
@@ -17427,7 +17547,7 @@
       </p:sp>
       <p:sp>
         <p:nvSpPr>
-          <p:cNvPr id="77" name="Rectangle 76"/>
+          <p:cNvPr id="78" name="Rectangle 77"/>
           <p:cNvSpPr/>
           <p:nvPr/>
         </p:nvSpPr>
@@ -17444,7 +17564,7 @@
           </a:solidFill>
           <a:ln w="3810">
             <a:solidFill>
-              <a:srgbClr val="D0D8DD"/>
+              <a:srgbClr val="D0D8D9"/>
             </a:solidFill>
           </a:ln>
         </p:spPr>
@@ -17472,7 +17592,7 @@
       </p:sp>
       <p:sp>
         <p:nvSpPr>
-          <p:cNvPr id="78" name="TextBox 77"/>
+          <p:cNvPr id="79" name="TextBox 78"/>
           <p:cNvSpPr txBox="1"/>
           <p:nvPr/>
         </p:nvSpPr>
@@ -17514,7 +17634,7 @@
       </p:sp>
       <p:sp>
         <p:nvSpPr>
-          <p:cNvPr id="79" name="TextBox 78"/>
+          <p:cNvPr id="80" name="TextBox 79"/>
           <p:cNvSpPr txBox="1"/>
           <p:nvPr/>
         </p:nvSpPr>
@@ -17556,7 +17676,7 @@
       </p:sp>
       <p:sp>
         <p:nvSpPr>
-          <p:cNvPr id="80" name="Rectangle 79"/>
+          <p:cNvPr id="81" name="Rectangle 80"/>
           <p:cNvSpPr/>
           <p:nvPr/>
         </p:nvSpPr>
@@ -17569,7 +17689,7 @@
             <a:avLst/>
           </a:prstGeom>
           <a:solidFill>
-            <a:srgbClr val="D0D8DD"/>
+            <a:srgbClr val="D0D8D9"/>
           </a:solidFill>
           <a:ln>
             <a:noFill/>
@@ -17599,7 +17719,7 @@
       </p:sp>
       <p:sp>
         <p:nvSpPr>
-          <p:cNvPr id="81" name="TextBox 80"/>
+          <p:cNvPr id="82" name="TextBox 81"/>
           <p:cNvSpPr txBox="1"/>
           <p:nvPr/>
         </p:nvSpPr>
@@ -17759,7 +17879,7 @@
         <p:spPr>
           <a:xfrm>
             <a:off x="457200" y="402336"/>
-            <a:ext cx="10972800" cy="164592"/>
+            <a:ext cx="10058400" cy="164592"/>
           </a:xfrm>
           <a:prstGeom prst="rect">
             <a:avLst/>
@@ -17792,9 +17912,33 @@
           </a:p>
         </p:txBody>
       </p:sp>
-      <p:sp>
-        <p:nvSpPr>
-          <p:cNvPr id="5" name="Rectangle 4"/>
+      <p:pic>
+        <p:nvPicPr>
+          <p:cNvPr id="5" name="Picture 4" descr="sih_logo.png"/>
+          <p:cNvPicPr>
+            <a:picLocks noChangeAspect="1"/>
+          </p:cNvPicPr>
+          <p:nvPr/>
+        </p:nvPicPr>
+        <p:blipFill>
+          <a:blip r:embed="rId2"/>
+          <a:stretch>
+            <a:fillRect/>
+          </a:stretch>
+        </p:blipFill>
+        <p:spPr>
+          <a:xfrm>
+            <a:off x="10698480" y="36576"/>
+            <a:ext cx="1216152" cy="566928"/>
+          </a:xfrm>
+          <a:prstGeom prst="rect">
+            <a:avLst/>
+          </a:prstGeom>
+        </p:spPr>
+      </p:pic>
+      <p:sp>
+        <p:nvSpPr>
+          <p:cNvPr id="6" name="Rectangle 5"/>
           <p:cNvSpPr/>
           <p:nvPr/>
         </p:nvSpPr>
@@ -17807,7 +17951,7 @@
             <a:avLst/>
           </a:prstGeom>
           <a:solidFill>
-            <a:srgbClr val="D0D8DD"/>
+            <a:srgbClr val="D0D8D9"/>
           </a:solidFill>
           <a:ln>
             <a:noFill/>
@@ -17837,7 +17981,7 @@
       </p:sp>
       <p:sp>
         <p:nvSpPr>
-          <p:cNvPr id="6" name="Rectangle 5"/>
+          <p:cNvPr id="7" name="Rectangle 6"/>
           <p:cNvSpPr/>
           <p:nvPr/>
         </p:nvSpPr>
@@ -17880,7 +18024,7 @@
       </p:sp>
       <p:sp>
         <p:nvSpPr>
-          <p:cNvPr id="7" name="TextBox 6"/>
+          <p:cNvPr id="8" name="TextBox 7"/>
           <p:cNvSpPr txBox="1"/>
           <p:nvPr/>
         </p:nvSpPr>
@@ -17922,7 +18066,7 @@
       </p:sp>
       <p:sp>
         <p:nvSpPr>
-          <p:cNvPr id="8" name="Rectangle 7"/>
+          <p:cNvPr id="9" name="Rectangle 8"/>
           <p:cNvSpPr/>
           <p:nvPr/>
         </p:nvSpPr>
@@ -17939,7 +18083,7 @@
           </a:solidFill>
           <a:ln w="5080">
             <a:solidFill>
-              <a:srgbClr val="D0D8DD"/>
+              <a:srgbClr val="D0D8D9"/>
             </a:solidFill>
           </a:ln>
         </p:spPr>
@@ -17967,7 +18111,7 @@
       </p:sp>
       <p:sp>
         <p:nvSpPr>
-          <p:cNvPr id="9" name="Rectangle 8"/>
+          <p:cNvPr id="10" name="Rectangle 9"/>
           <p:cNvSpPr/>
           <p:nvPr/>
         </p:nvSpPr>
@@ -17984,7 +18128,7 @@
           </a:solidFill>
           <a:ln w="3810">
             <a:solidFill>
-              <a:srgbClr val="D0D8DD"/>
+              <a:srgbClr val="D0D8D9"/>
             </a:solidFill>
           </a:ln>
         </p:spPr>
@@ -18012,7 +18156,7 @@
       </p:sp>
       <p:sp>
         <p:nvSpPr>
-          <p:cNvPr id="10" name="TextBox 9"/>
+          <p:cNvPr id="11" name="TextBox 10"/>
           <p:cNvSpPr txBox="1"/>
           <p:nvPr/>
         </p:nvSpPr>
@@ -18054,7 +18198,7 @@
       </p:sp>
       <p:sp>
         <p:nvSpPr>
-          <p:cNvPr id="11" name="TextBox 10"/>
+          <p:cNvPr id="12" name="TextBox 11"/>
           <p:cNvSpPr txBox="1"/>
           <p:nvPr/>
         </p:nvSpPr>
@@ -18096,7 +18240,7 @@
       </p:sp>
       <p:sp>
         <p:nvSpPr>
-          <p:cNvPr id="12" name="Rectangle 11"/>
+          <p:cNvPr id="13" name="Rectangle 12"/>
           <p:cNvSpPr/>
           <p:nvPr/>
         </p:nvSpPr>
@@ -18113,7 +18257,7 @@
           </a:solidFill>
           <a:ln w="3810">
             <a:solidFill>
-              <a:srgbClr val="D0D8DD"/>
+              <a:srgbClr val="D0D8D9"/>
             </a:solidFill>
           </a:ln>
         </p:spPr>
@@ -18141,7 +18285,7 @@
       </p:sp>
       <p:sp>
         <p:nvSpPr>
-          <p:cNvPr id="13" name="TextBox 12"/>
+          <p:cNvPr id="14" name="TextBox 13"/>
           <p:cNvSpPr txBox="1"/>
           <p:nvPr/>
         </p:nvSpPr>
@@ -18183,7 +18327,7 @@
       </p:sp>
       <p:sp>
         <p:nvSpPr>
-          <p:cNvPr id="14" name="TextBox 13"/>
+          <p:cNvPr id="15" name="TextBox 14"/>
           <p:cNvSpPr txBox="1"/>
           <p:nvPr/>
         </p:nvSpPr>
@@ -18225,7 +18369,7 @@
       </p:sp>
       <p:sp>
         <p:nvSpPr>
-          <p:cNvPr id="15" name="Rectangle 14"/>
+          <p:cNvPr id="16" name="Rectangle 15"/>
           <p:cNvSpPr/>
           <p:nvPr/>
         </p:nvSpPr>
@@ -18242,7 +18386,7 @@
           </a:solidFill>
           <a:ln w="3810">
             <a:solidFill>
-              <a:srgbClr val="D0D8DD"/>
+              <a:srgbClr val="D0D8D9"/>
             </a:solidFill>
           </a:ln>
         </p:spPr>
@@ -18270,7 +18414,7 @@
       </p:sp>
       <p:sp>
         <p:nvSpPr>
-          <p:cNvPr id="16" name="TextBox 15"/>
+          <p:cNvPr id="17" name="TextBox 16"/>
           <p:cNvSpPr txBox="1"/>
           <p:nvPr/>
         </p:nvSpPr>
@@ -18312,7 +18456,7 @@
       </p:sp>
       <p:sp>
         <p:nvSpPr>
-          <p:cNvPr id="17" name="TextBox 16"/>
+          <p:cNvPr id="18" name="TextBox 17"/>
           <p:cNvSpPr txBox="1"/>
           <p:nvPr/>
         </p:nvSpPr>
@@ -18354,7 +18498,7 @@
       </p:sp>
       <p:sp>
         <p:nvSpPr>
-          <p:cNvPr id="18" name="Rectangle 17"/>
+          <p:cNvPr id="19" name="Rectangle 18"/>
           <p:cNvSpPr/>
           <p:nvPr/>
         </p:nvSpPr>
@@ -18371,7 +18515,7 @@
           </a:solidFill>
           <a:ln w="3810">
             <a:solidFill>
-              <a:srgbClr val="D0D8DD"/>
+              <a:srgbClr val="D0D8D9"/>
             </a:solidFill>
           </a:ln>
         </p:spPr>
@@ -18399,7 +18543,7 @@
       </p:sp>
       <p:sp>
         <p:nvSpPr>
-          <p:cNvPr id="19" name="TextBox 18"/>
+          <p:cNvPr id="20" name="TextBox 19"/>
           <p:cNvSpPr txBox="1"/>
           <p:nvPr/>
         </p:nvSpPr>
@@ -18441,7 +18585,7 @@
       </p:sp>
       <p:sp>
         <p:nvSpPr>
-          <p:cNvPr id="20" name="TextBox 19"/>
+          <p:cNvPr id="21" name="TextBox 20"/>
           <p:cNvSpPr txBox="1"/>
           <p:nvPr/>
         </p:nvSpPr>
@@ -18483,7 +18627,7 @@
       </p:sp>
       <p:sp>
         <p:nvSpPr>
-          <p:cNvPr id="21" name="Rectangle 20"/>
+          <p:cNvPr id="22" name="Rectangle 21"/>
           <p:cNvSpPr/>
           <p:nvPr/>
         </p:nvSpPr>
@@ -18526,7 +18670,7 @@
       </p:sp>
       <p:sp>
         <p:nvSpPr>
-          <p:cNvPr id="22" name="TextBox 21"/>
+          <p:cNvPr id="23" name="TextBox 22"/>
           <p:cNvSpPr txBox="1"/>
           <p:nvPr/>
         </p:nvSpPr>
@@ -18568,7 +18712,7 @@
       </p:sp>
       <p:sp>
         <p:nvSpPr>
-          <p:cNvPr id="23" name="Rectangle 22"/>
+          <p:cNvPr id="24" name="Rectangle 23"/>
           <p:cNvSpPr/>
           <p:nvPr/>
         </p:nvSpPr>
@@ -18585,7 +18729,7 @@
           </a:solidFill>
           <a:ln w="5080">
             <a:solidFill>
-              <a:srgbClr val="D0D8DD"/>
+              <a:srgbClr val="D0D8D9"/>
             </a:solidFill>
           </a:ln>
         </p:spPr>
@@ -18613,7 +18757,7 @@
       </p:sp>
       <p:sp>
         <p:nvSpPr>
-          <p:cNvPr id="24" name="Rectangle 23"/>
+          <p:cNvPr id="25" name="Rectangle 24"/>
           <p:cNvSpPr/>
           <p:nvPr/>
         </p:nvSpPr>
@@ -18630,7 +18774,7 @@
           </a:solidFill>
           <a:ln w="3810">
             <a:solidFill>
-              <a:srgbClr val="D0D8DD"/>
+              <a:srgbClr val="D0D8D9"/>
             </a:solidFill>
           </a:ln>
         </p:spPr>
@@ -18658,7 +18802,7 @@
       </p:sp>
       <p:sp>
         <p:nvSpPr>
-          <p:cNvPr id="25" name="TextBox 24"/>
+          <p:cNvPr id="26" name="TextBox 25"/>
           <p:cNvSpPr txBox="1"/>
           <p:nvPr/>
         </p:nvSpPr>
@@ -18700,7 +18844,7 @@
       </p:sp>
       <p:sp>
         <p:nvSpPr>
-          <p:cNvPr id="26" name="TextBox 25"/>
+          <p:cNvPr id="27" name="TextBox 26"/>
           <p:cNvSpPr txBox="1"/>
           <p:nvPr/>
         </p:nvSpPr>
@@ -18727,7 +18871,7 @@
                   <a:srgbClr val="147D77"/>
                 </a:solidFill>
                 <a:latin typeface="Calibri"/>
-                <a:hlinkClick r:id="rId2"/>
+                <a:hlinkClick r:id="rId3"/>
               </a:rPr>
               <a:t>https://github.com/TanukuSai/luna-corr</a:t>
             </a:r>
@@ -18736,7 +18880,7 @@
       </p:sp>
       <p:sp>
         <p:nvSpPr>
-          <p:cNvPr id="27" name="TextBox 26"/>
+          <p:cNvPr id="28" name="TextBox 27"/>
           <p:cNvSpPr txBox="1"/>
           <p:nvPr/>
         </p:nvSpPr>
@@ -18778,7 +18922,7 @@
       </p:sp>
       <p:sp>
         <p:nvSpPr>
-          <p:cNvPr id="28" name="Rectangle 27"/>
+          <p:cNvPr id="29" name="Rectangle 28"/>
           <p:cNvSpPr/>
           <p:nvPr/>
         </p:nvSpPr>
@@ -18795,7 +18939,7 @@
           </a:solidFill>
           <a:ln w="3810">
             <a:solidFill>
-              <a:srgbClr val="D0D8DD"/>
+              <a:srgbClr val="D0D8D9"/>
             </a:solidFill>
           </a:ln>
         </p:spPr>
@@ -18823,7 +18967,7 @@
       </p:sp>
       <p:sp>
         <p:nvSpPr>
-          <p:cNvPr id="29" name="TextBox 28"/>
+          <p:cNvPr id="30" name="TextBox 29"/>
           <p:cNvSpPr txBox="1"/>
           <p:nvPr/>
         </p:nvSpPr>
@@ -18865,7 +19009,7 @@
       </p:sp>
       <p:sp>
         <p:nvSpPr>
-          <p:cNvPr id="30" name="TextBox 29"/>
+          <p:cNvPr id="31" name="TextBox 30"/>
           <p:cNvSpPr txBox="1"/>
           <p:nvPr/>
         </p:nvSpPr>
@@ -18892,7 +19036,7 @@
                   <a:srgbClr val="147D77"/>
                 </a:solidFill>
                 <a:latin typeface="Calibri"/>
-                <a:hlinkClick r:id="rId3"/>
+                <a:hlinkClick r:id="rId4"/>
               </a:rPr>
               <a:t>https://pradan.issdc.gov.in</a:t>
             </a:r>
@@ -18901,7 +19045,7 @@
       </p:sp>
       <p:sp>
         <p:nvSpPr>
-          <p:cNvPr id="31" name="TextBox 30"/>
+          <p:cNvPr id="32" name="TextBox 31"/>
           <p:cNvSpPr txBox="1"/>
           <p:nvPr/>
         </p:nvSpPr>
@@ -18943,7 +19087,7 @@
       </p:sp>
       <p:sp>
         <p:nvSpPr>
-          <p:cNvPr id="32" name="Rectangle 31"/>
+          <p:cNvPr id="33" name="Rectangle 32"/>
           <p:cNvSpPr/>
           <p:nvPr/>
         </p:nvSpPr>
@@ -18960,7 +19104,7 @@
           </a:solidFill>
           <a:ln w="3810">
             <a:solidFill>
-              <a:srgbClr val="D0D8DD"/>
+              <a:srgbClr val="D0D8D9"/>
             </a:solidFill>
           </a:ln>
         </p:spPr>
@@ -18988,7 +19132,7 @@
       </p:sp>
       <p:sp>
         <p:nvSpPr>
-          <p:cNvPr id="33" name="TextBox 32"/>
+          <p:cNvPr id="34" name="TextBox 33"/>
           <p:cNvSpPr txBox="1"/>
           <p:nvPr/>
         </p:nvSpPr>
@@ -19030,7 +19174,7 @@
       </p:sp>
       <p:sp>
         <p:nvSpPr>
-          <p:cNvPr id="34" name="TextBox 33"/>
+          <p:cNvPr id="35" name="TextBox 34"/>
           <p:cNvSpPr txBox="1"/>
           <p:nvPr/>
         </p:nvSpPr>
@@ -19057,7 +19201,7 @@
                   <a:srgbClr val="147D77"/>
                 </a:solidFill>
                 <a:latin typeface="Calibri"/>
-                <a:hlinkClick r:id="rId4"/>
+                <a:hlinkClick r:id="rId5"/>
               </a:rPr>
               <a:t>https://astrogeology.usgs.gov</a:t>
             </a:r>
@@ -19066,7 +19210,7 @@
       </p:sp>
       <p:sp>
         <p:nvSpPr>
-          <p:cNvPr id="35" name="TextBox 34"/>
+          <p:cNvPr id="36" name="TextBox 35"/>
           <p:cNvSpPr txBox="1"/>
           <p:nvPr/>
         </p:nvSpPr>
@@ -19108,7 +19252,7 @@
       </p:sp>
       <p:sp>
         <p:nvSpPr>
-          <p:cNvPr id="36" name="Rectangle 35"/>
+          <p:cNvPr id="37" name="Rectangle 36"/>
           <p:cNvSpPr/>
           <p:nvPr/>
         </p:nvSpPr>
@@ -19125,7 +19269,7 @@
           </a:solidFill>
           <a:ln w="3810">
             <a:solidFill>
-              <a:srgbClr val="D0D8DD"/>
+              <a:srgbClr val="D0D8D9"/>
             </a:solidFill>
           </a:ln>
         </p:spPr>
@@ -19153,7 +19297,7 @@
       </p:sp>
       <p:sp>
         <p:nvSpPr>
-          <p:cNvPr id="37" name="TextBox 36"/>
+          <p:cNvPr id="38" name="TextBox 37"/>
           <p:cNvSpPr txBox="1"/>
           <p:nvPr/>
         </p:nvSpPr>
@@ -19195,7 +19339,7 @@
       </p:sp>
       <p:sp>
         <p:nvSpPr>
-          <p:cNvPr id="38" name="TextBox 37"/>
+          <p:cNvPr id="39" name="TextBox 38"/>
           <p:cNvSpPr txBox="1"/>
           <p:nvPr/>
         </p:nvSpPr>
@@ -19237,7 +19381,7 @@
       </p:sp>
       <p:sp>
         <p:nvSpPr>
-          <p:cNvPr id="39" name="Rectangle 38"/>
+          <p:cNvPr id="40" name="Rectangle 39"/>
           <p:cNvSpPr/>
           <p:nvPr/>
         </p:nvSpPr>
@@ -19280,7 +19424,7 @@
       </p:sp>
       <p:sp>
         <p:nvSpPr>
-          <p:cNvPr id="40" name="TextBox 39"/>
+          <p:cNvPr id="41" name="TextBox 40"/>
           <p:cNvSpPr txBox="1"/>
           <p:nvPr/>
         </p:nvSpPr>
@@ -19322,7 +19466,7 @@
       </p:sp>
       <p:sp>
         <p:nvSpPr>
-          <p:cNvPr id="41" name="Rectangle 40"/>
+          <p:cNvPr id="42" name="Rectangle 41"/>
           <p:cNvSpPr/>
           <p:nvPr/>
         </p:nvSpPr>
@@ -19367,7 +19511,7 @@
       </p:sp>
       <p:sp>
         <p:nvSpPr>
-          <p:cNvPr id="42" name="Rectangle 41"/>
+          <p:cNvPr id="43" name="Rectangle 42"/>
           <p:cNvSpPr/>
           <p:nvPr/>
         </p:nvSpPr>
@@ -19410,7 +19554,7 @@
       </p:sp>
       <p:sp>
         <p:nvSpPr>
-          <p:cNvPr id="43" name="TextBox 42"/>
+          <p:cNvPr id="44" name="TextBox 43"/>
           <p:cNvSpPr txBox="1"/>
           <p:nvPr/>
         </p:nvSpPr>
@@ -19452,7 +19596,7 @@
       </p:sp>
       <p:sp>
         <p:nvSpPr>
-          <p:cNvPr id="44" name="Rectangle 43"/>
+          <p:cNvPr id="45" name="Rectangle 44"/>
           <p:cNvSpPr/>
           <p:nvPr/>
         </p:nvSpPr>
@@ -19469,7 +19613,7 @@
           </a:solidFill>
           <a:ln w="3810">
             <a:solidFill>
-              <a:srgbClr val="D0D8DD"/>
+              <a:srgbClr val="D0D8D9"/>
             </a:solidFill>
           </a:ln>
         </p:spPr>
@@ -19497,7 +19641,7 @@
       </p:sp>
       <p:sp>
         <p:nvSpPr>
-          <p:cNvPr id="45" name="TextBox 44"/>
+          <p:cNvPr id="46" name="TextBox 45"/>
           <p:cNvSpPr txBox="1"/>
           <p:nvPr/>
         </p:nvSpPr>
@@ -19539,7 +19683,7 @@
       </p:sp>
       <p:sp>
         <p:nvSpPr>
-          <p:cNvPr id="46" name="TextBox 45"/>
+          <p:cNvPr id="47" name="TextBox 46"/>
           <p:cNvSpPr txBox="1"/>
           <p:nvPr/>
         </p:nvSpPr>
@@ -19581,7 +19725,7 @@
       </p:sp>
       <p:sp>
         <p:nvSpPr>
-          <p:cNvPr id="47" name="Rectangle 46"/>
+          <p:cNvPr id="48" name="Rectangle 47"/>
           <p:cNvSpPr/>
           <p:nvPr/>
         </p:nvSpPr>
@@ -19598,7 +19742,7 @@
           </a:solidFill>
           <a:ln w="3810">
             <a:solidFill>
-              <a:srgbClr val="D0D8DD"/>
+              <a:srgbClr val="D0D8D9"/>
             </a:solidFill>
           </a:ln>
         </p:spPr>
@@ -19626,7 +19770,7 @@
       </p:sp>
       <p:sp>
         <p:nvSpPr>
-          <p:cNvPr id="48" name="TextBox 47"/>
+          <p:cNvPr id="49" name="TextBox 48"/>
           <p:cNvSpPr txBox="1"/>
           <p:nvPr/>
         </p:nvSpPr>
@@ -19668,7 +19812,7 @@
       </p:sp>
       <p:sp>
         <p:nvSpPr>
-          <p:cNvPr id="49" name="TextBox 48"/>
+          <p:cNvPr id="50" name="TextBox 49"/>
           <p:cNvSpPr txBox="1"/>
           <p:nvPr/>
         </p:nvSpPr>
@@ -19710,7 +19854,7 @@
       </p:sp>
       <p:sp>
         <p:nvSpPr>
-          <p:cNvPr id="50" name="Rectangle 49"/>
+          <p:cNvPr id="51" name="Rectangle 50"/>
           <p:cNvSpPr/>
           <p:nvPr/>
         </p:nvSpPr>
@@ -19727,7 +19871,7 @@
           </a:solidFill>
           <a:ln w="3810">
             <a:solidFill>
-              <a:srgbClr val="D0D8DD"/>
+              <a:srgbClr val="D0D8D9"/>
             </a:solidFill>
           </a:ln>
         </p:spPr>
@@ -19755,7 +19899,7 @@
       </p:sp>
       <p:sp>
         <p:nvSpPr>
-          <p:cNvPr id="51" name="TextBox 50"/>
+          <p:cNvPr id="52" name="TextBox 51"/>
           <p:cNvSpPr txBox="1"/>
           <p:nvPr/>
         </p:nvSpPr>
@@ -19797,7 +19941,7 @@
       </p:sp>
       <p:sp>
         <p:nvSpPr>
-          <p:cNvPr id="52" name="TextBox 51"/>
+          <p:cNvPr id="53" name="TextBox 52"/>
           <p:cNvSpPr txBox="1"/>
           <p:nvPr/>
         </p:nvSpPr>
@@ -19839,7 +19983,7 @@
       </p:sp>
       <p:sp>
         <p:nvSpPr>
-          <p:cNvPr id="53" name="Rectangle 52"/>
+          <p:cNvPr id="54" name="Rectangle 53"/>
           <p:cNvSpPr/>
           <p:nvPr/>
         </p:nvSpPr>
@@ -19884,7 +20028,7 @@
       </p:sp>
       <p:sp>
         <p:nvSpPr>
-          <p:cNvPr id="54" name="Rectangle 53"/>
+          <p:cNvPr id="55" name="Rectangle 54"/>
           <p:cNvSpPr/>
           <p:nvPr/>
         </p:nvSpPr>
@@ -19927,7 +20071,7 @@
       </p:sp>
       <p:sp>
         <p:nvSpPr>
-          <p:cNvPr id="55" name="TextBox 54"/>
+          <p:cNvPr id="56" name="TextBox 55"/>
           <p:cNvSpPr txBox="1"/>
           <p:nvPr/>
         </p:nvSpPr>
@@ -19969,7 +20113,7 @@
       </p:sp>
       <p:sp>
         <p:nvSpPr>
-          <p:cNvPr id="56" name="Rectangle 55"/>
+          <p:cNvPr id="57" name="Rectangle 56"/>
           <p:cNvSpPr/>
           <p:nvPr/>
         </p:nvSpPr>
@@ -19986,7 +20130,7 @@
           </a:solidFill>
           <a:ln w="3810">
             <a:solidFill>
-              <a:srgbClr val="D0D8DD"/>
+              <a:srgbClr val="D0D8D9"/>
             </a:solidFill>
           </a:ln>
         </p:spPr>
@@ -20014,7 +20158,7 @@
       </p:sp>
       <p:sp>
         <p:nvSpPr>
-          <p:cNvPr id="57" name="TextBox 56"/>
+          <p:cNvPr id="58" name="TextBox 57"/>
           <p:cNvSpPr txBox="1"/>
           <p:nvPr/>
         </p:nvSpPr>
@@ -20056,7 +20200,7 @@
       </p:sp>
       <p:sp>
         <p:nvSpPr>
-          <p:cNvPr id="58" name="TextBox 57"/>
+          <p:cNvPr id="59" name="TextBox 58"/>
           <p:cNvSpPr txBox="1"/>
           <p:nvPr/>
         </p:nvSpPr>
@@ -20098,7 +20242,7 @@
       </p:sp>
       <p:sp>
         <p:nvSpPr>
-          <p:cNvPr id="59" name="Rectangle 58"/>
+          <p:cNvPr id="60" name="Rectangle 59"/>
           <p:cNvSpPr/>
           <p:nvPr/>
         </p:nvSpPr>
@@ -20115,7 +20259,7 @@
           </a:solidFill>
           <a:ln w="3810">
             <a:solidFill>
-              <a:srgbClr val="D0D8DD"/>
+              <a:srgbClr val="D0D8D9"/>
             </a:solidFill>
           </a:ln>
         </p:spPr>
@@ -20143,7 +20287,7 @@
       </p:sp>
       <p:sp>
         <p:nvSpPr>
-          <p:cNvPr id="60" name="TextBox 59"/>
+          <p:cNvPr id="61" name="TextBox 60"/>
           <p:cNvSpPr txBox="1"/>
           <p:nvPr/>
         </p:nvSpPr>
@@ -20185,7 +20329,7 @@
       </p:sp>
       <p:sp>
         <p:nvSpPr>
-          <p:cNvPr id="61" name="TextBox 60"/>
+          <p:cNvPr id="62" name="TextBox 61"/>
           <p:cNvSpPr txBox="1"/>
           <p:nvPr/>
         </p:nvSpPr>
@@ -20227,7 +20371,7 @@
       </p:sp>
       <p:sp>
         <p:nvSpPr>
-          <p:cNvPr id="62" name="Rectangle 61"/>
+          <p:cNvPr id="63" name="Rectangle 62"/>
           <p:cNvSpPr/>
           <p:nvPr/>
         </p:nvSpPr>
@@ -20244,7 +20388,7 @@
           </a:solidFill>
           <a:ln w="3810">
             <a:solidFill>
-              <a:srgbClr val="D0D8DD"/>
+              <a:srgbClr val="D0D8D9"/>
             </a:solidFill>
           </a:ln>
         </p:spPr>
@@ -20272,7 +20416,7 @@
       </p:sp>
       <p:sp>
         <p:nvSpPr>
-          <p:cNvPr id="63" name="TextBox 62"/>
+          <p:cNvPr id="64" name="TextBox 63"/>
           <p:cNvSpPr txBox="1"/>
           <p:nvPr/>
         </p:nvSpPr>
@@ -20314,7 +20458,7 @@
       </p:sp>
       <p:sp>
         <p:nvSpPr>
-          <p:cNvPr id="64" name="TextBox 63"/>
+          <p:cNvPr id="65" name="TextBox 64"/>
           <p:cNvSpPr txBox="1"/>
           <p:nvPr/>
         </p:nvSpPr>
@@ -20356,7 +20500,7 @@
       </p:sp>
       <p:sp>
         <p:nvSpPr>
-          <p:cNvPr id="65" name="Rectangle 64"/>
+          <p:cNvPr id="66" name="Rectangle 65"/>
           <p:cNvSpPr/>
           <p:nvPr/>
         </p:nvSpPr>
@@ -20401,7 +20545,7 @@
       </p:sp>
       <p:sp>
         <p:nvSpPr>
-          <p:cNvPr id="66" name="Rectangle 65"/>
+          <p:cNvPr id="67" name="Rectangle 66"/>
           <p:cNvSpPr/>
           <p:nvPr/>
         </p:nvSpPr>
@@ -20444,7 +20588,7 @@
       </p:sp>
       <p:sp>
         <p:nvSpPr>
-          <p:cNvPr id="67" name="TextBox 66"/>
+          <p:cNvPr id="68" name="TextBox 67"/>
           <p:cNvSpPr txBox="1"/>
           <p:nvPr/>
         </p:nvSpPr>
@@ -20486,7 +20630,7 @@
       </p:sp>
       <p:sp>
         <p:nvSpPr>
-          <p:cNvPr id="68" name="Rectangle 67"/>
+          <p:cNvPr id="69" name="Rectangle 68"/>
           <p:cNvSpPr/>
           <p:nvPr/>
         </p:nvSpPr>
@@ -20503,7 +20647,7 @@
           </a:solidFill>
           <a:ln w="3810">
             <a:solidFill>
-              <a:srgbClr val="D0D8DD"/>
+              <a:srgbClr val="D0D8D9"/>
             </a:solidFill>
           </a:ln>
         </p:spPr>
@@ -20531,7 +20675,7 @@
       </p:sp>
       <p:sp>
         <p:nvSpPr>
-          <p:cNvPr id="69" name="TextBox 68"/>
+          <p:cNvPr id="70" name="TextBox 69"/>
           <p:cNvSpPr txBox="1"/>
           <p:nvPr/>
         </p:nvSpPr>
@@ -20573,7 +20717,7 @@
       </p:sp>
       <p:sp>
         <p:nvSpPr>
-          <p:cNvPr id="70" name="TextBox 69"/>
+          <p:cNvPr id="71" name="TextBox 70"/>
           <p:cNvSpPr txBox="1"/>
           <p:nvPr/>
         </p:nvSpPr>
@@ -20615,7 +20759,7 @@
       </p:sp>
       <p:sp>
         <p:nvSpPr>
-          <p:cNvPr id="71" name="Rectangle 70"/>
+          <p:cNvPr id="72" name="Rectangle 71"/>
           <p:cNvSpPr/>
           <p:nvPr/>
         </p:nvSpPr>
@@ -20632,7 +20776,7 @@
           </a:solidFill>
           <a:ln w="3810">
             <a:solidFill>
-              <a:srgbClr val="D0D8DD"/>
+              <a:srgbClr val="D0D8D9"/>
             </a:solidFill>
           </a:ln>
         </p:spPr>
@@ -20660,7 +20804,7 @@
       </p:sp>
       <p:sp>
         <p:nvSpPr>
-          <p:cNvPr id="72" name="TextBox 71"/>
+          <p:cNvPr id="73" name="TextBox 72"/>
           <p:cNvSpPr txBox="1"/>
           <p:nvPr/>
         </p:nvSpPr>
@@ -20702,7 +20846,7 @@
       </p:sp>
       <p:sp>
         <p:nvSpPr>
-          <p:cNvPr id="73" name="TextBox 72"/>
+          <p:cNvPr id="74" name="TextBox 73"/>
           <p:cNvSpPr txBox="1"/>
           <p:nvPr/>
         </p:nvSpPr>
@@ -20744,7 +20888,7 @@
       </p:sp>
       <p:sp>
         <p:nvSpPr>
-          <p:cNvPr id="74" name="Rectangle 73"/>
+          <p:cNvPr id="75" name="Rectangle 74"/>
           <p:cNvSpPr/>
           <p:nvPr/>
         </p:nvSpPr>
@@ -20761,7 +20905,7 @@
           </a:solidFill>
           <a:ln w="3810">
             <a:solidFill>
-              <a:srgbClr val="D0D8DD"/>
+              <a:srgbClr val="D0D8D9"/>
             </a:solidFill>
           </a:ln>
         </p:spPr>
@@ -20789,7 +20933,7 @@
       </p:sp>
       <p:sp>
         <p:nvSpPr>
-          <p:cNvPr id="75" name="TextBox 74"/>
+          <p:cNvPr id="76" name="TextBox 75"/>
           <p:cNvSpPr txBox="1"/>
           <p:nvPr/>
         </p:nvSpPr>
@@ -20831,7 +20975,7 @@
       </p:sp>
       <p:sp>
         <p:nvSpPr>
-          <p:cNvPr id="76" name="TextBox 75"/>
+          <p:cNvPr id="77" name="TextBox 76"/>
           <p:cNvSpPr txBox="1"/>
           <p:nvPr/>
         </p:nvSpPr>
@@ -20873,7 +21017,7 @@
       </p:sp>
       <p:sp>
         <p:nvSpPr>
-          <p:cNvPr id="77" name="Rectangle 76"/>
+          <p:cNvPr id="78" name="Rectangle 77"/>
           <p:cNvSpPr/>
           <p:nvPr/>
         </p:nvSpPr>
@@ -20886,7 +21030,7 @@
             <a:avLst/>
           </a:prstGeom>
           <a:solidFill>
-            <a:srgbClr val="D0D8DD"/>
+            <a:srgbClr val="D0D8D9"/>
           </a:solidFill>
           <a:ln>
             <a:noFill/>
@@ -20916,7 +21060,7 @@
       </p:sp>
       <p:sp>
         <p:nvSpPr>
-          <p:cNvPr id="78" name="TextBox 77"/>
+          <p:cNvPr id="79" name="TextBox 78"/>
           <p:cNvSpPr txBox="1"/>
           <p:nvPr/>
         </p:nvSpPr>

--- a/LUNA-CORR_SIH2026_Presentation.pptx
+++ b/LUNA-CORR_SIH2026_Presentation.pptx
@@ -4042,7 +4042,7 @@
         </p:nvSpPr>
         <p:spPr>
           <a:xfrm>
-            <a:off x="4023360" y="201168"/>
+            <a:off x="4023360" y="182880"/>
             <a:ext cx="6537960" cy="201168"/>
           </a:xfrm>
           <a:prstGeom prst="rect">
@@ -4085,7 +4085,7 @@
         </p:nvSpPr>
         <p:spPr>
           <a:xfrm>
-            <a:off x="4096512" y="219456"/>
+            <a:off x="4096512" y="201168"/>
             <a:ext cx="6428232" cy="201168"/>
           </a:xfrm>
           <a:prstGeom prst="rect">
@@ -4135,8 +4135,8 @@
         </p:blipFill>
         <p:spPr>
           <a:xfrm>
-            <a:off x="10698480" y="36576"/>
-            <a:ext cx="1216152" cy="566928"/>
+            <a:off x="10744200" y="73152"/>
+            <a:ext cx="1143000" cy="475488"/>
           </a:xfrm>
           <a:prstGeom prst="rect">
             <a:avLst/>
@@ -4159,8 +4159,8 @@
         </p:blipFill>
         <p:spPr>
           <a:xfrm>
-            <a:off x="4023360" y="457200"/>
-            <a:ext cx="8092440" cy="2606040"/>
+            <a:off x="4023360" y="594360"/>
+            <a:ext cx="8092440" cy="2468880"/>
           </a:xfrm>
           <a:prstGeom prst="rect">
             <a:avLst/>
